--- a/Cocos_grampositivos_BLANCO.pptx
+++ b/Cocos_grampositivos_BLANCO.pptx
@@ -7,9 +7,11 @@
   <p:sldIdLst>
     <p:sldId id="256" r:id="rId2"/>
     <p:sldId id="257" r:id="rId3"/>
+    <p:sldId id="258" r:id="rId4"/>
+    <p:sldId id="259" r:id="rId5"/>
   </p:sldIdLst>
   <p:notesMasterIdLst>
-    <p:notesMasterId r:id="rId4"/>
+    <p:notesMasterId r:id="rId6"/>
   </p:notesMasterIdLst>
   <p:sldSz cx="9144000" cy="5143500"/>
   <p:notesSz cx="5143500" cy="9144000"/>
@@ -503,7 +505,7 @@
           <a:p>
             <a:r>
               <a:rPr lang="en-US" dirty="0"/>
-              <a:t>Portada en formato blanco. Ilustracion original: racimo dorado (Staphylococcus) y cadena roja (Streptococcus).</a:t>
+              <a:t>Portada. Infecciones por grampositivos: de la colonizacion al choque septico. Ilustracion original: racimo dorado (Staphylococcus) y cadena roja (Streptococcus).</a:t>
             </a:r>
             <a:endParaRPr lang="en-US" dirty="0"/>
           </a:p>
@@ -591,7 +593,7 @@
           <a:p>
             <a:r>
               <a:rPr lang="en-US" dirty="0"/>
-              <a:t>Ejemplo de diapositiva de contenido en formato blanco: arbol de clasificación de cocos grampositivos.</a:t>
+              <a:t>Agenda: objetivo, anatomia, fisiologia, fisiopatologia y conclusion.</a:t>
             </a:r>
             <a:endParaRPr lang="en-US" dirty="0"/>
           </a:p>
@@ -615,6 +617,182 @@
             <a:fld id="{F7021451-1387-4CA6-816F-3879F97B5CBC}" type="slidenum">
               <a:rPr lang="en-US"/>
               <a:t>2</a:t>
+            </a:fld>
+            <a:endParaRPr lang="en-US"/>
+          </a:p>
+        </p:txBody>
+      </p:sp>
+    </p:spTree>
+    <p:extLst>
+      <p:ext uri="{BB962C8B-B14F-4D97-AF65-F5344CB8AC3E}">
+        <p14:creationId xmlns:p14="http://schemas.microsoft.com/office/powerpoint/2010/main" val="1024086991"/>
+      </p:ext>
+    </p:extLst>
+  </p:cSld>
+  <p:clrMapOvr>
+    <a:masterClrMapping/>
+  </p:clrMapOvr>
+</p:notes>
+</file>
+
+<file path=ppt/notesSlides/notesSlide3.xml><?xml version="1.0" encoding="utf-8"?>
+<p:notes xmlns:a="http://schemas.openxmlformats.org/drawingml/2006/main" xmlns:r="http://schemas.openxmlformats.org/officeDocument/2006/relationships" xmlns:p="http://schemas.openxmlformats.org/presentationml/2006/main">
+  <p:cSld>
+    <p:spTree>
+      <p:nvGrpSpPr>
+        <p:cNvPr id="1" name=""/>
+        <p:cNvGrpSpPr/>
+        <p:nvPr/>
+      </p:nvGrpSpPr>
+      <p:grpSpPr>
+        <a:xfrm>
+          <a:off x="0" y="0"/>
+          <a:ext cx="0" cy="0"/>
+          <a:chOff x="0" y="0"/>
+          <a:chExt cx="0" cy="0"/>
+        </a:xfrm>
+      </p:grpSpPr>
+      <p:sp>
+        <p:nvSpPr>
+          <p:cNvPr id="2" name="Slide Image Placeholder 1"/>
+          <p:cNvSpPr>
+            <a:spLocks noGrp="1" noRot="1" noChangeAspect="1"/>
+          </p:cNvSpPr>
+          <p:nvPr>
+            <p:ph type="sldImg"/>
+          </p:nvPr>
+        </p:nvSpPr>
+        <p:spPr/>
+      </p:sp>
+      <p:sp>
+        <p:nvSpPr>
+          <p:cNvPr id="3" name="Notes Placeholder 2"/>
+          <p:cNvSpPr>
+            <a:spLocks noGrp="1"/>
+          </p:cNvSpPr>
+          <p:nvPr>
+            <p:ph type="body" idx="1"/>
+          </p:nvPr>
+        </p:nvSpPr>
+        <p:spPr/>
+        <p:txBody>
+          <a:bodyPr/>
+          <a:lstStyle/>
+          <a:p>
+            <a:r>
+              <a:rPr lang="en-US" dirty="0"/>
+              <a:t/>
+            </a:r>
+            <a:endParaRPr lang="en-US" dirty="0"/>
+          </a:p>
+        </p:txBody>
+      </p:sp>
+      <p:sp>
+        <p:nvSpPr>
+          <p:cNvPr id="4" name="Slide Number Placeholder 3"/>
+          <p:cNvSpPr>
+            <a:spLocks noGrp="1"/>
+          </p:cNvSpPr>
+          <p:nvPr>
+            <p:ph type="sldNum" sz="quarter" idx="10"/>
+          </p:nvPr>
+        </p:nvSpPr>
+        <p:spPr/>
+        <p:txBody>
+          <a:bodyPr/>
+          <a:lstStyle/>
+          <a:p>
+            <a:fld id="{F7021451-1387-4CA6-816F-3879F97B5CBC}" type="slidenum">
+              <a:rPr lang="en-US"/>
+              <a:t>3</a:t>
+            </a:fld>
+            <a:endParaRPr lang="en-US"/>
+          </a:p>
+        </p:txBody>
+      </p:sp>
+    </p:spTree>
+    <p:extLst>
+      <p:ext uri="{BB962C8B-B14F-4D97-AF65-F5344CB8AC3E}">
+        <p14:creationId xmlns:p14="http://schemas.microsoft.com/office/powerpoint/2010/main" val="1024086991"/>
+      </p:ext>
+    </p:extLst>
+  </p:cSld>
+  <p:clrMapOvr>
+    <a:masterClrMapping/>
+  </p:clrMapOvr>
+</p:notes>
+</file>
+
+<file path=ppt/notesSlides/notesSlide4.xml><?xml version="1.0" encoding="utf-8"?>
+<p:notes xmlns:a="http://schemas.openxmlformats.org/drawingml/2006/main" xmlns:r="http://schemas.openxmlformats.org/officeDocument/2006/relationships" xmlns:p="http://schemas.openxmlformats.org/presentationml/2006/main">
+  <p:cSld>
+    <p:spTree>
+      <p:nvGrpSpPr>
+        <p:cNvPr id="1" name=""/>
+        <p:cNvGrpSpPr/>
+        <p:nvPr/>
+      </p:nvGrpSpPr>
+      <p:grpSpPr>
+        <a:xfrm>
+          <a:off x="0" y="0"/>
+          <a:ext cx="0" cy="0"/>
+          <a:chOff x="0" y="0"/>
+          <a:chExt cx="0" cy="0"/>
+        </a:xfrm>
+      </p:grpSpPr>
+      <p:sp>
+        <p:nvSpPr>
+          <p:cNvPr id="2" name="Slide Image Placeholder 1"/>
+          <p:cNvSpPr>
+            <a:spLocks noGrp="1" noRot="1" noChangeAspect="1"/>
+          </p:cNvSpPr>
+          <p:nvPr>
+            <p:ph type="sldImg"/>
+          </p:nvPr>
+        </p:nvSpPr>
+        <p:spPr/>
+      </p:sp>
+      <p:sp>
+        <p:nvSpPr>
+          <p:cNvPr id="3" name="Notes Placeholder 2"/>
+          <p:cNvSpPr>
+            <a:spLocks noGrp="1"/>
+          </p:cNvSpPr>
+          <p:nvPr>
+            <p:ph type="body" idx="1"/>
+          </p:nvPr>
+        </p:nvSpPr>
+        <p:spPr/>
+        <p:txBody>
+          <a:bodyPr/>
+          <a:lstStyle/>
+          <a:p>
+            <a:r>
+              <a:rPr lang="en-US" dirty="0"/>
+              <a:t>Objetivo general: comprender los mecanismos fisiopatologicos de las infecciones por grampositivos, con enfasis en virulencia, evasion inmunitaria y dano tisular.</a:t>
+            </a:r>
+            <a:endParaRPr lang="en-US" dirty="0"/>
+          </a:p>
+        </p:txBody>
+      </p:sp>
+      <p:sp>
+        <p:nvSpPr>
+          <p:cNvPr id="4" name="Slide Number Placeholder 3"/>
+          <p:cNvSpPr>
+            <a:spLocks noGrp="1"/>
+          </p:cNvSpPr>
+          <p:nvPr>
+            <p:ph type="sldNum" sz="quarter" idx="10"/>
+          </p:nvPr>
+        </p:nvSpPr>
+        <p:spPr/>
+        <p:txBody>
+          <a:bodyPr/>
+          <a:lstStyle/>
+          <a:p>
+            <a:fld id="{F7021451-1387-4CA6-816F-3879F97B5CBC}" type="slidenum">
+              <a:rPr lang="en-US"/>
+              <a:t>4</a:t>
             </a:fld>
             <a:endParaRPr lang="en-US"/>
           </a:p>
@@ -1068,7 +1246,7 @@
         </p:nvSpPr>
         <p:spPr>
           <a:xfrm>
-            <a:off x="6675120" y="1097280"/>
+            <a:off x="6629400" y="1051560"/>
             <a:ext cx="475488" cy="475488"/>
           </a:xfrm>
           <a:prstGeom prst="ellipse">
@@ -1093,7 +1271,7 @@
         </p:nvSpPr>
         <p:spPr>
           <a:xfrm>
-            <a:off x="7132320" y="1188720"/>
+            <a:off x="7086600" y="1143000"/>
             <a:ext cx="475488" cy="475488"/>
           </a:xfrm>
           <a:prstGeom prst="ellipse">
@@ -1118,7 +1296,7 @@
         </p:nvSpPr>
         <p:spPr>
           <a:xfrm>
-            <a:off x="6903720" y="1554480"/>
+            <a:off x="6858000" y="1508760"/>
             <a:ext cx="475488" cy="475488"/>
           </a:xfrm>
           <a:prstGeom prst="ellipse">
@@ -1143,7 +1321,7 @@
         </p:nvSpPr>
         <p:spPr>
           <a:xfrm>
-            <a:off x="7360920" y="1600200"/>
+            <a:off x="7315200" y="1554480"/>
             <a:ext cx="475488" cy="475488"/>
           </a:xfrm>
           <a:prstGeom prst="ellipse">
@@ -1168,7 +1346,7 @@
         </p:nvSpPr>
         <p:spPr>
           <a:xfrm>
-            <a:off x="6766560" y="1965960"/>
+            <a:off x="6720840" y="1920240"/>
             <a:ext cx="475488" cy="475488"/>
           </a:xfrm>
           <a:prstGeom prst="ellipse">
@@ -1193,7 +1371,7 @@
         </p:nvSpPr>
         <p:spPr>
           <a:xfrm>
-            <a:off x="7223760" y="2011680"/>
+            <a:off x="7178040" y="1965960"/>
             <a:ext cx="475488" cy="475488"/>
           </a:xfrm>
           <a:prstGeom prst="ellipse">
@@ -1218,7 +1396,7 @@
         </p:nvSpPr>
         <p:spPr>
           <a:xfrm>
-            <a:off x="7543800" y="1280160"/>
+            <a:off x="7498080" y="1234440"/>
             <a:ext cx="475488" cy="475488"/>
           </a:xfrm>
           <a:prstGeom prst="ellipse">
@@ -1243,7 +1421,7 @@
         </p:nvSpPr>
         <p:spPr>
           <a:xfrm>
-            <a:off x="7589520" y="1783080"/>
+            <a:off x="7543800" y="1737360"/>
             <a:ext cx="475488" cy="475488"/>
           </a:xfrm>
           <a:prstGeom prst="ellipse">
@@ -1268,7 +1446,7 @@
         </p:nvSpPr>
         <p:spPr>
           <a:xfrm>
-            <a:off x="6583680" y="3200400"/>
+            <a:off x="6537960" y="3200400"/>
             <a:ext cx="402336" cy="402336"/>
           </a:xfrm>
           <a:prstGeom prst="ellipse">
@@ -1293,7 +1471,7 @@
         </p:nvSpPr>
         <p:spPr>
           <a:xfrm>
-            <a:off x="6858000" y="3364992"/>
+            <a:off x="6812280" y="3364992"/>
             <a:ext cx="402336" cy="402336"/>
           </a:xfrm>
           <a:prstGeom prst="ellipse">
@@ -1318,7 +1496,7 @@
         </p:nvSpPr>
         <p:spPr>
           <a:xfrm>
-            <a:off x="7132320" y="3529584"/>
+            <a:off x="7086600" y="3529584"/>
             <a:ext cx="402336" cy="402336"/>
           </a:xfrm>
           <a:prstGeom prst="ellipse">
@@ -1343,7 +1521,7 @@
         </p:nvSpPr>
         <p:spPr>
           <a:xfrm>
-            <a:off x="7406640" y="3694176"/>
+            <a:off x="7360920" y="3694176"/>
             <a:ext cx="402336" cy="402336"/>
           </a:xfrm>
           <a:prstGeom prst="ellipse">
@@ -1368,7 +1546,7 @@
         </p:nvSpPr>
         <p:spPr>
           <a:xfrm>
-            <a:off x="7680960" y="3858768"/>
+            <a:off x="7635240" y="3858768"/>
             <a:ext cx="402336" cy="402336"/>
           </a:xfrm>
           <a:prstGeom prst="ellipse">
@@ -1393,7 +1571,7 @@
         </p:nvSpPr>
         <p:spPr>
           <a:xfrm>
-            <a:off x="7955280" y="4023360"/>
+            <a:off x="7909560" y="4023360"/>
             <a:ext cx="402336" cy="402336"/>
           </a:xfrm>
           <a:prstGeom prst="ellipse">
@@ -1418,7 +1596,7 @@
         </p:nvSpPr>
         <p:spPr>
           <a:xfrm>
-            <a:off x="8229600" y="4187952"/>
+            <a:off x="8183880" y="4187952"/>
             <a:ext cx="402336" cy="402336"/>
           </a:xfrm>
           <a:prstGeom prst="ellipse">
@@ -1444,7 +1622,7 @@
         <p:spPr>
           <a:xfrm>
             <a:off x="548640" y="914400"/>
-            <a:ext cx="5669280" cy="365760"/>
+            <a:ext cx="5760720" cy="365760"/>
           </a:xfrm>
           <a:prstGeom prst="rect">
             <a:avLst/>
@@ -1460,7 +1638,7 @@
               <a:buNone/>
             </a:pPr>
             <a:r>
-              <a:rPr lang="en-US" sz="1600" b="1" spc="500" kern="0" dirty="0">
+              <a:rPr lang="en-US" sz="1500" b="1" spc="400" kern="0" dirty="0">
                 <a:solidFill>
                   <a:srgbClr val="6A4CCF"/>
                 </a:solidFill>
@@ -1468,9 +1646,9 @@
                 <a:ea typeface="Calibri" pitchFamily="34" charset="-122"/>
                 <a:cs typeface="Calibri" pitchFamily="34" charset="-120"/>
               </a:rPr>
-              <a:t>COCOS GRAMPOSITIVOS</a:t>
-            </a:r>
-            <a:endParaRPr lang="en-US" sz="1600" dirty="0"/>
+              <a:t>INFECCIONES POR GRAMPOSITIVOS</a:t>
+            </a:r>
+            <a:endParaRPr lang="en-US" sz="1500" dirty="0"/>
           </a:p>
         </p:txBody>
       </p:sp>
@@ -1483,7 +1661,7 @@
         <p:spPr>
           <a:xfrm>
             <a:off x="548640" y="1325880"/>
-            <a:ext cx="5852160" cy="777240"/>
+            <a:ext cx="5852160" cy="914400"/>
           </a:xfrm>
           <a:prstGeom prst="rect">
             <a:avLst/>
@@ -1499,7 +1677,7 @@
               <a:buNone/>
             </a:pPr>
             <a:r>
-              <a:rPr lang="en-US" sz="4600" b="1" dirty="0">
+              <a:rPr lang="en-US" sz="5200" b="1" dirty="0">
                 <a:solidFill>
                   <a:srgbClr val="15193A"/>
                 </a:solidFill>
@@ -1507,9 +1685,9 @@
                 <a:ea typeface="Calibri" pitchFamily="34" charset="-122"/>
                 <a:cs typeface="Calibri" pitchFamily="34" charset="-120"/>
               </a:rPr>
-              <a:t>Clasificación y</a:t>
-            </a:r>
-            <a:endParaRPr lang="en-US" sz="4600" dirty="0"/>
+              <a:t>Grampositivos</a:t>
+            </a:r>
+            <a:endParaRPr lang="en-US" sz="5200" dirty="0"/>
           </a:p>
         </p:txBody>
       </p:sp>
@@ -1521,8 +1699,8 @@
         </p:nvSpPr>
         <p:spPr>
           <a:xfrm>
-            <a:off x="548640" y="2103120"/>
-            <a:ext cx="5852160" cy="777240"/>
+            <a:off x="548640" y="2377440"/>
+            <a:ext cx="5760720" cy="822960"/>
           </a:xfrm>
           <a:prstGeom prst="rect">
             <a:avLst/>
@@ -1531,53 +1709,14 @@
           <a:ln/>
         </p:spPr>
         <p:txBody>
-          <a:bodyPr wrap="square" lIns="0" tIns="0" rIns="0" bIns="0" rtlCol="0" anchor="b"/>
+          <a:bodyPr wrap="square" lIns="0" tIns="0" rIns="0" bIns="0" rtlCol="0" anchor="t"/>
           <a:lstStyle/>
           <a:p>
             <a:pPr indent="0" marL="0">
               <a:buNone/>
             </a:pPr>
             <a:r>
-              <a:rPr lang="en-US" sz="4600" b="1" dirty="0">
-                <a:solidFill>
-                  <a:srgbClr val="15193A"/>
-                </a:solidFill>
-                <a:latin typeface="Calibri" pitchFamily="34" charset="0"/>
-                <a:ea typeface="Calibri" pitchFamily="34" charset="-122"/>
-                <a:cs typeface="Calibri" pitchFamily="34" charset="-120"/>
-              </a:rPr>
-              <a:t>fisiopatología</a:t>
-            </a:r>
-            <a:endParaRPr lang="en-US" sz="4600" dirty="0"/>
-          </a:p>
-        </p:txBody>
-      </p:sp>
-      <p:sp>
-        <p:nvSpPr>
-          <p:cNvPr id="20" name="Text 18"/>
-          <p:cNvSpPr txBox="1"/>
-          <p:nvPr/>
-        </p:nvSpPr>
-        <p:spPr>
-          <a:xfrm>
-            <a:off x="548640" y="3017520"/>
-            <a:ext cx="5486400" cy="457200"/>
-          </a:xfrm>
-          <a:prstGeom prst="rect">
-            <a:avLst/>
-          </a:prstGeom>
-          <a:noFill/>
-          <a:ln/>
-        </p:spPr>
-        <p:txBody>
-          <a:bodyPr wrap="square" lIns="0" tIns="0" rIns="0" bIns="0" rtlCol="0" anchor="t"/>
-          <a:lstStyle/>
-          <a:p>
-            <a:pPr indent="0" marL="0">
-              <a:buNone/>
-            </a:pPr>
-            <a:r>
-              <a:rPr lang="en-US" sz="2100" dirty="0">
+              <a:rPr lang="en-US" sz="2400" dirty="0">
                 <a:solidFill>
                   <a:srgbClr val="A66A00"/>
                 </a:solidFill>
@@ -1585,22 +1724,22 @@
                 <a:ea typeface="Calibri" pitchFamily="34" charset="-122"/>
                 <a:cs typeface="Calibri" pitchFamily="34" charset="-120"/>
               </a:rPr>
-              <a:t>Del laboratorio a la clínica</a:t>
-            </a:r>
-            <a:endParaRPr lang="en-US" sz="2100" dirty="0"/>
-          </a:p>
-        </p:txBody>
-      </p:sp>
-      <p:sp>
-        <p:nvSpPr>
-          <p:cNvPr id="21" name="Text 19"/>
+              <a:t>De la colonización al choque séptico</a:t>
+            </a:r>
+            <a:endParaRPr lang="en-US" sz="2400" dirty="0"/>
+          </a:p>
+        </p:txBody>
+      </p:sp>
+      <p:sp>
+        <p:nvSpPr>
+          <p:cNvPr id="20" name="Text 18"/>
           <p:cNvSpPr txBox="1"/>
           <p:nvPr/>
         </p:nvSpPr>
         <p:spPr>
           <a:xfrm>
-            <a:off x="548640" y="3886200"/>
-            <a:ext cx="5486400" cy="411480"/>
+            <a:off x="548640" y="3794760"/>
+            <a:ext cx="5669280" cy="411480"/>
           </a:xfrm>
           <a:prstGeom prst="rect">
             <a:avLst/>
@@ -1624,7 +1763,7 @@
                 <a:ea typeface="Calibri" pitchFamily="34" charset="-122"/>
                 <a:cs typeface="Calibri" pitchFamily="34" charset="-120"/>
               </a:rPr>
-              <a:t>Nestor Fabian Sanabria Duarte</a:t>
+              <a:t>Néstor Fabián Sanabria Duarte</a:t>
             </a:r>
             <a:endParaRPr lang="en-US" sz="2200" dirty="0"/>
           </a:p>
@@ -1632,14 +1771,14 @@
       </p:sp>
       <p:sp>
         <p:nvSpPr>
-          <p:cNvPr id="22" name="Text 20"/>
+          <p:cNvPr id="21" name="Text 19"/>
           <p:cNvSpPr txBox="1"/>
           <p:nvPr/>
         </p:nvSpPr>
         <p:spPr>
           <a:xfrm>
-            <a:off x="548640" y="4279392"/>
-            <a:ext cx="6400800" cy="320040"/>
+            <a:off x="548640" y="4187952"/>
+            <a:ext cx="5943600" cy="320040"/>
           </a:xfrm>
           <a:prstGeom prst="rect">
             <a:avLst/>
@@ -1655,7 +1794,7 @@
               <a:buNone/>
             </a:pPr>
             <a:r>
-              <a:rPr lang="en-US" sz="1400" dirty="0">
+              <a:rPr lang="en-US" sz="1500" dirty="0">
                 <a:solidFill>
                   <a:srgbClr val="51597F"/>
                 </a:solidFill>
@@ -1663,7 +1802,46 @@
                 <a:ea typeface="Calibri" pitchFamily="34" charset="-122"/>
                 <a:cs typeface="Calibri" pitchFamily="34" charset="-120"/>
               </a:rPr>
-              <a:t>Residente de III año - Especialización en medicina interna</a:t>
+              <a:t>Residente de Medicina Interna</a:t>
+            </a:r>
+            <a:endParaRPr lang="en-US" sz="1500" dirty="0"/>
+          </a:p>
+        </p:txBody>
+      </p:sp>
+      <p:sp>
+        <p:nvSpPr>
+          <p:cNvPr id="22" name="Text 20"/>
+          <p:cNvSpPr txBox="1"/>
+          <p:nvPr/>
+        </p:nvSpPr>
+        <p:spPr>
+          <a:xfrm>
+            <a:off x="548640" y="4480560"/>
+            <a:ext cx="5943600" cy="292608"/>
+          </a:xfrm>
+          <a:prstGeom prst="rect">
+            <a:avLst/>
+          </a:prstGeom>
+          <a:noFill/>
+          <a:ln/>
+        </p:spPr>
+        <p:txBody>
+          <a:bodyPr wrap="square" lIns="0" tIns="0" rIns="0" bIns="0" rtlCol="0" anchor="t"/>
+          <a:lstStyle/>
+          <a:p>
+            <a:pPr indent="0" marL="0">
+              <a:buNone/>
+            </a:pPr>
+            <a:r>
+              <a:rPr lang="en-US" sz="1400" dirty="0">
+                <a:solidFill>
+                  <a:srgbClr val="9AA0C0"/>
+                </a:solidFill>
+                <a:latin typeface="Calibri" pitchFamily="34" charset="0"/>
+                <a:ea typeface="Calibri" pitchFamily="34" charset="-122"/>
+                <a:cs typeface="Calibri" pitchFamily="34" charset="-120"/>
+              </a:rPr>
+              <a:t>Universidad Libre</a:t>
             </a:r>
             <a:endParaRPr lang="en-US" sz="1400" dirty="0"/>
           </a:p>
@@ -1728,13 +1906,13 @@
             <a:r>
               <a:rPr lang="en-US" sz="1300" b="1" spc="300" kern="0" dirty="0">
                 <a:solidFill>
-                  <a:srgbClr val="A66A00"/>
+                  <a:srgbClr val="6A4CCF"/>
                 </a:solidFill>
                 <a:latin typeface="Calibri" pitchFamily="34" charset="0"/>
                 <a:ea typeface="Calibri" pitchFamily="34" charset="-122"/>
                 <a:cs typeface="Calibri" pitchFamily="34" charset="-120"/>
               </a:rPr>
-              <a:t>CLASIFICACIÓN</a:t>
+              <a:t>AGENDA</a:t>
             </a:r>
             <a:endParaRPr lang="en-US" sz="1300" dirty="0"/>
           </a:p>
@@ -1773,7 +1951,7 @@
                 <a:ea typeface="Calibri" pitchFamily="34" charset="-122"/>
                 <a:cs typeface="Calibri" pitchFamily="34" charset="-120"/>
               </a:rPr>
-              <a:t>Árbol práctico: de la catalasa al género</a:t>
+              <a:t>Ruta de la exposición</a:t>
             </a:r>
             <a:endParaRPr lang="en-US" sz="3000" dirty="0"/>
           </a:p>
@@ -1787,16 +1965,22 @@
         </p:nvSpPr>
         <p:spPr>
           <a:xfrm>
-            <a:off x="457200" y="4507992"/>
-            <a:ext cx="8229600" cy="0"/>
-          </a:xfrm>
-          <a:prstGeom prst="line">
-            <a:avLst/>
-          </a:prstGeom>
-          <a:noFill/>
-          <a:ln w="9525">
+            <a:off x="365760" y="1554480"/>
+            <a:ext cx="1572768" cy="1920240"/>
+          </a:xfrm>
+          <a:prstGeom prst="roundRect">
+            <a:avLst>
+              <a:gd name="adj" fmla="val 5814"/>
+            </a:avLst>
+          </a:prstGeom>
+          <a:solidFill>
+            <a:srgbClr val="A78BFA">
+              <a:alpha val="10000"/>
+            </a:srgbClr>
+          </a:solidFill>
+          <a:ln w="19050">
             <a:solidFill>
-              <a:srgbClr val="D7DCEF"/>
+              <a:srgbClr val="A78BFA"/>
             </a:solidFill>
             <a:prstDash val="solid"/>
           </a:ln>
@@ -1810,8 +1994,8 @@
         </p:nvSpPr>
         <p:spPr>
           <a:xfrm>
-            <a:off x="457200" y="4553712"/>
-            <a:ext cx="7818120" cy="502920"/>
+            <a:off x="365760" y="1737360"/>
+            <a:ext cx="1572768" cy="731520"/>
           </a:xfrm>
           <a:prstGeom prst="rect">
             <a:avLst/>
@@ -1823,78 +2007,34 @@
           <a:bodyPr wrap="square" lIns="0" tIns="0" rIns="0" bIns="0" rtlCol="0" anchor="ctr"/>
           <a:lstStyle/>
           <a:p>
-            <a:pPr indent="0" marL="0">
+            <a:pPr algn="ctr" indent="0" marL="0">
               <a:buNone/>
             </a:pPr>
             <a:r>
-              <a:rPr lang="en-US" sz="900" dirty="0">
+              <a:rPr lang="en-US" sz="3800" b="1" dirty="0">
                 <a:solidFill>
-                  <a:srgbClr val="51597F"/>
+                  <a:srgbClr val="6A4CCF"/>
                 </a:solidFill>
                 <a:latin typeface="Calibri" pitchFamily="34" charset="0"/>
                 <a:ea typeface="Calibri" pitchFamily="34" charset="-122"/>
                 <a:cs typeface="Calibri" pitchFamily="34" charset="-120"/>
               </a:rPr>
-              <a:t>1. Cheung GYC, Bae JS, Otto M. Pathogenicity and virulence of Staphylococcus aureus. Virulence. 2021;12(1):547-69.</a:t>
-            </a:r>
-            <a:endParaRPr lang="en-US" sz="900" dirty="0"/>
-          </a:p>
-          <a:p>
-            <a:pPr indent="0" marL="0">
-              <a:buNone/>
-            </a:pPr>
-            <a:r>
-              <a:rPr lang="en-US" sz="900" dirty="0">
-                <a:solidFill>
-                  <a:srgbClr val="51597F"/>
-                </a:solidFill>
-                <a:latin typeface="Calibri" pitchFamily="34" charset="0"/>
-                <a:ea typeface="Calibri" pitchFamily="34" charset="-122"/>
-                <a:cs typeface="Calibri" pitchFamily="34" charset="-120"/>
-              </a:rPr>
-              <a:t>2. Brouwer S, Rivera-Hernandez T, Curren BF, Harbison-Price N, De Oliveira DMP, Jespersen MG, et al. Pathogenesis, epidemiology and control of Group A Streptococcus infection. Nat Rev Microbiol. 2023;21(7):431-47.</a:t>
-            </a:r>
-            <a:endParaRPr lang="en-US" sz="900" dirty="0"/>
-          </a:p>
-        </p:txBody>
-      </p:sp>
-      <p:sp>
-        <p:nvSpPr>
-          <p:cNvPr id="6" name="Shape 4"/>
-          <p:cNvSpPr/>
-          <p:nvPr/>
-        </p:nvSpPr>
-        <p:spPr>
-          <a:xfrm>
-            <a:off x="3291840" y="1143000"/>
-            <a:ext cx="2560320" cy="502920"/>
-          </a:xfrm>
-          <a:prstGeom prst="roundRect">
-            <a:avLst>
-              <a:gd name="adj" fmla="val 18182"/>
-            </a:avLst>
-          </a:prstGeom>
-          <a:solidFill>
-            <a:srgbClr val="A78BFA"/>
-          </a:solidFill>
-          <a:ln w="12700">
-            <a:solidFill>
-              <a:srgbClr val="A78BFA"/>
-            </a:solidFill>
-            <a:prstDash val="solid"/>
-          </a:ln>
-        </p:spPr>
-      </p:sp>
-      <p:sp>
-        <p:nvSpPr>
-          <p:cNvPr id="7" name="Text 5"/>
+              <a:t>01</a:t>
+            </a:r>
+            <a:endParaRPr lang="en-US" sz="3800" dirty="0"/>
+          </a:p>
+        </p:txBody>
+      </p:sp>
+      <p:sp>
+        <p:nvSpPr>
+          <p:cNvPr id="6" name="Text 4"/>
           <p:cNvSpPr txBox="1"/>
           <p:nvPr/>
         </p:nvSpPr>
         <p:spPr>
           <a:xfrm>
-            <a:off x="3346704" y="1143000"/>
-            <a:ext cx="2450592" cy="502920"/>
+            <a:off x="347472" y="2514600"/>
+            <a:ext cx="1609344" cy="777240"/>
           </a:xfrm>
           <a:prstGeom prst="rect">
             <a:avLst/>
@@ -1903,265 +2043,7 @@
           <a:ln/>
         </p:spPr>
         <p:txBody>
-          <a:bodyPr wrap="square" lIns="0" tIns="0" rIns="0" bIns="0" rtlCol="0" anchor="ctr"/>
-          <a:lstStyle/>
-          <a:p>
-            <a:pPr algn="ctr" indent="0" marL="0">
-              <a:buNone/>
-            </a:pPr>
-            <a:r>
-              <a:rPr lang="en-US" sz="1700" b="1" dirty="0">
-                <a:solidFill>
-                  <a:srgbClr val="15193A"/>
-                </a:solidFill>
-                <a:latin typeface="Calibri" pitchFamily="34" charset="0"/>
-                <a:ea typeface="Calibri" pitchFamily="34" charset="-122"/>
-                <a:cs typeface="Calibri" pitchFamily="34" charset="-120"/>
-              </a:rPr>
-              <a:t>Cocos grampositivos</a:t>
-            </a:r>
-            <a:endParaRPr lang="en-US" sz="1700" dirty="0"/>
-          </a:p>
-        </p:txBody>
-      </p:sp>
-      <p:sp>
-        <p:nvSpPr>
-          <p:cNvPr id="8" name="Shape 6"/>
-          <p:cNvSpPr/>
-          <p:nvPr/>
-        </p:nvSpPr>
-        <p:spPr>
-          <a:xfrm flipH="1">
-            <a:off x="2286000" y="1645920"/>
-            <a:ext cx="1737360" cy="365760"/>
-          </a:xfrm>
-          <a:prstGeom prst="line">
-            <a:avLst/>
-          </a:prstGeom>
-          <a:noFill/>
-          <a:ln w="31750">
-            <a:solidFill>
-              <a:srgbClr val="A66A00"/>
-            </a:solidFill>
-            <a:prstDash val="solid"/>
-            <a:tailEnd type="triangle"/>
-          </a:ln>
-        </p:spPr>
-      </p:sp>
-      <p:sp>
-        <p:nvSpPr>
-          <p:cNvPr id="9" name="Shape 7"/>
-          <p:cNvSpPr/>
-          <p:nvPr/>
-        </p:nvSpPr>
-        <p:spPr>
-          <a:xfrm>
-            <a:off x="5120640" y="1645920"/>
-            <a:ext cx="1645920" cy="365760"/>
-          </a:xfrm>
-          <a:prstGeom prst="line">
-            <a:avLst/>
-          </a:prstGeom>
-          <a:noFill/>
-          <a:ln w="31750">
-            <a:solidFill>
-              <a:srgbClr val="0C8368"/>
-            </a:solidFill>
-            <a:prstDash val="solid"/>
-            <a:tailEnd type="triangle"/>
-          </a:ln>
-        </p:spPr>
-      </p:sp>
-      <p:sp>
-        <p:nvSpPr>
-          <p:cNvPr id="10" name="Text 8"/>
-          <p:cNvSpPr txBox="1"/>
-          <p:nvPr/>
-        </p:nvSpPr>
-        <p:spPr>
-          <a:xfrm>
-            <a:off x="2103120" y="1664208"/>
-            <a:ext cx="1828800" cy="274320"/>
-          </a:xfrm>
-          <a:prstGeom prst="rect">
-            <a:avLst/>
-          </a:prstGeom>
-          <a:noFill/>
-          <a:ln/>
-        </p:spPr>
-        <p:txBody>
           <a:bodyPr wrap="square" lIns="0" tIns="0" rIns="0" bIns="0" rtlCol="0" anchor="t"/>
-          <a:lstStyle/>
-          <a:p>
-            <a:pPr algn="ctr" indent="0" marL="0">
-              <a:buNone/>
-            </a:pPr>
-            <a:r>
-              <a:rPr lang="en-US" sz="1300" b="1" dirty="0">
-                <a:solidFill>
-                  <a:srgbClr val="A66A00"/>
-                </a:solidFill>
-                <a:latin typeface="Calibri" pitchFamily="34" charset="0"/>
-                <a:ea typeface="Calibri" pitchFamily="34" charset="-122"/>
-                <a:cs typeface="Calibri" pitchFamily="34" charset="-120"/>
-              </a:rPr>
-              <a:t>Catalasa +</a:t>
-            </a:r>
-            <a:endParaRPr lang="en-US" sz="1300" dirty="0"/>
-          </a:p>
-        </p:txBody>
-      </p:sp>
-      <p:sp>
-        <p:nvSpPr>
-          <p:cNvPr id="11" name="Text 9"/>
-          <p:cNvSpPr txBox="1"/>
-          <p:nvPr/>
-        </p:nvSpPr>
-        <p:spPr>
-          <a:xfrm>
-            <a:off x="5212080" y="1664208"/>
-            <a:ext cx="1828800" cy="274320"/>
-          </a:xfrm>
-          <a:prstGeom prst="rect">
-            <a:avLst/>
-          </a:prstGeom>
-          <a:noFill/>
-          <a:ln/>
-        </p:spPr>
-        <p:txBody>
-          <a:bodyPr wrap="square" lIns="0" tIns="0" rIns="0" bIns="0" rtlCol="0" anchor="t"/>
-          <a:lstStyle/>
-          <a:p>
-            <a:pPr algn="ctr" indent="0" marL="0">
-              <a:buNone/>
-            </a:pPr>
-            <a:r>
-              <a:rPr lang="en-US" sz="1300" b="1" dirty="0">
-                <a:solidFill>
-                  <a:srgbClr val="0C8368"/>
-                </a:solidFill>
-                <a:latin typeface="Calibri" pitchFamily="34" charset="0"/>
-                <a:ea typeface="Calibri" pitchFamily="34" charset="-122"/>
-                <a:cs typeface="Calibri" pitchFamily="34" charset="-120"/>
-              </a:rPr>
-              <a:t>Catalasa -</a:t>
-            </a:r>
-            <a:endParaRPr lang="en-US" sz="1300" dirty="0"/>
-          </a:p>
-        </p:txBody>
-      </p:sp>
-      <p:sp>
-        <p:nvSpPr>
-          <p:cNvPr id="12" name="Shape 10"/>
-          <p:cNvSpPr/>
-          <p:nvPr/>
-        </p:nvSpPr>
-        <p:spPr>
-          <a:xfrm>
-            <a:off x="1188720" y="2057400"/>
-            <a:ext cx="2194560" cy="502920"/>
-          </a:xfrm>
-          <a:prstGeom prst="roundRect">
-            <a:avLst>
-              <a:gd name="adj" fmla="val 18182"/>
-            </a:avLst>
-          </a:prstGeom>
-          <a:solidFill>
-            <a:srgbClr val="F2B43C"/>
-          </a:solidFill>
-          <a:ln w="12700">
-            <a:solidFill>
-              <a:srgbClr val="F2B43C"/>
-            </a:solidFill>
-            <a:prstDash val="solid"/>
-          </a:ln>
-        </p:spPr>
-      </p:sp>
-      <p:sp>
-        <p:nvSpPr>
-          <p:cNvPr id="13" name="Text 11"/>
-          <p:cNvSpPr txBox="1"/>
-          <p:nvPr/>
-        </p:nvSpPr>
-        <p:spPr>
-          <a:xfrm>
-            <a:off x="1243584" y="2057400"/>
-            <a:ext cx="2084832" cy="502920"/>
-          </a:xfrm>
-          <a:prstGeom prst="rect">
-            <a:avLst/>
-          </a:prstGeom>
-          <a:noFill/>
-          <a:ln/>
-        </p:spPr>
-        <p:txBody>
-          <a:bodyPr wrap="square" lIns="0" tIns="0" rIns="0" bIns="0" rtlCol="0" anchor="ctr"/>
-          <a:lstStyle/>
-          <a:p>
-            <a:pPr algn="ctr" indent="0" marL="0">
-              <a:buNone/>
-            </a:pPr>
-            <a:r>
-              <a:rPr lang="en-US" sz="1600" b="1" dirty="0">
-                <a:solidFill>
-                  <a:srgbClr val="15193A"/>
-                </a:solidFill>
-                <a:latin typeface="Calibri" pitchFamily="34" charset="0"/>
-                <a:ea typeface="Calibri" pitchFamily="34" charset="-122"/>
-                <a:cs typeface="Calibri" pitchFamily="34" charset="-120"/>
-              </a:rPr>
-              <a:t>Staphylococcus</a:t>
-            </a:r>
-            <a:endParaRPr lang="en-US" sz="1600" dirty="0"/>
-          </a:p>
-        </p:txBody>
-      </p:sp>
-      <p:sp>
-        <p:nvSpPr>
-          <p:cNvPr id="14" name="Shape 12"/>
-          <p:cNvSpPr/>
-          <p:nvPr/>
-        </p:nvSpPr>
-        <p:spPr>
-          <a:xfrm>
-            <a:off x="5760720" y="2057400"/>
-            <a:ext cx="2194560" cy="502920"/>
-          </a:xfrm>
-          <a:prstGeom prst="roundRect">
-            <a:avLst>
-              <a:gd name="adj" fmla="val 18182"/>
-            </a:avLst>
-          </a:prstGeom>
-          <a:solidFill>
-            <a:srgbClr val="2EC4B6"/>
-          </a:solidFill>
-          <a:ln w="12700">
-            <a:solidFill>
-              <a:srgbClr val="2EC4B6"/>
-            </a:solidFill>
-            <a:prstDash val="solid"/>
-          </a:ln>
-        </p:spPr>
-      </p:sp>
-      <p:sp>
-        <p:nvSpPr>
-          <p:cNvPr id="15" name="Text 13"/>
-          <p:cNvSpPr txBox="1"/>
-          <p:nvPr/>
-        </p:nvSpPr>
-        <p:spPr>
-          <a:xfrm>
-            <a:off x="5815584" y="2057400"/>
-            <a:ext cx="2084832" cy="502920"/>
-          </a:xfrm>
-          <a:prstGeom prst="rect">
-            <a:avLst/>
-          </a:prstGeom>
-          <a:noFill/>
-          <a:ln/>
-        </p:spPr>
-        <p:txBody>
-          <a:bodyPr wrap="square" lIns="0" tIns="0" rIns="0" bIns="0" rtlCol="0" anchor="ctr"/>
           <a:lstStyle/>
           <a:p>
             <a:pPr algn="ctr" indent="0" marL="0">
@@ -2176,7 +2058,7 @@
                 <a:ea typeface="Calibri" pitchFamily="34" charset="-122"/>
                 <a:cs typeface="Calibri" pitchFamily="34" charset="-120"/>
               </a:rPr>
-              <a:t>Strepto / Enterococcus</a:t>
+              <a:t>Objetivo</a:t>
             </a:r>
             <a:endParaRPr lang="en-US" sz="1500" dirty="0"/>
           </a:p>
@@ -2184,70 +2066,24 @@
       </p:sp>
       <p:sp>
         <p:nvSpPr>
-          <p:cNvPr id="16" name="Shape 14"/>
+          <p:cNvPr id="7" name="Shape 5"/>
           <p:cNvSpPr/>
           <p:nvPr/>
         </p:nvSpPr>
         <p:spPr>
-          <a:xfrm flipH="1">
-            <a:off x="1280160" y="2560320"/>
-            <a:ext cx="457200" cy="320040"/>
-          </a:xfrm>
-          <a:prstGeom prst="line">
-            <a:avLst/>
-          </a:prstGeom>
-          <a:noFill/>
-          <a:ln w="31750">
-            <a:solidFill>
-              <a:srgbClr val="A66A00"/>
-            </a:solidFill>
-            <a:prstDash val="solid"/>
-            <a:tailEnd type="triangle"/>
-          </a:ln>
-        </p:spPr>
-      </p:sp>
-      <p:sp>
-        <p:nvSpPr>
-          <p:cNvPr id="17" name="Shape 15"/>
-          <p:cNvSpPr/>
-          <p:nvPr/>
-        </p:nvSpPr>
-        <p:spPr>
-          <a:xfrm>
-            <a:off x="2743200" y="2560320"/>
-            <a:ext cx="365760" cy="320040"/>
-          </a:xfrm>
-          <a:prstGeom prst="line">
-            <a:avLst/>
-          </a:prstGeom>
-          <a:noFill/>
-          <a:ln w="31750">
-            <a:solidFill>
-              <a:srgbClr val="A66A00"/>
-            </a:solidFill>
-            <a:prstDash val="solid"/>
-            <a:tailEnd type="triangle"/>
-          </a:ln>
-        </p:spPr>
-      </p:sp>
-      <p:sp>
-        <p:nvSpPr>
-          <p:cNvPr id="18" name="Shape 16"/>
-          <p:cNvSpPr/>
-          <p:nvPr/>
-        </p:nvSpPr>
-        <p:spPr>
-          <a:xfrm>
-            <a:off x="457200" y="2926080"/>
-            <a:ext cx="1828800" cy="868680"/>
+          <a:xfrm>
+            <a:off x="2066544" y="1554480"/>
+            <a:ext cx="1572768" cy="1920240"/>
           </a:xfrm>
           <a:prstGeom prst="roundRect">
             <a:avLst>
-              <a:gd name="adj" fmla="val 10526"/>
+              <a:gd name="adj" fmla="val 5814"/>
             </a:avLst>
           </a:prstGeom>
           <a:solidFill>
-            <a:srgbClr val="ECEFF9"/>
+            <a:srgbClr val="F2B43C">
+              <a:alpha val="10000"/>
+            </a:srgbClr>
           </a:solidFill>
           <a:ln w="19050">
             <a:solidFill>
@@ -2259,14 +2095,14 @@
       </p:sp>
       <p:sp>
         <p:nvSpPr>
-          <p:cNvPr id="19" name="Text 17"/>
+          <p:cNvPr id="8" name="Text 6"/>
           <p:cNvSpPr txBox="1"/>
           <p:nvPr/>
         </p:nvSpPr>
         <p:spPr>
           <a:xfrm>
-            <a:off x="566928" y="2926080"/>
-            <a:ext cx="1645920" cy="868680"/>
+            <a:off x="2066544" y="1737360"/>
+            <a:ext cx="1572768" cy="731520"/>
           </a:xfrm>
           <a:prstGeom prst="rect">
             <a:avLst/>
@@ -2278,11 +2114,50 @@
           <a:bodyPr wrap="square" lIns="0" tIns="0" rIns="0" bIns="0" rtlCol="0" anchor="ctr"/>
           <a:lstStyle/>
           <a:p>
-            <a:pPr indent="0" marL="0">
+            <a:pPr algn="ctr" indent="0" marL="0">
               <a:buNone/>
             </a:pPr>
             <a:r>
-              <a:rPr lang="en-US" sz="1300" dirty="0">
+              <a:rPr lang="en-US" sz="3800" b="1" dirty="0">
+                <a:solidFill>
+                  <a:srgbClr val="A66A00"/>
+                </a:solidFill>
+                <a:latin typeface="Calibri" pitchFamily="34" charset="0"/>
+                <a:ea typeface="Calibri" pitchFamily="34" charset="-122"/>
+                <a:cs typeface="Calibri" pitchFamily="34" charset="-120"/>
+              </a:rPr>
+              <a:t>02</a:t>
+            </a:r>
+            <a:endParaRPr lang="en-US" sz="3800" dirty="0"/>
+          </a:p>
+        </p:txBody>
+      </p:sp>
+      <p:sp>
+        <p:nvSpPr>
+          <p:cNvPr id="9" name="Text 7"/>
+          <p:cNvSpPr txBox="1"/>
+          <p:nvPr/>
+        </p:nvSpPr>
+        <p:spPr>
+          <a:xfrm>
+            <a:off x="2048256" y="2514600"/>
+            <a:ext cx="1609344" cy="777240"/>
+          </a:xfrm>
+          <a:prstGeom prst="rect">
+            <a:avLst/>
+          </a:prstGeom>
+          <a:noFill/>
+          <a:ln/>
+        </p:spPr>
+        <p:txBody>
+          <a:bodyPr wrap="square" lIns="0" tIns="0" rIns="0" bIns="0" rtlCol="0" anchor="t"/>
+          <a:lstStyle/>
+          <a:p>
+            <a:pPr algn="ctr" indent="0" marL="0">
+              <a:buNone/>
+            </a:pPr>
+            <a:r>
+              <a:rPr lang="en-US" sz="1500" b="1" dirty="0">
                 <a:solidFill>
                   <a:srgbClr val="15193A"/>
                 </a:solidFill>
@@ -2290,16 +2165,106 @@
                 <a:ea typeface="Calibri" pitchFamily="34" charset="-122"/>
                 <a:cs typeface="Calibri" pitchFamily="34" charset="-120"/>
               </a:rPr>
-              <a:t>Coagulasa +</a:t>
-            </a:r>
-            <a:endParaRPr lang="en-US" sz="1300" dirty="0"/>
-          </a:p>
-          <a:p>
-            <a:pPr indent="0" marL="0">
+              <a:t>Anatomía</a:t>
+            </a:r>
+            <a:endParaRPr lang="en-US" sz="1500" dirty="0"/>
+          </a:p>
+        </p:txBody>
+      </p:sp>
+      <p:sp>
+        <p:nvSpPr>
+          <p:cNvPr id="10" name="Shape 8"/>
+          <p:cNvSpPr/>
+          <p:nvPr/>
+        </p:nvSpPr>
+        <p:spPr>
+          <a:xfrm>
+            <a:off x="3767328" y="1554480"/>
+            <a:ext cx="1572768" cy="1920240"/>
+          </a:xfrm>
+          <a:prstGeom prst="roundRect">
+            <a:avLst>
+              <a:gd name="adj" fmla="val 5814"/>
+            </a:avLst>
+          </a:prstGeom>
+          <a:solidFill>
+            <a:srgbClr val="2EC4B6">
+              <a:alpha val="10000"/>
+            </a:srgbClr>
+          </a:solidFill>
+          <a:ln w="19050">
+            <a:solidFill>
+              <a:srgbClr val="2EC4B6"/>
+            </a:solidFill>
+            <a:prstDash val="solid"/>
+          </a:ln>
+        </p:spPr>
+      </p:sp>
+      <p:sp>
+        <p:nvSpPr>
+          <p:cNvPr id="11" name="Text 9"/>
+          <p:cNvSpPr txBox="1"/>
+          <p:nvPr/>
+        </p:nvSpPr>
+        <p:spPr>
+          <a:xfrm>
+            <a:off x="3767328" y="1737360"/>
+            <a:ext cx="1572768" cy="731520"/>
+          </a:xfrm>
+          <a:prstGeom prst="rect">
+            <a:avLst/>
+          </a:prstGeom>
+          <a:noFill/>
+          <a:ln/>
+        </p:spPr>
+        <p:txBody>
+          <a:bodyPr wrap="square" lIns="0" tIns="0" rIns="0" bIns="0" rtlCol="0" anchor="ctr"/>
+          <a:lstStyle/>
+          <a:p>
+            <a:pPr algn="ctr" indent="0" marL="0">
               <a:buNone/>
             </a:pPr>
             <a:r>
-              <a:rPr lang="en-US" sz="1300" dirty="0">
+              <a:rPr lang="en-US" sz="3800" b="1" dirty="0">
+                <a:solidFill>
+                  <a:srgbClr val="0C8368"/>
+                </a:solidFill>
+                <a:latin typeface="Calibri" pitchFamily="34" charset="0"/>
+                <a:ea typeface="Calibri" pitchFamily="34" charset="-122"/>
+                <a:cs typeface="Calibri" pitchFamily="34" charset="-120"/>
+              </a:rPr>
+              <a:t>03</a:t>
+            </a:r>
+            <a:endParaRPr lang="en-US" sz="3800" dirty="0"/>
+          </a:p>
+        </p:txBody>
+      </p:sp>
+      <p:sp>
+        <p:nvSpPr>
+          <p:cNvPr id="12" name="Text 10"/>
+          <p:cNvSpPr txBox="1"/>
+          <p:nvPr/>
+        </p:nvSpPr>
+        <p:spPr>
+          <a:xfrm>
+            <a:off x="3749040" y="2514600"/>
+            <a:ext cx="1609344" cy="777240"/>
+          </a:xfrm>
+          <a:prstGeom prst="rect">
+            <a:avLst/>
+          </a:prstGeom>
+          <a:noFill/>
+          <a:ln/>
+        </p:spPr>
+        <p:txBody>
+          <a:bodyPr wrap="square" lIns="0" tIns="0" rIns="0" bIns="0" rtlCol="0" anchor="t"/>
+          <a:lstStyle/>
+          <a:p>
+            <a:pPr algn="ctr" indent="0" marL="0">
+              <a:buNone/>
+            </a:pPr>
+            <a:r>
+              <a:rPr lang="en-US" sz="1500" b="1" dirty="0">
                 <a:solidFill>
                   <a:srgbClr val="15193A"/>
                 </a:solidFill>
@@ -2307,34 +2272,36 @@
                 <a:ea typeface="Calibri" pitchFamily="34" charset="-122"/>
                 <a:cs typeface="Calibri" pitchFamily="34" charset="-120"/>
               </a:rPr>
-              <a:t>S. aureus</a:t>
-            </a:r>
-            <a:endParaRPr lang="en-US" sz="1300" dirty="0"/>
-          </a:p>
-        </p:txBody>
-      </p:sp>
-      <p:sp>
-        <p:nvSpPr>
-          <p:cNvPr id="20" name="Shape 18"/>
+              <a:t>Fisiología</a:t>
+            </a:r>
+            <a:endParaRPr lang="en-US" sz="1500" dirty="0"/>
+          </a:p>
+        </p:txBody>
+      </p:sp>
+      <p:sp>
+        <p:nvSpPr>
+          <p:cNvPr id="13" name="Shape 11"/>
           <p:cNvSpPr/>
           <p:nvPr/>
         </p:nvSpPr>
         <p:spPr>
           <a:xfrm>
-            <a:off x="2468880" y="2926080"/>
-            <a:ext cx="1828800" cy="868680"/>
+            <a:off x="5468112" y="1554480"/>
+            <a:ext cx="1572768" cy="1920240"/>
           </a:xfrm>
           <a:prstGeom prst="roundRect">
             <a:avLst>
-              <a:gd name="adj" fmla="val 10526"/>
+              <a:gd name="adj" fmla="val 5814"/>
             </a:avLst>
           </a:prstGeom>
           <a:solidFill>
-            <a:srgbClr val="ECEFF9"/>
+            <a:srgbClr val="F2546B">
+              <a:alpha val="10000"/>
+            </a:srgbClr>
           </a:solidFill>
           <a:ln w="19050">
             <a:solidFill>
-              <a:srgbClr val="F2B43C"/>
+              <a:srgbClr val="F2546B"/>
             </a:solidFill>
             <a:prstDash val="solid"/>
           </a:ln>
@@ -2342,14 +2309,14 @@
       </p:sp>
       <p:sp>
         <p:nvSpPr>
-          <p:cNvPr id="21" name="Text 19"/>
+          <p:cNvPr id="14" name="Text 12"/>
           <p:cNvSpPr txBox="1"/>
           <p:nvPr/>
         </p:nvSpPr>
         <p:spPr>
           <a:xfrm>
-            <a:off x="2578608" y="2926080"/>
-            <a:ext cx="1645920" cy="868680"/>
+            <a:off x="5468112" y="1737360"/>
+            <a:ext cx="1572768" cy="731520"/>
           </a:xfrm>
           <a:prstGeom prst="rect">
             <a:avLst/>
@@ -2361,11 +2328,50 @@
           <a:bodyPr wrap="square" lIns="0" tIns="0" rIns="0" bIns="0" rtlCol="0" anchor="ctr"/>
           <a:lstStyle/>
           <a:p>
-            <a:pPr indent="0" marL="0">
+            <a:pPr algn="ctr" indent="0" marL="0">
               <a:buNone/>
             </a:pPr>
             <a:r>
-              <a:rPr lang="en-US" sz="1100" dirty="0">
+              <a:rPr lang="en-US" sz="3800" b="1" dirty="0">
+                <a:solidFill>
+                  <a:srgbClr val="C81E43"/>
+                </a:solidFill>
+                <a:latin typeface="Calibri" pitchFamily="34" charset="0"/>
+                <a:ea typeface="Calibri" pitchFamily="34" charset="-122"/>
+                <a:cs typeface="Calibri" pitchFamily="34" charset="-120"/>
+              </a:rPr>
+              <a:t>04</a:t>
+            </a:r>
+            <a:endParaRPr lang="en-US" sz="3800" dirty="0"/>
+          </a:p>
+        </p:txBody>
+      </p:sp>
+      <p:sp>
+        <p:nvSpPr>
+          <p:cNvPr id="15" name="Text 13"/>
+          <p:cNvSpPr txBox="1"/>
+          <p:nvPr/>
+        </p:nvSpPr>
+        <p:spPr>
+          <a:xfrm>
+            <a:off x="5449824" y="2514600"/>
+            <a:ext cx="1609344" cy="777240"/>
+          </a:xfrm>
+          <a:prstGeom prst="rect">
+            <a:avLst/>
+          </a:prstGeom>
+          <a:noFill/>
+          <a:ln/>
+        </p:spPr>
+        <p:txBody>
+          <a:bodyPr wrap="square" lIns="0" tIns="0" rIns="0" bIns="0" rtlCol="0" anchor="t"/>
+          <a:lstStyle/>
+          <a:p>
+            <a:pPr algn="ctr" indent="0" marL="0">
+              <a:buNone/>
+            </a:pPr>
+            <a:r>
+              <a:rPr lang="en-US" sz="1500" b="1" dirty="0">
                 <a:solidFill>
                   <a:srgbClr val="15193A"/>
                 </a:solidFill>
@@ -2373,16 +2379,106 @@
                 <a:ea typeface="Calibri" pitchFamily="34" charset="-122"/>
                 <a:cs typeface="Calibri" pitchFamily="34" charset="-120"/>
               </a:rPr>
-              <a:t>Coagulasa -</a:t>
-            </a:r>
-            <a:endParaRPr lang="en-US" sz="1100" dirty="0"/>
-          </a:p>
-          <a:p>
-            <a:pPr indent="0" marL="0">
+              <a:t>Fisiopatología</a:t>
+            </a:r>
+            <a:endParaRPr lang="en-US" sz="1500" dirty="0"/>
+          </a:p>
+        </p:txBody>
+      </p:sp>
+      <p:sp>
+        <p:nvSpPr>
+          <p:cNvPr id="16" name="Shape 14"/>
+          <p:cNvSpPr/>
+          <p:nvPr/>
+        </p:nvSpPr>
+        <p:spPr>
+          <a:xfrm>
+            <a:off x="7168896" y="1554480"/>
+            <a:ext cx="1572768" cy="1920240"/>
+          </a:xfrm>
+          <a:prstGeom prst="roundRect">
+            <a:avLst>
+              <a:gd name="adj" fmla="val 5814"/>
+            </a:avLst>
+          </a:prstGeom>
+          <a:solidFill>
+            <a:srgbClr val="4CC9F0">
+              <a:alpha val="10000"/>
+            </a:srgbClr>
+          </a:solidFill>
+          <a:ln w="19050">
+            <a:solidFill>
+              <a:srgbClr val="4CC9F0"/>
+            </a:solidFill>
+            <a:prstDash val="solid"/>
+          </a:ln>
+        </p:spPr>
+      </p:sp>
+      <p:sp>
+        <p:nvSpPr>
+          <p:cNvPr id="17" name="Text 15"/>
+          <p:cNvSpPr txBox="1"/>
+          <p:nvPr/>
+        </p:nvSpPr>
+        <p:spPr>
+          <a:xfrm>
+            <a:off x="7168896" y="1737360"/>
+            <a:ext cx="1572768" cy="731520"/>
+          </a:xfrm>
+          <a:prstGeom prst="rect">
+            <a:avLst/>
+          </a:prstGeom>
+          <a:noFill/>
+          <a:ln/>
+        </p:spPr>
+        <p:txBody>
+          <a:bodyPr wrap="square" lIns="0" tIns="0" rIns="0" bIns="0" rtlCol="0" anchor="ctr"/>
+          <a:lstStyle/>
+          <a:p>
+            <a:pPr algn="ctr" indent="0" marL="0">
               <a:buNone/>
             </a:pPr>
             <a:r>
-              <a:rPr lang="en-US" sz="1100" dirty="0">
+              <a:rPr lang="en-US" sz="3800" b="1" dirty="0">
+                <a:solidFill>
+                  <a:srgbClr val="0A6F98"/>
+                </a:solidFill>
+                <a:latin typeface="Calibri" pitchFamily="34" charset="0"/>
+                <a:ea typeface="Calibri" pitchFamily="34" charset="-122"/>
+                <a:cs typeface="Calibri" pitchFamily="34" charset="-120"/>
+              </a:rPr>
+              <a:t>05</a:t>
+            </a:r>
+            <a:endParaRPr lang="en-US" sz="3800" dirty="0"/>
+          </a:p>
+        </p:txBody>
+      </p:sp>
+      <p:sp>
+        <p:nvSpPr>
+          <p:cNvPr id="18" name="Text 16"/>
+          <p:cNvSpPr txBox="1"/>
+          <p:nvPr/>
+        </p:nvSpPr>
+        <p:spPr>
+          <a:xfrm>
+            <a:off x="7150608" y="2514600"/>
+            <a:ext cx="1609344" cy="777240"/>
+          </a:xfrm>
+          <a:prstGeom prst="rect">
+            <a:avLst/>
+          </a:prstGeom>
+          <a:noFill/>
+          <a:ln/>
+        </p:spPr>
+        <p:txBody>
+          <a:bodyPr wrap="square" lIns="0" tIns="0" rIns="0" bIns="0" rtlCol="0" anchor="t"/>
+          <a:lstStyle/>
+          <a:p>
+            <a:pPr algn="ctr" indent="0" marL="0">
+              <a:buNone/>
+            </a:pPr>
+            <a:r>
+              <a:rPr lang="en-US" sz="1500" b="1" dirty="0">
                 <a:solidFill>
                   <a:srgbClr val="15193A"/>
                 </a:solidFill>
@@ -2390,291 +2486,9 @@
                 <a:ea typeface="Calibri" pitchFamily="34" charset="-122"/>
                 <a:cs typeface="Calibri" pitchFamily="34" charset="-120"/>
               </a:rPr>
-              <a:t>S. epidermidis, lugdunensis, saprophyticus</a:t>
-            </a:r>
-            <a:endParaRPr lang="en-US" sz="1100" dirty="0"/>
-          </a:p>
-        </p:txBody>
-      </p:sp>
-      <p:sp>
-        <p:nvSpPr>
-          <p:cNvPr id="22" name="Shape 20"/>
-          <p:cNvSpPr/>
-          <p:nvPr/>
-        </p:nvSpPr>
-        <p:spPr>
-          <a:xfrm flipH="1">
-            <a:off x="5760720" y="2560320"/>
-            <a:ext cx="548640" cy="320040"/>
-          </a:xfrm>
-          <a:prstGeom prst="line">
-            <a:avLst/>
-          </a:prstGeom>
-          <a:noFill/>
-          <a:ln w="31750">
-            <a:solidFill>
-              <a:srgbClr val="0C8368"/>
-            </a:solidFill>
-            <a:prstDash val="solid"/>
-            <a:tailEnd type="triangle"/>
-          </a:ln>
-        </p:spPr>
-      </p:sp>
-      <p:sp>
-        <p:nvSpPr>
-          <p:cNvPr id="23" name="Shape 21"/>
-          <p:cNvSpPr/>
-          <p:nvPr/>
-        </p:nvSpPr>
-        <p:spPr>
-          <a:xfrm>
-            <a:off x="7406640" y="2560320"/>
-            <a:ext cx="548640" cy="320040"/>
-          </a:xfrm>
-          <a:prstGeom prst="line">
-            <a:avLst/>
-          </a:prstGeom>
-          <a:noFill/>
-          <a:ln w="31750">
-            <a:solidFill>
-              <a:srgbClr val="C81E43"/>
-            </a:solidFill>
-            <a:prstDash val="solid"/>
-            <a:tailEnd type="triangle"/>
-          </a:ln>
-        </p:spPr>
-      </p:sp>
-      <p:sp>
-        <p:nvSpPr>
-          <p:cNvPr id="24" name="Shape 22"/>
-          <p:cNvSpPr/>
-          <p:nvPr/>
-        </p:nvSpPr>
-        <p:spPr>
-          <a:xfrm>
-            <a:off x="4846320" y="2926080"/>
-            <a:ext cx="1737360" cy="868680"/>
-          </a:xfrm>
-          <a:prstGeom prst="roundRect">
-            <a:avLst>
-              <a:gd name="adj" fmla="val 10526"/>
-            </a:avLst>
-          </a:prstGeom>
-          <a:solidFill>
-            <a:srgbClr val="ECEFF9"/>
-          </a:solidFill>
-          <a:ln w="19050">
-            <a:solidFill>
-              <a:srgbClr val="2EC4B6"/>
-            </a:solidFill>
-            <a:prstDash val="solid"/>
-          </a:ln>
-        </p:spPr>
-      </p:sp>
-      <p:sp>
-        <p:nvSpPr>
-          <p:cNvPr id="25" name="Text 23"/>
-          <p:cNvSpPr txBox="1"/>
-          <p:nvPr/>
-        </p:nvSpPr>
-        <p:spPr>
-          <a:xfrm>
-            <a:off x="4956048" y="2926080"/>
-            <a:ext cx="1554480" cy="868680"/>
-          </a:xfrm>
-          <a:prstGeom prst="rect">
-            <a:avLst/>
-          </a:prstGeom>
-          <a:noFill/>
-          <a:ln/>
-        </p:spPr>
-        <p:txBody>
-          <a:bodyPr wrap="square" lIns="0" tIns="0" rIns="0" bIns="0" rtlCol="0" anchor="ctr"/>
-          <a:lstStyle/>
-          <a:p>
-            <a:pPr indent="0" marL="0">
-              <a:buNone/>
-            </a:pPr>
-            <a:r>
-              <a:rPr lang="en-US" sz="1100" dirty="0">
-                <a:solidFill>
-                  <a:srgbClr val="15193A"/>
-                </a:solidFill>
-                <a:latin typeface="Calibri" pitchFamily="34" charset="0"/>
-                <a:ea typeface="Calibri" pitchFamily="34" charset="-122"/>
-                <a:cs typeface="Calibri" pitchFamily="34" charset="-120"/>
-              </a:rPr>
-              <a:t>Hemólisis + grupo de Lancefield</a:t>
-            </a:r>
-            <a:endParaRPr lang="en-US" sz="1100" dirty="0"/>
-          </a:p>
-          <a:p>
-            <a:pPr indent="0" marL="0">
-              <a:buNone/>
-            </a:pPr>
-            <a:r>
-              <a:rPr lang="en-US" sz="1100" dirty="0">
-                <a:solidFill>
-                  <a:srgbClr val="15193A"/>
-                </a:solidFill>
-                <a:latin typeface="Calibri" pitchFamily="34" charset="0"/>
-                <a:ea typeface="Calibri" pitchFamily="34" charset="-122"/>
-                <a:cs typeface="Calibri" pitchFamily="34" charset="-120"/>
-              </a:rPr>
-              <a:t>Streptococcus</a:t>
-            </a:r>
-            <a:endParaRPr lang="en-US" sz="1100" dirty="0"/>
-          </a:p>
-        </p:txBody>
-      </p:sp>
-      <p:sp>
-        <p:nvSpPr>
-          <p:cNvPr id="26" name="Shape 24"/>
-          <p:cNvSpPr/>
-          <p:nvPr/>
-        </p:nvSpPr>
-        <p:spPr>
-          <a:xfrm>
-            <a:off x="6766560" y="2926080"/>
-            <a:ext cx="1920240" cy="868680"/>
-          </a:xfrm>
-          <a:prstGeom prst="roundRect">
-            <a:avLst>
-              <a:gd name="adj" fmla="val 10526"/>
-            </a:avLst>
-          </a:prstGeom>
-          <a:solidFill>
-            <a:srgbClr val="ECEFF9"/>
-          </a:solidFill>
-          <a:ln w="19050">
-            <a:solidFill>
-              <a:srgbClr val="F2546B"/>
-            </a:solidFill>
-            <a:prstDash val="solid"/>
-          </a:ln>
-        </p:spPr>
-      </p:sp>
-      <p:sp>
-        <p:nvSpPr>
-          <p:cNvPr id="27" name="Text 25"/>
-          <p:cNvSpPr txBox="1"/>
-          <p:nvPr/>
-        </p:nvSpPr>
-        <p:spPr>
-          <a:xfrm>
-            <a:off x="6876288" y="2926080"/>
-            <a:ext cx="1737360" cy="868680"/>
-          </a:xfrm>
-          <a:prstGeom prst="rect">
-            <a:avLst/>
-          </a:prstGeom>
-          <a:noFill/>
-          <a:ln/>
-        </p:spPr>
-        <p:txBody>
-          <a:bodyPr wrap="square" lIns="0" tIns="0" rIns="0" bIns="0" rtlCol="0" anchor="ctr"/>
-          <a:lstStyle/>
-          <a:p>
-            <a:pPr indent="0" marL="0">
-              <a:buNone/>
-            </a:pPr>
-            <a:r>
-              <a:rPr lang="en-US" sz="1100" dirty="0">
-                <a:solidFill>
-                  <a:srgbClr val="15193A"/>
-                </a:solidFill>
-                <a:latin typeface="Calibri" pitchFamily="34" charset="0"/>
-                <a:ea typeface="Calibri" pitchFamily="34" charset="-122"/>
-                <a:cs typeface="Calibri" pitchFamily="34" charset="-120"/>
-              </a:rPr>
-              <a:t>PYR +, bilis-esculina, 6,5% NaCl</a:t>
-            </a:r>
-            <a:endParaRPr lang="en-US" sz="1100" dirty="0"/>
-          </a:p>
-          <a:p>
-            <a:pPr indent="0" marL="0">
-              <a:buNone/>
-            </a:pPr>
-            <a:r>
-              <a:rPr lang="en-US" sz="1100" dirty="0">
-                <a:solidFill>
-                  <a:srgbClr val="15193A"/>
-                </a:solidFill>
-                <a:latin typeface="Calibri" pitchFamily="34" charset="0"/>
-                <a:ea typeface="Calibri" pitchFamily="34" charset="-122"/>
-                <a:cs typeface="Calibri" pitchFamily="34" charset="-120"/>
-              </a:rPr>
-              <a:t>Enterococcus</a:t>
-            </a:r>
-            <a:endParaRPr lang="en-US" sz="1100" dirty="0"/>
-          </a:p>
-        </p:txBody>
-      </p:sp>
-      <p:sp>
-        <p:nvSpPr>
-          <p:cNvPr id="28" name="Shape 26"/>
-          <p:cNvSpPr/>
-          <p:nvPr/>
-        </p:nvSpPr>
-        <p:spPr>
-          <a:xfrm>
-            <a:off x="457200" y="3977640"/>
-            <a:ext cx="8229600" cy="457200"/>
-          </a:xfrm>
-          <a:prstGeom prst="roundRect">
-            <a:avLst>
-              <a:gd name="adj" fmla="val 20000"/>
-            </a:avLst>
-          </a:prstGeom>
-          <a:solidFill>
-            <a:srgbClr val="4CC9F0">
-              <a:alpha val="10000"/>
-            </a:srgbClr>
-          </a:solidFill>
-          <a:ln w="19050">
-            <a:solidFill>
-              <a:srgbClr val="4CC9F0"/>
-            </a:solidFill>
-            <a:prstDash val="solid"/>
-          </a:ln>
-        </p:spPr>
-      </p:sp>
-      <p:sp>
-        <p:nvSpPr>
-          <p:cNvPr id="29" name="Text 27"/>
-          <p:cNvSpPr txBox="1"/>
-          <p:nvPr/>
-        </p:nvSpPr>
-        <p:spPr>
-          <a:xfrm>
-            <a:off x="512064" y="3977640"/>
-            <a:ext cx="8119872" cy="457200"/>
-          </a:xfrm>
-          <a:prstGeom prst="rect">
-            <a:avLst/>
-          </a:prstGeom>
-          <a:noFill/>
-          <a:ln/>
-        </p:spPr>
-        <p:txBody>
-          <a:bodyPr wrap="square" lIns="0" tIns="0" rIns="0" bIns="0" rtlCol="0" anchor="ctr"/>
-          <a:lstStyle/>
-          <a:p>
-            <a:pPr algn="ctr" indent="0" marL="0">
-              <a:buNone/>
-            </a:pPr>
-            <a:r>
-              <a:rPr lang="en-US" sz="1400" b="1" dirty="0">
-                <a:solidFill>
-                  <a:srgbClr val="15193A"/>
-                </a:solidFill>
-                <a:latin typeface="Calibri" pitchFamily="34" charset="0"/>
-                <a:ea typeface="Calibri" pitchFamily="34" charset="-122"/>
-                <a:cs typeface="Calibri" pitchFamily="34" charset="-120"/>
-              </a:rPr>
-              <a:t>Pruebas clave: catalasa, coagulasa, hemólisis, antígeno de Lancefield, PYR y bilis-esculina</a:t>
-            </a:r>
-            <a:endParaRPr lang="en-US" sz="1400" dirty="0"/>
+              <a:t>Conclusión</a:t>
+            </a:r>
+            <a:endParaRPr lang="en-US" sz="1500" dirty="0"/>
           </a:p>
         </p:txBody>
       </p:sp>
@@ -2721,6 +2535,947 @@
             <a:fld id="{F7021451-1387-4CA6-816F-3879F97B5CBC}" type="slidenum">
               <a:rPr b="0" lang="en-US"/>
               <a:t>2</a:t>
+            </a:fld>
+            <a:endParaRPr lang="en-US"/>
+          </a:p>
+        </p:txBody>
+      </p:sp>
+    </p:spTree>
+  </p:cSld>
+  <p:clrMapOvr>
+    <a:masterClrMapping/>
+  </p:clrMapOvr>
+</p:sld>
+</file>
+
+<file path=ppt/slides/slide3.xml><?xml version="1.0" encoding="utf-8"?>
+<p:sld xmlns:a="http://schemas.openxmlformats.org/drawingml/2006/main" xmlns:r="http://schemas.openxmlformats.org/officeDocument/2006/relationships" xmlns:p="http://schemas.openxmlformats.org/presentationml/2006/main">
+  <p:cSld name="Slide 3">
+    <p:bg>
+      <p:bgPr>
+        <a:solidFill>
+          <a:srgbClr val="FFFFFF"/>
+        </a:solidFill>
+      </p:bgPr>
+    </p:bg>
+    <p:spTree>
+      <p:nvGrpSpPr>
+        <p:cNvPr id="1" name=""/>
+        <p:cNvGrpSpPr/>
+        <p:nvPr/>
+      </p:nvGrpSpPr>
+      <p:grpSpPr>
+        <a:xfrm>
+          <a:off x="0" y="0"/>
+          <a:ext cx="0" cy="0"/>
+          <a:chOff x="0" y="0"/>
+          <a:chExt cx="0" cy="0"/>
+        </a:xfrm>
+      </p:grpSpPr>
+      <p:sp>
+        <p:nvSpPr>
+          <p:cNvPr id="2" name="Shape 0"/>
+          <p:cNvSpPr/>
+          <p:nvPr/>
+        </p:nvSpPr>
+        <p:spPr>
+          <a:xfrm>
+            <a:off x="548640" y="1828800"/>
+            <a:ext cx="109728" cy="1280160"/>
+          </a:xfrm>
+          <a:prstGeom prst="rect">
+            <a:avLst/>
+          </a:prstGeom>
+          <a:solidFill>
+            <a:srgbClr val="A78BFA"/>
+          </a:solidFill>
+          <a:ln w="12700">
+            <a:solidFill>
+              <a:srgbClr val="A78BFA"/>
+            </a:solidFill>
+            <a:prstDash val="solid"/>
+          </a:ln>
+        </p:spPr>
+      </p:sp>
+      <p:sp>
+        <p:nvSpPr>
+          <p:cNvPr id="3" name="Text 1"/>
+          <p:cNvSpPr txBox="1"/>
+          <p:nvPr/>
+        </p:nvSpPr>
+        <p:spPr>
+          <a:xfrm>
+            <a:off x="868680" y="1280160"/>
+            <a:ext cx="3657600" cy="914400"/>
+          </a:xfrm>
+          <a:prstGeom prst="rect">
+            <a:avLst/>
+          </a:prstGeom>
+          <a:noFill/>
+          <a:ln/>
+        </p:spPr>
+        <p:txBody>
+          <a:bodyPr wrap="square" lIns="0" tIns="0" rIns="0" bIns="0" rtlCol="0" anchor="b"/>
+          <a:lstStyle/>
+          <a:p>
+            <a:pPr indent="0" marL="0">
+              <a:buNone/>
+            </a:pPr>
+            <a:r>
+              <a:rPr lang="en-US" sz="5600" b="1" dirty="0">
+                <a:solidFill>
+                  <a:srgbClr val="6A4CCF"/>
+                </a:solidFill>
+                <a:latin typeface="Calibri" pitchFamily="34" charset="0"/>
+                <a:ea typeface="Calibri" pitchFamily="34" charset="-122"/>
+                <a:cs typeface="Calibri" pitchFamily="34" charset="-120"/>
+              </a:rPr>
+              <a:t>01</a:t>
+            </a:r>
+            <a:endParaRPr lang="en-US" sz="5600" dirty="0"/>
+          </a:p>
+        </p:txBody>
+      </p:sp>
+      <p:sp>
+        <p:nvSpPr>
+          <p:cNvPr id="4" name="Text 2"/>
+          <p:cNvSpPr txBox="1"/>
+          <p:nvPr/>
+        </p:nvSpPr>
+        <p:spPr>
+          <a:xfrm>
+            <a:off x="868680" y="2194560"/>
+            <a:ext cx="7498080" cy="914400"/>
+          </a:xfrm>
+          <a:prstGeom prst="rect">
+            <a:avLst/>
+          </a:prstGeom>
+          <a:noFill/>
+          <a:ln/>
+        </p:spPr>
+        <p:txBody>
+          <a:bodyPr wrap="square" lIns="0" tIns="0" rIns="0" bIns="0" rtlCol="0" anchor="ctr"/>
+          <a:lstStyle/>
+          <a:p>
+            <a:pPr indent="0" marL="0">
+              <a:buNone/>
+            </a:pPr>
+            <a:r>
+              <a:rPr lang="en-US" sz="4800" b="1" dirty="0">
+                <a:solidFill>
+                  <a:srgbClr val="15193A"/>
+                </a:solidFill>
+                <a:latin typeface="Calibri" pitchFamily="34" charset="0"/>
+                <a:ea typeface="Calibri" pitchFamily="34" charset="-122"/>
+                <a:cs typeface="Calibri" pitchFamily="34" charset="-120"/>
+              </a:rPr>
+              <a:t>Objetivo</a:t>
+            </a:r>
+            <a:endParaRPr lang="en-US" sz="4800" dirty="0"/>
+          </a:p>
+        </p:txBody>
+      </p:sp>
+      <p:sp>
+        <p:nvSpPr>
+          <p:cNvPr id="5" name="Text 3"/>
+          <p:cNvSpPr txBox="1"/>
+          <p:nvPr/>
+        </p:nvSpPr>
+        <p:spPr>
+          <a:xfrm>
+            <a:off x="886968" y="3200400"/>
+            <a:ext cx="6858000" cy="640080"/>
+          </a:xfrm>
+          <a:prstGeom prst="rect">
+            <a:avLst/>
+          </a:prstGeom>
+          <a:noFill/>
+          <a:ln/>
+        </p:spPr>
+        <p:txBody>
+          <a:bodyPr wrap="square" lIns="0" tIns="0" rIns="0" bIns="0" rtlCol="0" anchor="t"/>
+          <a:lstStyle/>
+          <a:p>
+            <a:pPr indent="0" marL="0">
+              <a:buNone/>
+            </a:pPr>
+            <a:r>
+              <a:rPr lang="en-US" sz="2000" dirty="0">
+                <a:solidFill>
+                  <a:srgbClr val="51597F"/>
+                </a:solidFill>
+                <a:latin typeface="Calibri" pitchFamily="34" charset="0"/>
+                <a:ea typeface="Calibri" pitchFamily="34" charset="-122"/>
+                <a:cs typeface="Calibri" pitchFamily="34" charset="-120"/>
+              </a:rPr>
+              <a:t>Qué queremos comprender</a:t>
+            </a:r>
+            <a:endParaRPr lang="en-US" sz="2000" dirty="0"/>
+          </a:p>
+        </p:txBody>
+      </p:sp>
+    </p:spTree>
+  </p:cSld>
+  <p:clrMapOvr>
+    <a:masterClrMapping/>
+  </p:clrMapOvr>
+</p:sld>
+</file>
+
+<file path=ppt/slides/slide4.xml><?xml version="1.0" encoding="utf-8"?>
+<p:sld xmlns:a="http://schemas.openxmlformats.org/drawingml/2006/main" xmlns:r="http://schemas.openxmlformats.org/officeDocument/2006/relationships" xmlns:p="http://schemas.openxmlformats.org/presentationml/2006/main">
+  <p:cSld name="Slide 4">
+    <p:bg>
+      <p:bgPr>
+        <a:solidFill>
+          <a:srgbClr val="FFFFFF"/>
+        </a:solidFill>
+      </p:bgPr>
+    </p:bg>
+    <p:spTree>
+      <p:nvGrpSpPr>
+        <p:cNvPr id="1" name=""/>
+        <p:cNvGrpSpPr/>
+        <p:nvPr/>
+      </p:nvGrpSpPr>
+      <p:grpSpPr>
+        <a:xfrm>
+          <a:off x="0" y="0"/>
+          <a:ext cx="0" cy="0"/>
+          <a:chOff x="0" y="0"/>
+          <a:chExt cx="0" cy="0"/>
+        </a:xfrm>
+      </p:grpSpPr>
+      <p:sp>
+        <p:nvSpPr>
+          <p:cNvPr id="2" name="Text 0"/>
+          <p:cNvSpPr txBox="1"/>
+          <p:nvPr/>
+        </p:nvSpPr>
+        <p:spPr>
+          <a:xfrm>
+            <a:off x="457200" y="201168"/>
+            <a:ext cx="7863840" cy="274320"/>
+          </a:xfrm>
+          <a:prstGeom prst="rect">
+            <a:avLst/>
+          </a:prstGeom>
+          <a:noFill/>
+          <a:ln/>
+        </p:spPr>
+        <p:txBody>
+          <a:bodyPr wrap="square" lIns="0" tIns="0" rIns="0" bIns="0" rtlCol="0" anchor="ctr"/>
+          <a:lstStyle/>
+          <a:p>
+            <a:pPr indent="0" marL="0">
+              <a:buNone/>
+            </a:pPr>
+            <a:r>
+              <a:rPr lang="en-US" sz="1300" b="1" spc="300" kern="0" dirty="0">
+                <a:solidFill>
+                  <a:srgbClr val="6A4CCF"/>
+                </a:solidFill>
+                <a:latin typeface="Calibri" pitchFamily="34" charset="0"/>
+                <a:ea typeface="Calibri" pitchFamily="34" charset="-122"/>
+                <a:cs typeface="Calibri" pitchFamily="34" charset="-120"/>
+              </a:rPr>
+              <a:t>01 - OBJETIVO</a:t>
+            </a:r>
+            <a:endParaRPr lang="en-US" sz="1300" dirty="0"/>
+          </a:p>
+        </p:txBody>
+      </p:sp>
+      <p:sp>
+        <p:nvSpPr>
+          <p:cNvPr id="3" name="Text 1"/>
+          <p:cNvSpPr txBox="1"/>
+          <p:nvPr/>
+        </p:nvSpPr>
+        <p:spPr>
+          <a:xfrm>
+            <a:off x="457200" y="457200"/>
+            <a:ext cx="8229600" cy="658368"/>
+          </a:xfrm>
+          <a:prstGeom prst="rect">
+            <a:avLst/>
+          </a:prstGeom>
+          <a:noFill/>
+          <a:ln/>
+        </p:spPr>
+        <p:txBody>
+          <a:bodyPr wrap="square" lIns="0" tIns="0" rIns="0" bIns="0" rtlCol="0" anchor="ctr"/>
+          <a:lstStyle/>
+          <a:p>
+            <a:pPr indent="0" marL="0">
+              <a:buNone/>
+            </a:pPr>
+            <a:r>
+              <a:rPr lang="en-US" sz="3000" b="1" dirty="0">
+                <a:solidFill>
+                  <a:srgbClr val="15193A"/>
+                </a:solidFill>
+                <a:latin typeface="Calibri" pitchFamily="34" charset="0"/>
+                <a:ea typeface="Calibri" pitchFamily="34" charset="-122"/>
+                <a:cs typeface="Calibri" pitchFamily="34" charset="-120"/>
+              </a:rPr>
+              <a:t>Objetivo general</a:t>
+            </a:r>
+            <a:endParaRPr lang="en-US" sz="3000" dirty="0"/>
+          </a:p>
+        </p:txBody>
+      </p:sp>
+      <p:sp>
+        <p:nvSpPr>
+          <p:cNvPr id="4" name="Shape 2"/>
+          <p:cNvSpPr/>
+          <p:nvPr/>
+        </p:nvSpPr>
+        <p:spPr>
+          <a:xfrm>
+            <a:off x="457200" y="4507992"/>
+            <a:ext cx="8229600" cy="0"/>
+          </a:xfrm>
+          <a:prstGeom prst="line">
+            <a:avLst/>
+          </a:prstGeom>
+          <a:noFill/>
+          <a:ln w="9525">
+            <a:solidFill>
+              <a:srgbClr val="D7DCEF"/>
+            </a:solidFill>
+            <a:prstDash val="solid"/>
+          </a:ln>
+        </p:spPr>
+      </p:sp>
+      <p:sp>
+        <p:nvSpPr>
+          <p:cNvPr id="5" name="Text 3"/>
+          <p:cNvSpPr txBox="1"/>
+          <p:nvPr/>
+        </p:nvSpPr>
+        <p:spPr>
+          <a:xfrm>
+            <a:off x="457200" y="4553712"/>
+            <a:ext cx="7818120" cy="502920"/>
+          </a:xfrm>
+          <a:prstGeom prst="rect">
+            <a:avLst/>
+          </a:prstGeom>
+          <a:noFill/>
+          <a:ln/>
+        </p:spPr>
+        <p:txBody>
+          <a:bodyPr wrap="square" lIns="0" tIns="0" rIns="0" bIns="0" rtlCol="0" anchor="ctr"/>
+          <a:lstStyle/>
+          <a:p>
+            <a:pPr indent="0" marL="0">
+              <a:buNone/>
+            </a:pPr>
+            <a:r>
+              <a:rPr lang="en-US" sz="900" dirty="0">
+                <a:solidFill>
+                  <a:srgbClr val="51597F"/>
+                </a:solidFill>
+                <a:latin typeface="Calibri" pitchFamily="34" charset="0"/>
+                <a:ea typeface="Calibri" pitchFamily="34" charset="-122"/>
+                <a:cs typeface="Calibri" pitchFamily="34" charset="-120"/>
+              </a:rPr>
+              <a:t>3. Howden BP, Giulieri SG, Wong Fok Lung T, Baines SL, Sharkey LK, Lee JYH, et al. Staphylococcus aureus host interactions and adaptation. Nat Rev Microbiol. 2023;21(6):380-95.</a:t>
+            </a:r>
+            <a:endParaRPr lang="en-US" sz="900" dirty="0"/>
+          </a:p>
+          <a:p>
+            <a:pPr indent="0" marL="0">
+              <a:buNone/>
+            </a:pPr>
+            <a:r>
+              <a:rPr lang="en-US" sz="900" dirty="0">
+                <a:solidFill>
+                  <a:srgbClr val="51597F"/>
+                </a:solidFill>
+                <a:latin typeface="Calibri" pitchFamily="34" charset="0"/>
+                <a:ea typeface="Calibri" pitchFamily="34" charset="-122"/>
+                <a:cs typeface="Calibri" pitchFamily="34" charset="-120"/>
+              </a:rPr>
+              <a:t>2. Brouwer S, Rivera-Hernandez T, Curren BF, Harbison-Price N, De Oliveira DMP, Jespersen MG, et al. Pathogenesis, epidemiology and control of Group A Streptococcus infection. Nat Rev Microbiol. 2023;21(7):431-47.</a:t>
+            </a:r>
+            <a:endParaRPr lang="en-US" sz="900" dirty="0"/>
+          </a:p>
+        </p:txBody>
+      </p:sp>
+      <p:sp>
+        <p:nvSpPr>
+          <p:cNvPr id="6" name="Shape 4"/>
+          <p:cNvSpPr/>
+          <p:nvPr/>
+        </p:nvSpPr>
+        <p:spPr>
+          <a:xfrm>
+            <a:off x="457200" y="1280160"/>
+            <a:ext cx="8229600" cy="1371600"/>
+          </a:xfrm>
+          <a:prstGeom prst="roundRect">
+            <a:avLst>
+              <a:gd name="adj" fmla="val 6667"/>
+            </a:avLst>
+          </a:prstGeom>
+          <a:solidFill>
+            <a:srgbClr val="A78BFA">
+              <a:alpha val="10000"/>
+            </a:srgbClr>
+          </a:solidFill>
+          <a:ln w="19050">
+            <a:solidFill>
+              <a:srgbClr val="A78BFA"/>
+            </a:solidFill>
+            <a:prstDash val="solid"/>
+          </a:ln>
+        </p:spPr>
+      </p:sp>
+      <p:sp>
+        <p:nvSpPr>
+          <p:cNvPr id="7" name="Text 5"/>
+          <p:cNvSpPr txBox="1"/>
+          <p:nvPr/>
+        </p:nvSpPr>
+        <p:spPr>
+          <a:xfrm>
+            <a:off x="822960" y="1371600"/>
+            <a:ext cx="7498080" cy="1188720"/>
+          </a:xfrm>
+          <a:prstGeom prst="rect">
+            <a:avLst/>
+          </a:prstGeom>
+          <a:noFill/>
+          <a:ln/>
+        </p:spPr>
+        <p:txBody>
+          <a:bodyPr wrap="square" lIns="0" tIns="0" rIns="0" bIns="0" rtlCol="0" anchor="ctr"/>
+          <a:lstStyle/>
+          <a:p>
+            <a:pPr indent="0" marL="0">
+              <a:buNone/>
+            </a:pPr>
+            <a:r>
+              <a:rPr lang="en-US" sz="2100" dirty="0">
+                <a:solidFill>
+                  <a:srgbClr val="15193A"/>
+                </a:solidFill>
+                <a:latin typeface="Calibri" pitchFamily="34" charset="0"/>
+                <a:ea typeface="Calibri" pitchFamily="34" charset="-122"/>
+                <a:cs typeface="Calibri" pitchFamily="34" charset="-120"/>
+              </a:rPr>
+              <a:t>Comprender los mecanismos fisiopatológicos de las infecciones por bacterias grampositivas, enfatizando la virulencia, la evasión inmunitaria y el daño tisular.</a:t>
+            </a:r>
+            <a:endParaRPr lang="en-US" sz="2100" dirty="0"/>
+          </a:p>
+        </p:txBody>
+      </p:sp>
+      <p:sp>
+        <p:nvSpPr>
+          <p:cNvPr id="8" name="Shape 6"/>
+          <p:cNvSpPr/>
+          <p:nvPr/>
+        </p:nvSpPr>
+        <p:spPr>
+          <a:xfrm>
+            <a:off x="457200" y="2880360"/>
+            <a:ext cx="2624328" cy="1417320"/>
+          </a:xfrm>
+          <a:prstGeom prst="roundRect">
+            <a:avLst>
+              <a:gd name="adj" fmla="val 6452"/>
+            </a:avLst>
+          </a:prstGeom>
+          <a:solidFill>
+            <a:srgbClr val="F4F6FD"/>
+          </a:solidFill>
+          <a:ln w="19050">
+            <a:solidFill>
+              <a:srgbClr val="F2B43C"/>
+            </a:solidFill>
+            <a:prstDash val="solid"/>
+          </a:ln>
+        </p:spPr>
+      </p:sp>
+      <p:sp>
+        <p:nvSpPr>
+          <p:cNvPr id="9" name="Shape 7"/>
+          <p:cNvSpPr/>
+          <p:nvPr/>
+        </p:nvSpPr>
+        <p:spPr>
+          <a:xfrm>
+            <a:off x="1408176" y="3017520"/>
+            <a:ext cx="731520" cy="731520"/>
+          </a:xfrm>
+          <a:prstGeom prst="ellipse">
+            <a:avLst/>
+          </a:prstGeom>
+          <a:solidFill>
+            <a:srgbClr val="F2B43C"/>
+          </a:solidFill>
+          <a:ln w="12700">
+            <a:solidFill>
+              <a:srgbClr val="F2B43C"/>
+            </a:solidFill>
+            <a:prstDash val="solid"/>
+          </a:ln>
+        </p:spPr>
+      </p:sp>
+      <p:pic>
+        <p:nvPicPr>
+          <p:cNvPr id="10" name="Image 0" descr="preencoded.png">    </p:cNvPr>
+          <p:cNvPicPr>
+            <a:picLocks noChangeAspect="1"/>
+          </p:cNvPicPr>
+          <p:nvPr/>
+        </p:nvPicPr>
+        <p:blipFill>
+          <a:blip r:embed="rId1"/>
+          <a:stretch>
+            <a:fillRect/>
+          </a:stretch>
+        </p:blipFill>
+        <p:spPr>
+          <a:xfrm>
+            <a:off x="1583741" y="3193085"/>
+            <a:ext cx="380390" cy="380390"/>
+          </a:xfrm>
+          <a:prstGeom prst="rect">
+            <a:avLst/>
+          </a:prstGeom>
+        </p:spPr>
+      </p:pic>
+      <p:sp>
+        <p:nvSpPr>
+          <p:cNvPr id="11" name="Text 8"/>
+          <p:cNvSpPr txBox="1"/>
+          <p:nvPr/>
+        </p:nvSpPr>
+        <p:spPr>
+          <a:xfrm>
+            <a:off x="457200" y="3840480"/>
+            <a:ext cx="2624328" cy="365760"/>
+          </a:xfrm>
+          <a:prstGeom prst="rect">
+            <a:avLst/>
+          </a:prstGeom>
+          <a:noFill/>
+          <a:ln/>
+        </p:spPr>
+        <p:txBody>
+          <a:bodyPr wrap="square" lIns="0" tIns="0" rIns="0" bIns="0" rtlCol="0" anchor="t"/>
+          <a:lstStyle/>
+          <a:p>
+            <a:pPr algn="ctr" indent="0" marL="0">
+              <a:buNone/>
+            </a:pPr>
+            <a:r>
+              <a:rPr lang="en-US" sz="1700" b="1" dirty="0">
+                <a:solidFill>
+                  <a:srgbClr val="A66A00"/>
+                </a:solidFill>
+                <a:latin typeface="Calibri" pitchFamily="34" charset="0"/>
+                <a:ea typeface="Calibri" pitchFamily="34" charset="-122"/>
+                <a:cs typeface="Calibri" pitchFamily="34" charset="-120"/>
+              </a:rPr>
+              <a:t>Virulencia</a:t>
+            </a:r>
+            <a:endParaRPr lang="en-US" sz="1700" dirty="0"/>
+          </a:p>
+        </p:txBody>
+      </p:sp>
+      <p:sp>
+        <p:nvSpPr>
+          <p:cNvPr id="12" name="Text 9"/>
+          <p:cNvSpPr txBox="1"/>
+          <p:nvPr/>
+        </p:nvSpPr>
+        <p:spPr>
+          <a:xfrm>
+            <a:off x="457200" y="4187952"/>
+            <a:ext cx="2624328" cy="274320"/>
+          </a:xfrm>
+          <a:prstGeom prst="rect">
+            <a:avLst/>
+          </a:prstGeom>
+          <a:noFill/>
+          <a:ln/>
+        </p:spPr>
+        <p:txBody>
+          <a:bodyPr wrap="square" lIns="0" tIns="0" rIns="0" bIns="0" rtlCol="0" anchor="t"/>
+          <a:lstStyle/>
+          <a:p>
+            <a:pPr algn="ctr" indent="0" marL="0">
+              <a:buNone/>
+            </a:pPr>
+            <a:r>
+              <a:rPr lang="en-US" sz="1300" dirty="0">
+                <a:solidFill>
+                  <a:srgbClr val="51597F"/>
+                </a:solidFill>
+                <a:latin typeface="Calibri" pitchFamily="34" charset="0"/>
+                <a:ea typeface="Calibri" pitchFamily="34" charset="-122"/>
+                <a:cs typeface="Calibri" pitchFamily="34" charset="-120"/>
+              </a:rPr>
+              <a:t>Cómo ataca</a:t>
+            </a:r>
+            <a:endParaRPr lang="en-US" sz="1300" dirty="0"/>
+          </a:p>
+        </p:txBody>
+      </p:sp>
+      <p:sp>
+        <p:nvSpPr>
+          <p:cNvPr id="13" name="Shape 10"/>
+          <p:cNvSpPr/>
+          <p:nvPr/>
+        </p:nvSpPr>
+        <p:spPr>
+          <a:xfrm>
+            <a:off x="3264408" y="2880360"/>
+            <a:ext cx="2624328" cy="1417320"/>
+          </a:xfrm>
+          <a:prstGeom prst="roundRect">
+            <a:avLst>
+              <a:gd name="adj" fmla="val 6452"/>
+            </a:avLst>
+          </a:prstGeom>
+          <a:solidFill>
+            <a:srgbClr val="F4F6FD"/>
+          </a:solidFill>
+          <a:ln w="19050">
+            <a:solidFill>
+              <a:srgbClr val="2EC4B6"/>
+            </a:solidFill>
+            <a:prstDash val="solid"/>
+          </a:ln>
+        </p:spPr>
+      </p:sp>
+      <p:sp>
+        <p:nvSpPr>
+          <p:cNvPr id="14" name="Shape 11"/>
+          <p:cNvSpPr/>
+          <p:nvPr/>
+        </p:nvSpPr>
+        <p:spPr>
+          <a:xfrm>
+            <a:off x="4215384" y="3017520"/>
+            <a:ext cx="731520" cy="731520"/>
+          </a:xfrm>
+          <a:prstGeom prst="ellipse">
+            <a:avLst/>
+          </a:prstGeom>
+          <a:solidFill>
+            <a:srgbClr val="2EC4B6"/>
+          </a:solidFill>
+          <a:ln w="12700">
+            <a:solidFill>
+              <a:srgbClr val="2EC4B6"/>
+            </a:solidFill>
+            <a:prstDash val="solid"/>
+          </a:ln>
+        </p:spPr>
+      </p:sp>
+      <p:pic>
+        <p:nvPicPr>
+          <p:cNvPr id="15" name="Image 1" descr="preencoded.png">    </p:cNvPr>
+          <p:cNvPicPr>
+            <a:picLocks noChangeAspect="1"/>
+          </p:cNvPicPr>
+          <p:nvPr/>
+        </p:nvPicPr>
+        <p:blipFill>
+          <a:blip r:embed="rId2"/>
+          <a:stretch>
+            <a:fillRect/>
+          </a:stretch>
+        </p:blipFill>
+        <p:spPr>
+          <a:xfrm>
+            <a:off x="4390949" y="3193085"/>
+            <a:ext cx="380390" cy="380390"/>
+          </a:xfrm>
+          <a:prstGeom prst="rect">
+            <a:avLst/>
+          </a:prstGeom>
+        </p:spPr>
+      </p:pic>
+      <p:sp>
+        <p:nvSpPr>
+          <p:cNvPr id="16" name="Text 12"/>
+          <p:cNvSpPr txBox="1"/>
+          <p:nvPr/>
+        </p:nvSpPr>
+        <p:spPr>
+          <a:xfrm>
+            <a:off x="3264408" y="3840480"/>
+            <a:ext cx="2624328" cy="365760"/>
+          </a:xfrm>
+          <a:prstGeom prst="rect">
+            <a:avLst/>
+          </a:prstGeom>
+          <a:noFill/>
+          <a:ln/>
+        </p:spPr>
+        <p:txBody>
+          <a:bodyPr wrap="square" lIns="0" tIns="0" rIns="0" bIns="0" rtlCol="0" anchor="t"/>
+          <a:lstStyle/>
+          <a:p>
+            <a:pPr algn="ctr" indent="0" marL="0">
+              <a:buNone/>
+            </a:pPr>
+            <a:r>
+              <a:rPr lang="en-US" sz="1700" b="1" dirty="0">
+                <a:solidFill>
+                  <a:srgbClr val="0C8368"/>
+                </a:solidFill>
+                <a:latin typeface="Calibri" pitchFamily="34" charset="0"/>
+                <a:ea typeface="Calibri" pitchFamily="34" charset="-122"/>
+                <a:cs typeface="Calibri" pitchFamily="34" charset="-120"/>
+              </a:rPr>
+              <a:t>Evasión inmunitaria</a:t>
+            </a:r>
+            <a:endParaRPr lang="en-US" sz="1700" dirty="0"/>
+          </a:p>
+        </p:txBody>
+      </p:sp>
+      <p:sp>
+        <p:nvSpPr>
+          <p:cNvPr id="17" name="Text 13"/>
+          <p:cNvSpPr txBox="1"/>
+          <p:nvPr/>
+        </p:nvSpPr>
+        <p:spPr>
+          <a:xfrm>
+            <a:off x="3264408" y="4187952"/>
+            <a:ext cx="2624328" cy="274320"/>
+          </a:xfrm>
+          <a:prstGeom prst="rect">
+            <a:avLst/>
+          </a:prstGeom>
+          <a:noFill/>
+          <a:ln/>
+        </p:spPr>
+        <p:txBody>
+          <a:bodyPr wrap="square" lIns="0" tIns="0" rIns="0" bIns="0" rtlCol="0" anchor="t"/>
+          <a:lstStyle/>
+          <a:p>
+            <a:pPr algn="ctr" indent="0" marL="0">
+              <a:buNone/>
+            </a:pPr>
+            <a:r>
+              <a:rPr lang="en-US" sz="1300" dirty="0">
+                <a:solidFill>
+                  <a:srgbClr val="51597F"/>
+                </a:solidFill>
+                <a:latin typeface="Calibri" pitchFamily="34" charset="0"/>
+                <a:ea typeface="Calibri" pitchFamily="34" charset="-122"/>
+                <a:cs typeface="Calibri" pitchFamily="34" charset="-120"/>
+              </a:rPr>
+              <a:t>Cómo escapa</a:t>
+            </a:r>
+            <a:endParaRPr lang="en-US" sz="1300" dirty="0"/>
+          </a:p>
+        </p:txBody>
+      </p:sp>
+      <p:sp>
+        <p:nvSpPr>
+          <p:cNvPr id="18" name="Shape 14"/>
+          <p:cNvSpPr/>
+          <p:nvPr/>
+        </p:nvSpPr>
+        <p:spPr>
+          <a:xfrm>
+            <a:off x="6071616" y="2880360"/>
+            <a:ext cx="2624328" cy="1417320"/>
+          </a:xfrm>
+          <a:prstGeom prst="roundRect">
+            <a:avLst>
+              <a:gd name="adj" fmla="val 6452"/>
+            </a:avLst>
+          </a:prstGeom>
+          <a:solidFill>
+            <a:srgbClr val="F4F6FD"/>
+          </a:solidFill>
+          <a:ln w="19050">
+            <a:solidFill>
+              <a:srgbClr val="F2546B"/>
+            </a:solidFill>
+            <a:prstDash val="solid"/>
+          </a:ln>
+        </p:spPr>
+      </p:sp>
+      <p:sp>
+        <p:nvSpPr>
+          <p:cNvPr id="19" name="Shape 15"/>
+          <p:cNvSpPr/>
+          <p:nvPr/>
+        </p:nvSpPr>
+        <p:spPr>
+          <a:xfrm>
+            <a:off x="7022592" y="3017520"/>
+            <a:ext cx="731520" cy="731520"/>
+          </a:xfrm>
+          <a:prstGeom prst="ellipse">
+            <a:avLst/>
+          </a:prstGeom>
+          <a:solidFill>
+            <a:srgbClr val="F2546B"/>
+          </a:solidFill>
+          <a:ln w="12700">
+            <a:solidFill>
+              <a:srgbClr val="F2546B"/>
+            </a:solidFill>
+            <a:prstDash val="solid"/>
+          </a:ln>
+        </p:spPr>
+      </p:sp>
+      <p:pic>
+        <p:nvPicPr>
+          <p:cNvPr id="20" name="Image 2" descr="preencoded.png">    </p:cNvPr>
+          <p:cNvPicPr>
+            <a:picLocks noChangeAspect="1"/>
+          </p:cNvPicPr>
+          <p:nvPr/>
+        </p:nvPicPr>
+        <p:blipFill>
+          <a:blip r:embed="rId3"/>
+          <a:stretch>
+            <a:fillRect/>
+          </a:stretch>
+        </p:blipFill>
+        <p:spPr>
+          <a:xfrm>
+            <a:off x="7198157" y="3193085"/>
+            <a:ext cx="380390" cy="380390"/>
+          </a:xfrm>
+          <a:prstGeom prst="rect">
+            <a:avLst/>
+          </a:prstGeom>
+        </p:spPr>
+      </p:pic>
+      <p:sp>
+        <p:nvSpPr>
+          <p:cNvPr id="21" name="Text 16"/>
+          <p:cNvSpPr txBox="1"/>
+          <p:nvPr/>
+        </p:nvSpPr>
+        <p:spPr>
+          <a:xfrm>
+            <a:off x="6071616" y="3840480"/>
+            <a:ext cx="2624328" cy="365760"/>
+          </a:xfrm>
+          <a:prstGeom prst="rect">
+            <a:avLst/>
+          </a:prstGeom>
+          <a:noFill/>
+          <a:ln/>
+        </p:spPr>
+        <p:txBody>
+          <a:bodyPr wrap="square" lIns="0" tIns="0" rIns="0" bIns="0" rtlCol="0" anchor="t"/>
+          <a:lstStyle/>
+          <a:p>
+            <a:pPr algn="ctr" indent="0" marL="0">
+              <a:buNone/>
+            </a:pPr>
+            <a:r>
+              <a:rPr lang="en-US" sz="1700" b="1" dirty="0">
+                <a:solidFill>
+                  <a:srgbClr val="C81E43"/>
+                </a:solidFill>
+                <a:latin typeface="Calibri" pitchFamily="34" charset="0"/>
+                <a:ea typeface="Calibri" pitchFamily="34" charset="-122"/>
+                <a:cs typeface="Calibri" pitchFamily="34" charset="-120"/>
+              </a:rPr>
+              <a:t>Daño tisular</a:t>
+            </a:r>
+            <a:endParaRPr lang="en-US" sz="1700" dirty="0"/>
+          </a:p>
+        </p:txBody>
+      </p:sp>
+      <p:sp>
+        <p:nvSpPr>
+          <p:cNvPr id="22" name="Text 17"/>
+          <p:cNvSpPr txBox="1"/>
+          <p:nvPr/>
+        </p:nvSpPr>
+        <p:spPr>
+          <a:xfrm>
+            <a:off x="6071616" y="4187952"/>
+            <a:ext cx="2624328" cy="274320"/>
+          </a:xfrm>
+          <a:prstGeom prst="rect">
+            <a:avLst/>
+          </a:prstGeom>
+          <a:noFill/>
+          <a:ln/>
+        </p:spPr>
+        <p:txBody>
+          <a:bodyPr wrap="square" lIns="0" tIns="0" rIns="0" bIns="0" rtlCol="0" anchor="t"/>
+          <a:lstStyle/>
+          <a:p>
+            <a:pPr algn="ctr" indent="0" marL="0">
+              <a:buNone/>
+            </a:pPr>
+            <a:r>
+              <a:rPr lang="en-US" sz="1300" dirty="0">
+                <a:solidFill>
+                  <a:srgbClr val="51597F"/>
+                </a:solidFill>
+                <a:latin typeface="Calibri" pitchFamily="34" charset="0"/>
+                <a:ea typeface="Calibri" pitchFamily="34" charset="-122"/>
+                <a:cs typeface="Calibri" pitchFamily="34" charset="-120"/>
+              </a:rPr>
+              <a:t>Cómo lesiona</a:t>
+            </a:r>
+            <a:endParaRPr lang="en-US" sz="1300" dirty="0"/>
+          </a:p>
+        </p:txBody>
+      </p:sp>
+      <p:sp>
+        <p:nvSpPr>
+          <p:cNvPr id="25" name="Slide Number Placeholder 0"/>
+          <p:cNvSpPr>
+            <a:spLocks noGrp="1"/>
+          </p:cNvSpPr>
+          <p:nvPr>
+            <p:ph type="sldNum" sz="quarter" idx="4294967295"/>
+          </p:nvPr>
+        </p:nvSpPr>
+        <p:spPr>
+          <a:xfrm>
+            <a:off x="8321040" y="4754880"/>
+            <a:ext cx="365760" cy="274320"/>
+          </a:xfrm>
+          <a:prstGeom prst="rect">
+            <a:avLst/>
+          </a:prstGeom>
+          <a:extLst>
+            <a:ext uri="{C572A759-6A51-4108-AA02-DFA0A04FC94B}">
+              <ma14:wrappingTextBoxFlag xmlns:ma14="http://schemas.microsoft.com/office/mac/drawingml/2011/main" val="0"/>
+            </a:ext>
+          </a:extLst>
+        </p:spPr>
+        <p:txBody>
+          <a:bodyPr/>
+          <a:lstStyle>
+            <a:lvl1pPr>
+              <a:defRPr sz="1100">
+                <a:solidFill>
+                  <a:srgbClr val="9AA0C0"/>
+                </a:solidFill>
+                <a:latin typeface="Calibri"/>
+                <a:ea typeface="Calibri"/>
+                <a:cs typeface="Calibri"/>
+              </a:defRPr>
+            </a:lvl1pPr>
+          </a:lstStyle>
+          <a:p>
+            <a:pPr algn="r"/>
+            <a:fld id="{F7021451-1387-4CA6-816F-3879F97B5CBC}" type="slidenum">
+              <a:rPr b="0" lang="en-US"/>
+              <a:t>4</a:t>
             </a:fld>
             <a:endParaRPr lang="en-US"/>
           </a:p>

--- a/Cocos_grampositivos_BLANCO.pptx
+++ b/Cocos_grampositivos_BLANCO.pptx
@@ -1246,8 +1246,33 @@
         </p:nvSpPr>
         <p:spPr>
           <a:xfrm>
-            <a:off x="6629400" y="1051560"/>
-            <a:ext cx="475488" cy="475488"/>
+            <a:off x="5943600" y="0"/>
+            <a:ext cx="3200400" cy="5143500"/>
+          </a:xfrm>
+          <a:prstGeom prst="roundRect">
+            <a:avLst/>
+          </a:prstGeom>
+          <a:solidFill>
+            <a:srgbClr val="F4F6FD"/>
+          </a:solidFill>
+          <a:ln w="12700">
+            <a:solidFill>
+              <a:srgbClr val="F4F6FD"/>
+            </a:solidFill>
+            <a:prstDash val="solid"/>
+          </a:ln>
+        </p:spPr>
+      </p:sp>
+      <p:sp>
+        <p:nvSpPr>
+          <p:cNvPr id="3" name="Shape 1"/>
+          <p:cNvSpPr/>
+          <p:nvPr/>
+        </p:nvSpPr>
+        <p:spPr>
+          <a:xfrm>
+            <a:off x="6675120" y="640080"/>
+            <a:ext cx="566928" cy="566928"/>
           </a:xfrm>
           <a:prstGeom prst="ellipse">
             <a:avLst/>
@@ -1255,24 +1280,24 @@
           <a:solidFill>
             <a:srgbClr val="F2B43C"/>
           </a:solidFill>
-          <a:ln w="12700">
-            <a:solidFill>
-              <a:srgbClr val="D7DCEF"/>
-            </a:solidFill>
-            <a:prstDash val="solid"/>
-          </a:ln>
-        </p:spPr>
-      </p:sp>
-      <p:sp>
-        <p:nvSpPr>
-          <p:cNvPr id="3" name="Shape 1"/>
-          <p:cNvSpPr/>
-          <p:nvPr/>
-        </p:nvSpPr>
-        <p:spPr>
-          <a:xfrm>
-            <a:off x="7086600" y="1143000"/>
-            <a:ext cx="475488" cy="475488"/>
+          <a:ln w="19050">
+            <a:solidFill>
+              <a:srgbClr val="FFFFFF"/>
+            </a:solidFill>
+            <a:prstDash val="solid"/>
+          </a:ln>
+        </p:spPr>
+      </p:sp>
+      <p:sp>
+        <p:nvSpPr>
+          <p:cNvPr id="4" name="Shape 2"/>
+          <p:cNvSpPr/>
+          <p:nvPr/>
+        </p:nvSpPr>
+        <p:spPr>
+          <a:xfrm>
+            <a:off x="7185355" y="725119"/>
+            <a:ext cx="538582" cy="538582"/>
           </a:xfrm>
           <a:prstGeom prst="ellipse">
             <a:avLst/>
@@ -1280,24 +1305,24 @@
           <a:solidFill>
             <a:srgbClr val="F2B43C"/>
           </a:solidFill>
-          <a:ln w="12700">
-            <a:solidFill>
-              <a:srgbClr val="D7DCEF"/>
-            </a:solidFill>
-            <a:prstDash val="solid"/>
-          </a:ln>
-        </p:spPr>
-      </p:sp>
-      <p:sp>
-        <p:nvSpPr>
-          <p:cNvPr id="4" name="Shape 2"/>
-          <p:cNvSpPr/>
-          <p:nvPr/>
-        </p:nvSpPr>
-        <p:spPr>
-          <a:xfrm>
-            <a:off x="6858000" y="1508760"/>
-            <a:ext cx="475488" cy="475488"/>
+          <a:ln w="19050">
+            <a:solidFill>
+              <a:srgbClr val="FFFFFF"/>
+            </a:solidFill>
+            <a:prstDash val="solid"/>
+          </a:ln>
+        </p:spPr>
+      </p:sp>
+      <p:sp>
+        <p:nvSpPr>
+          <p:cNvPr id="5" name="Shape 3"/>
+          <p:cNvSpPr/>
+          <p:nvPr/>
+        </p:nvSpPr>
+        <p:spPr>
+          <a:xfrm>
+            <a:off x="6930238" y="1093622"/>
+            <a:ext cx="566928" cy="566928"/>
           </a:xfrm>
           <a:prstGeom prst="ellipse">
             <a:avLst/>
@@ -1305,24 +1330,24 @@
           <a:solidFill>
             <a:srgbClr val="F2B43C"/>
           </a:solidFill>
-          <a:ln w="12700">
-            <a:solidFill>
-              <a:srgbClr val="D7DCEF"/>
-            </a:solidFill>
-            <a:prstDash val="solid"/>
-          </a:ln>
-        </p:spPr>
-      </p:sp>
-      <p:sp>
-        <p:nvSpPr>
-          <p:cNvPr id="5" name="Shape 3"/>
-          <p:cNvSpPr/>
-          <p:nvPr/>
-        </p:nvSpPr>
-        <p:spPr>
-          <a:xfrm>
-            <a:off x="7315200" y="1554480"/>
-            <a:ext cx="475488" cy="475488"/>
+          <a:ln w="19050">
+            <a:solidFill>
+              <a:srgbClr val="FFFFFF"/>
+            </a:solidFill>
+            <a:prstDash val="solid"/>
+          </a:ln>
+        </p:spPr>
+      </p:sp>
+      <p:sp>
+        <p:nvSpPr>
+          <p:cNvPr id="6" name="Shape 4"/>
+          <p:cNvSpPr/>
+          <p:nvPr/>
+        </p:nvSpPr>
+        <p:spPr>
+          <a:xfrm>
+            <a:off x="7383780" y="1121969"/>
+            <a:ext cx="510235" cy="510235"/>
           </a:xfrm>
           <a:prstGeom prst="ellipse">
             <a:avLst/>
@@ -1330,24 +1355,24 @@
           <a:solidFill>
             <a:srgbClr val="F2B43C"/>
           </a:solidFill>
-          <a:ln w="12700">
-            <a:solidFill>
-              <a:srgbClr val="D7DCEF"/>
-            </a:solidFill>
-            <a:prstDash val="solid"/>
-          </a:ln>
-        </p:spPr>
-      </p:sp>
-      <p:sp>
-        <p:nvSpPr>
-          <p:cNvPr id="6" name="Shape 4"/>
-          <p:cNvSpPr/>
-          <p:nvPr/>
-        </p:nvSpPr>
-        <p:spPr>
-          <a:xfrm>
-            <a:off x="6720840" y="1920240"/>
-            <a:ext cx="475488" cy="475488"/>
+          <a:ln w="19050">
+            <a:solidFill>
+              <a:srgbClr val="FFFFFF"/>
+            </a:solidFill>
+            <a:prstDash val="solid"/>
+          </a:ln>
+        </p:spPr>
+      </p:sp>
+      <p:sp>
+        <p:nvSpPr>
+          <p:cNvPr id="7" name="Shape 5"/>
+          <p:cNvSpPr/>
+          <p:nvPr/>
+        </p:nvSpPr>
+        <p:spPr>
+          <a:xfrm>
+            <a:off x="6618427" y="1121969"/>
+            <a:ext cx="481889" cy="481889"/>
           </a:xfrm>
           <a:prstGeom prst="ellipse">
             <a:avLst/>
@@ -1355,24 +1380,24 @@
           <a:solidFill>
             <a:srgbClr val="F2B43C"/>
           </a:solidFill>
-          <a:ln w="12700">
-            <a:solidFill>
-              <a:srgbClr val="D7DCEF"/>
-            </a:solidFill>
-            <a:prstDash val="solid"/>
-          </a:ln>
-        </p:spPr>
-      </p:sp>
-      <p:sp>
-        <p:nvSpPr>
-          <p:cNvPr id="7" name="Shape 5"/>
-          <p:cNvSpPr/>
-          <p:nvPr/>
-        </p:nvSpPr>
-        <p:spPr>
-          <a:xfrm>
-            <a:off x="7178040" y="1965960"/>
-            <a:ext cx="475488" cy="475488"/>
+          <a:ln w="19050">
+            <a:solidFill>
+              <a:srgbClr val="FFFFFF"/>
+            </a:solidFill>
+            <a:prstDash val="solid"/>
+          </a:ln>
+        </p:spPr>
+      </p:sp>
+      <p:sp>
+        <p:nvSpPr>
+          <p:cNvPr id="8" name="Shape 6"/>
+          <p:cNvSpPr/>
+          <p:nvPr/>
+        </p:nvSpPr>
+        <p:spPr>
+          <a:xfrm>
+            <a:off x="7553858" y="753466"/>
+            <a:ext cx="453542" cy="453542"/>
           </a:xfrm>
           <a:prstGeom prst="ellipse">
             <a:avLst/>
@@ -1380,24 +1405,24 @@
           <a:solidFill>
             <a:srgbClr val="F2B43C"/>
           </a:solidFill>
-          <a:ln w="12700">
-            <a:solidFill>
-              <a:srgbClr val="D7DCEF"/>
-            </a:solidFill>
-            <a:prstDash val="solid"/>
-          </a:ln>
-        </p:spPr>
-      </p:sp>
-      <p:sp>
-        <p:nvSpPr>
-          <p:cNvPr id="8" name="Shape 6"/>
-          <p:cNvSpPr/>
-          <p:nvPr/>
-        </p:nvSpPr>
-        <p:spPr>
-          <a:xfrm>
-            <a:off x="7498080" y="1234440"/>
-            <a:ext cx="475488" cy="475488"/>
+          <a:ln w="19050">
+            <a:solidFill>
+              <a:srgbClr val="FFFFFF"/>
+            </a:solidFill>
+            <a:prstDash val="solid"/>
+          </a:ln>
+        </p:spPr>
+      </p:sp>
+      <p:sp>
+        <p:nvSpPr>
+          <p:cNvPr id="9" name="Shape 7"/>
+          <p:cNvSpPr/>
+          <p:nvPr/>
+        </p:nvSpPr>
+        <p:spPr>
+          <a:xfrm>
+            <a:off x="7128662" y="1518818"/>
+            <a:ext cx="481889" cy="481889"/>
           </a:xfrm>
           <a:prstGeom prst="ellipse">
             <a:avLst/>
@@ -1405,24 +1430,24 @@
           <a:solidFill>
             <a:srgbClr val="F2B43C"/>
           </a:solidFill>
-          <a:ln w="12700">
-            <a:solidFill>
-              <a:srgbClr val="D7DCEF"/>
-            </a:solidFill>
-            <a:prstDash val="solid"/>
-          </a:ln>
-        </p:spPr>
-      </p:sp>
-      <p:sp>
-        <p:nvSpPr>
-          <p:cNvPr id="9" name="Shape 7"/>
-          <p:cNvSpPr/>
-          <p:nvPr/>
-        </p:nvSpPr>
-        <p:spPr>
-          <a:xfrm>
-            <a:off x="7543800" y="1737360"/>
-            <a:ext cx="475488" cy="475488"/>
+          <a:ln w="19050">
+            <a:solidFill>
+              <a:srgbClr val="FFFFFF"/>
+            </a:solidFill>
+            <a:prstDash val="solid"/>
+          </a:ln>
+        </p:spPr>
+      </p:sp>
+      <p:sp>
+        <p:nvSpPr>
+          <p:cNvPr id="10" name="Shape 8"/>
+          <p:cNvSpPr/>
+          <p:nvPr/>
+        </p:nvSpPr>
+        <p:spPr>
+          <a:xfrm>
+            <a:off x="7610551" y="1433779"/>
+            <a:ext cx="425196" cy="425196"/>
           </a:xfrm>
           <a:prstGeom prst="ellipse">
             <a:avLst/>
@@ -1430,49 +1455,99 @@
           <a:solidFill>
             <a:srgbClr val="F2B43C"/>
           </a:solidFill>
-          <a:ln w="12700">
-            <a:solidFill>
-              <a:srgbClr val="D7DCEF"/>
-            </a:solidFill>
-            <a:prstDash val="solid"/>
-          </a:ln>
-        </p:spPr>
-      </p:sp>
-      <p:sp>
-        <p:nvSpPr>
-          <p:cNvPr id="10" name="Shape 8"/>
-          <p:cNvSpPr/>
-          <p:nvPr/>
-        </p:nvSpPr>
-        <p:spPr>
-          <a:xfrm>
-            <a:off x="6537960" y="3200400"/>
-            <a:ext cx="402336" cy="402336"/>
+          <a:ln w="19050">
+            <a:solidFill>
+              <a:srgbClr val="FFFFFF"/>
+            </a:solidFill>
+            <a:prstDash val="solid"/>
+          </a:ln>
+        </p:spPr>
+      </p:sp>
+      <p:sp>
+        <p:nvSpPr>
+          <p:cNvPr id="11" name="Shape 9"/>
+          <p:cNvSpPr/>
+          <p:nvPr/>
+        </p:nvSpPr>
+        <p:spPr>
+          <a:xfrm>
+            <a:off x="6646774" y="1547165"/>
+            <a:ext cx="425196" cy="425196"/>
           </a:xfrm>
           <a:prstGeom prst="ellipse">
             <a:avLst/>
           </a:prstGeom>
           <a:solidFill>
+            <a:srgbClr val="F2B43C"/>
+          </a:solidFill>
+          <a:ln w="19050">
+            <a:solidFill>
+              <a:srgbClr val="FFFFFF"/>
+            </a:solidFill>
+            <a:prstDash val="solid"/>
+          </a:ln>
+        </p:spPr>
+      </p:sp>
+      <p:sp>
+        <p:nvSpPr>
+          <p:cNvPr id="12" name="Shape 10"/>
+          <p:cNvSpPr/>
+          <p:nvPr/>
+        </p:nvSpPr>
+        <p:spPr>
+          <a:xfrm>
+            <a:off x="6873545" y="1915668"/>
+            <a:ext cx="396850" cy="396850"/>
+          </a:xfrm>
+          <a:prstGeom prst="ellipse">
+            <a:avLst/>
+          </a:prstGeom>
+          <a:solidFill>
+            <a:srgbClr val="F2B43C"/>
+          </a:solidFill>
+          <a:ln w="19050">
+            <a:solidFill>
+              <a:srgbClr val="FFFFFF"/>
+            </a:solidFill>
+            <a:prstDash val="solid"/>
+          </a:ln>
+        </p:spPr>
+      </p:sp>
+      <p:sp>
+        <p:nvSpPr>
+          <p:cNvPr id="13" name="Shape 11"/>
+          <p:cNvSpPr/>
+          <p:nvPr/>
+        </p:nvSpPr>
+        <p:spPr>
+          <a:xfrm>
+            <a:off x="6263640" y="3611880"/>
+            <a:ext cx="457200" cy="457200"/>
+          </a:xfrm>
+          <a:prstGeom prst="ellipse">
+            <a:avLst/>
+          </a:prstGeom>
+          <a:solidFill>
             <a:srgbClr val="F2546B"/>
           </a:solidFill>
-          <a:ln w="12700">
-            <a:solidFill>
-              <a:srgbClr val="D7DCEF"/>
-            </a:solidFill>
-            <a:prstDash val="solid"/>
-          </a:ln>
-        </p:spPr>
-      </p:sp>
-      <p:sp>
-        <p:nvSpPr>
-          <p:cNvPr id="11" name="Shape 9"/>
-          <p:cNvSpPr/>
-          <p:nvPr/>
-        </p:nvSpPr>
-        <p:spPr>
-          <a:xfrm>
-            <a:off x="6812280" y="3364992"/>
-            <a:ext cx="402336" cy="402336"/>
+          <a:ln w="19050">
+            <a:solidFill>
+              <a:srgbClr val="FFFFFF"/>
+            </a:solidFill>
+            <a:prstDash val="solid"/>
+          </a:ln>
+        </p:spPr>
+      </p:sp>
+      <p:sp>
+        <p:nvSpPr>
+          <p:cNvPr id="14" name="Shape 12"/>
+          <p:cNvSpPr/>
+          <p:nvPr/>
+        </p:nvSpPr>
+        <p:spPr>
+          <a:xfrm>
+            <a:off x="6574536" y="3721608"/>
+            <a:ext cx="457200" cy="457200"/>
           </a:xfrm>
           <a:prstGeom prst="ellipse">
             <a:avLst/>
@@ -1480,24 +1555,24 @@
           <a:solidFill>
             <a:srgbClr val="F2546B"/>
           </a:solidFill>
-          <a:ln w="12700">
-            <a:solidFill>
-              <a:srgbClr val="D7DCEF"/>
-            </a:solidFill>
-            <a:prstDash val="solid"/>
-          </a:ln>
-        </p:spPr>
-      </p:sp>
-      <p:sp>
-        <p:nvSpPr>
-          <p:cNvPr id="12" name="Shape 10"/>
-          <p:cNvSpPr/>
-          <p:nvPr/>
-        </p:nvSpPr>
-        <p:spPr>
-          <a:xfrm>
-            <a:off x="7086600" y="3529584"/>
-            <a:ext cx="402336" cy="402336"/>
+          <a:ln w="19050">
+            <a:solidFill>
+              <a:srgbClr val="FFFFFF"/>
+            </a:solidFill>
+            <a:prstDash val="solid"/>
+          </a:ln>
+        </p:spPr>
+      </p:sp>
+      <p:sp>
+        <p:nvSpPr>
+          <p:cNvPr id="15" name="Shape 13"/>
+          <p:cNvSpPr/>
+          <p:nvPr/>
+        </p:nvSpPr>
+        <p:spPr>
+          <a:xfrm>
+            <a:off x="6885432" y="3831336"/>
+            <a:ext cx="457200" cy="457200"/>
           </a:xfrm>
           <a:prstGeom prst="ellipse">
             <a:avLst/>
@@ -1505,24 +1580,24 @@
           <a:solidFill>
             <a:srgbClr val="F2546B"/>
           </a:solidFill>
-          <a:ln w="12700">
-            <a:solidFill>
-              <a:srgbClr val="D7DCEF"/>
-            </a:solidFill>
-            <a:prstDash val="solid"/>
-          </a:ln>
-        </p:spPr>
-      </p:sp>
-      <p:sp>
-        <p:nvSpPr>
-          <p:cNvPr id="13" name="Shape 11"/>
-          <p:cNvSpPr/>
-          <p:nvPr/>
-        </p:nvSpPr>
-        <p:spPr>
-          <a:xfrm>
-            <a:off x="7360920" y="3694176"/>
-            <a:ext cx="402336" cy="402336"/>
+          <a:ln w="19050">
+            <a:solidFill>
+              <a:srgbClr val="FFFFFF"/>
+            </a:solidFill>
+            <a:prstDash val="solid"/>
+          </a:ln>
+        </p:spPr>
+      </p:sp>
+      <p:sp>
+        <p:nvSpPr>
+          <p:cNvPr id="16" name="Shape 14"/>
+          <p:cNvSpPr/>
+          <p:nvPr/>
+        </p:nvSpPr>
+        <p:spPr>
+          <a:xfrm>
+            <a:off x="7196328" y="3941064"/>
+            <a:ext cx="457200" cy="457200"/>
           </a:xfrm>
           <a:prstGeom prst="ellipse">
             <a:avLst/>
@@ -1530,24 +1605,24 @@
           <a:solidFill>
             <a:srgbClr val="F2546B"/>
           </a:solidFill>
-          <a:ln w="12700">
-            <a:solidFill>
-              <a:srgbClr val="D7DCEF"/>
-            </a:solidFill>
-            <a:prstDash val="solid"/>
-          </a:ln>
-        </p:spPr>
-      </p:sp>
-      <p:sp>
-        <p:nvSpPr>
-          <p:cNvPr id="14" name="Shape 12"/>
-          <p:cNvSpPr/>
-          <p:nvPr/>
-        </p:nvSpPr>
-        <p:spPr>
-          <a:xfrm>
-            <a:off x="7635240" y="3858768"/>
-            <a:ext cx="402336" cy="402336"/>
+          <a:ln w="19050">
+            <a:solidFill>
+              <a:srgbClr val="FFFFFF"/>
+            </a:solidFill>
+            <a:prstDash val="solid"/>
+          </a:ln>
+        </p:spPr>
+      </p:sp>
+      <p:sp>
+        <p:nvSpPr>
+          <p:cNvPr id="17" name="Shape 15"/>
+          <p:cNvSpPr/>
+          <p:nvPr/>
+        </p:nvSpPr>
+        <p:spPr>
+          <a:xfrm>
+            <a:off x="7507224" y="4050792"/>
+            <a:ext cx="457200" cy="457200"/>
           </a:xfrm>
           <a:prstGeom prst="ellipse">
             <a:avLst/>
@@ -1555,24 +1630,24 @@
           <a:solidFill>
             <a:srgbClr val="F2546B"/>
           </a:solidFill>
-          <a:ln w="12700">
-            <a:solidFill>
-              <a:srgbClr val="D7DCEF"/>
-            </a:solidFill>
-            <a:prstDash val="solid"/>
-          </a:ln>
-        </p:spPr>
-      </p:sp>
-      <p:sp>
-        <p:nvSpPr>
-          <p:cNvPr id="15" name="Shape 13"/>
-          <p:cNvSpPr/>
-          <p:nvPr/>
-        </p:nvSpPr>
-        <p:spPr>
-          <a:xfrm>
-            <a:off x="7909560" y="4023360"/>
-            <a:ext cx="402336" cy="402336"/>
+          <a:ln w="19050">
+            <a:solidFill>
+              <a:srgbClr val="FFFFFF"/>
+            </a:solidFill>
+            <a:prstDash val="solid"/>
+          </a:ln>
+        </p:spPr>
+      </p:sp>
+      <p:sp>
+        <p:nvSpPr>
+          <p:cNvPr id="18" name="Shape 16"/>
+          <p:cNvSpPr/>
+          <p:nvPr/>
+        </p:nvSpPr>
+        <p:spPr>
+          <a:xfrm>
+            <a:off x="7818120" y="4160520"/>
+            <a:ext cx="457200" cy="457200"/>
           </a:xfrm>
           <a:prstGeom prst="ellipse">
             <a:avLst/>
@@ -1580,24 +1655,24 @@
           <a:solidFill>
             <a:srgbClr val="F2546B"/>
           </a:solidFill>
-          <a:ln w="12700">
-            <a:solidFill>
-              <a:srgbClr val="D7DCEF"/>
-            </a:solidFill>
-            <a:prstDash val="solid"/>
-          </a:ln>
-        </p:spPr>
-      </p:sp>
-      <p:sp>
-        <p:nvSpPr>
-          <p:cNvPr id="16" name="Shape 14"/>
-          <p:cNvSpPr/>
-          <p:nvPr/>
-        </p:nvSpPr>
-        <p:spPr>
-          <a:xfrm>
-            <a:off x="8183880" y="4187952"/>
-            <a:ext cx="402336" cy="402336"/>
+          <a:ln w="19050">
+            <a:solidFill>
+              <a:srgbClr val="FFFFFF"/>
+            </a:solidFill>
+            <a:prstDash val="solid"/>
+          </a:ln>
+        </p:spPr>
+      </p:sp>
+      <p:sp>
+        <p:nvSpPr>
+          <p:cNvPr id="19" name="Shape 17"/>
+          <p:cNvSpPr/>
+          <p:nvPr/>
+        </p:nvSpPr>
+        <p:spPr>
+          <a:xfrm>
+            <a:off x="8129016" y="4270248"/>
+            <a:ext cx="457200" cy="457200"/>
           </a:xfrm>
           <a:prstGeom prst="ellipse">
             <a:avLst/>
@@ -1605,24 +1680,49 @@
           <a:solidFill>
             <a:srgbClr val="F2546B"/>
           </a:solidFill>
-          <a:ln w="12700">
-            <a:solidFill>
-              <a:srgbClr val="D7DCEF"/>
-            </a:solidFill>
-            <a:prstDash val="solid"/>
-          </a:ln>
-        </p:spPr>
-      </p:sp>
-      <p:sp>
-        <p:nvSpPr>
-          <p:cNvPr id="17" name="Text 15"/>
+          <a:ln w="19050">
+            <a:solidFill>
+              <a:srgbClr val="FFFFFF"/>
+            </a:solidFill>
+            <a:prstDash val="solid"/>
+          </a:ln>
+        </p:spPr>
+      </p:sp>
+      <p:sp>
+        <p:nvSpPr>
+          <p:cNvPr id="20" name="Shape 18"/>
+          <p:cNvSpPr/>
+          <p:nvPr/>
+        </p:nvSpPr>
+        <p:spPr>
+          <a:xfrm>
+            <a:off x="8439912" y="4379976"/>
+            <a:ext cx="457200" cy="457200"/>
+          </a:xfrm>
+          <a:prstGeom prst="ellipse">
+            <a:avLst/>
+          </a:prstGeom>
+          <a:solidFill>
+            <a:srgbClr val="F2546B"/>
+          </a:solidFill>
+          <a:ln w="19050">
+            <a:solidFill>
+              <a:srgbClr val="FFFFFF"/>
+            </a:solidFill>
+            <a:prstDash val="solid"/>
+          </a:ln>
+        </p:spPr>
+      </p:sp>
+      <p:sp>
+        <p:nvSpPr>
+          <p:cNvPr id="21" name="Text 19"/>
           <p:cNvSpPr txBox="1"/>
           <p:nvPr/>
         </p:nvSpPr>
         <p:spPr>
           <a:xfrm>
             <a:off x="548640" y="914400"/>
-            <a:ext cx="5760720" cy="365760"/>
+            <a:ext cx="5486400" cy="365760"/>
           </a:xfrm>
           <a:prstGeom prst="rect">
             <a:avLst/>
@@ -1654,14 +1754,14 @@
       </p:sp>
       <p:sp>
         <p:nvSpPr>
-          <p:cNvPr id="18" name="Text 16"/>
+          <p:cNvPr id="22" name="Text 20"/>
           <p:cNvSpPr txBox="1"/>
           <p:nvPr/>
         </p:nvSpPr>
         <p:spPr>
           <a:xfrm>
             <a:off x="548640" y="1325880"/>
-            <a:ext cx="5852160" cy="914400"/>
+            <a:ext cx="5486400" cy="914400"/>
           </a:xfrm>
           <a:prstGeom prst="rect">
             <a:avLst/>
@@ -1677,7 +1777,7 @@
               <a:buNone/>
             </a:pPr>
             <a:r>
-              <a:rPr lang="en-US" sz="5200" b="1" dirty="0">
+              <a:rPr lang="en-US" sz="5400" b="1" dirty="0">
                 <a:solidFill>
                   <a:srgbClr val="15193A"/>
                 </a:solidFill>
@@ -1687,20 +1787,20 @@
               </a:rPr>
               <a:t>Grampositivos</a:t>
             </a:r>
-            <a:endParaRPr lang="en-US" sz="5200" dirty="0"/>
-          </a:p>
-        </p:txBody>
-      </p:sp>
-      <p:sp>
-        <p:nvSpPr>
-          <p:cNvPr id="19" name="Text 17"/>
+            <a:endParaRPr lang="en-US" sz="5400" dirty="0"/>
+          </a:p>
+        </p:txBody>
+      </p:sp>
+      <p:sp>
+        <p:nvSpPr>
+          <p:cNvPr id="23" name="Text 21"/>
           <p:cNvSpPr txBox="1"/>
           <p:nvPr/>
         </p:nvSpPr>
         <p:spPr>
           <a:xfrm>
             <a:off x="548640" y="2377440"/>
-            <a:ext cx="5760720" cy="822960"/>
+            <a:ext cx="5394960" cy="822960"/>
           </a:xfrm>
           <a:prstGeom prst="rect">
             <a:avLst/>
@@ -1732,14 +1832,14 @@
       </p:sp>
       <p:sp>
         <p:nvSpPr>
-          <p:cNvPr id="20" name="Text 18"/>
+          <p:cNvPr id="24" name="Text 22"/>
           <p:cNvSpPr txBox="1"/>
           <p:nvPr/>
         </p:nvSpPr>
         <p:spPr>
           <a:xfrm>
-            <a:off x="548640" y="3794760"/>
-            <a:ext cx="5669280" cy="411480"/>
+            <a:off x="548640" y="3749040"/>
+            <a:ext cx="5394960" cy="411480"/>
           </a:xfrm>
           <a:prstGeom prst="rect">
             <a:avLst/>
@@ -1771,14 +1871,14 @@
       </p:sp>
       <p:sp>
         <p:nvSpPr>
-          <p:cNvPr id="21" name="Text 19"/>
+          <p:cNvPr id="25" name="Text 23"/>
           <p:cNvSpPr txBox="1"/>
           <p:nvPr/>
         </p:nvSpPr>
         <p:spPr>
           <a:xfrm>
-            <a:off x="548640" y="4187952"/>
-            <a:ext cx="5943600" cy="320040"/>
+            <a:off x="548640" y="4142232"/>
+            <a:ext cx="5486400" cy="320040"/>
           </a:xfrm>
           <a:prstGeom prst="rect">
             <a:avLst/>
@@ -1810,14 +1910,14 @@
       </p:sp>
       <p:sp>
         <p:nvSpPr>
-          <p:cNvPr id="22" name="Text 20"/>
+          <p:cNvPr id="26" name="Text 24"/>
           <p:cNvSpPr txBox="1"/>
           <p:nvPr/>
         </p:nvSpPr>
         <p:spPr>
           <a:xfrm>
-            <a:off x="548640" y="4480560"/>
-            <a:ext cx="5943600" cy="292608"/>
+            <a:off x="548640" y="4434840"/>
+            <a:ext cx="5486400" cy="292608"/>
           </a:xfrm>
           <a:prstGeom prst="rect">
             <a:avLst/>
@@ -1965,8 +2065,8 @@
         </p:nvSpPr>
         <p:spPr>
           <a:xfrm>
-            <a:off x="365760" y="1554480"/>
-            <a:ext cx="1572768" cy="1920240"/>
+            <a:off x="365760" y="1417320"/>
+            <a:ext cx="1572768" cy="2377440"/>
           </a:xfrm>
           <a:prstGeom prst="roundRect">
             <a:avLst>
@@ -1988,14 +2088,63 @@
       </p:sp>
       <p:sp>
         <p:nvSpPr>
-          <p:cNvPr id="5" name="Text 3"/>
+          <p:cNvPr id="5" name="Shape 3"/>
+          <p:cNvSpPr/>
+          <p:nvPr/>
+        </p:nvSpPr>
+        <p:spPr>
+          <a:xfrm>
+            <a:off x="877824" y="1645920"/>
+            <a:ext cx="548640" cy="548640"/>
+          </a:xfrm>
+          <a:prstGeom prst="ellipse">
+            <a:avLst/>
+          </a:prstGeom>
+          <a:solidFill>
+            <a:srgbClr val="A78BFA"/>
+          </a:solidFill>
+          <a:ln w="12700">
+            <a:solidFill>
+              <a:srgbClr val="A78BFA"/>
+            </a:solidFill>
+            <a:prstDash val="solid"/>
+          </a:ln>
+        </p:spPr>
+      </p:sp>
+      <p:pic>
+        <p:nvPicPr>
+          <p:cNvPr id="6" name="Image 0" descr="preencoded.png">    </p:cNvPr>
+          <p:cNvPicPr>
+            <a:picLocks noChangeAspect="1"/>
+          </p:cNvPicPr>
+          <p:nvPr/>
+        </p:nvPicPr>
+        <p:blipFill>
+          <a:blip r:embed="rId1"/>
+          <a:stretch>
+            <a:fillRect/>
+          </a:stretch>
+        </p:blipFill>
+        <p:spPr>
+          <a:xfrm>
+            <a:off x="1009498" y="1777594"/>
+            <a:ext cx="285293" cy="285293"/>
+          </a:xfrm>
+          <a:prstGeom prst="rect">
+            <a:avLst/>
+          </a:prstGeom>
+        </p:spPr>
+      </p:pic>
+      <p:sp>
+        <p:nvSpPr>
+          <p:cNvPr id="7" name="Text 4"/>
           <p:cNvSpPr txBox="1"/>
           <p:nvPr/>
         </p:nvSpPr>
         <p:spPr>
           <a:xfrm>
-            <a:off x="365760" y="1737360"/>
-            <a:ext cx="1572768" cy="731520"/>
+            <a:off x="475488" y="1481328"/>
+            <a:ext cx="914400" cy="274320"/>
           </a:xfrm>
           <a:prstGeom prst="rect">
             <a:avLst/>
@@ -2004,14 +2153,14 @@
           <a:ln/>
         </p:spPr>
         <p:txBody>
-          <a:bodyPr wrap="square" lIns="0" tIns="0" rIns="0" bIns="0" rtlCol="0" anchor="ctr"/>
+          <a:bodyPr wrap="square" lIns="0" tIns="0" rIns="0" bIns="0" rtlCol="0" anchor="t"/>
           <a:lstStyle/>
           <a:p>
-            <a:pPr algn="ctr" indent="0" marL="0">
+            <a:pPr indent="0" marL="0">
               <a:buNone/>
             </a:pPr>
             <a:r>
-              <a:rPr lang="en-US" sz="3800" b="1" dirty="0">
+              <a:rPr lang="en-US" sz="1300" b="1" dirty="0">
                 <a:solidFill>
                   <a:srgbClr val="6A4CCF"/>
                 </a:solidFill>
@@ -2021,20 +2170,20 @@
               </a:rPr>
               <a:t>01</a:t>
             </a:r>
-            <a:endParaRPr lang="en-US" sz="3800" dirty="0"/>
-          </a:p>
-        </p:txBody>
-      </p:sp>
-      <p:sp>
-        <p:nvSpPr>
-          <p:cNvPr id="6" name="Text 4"/>
+            <a:endParaRPr lang="en-US" sz="1300" dirty="0"/>
+          </a:p>
+        </p:txBody>
+      </p:sp>
+      <p:sp>
+        <p:nvSpPr>
+          <p:cNvPr id="8" name="Text 5"/>
           <p:cNvSpPr txBox="1"/>
           <p:nvPr/>
         </p:nvSpPr>
         <p:spPr>
           <a:xfrm>
-            <a:off x="347472" y="2514600"/>
-            <a:ext cx="1609344" cy="777240"/>
+            <a:off x="347472" y="2377440"/>
+            <a:ext cx="1609344" cy="457200"/>
           </a:xfrm>
           <a:prstGeom prst="rect">
             <a:avLst/>
@@ -2066,14 +2215,53 @@
       </p:sp>
       <p:sp>
         <p:nvSpPr>
-          <p:cNvPr id="7" name="Shape 5"/>
-          <p:cNvSpPr/>
-          <p:nvPr/>
-        </p:nvSpPr>
-        <p:spPr>
-          <a:xfrm>
-            <a:off x="2066544" y="1554480"/>
-            <a:ext cx="1572768" cy="1920240"/>
+          <p:cNvPr id="9" name="Text 6"/>
+          <p:cNvSpPr txBox="1"/>
+          <p:nvPr/>
+        </p:nvSpPr>
+        <p:spPr>
+          <a:xfrm>
+            <a:off x="384048" y="2834640"/>
+            <a:ext cx="1536192" cy="822960"/>
+          </a:xfrm>
+          <a:prstGeom prst="rect">
+            <a:avLst/>
+          </a:prstGeom>
+          <a:noFill/>
+          <a:ln/>
+        </p:spPr>
+        <p:txBody>
+          <a:bodyPr wrap="square" lIns="0" tIns="0" rIns="0" bIns="0" rtlCol="0" anchor="t"/>
+          <a:lstStyle/>
+          <a:p>
+            <a:pPr algn="ctr" indent="0" marL="0">
+              <a:buNone/>
+            </a:pPr>
+            <a:r>
+              <a:rPr lang="en-US" sz="1100" dirty="0">
+                <a:solidFill>
+                  <a:srgbClr val="51597F"/>
+                </a:solidFill>
+                <a:latin typeface="Calibri" pitchFamily="34" charset="0"/>
+                <a:ea typeface="Calibri" pitchFamily="34" charset="-122"/>
+                <a:cs typeface="Calibri" pitchFamily="34" charset="-120"/>
+              </a:rPr>
+              <a:t>Objetivo general</a:t>
+            </a:r>
+            <a:endParaRPr lang="en-US" sz="1100" dirty="0"/>
+          </a:p>
+        </p:txBody>
+      </p:sp>
+      <p:sp>
+        <p:nvSpPr>
+          <p:cNvPr id="10" name="Shape 7"/>
+          <p:cNvSpPr/>
+          <p:nvPr/>
+        </p:nvSpPr>
+        <p:spPr>
+          <a:xfrm>
+            <a:off x="2066544" y="1417320"/>
+            <a:ext cx="1572768" cy="2377440"/>
           </a:xfrm>
           <a:prstGeom prst="roundRect">
             <a:avLst>
@@ -2095,14 +2283,63 @@
       </p:sp>
       <p:sp>
         <p:nvSpPr>
-          <p:cNvPr id="8" name="Text 6"/>
+          <p:cNvPr id="11" name="Shape 8"/>
+          <p:cNvSpPr/>
+          <p:nvPr/>
+        </p:nvSpPr>
+        <p:spPr>
+          <a:xfrm>
+            <a:off x="2578608" y="1645920"/>
+            <a:ext cx="548640" cy="548640"/>
+          </a:xfrm>
+          <a:prstGeom prst="ellipse">
+            <a:avLst/>
+          </a:prstGeom>
+          <a:solidFill>
+            <a:srgbClr val="F2B43C"/>
+          </a:solidFill>
+          <a:ln w="12700">
+            <a:solidFill>
+              <a:srgbClr val="F2B43C"/>
+            </a:solidFill>
+            <a:prstDash val="solid"/>
+          </a:ln>
+        </p:spPr>
+      </p:sp>
+      <p:pic>
+        <p:nvPicPr>
+          <p:cNvPr id="12" name="Image 1" descr="preencoded.png">    </p:cNvPr>
+          <p:cNvPicPr>
+            <a:picLocks noChangeAspect="1"/>
+          </p:cNvPicPr>
+          <p:nvPr/>
+        </p:nvPicPr>
+        <p:blipFill>
+          <a:blip r:embed="rId2"/>
+          <a:stretch>
+            <a:fillRect/>
+          </a:stretch>
+        </p:blipFill>
+        <p:spPr>
+          <a:xfrm>
+            <a:off x="2710282" y="1777594"/>
+            <a:ext cx="285293" cy="285293"/>
+          </a:xfrm>
+          <a:prstGeom prst="rect">
+            <a:avLst/>
+          </a:prstGeom>
+        </p:spPr>
+      </p:pic>
+      <p:sp>
+        <p:nvSpPr>
+          <p:cNvPr id="13" name="Text 9"/>
           <p:cNvSpPr txBox="1"/>
           <p:nvPr/>
         </p:nvSpPr>
         <p:spPr>
           <a:xfrm>
-            <a:off x="2066544" y="1737360"/>
-            <a:ext cx="1572768" cy="731520"/>
+            <a:off x="2176272" y="1481328"/>
+            <a:ext cx="914400" cy="274320"/>
           </a:xfrm>
           <a:prstGeom prst="rect">
             <a:avLst/>
@@ -2111,14 +2348,14 @@
           <a:ln/>
         </p:spPr>
         <p:txBody>
-          <a:bodyPr wrap="square" lIns="0" tIns="0" rIns="0" bIns="0" rtlCol="0" anchor="ctr"/>
+          <a:bodyPr wrap="square" lIns="0" tIns="0" rIns="0" bIns="0" rtlCol="0" anchor="t"/>
           <a:lstStyle/>
           <a:p>
-            <a:pPr algn="ctr" indent="0" marL="0">
+            <a:pPr indent="0" marL="0">
               <a:buNone/>
             </a:pPr>
             <a:r>
-              <a:rPr lang="en-US" sz="3800" b="1" dirty="0">
+              <a:rPr lang="en-US" sz="1300" b="1" dirty="0">
                 <a:solidFill>
                   <a:srgbClr val="A66A00"/>
                 </a:solidFill>
@@ -2128,20 +2365,20 @@
               </a:rPr>
               <a:t>02</a:t>
             </a:r>
-            <a:endParaRPr lang="en-US" sz="3800" dirty="0"/>
-          </a:p>
-        </p:txBody>
-      </p:sp>
-      <p:sp>
-        <p:nvSpPr>
-          <p:cNvPr id="9" name="Text 7"/>
+            <a:endParaRPr lang="en-US" sz="1300" dirty="0"/>
+          </a:p>
+        </p:txBody>
+      </p:sp>
+      <p:sp>
+        <p:nvSpPr>
+          <p:cNvPr id="14" name="Text 10"/>
           <p:cNvSpPr txBox="1"/>
           <p:nvPr/>
         </p:nvSpPr>
         <p:spPr>
           <a:xfrm>
-            <a:off x="2048256" y="2514600"/>
-            <a:ext cx="1609344" cy="777240"/>
+            <a:off x="2048256" y="2377440"/>
+            <a:ext cx="1609344" cy="457200"/>
           </a:xfrm>
           <a:prstGeom prst="rect">
             <a:avLst/>
@@ -2173,14 +2410,53 @@
       </p:sp>
       <p:sp>
         <p:nvSpPr>
-          <p:cNvPr id="10" name="Shape 8"/>
-          <p:cNvSpPr/>
-          <p:nvPr/>
-        </p:nvSpPr>
-        <p:spPr>
-          <a:xfrm>
-            <a:off x="3767328" y="1554480"/>
-            <a:ext cx="1572768" cy="1920240"/>
+          <p:cNvPr id="15" name="Text 11"/>
+          <p:cNvSpPr txBox="1"/>
+          <p:nvPr/>
+        </p:nvSpPr>
+        <p:spPr>
+          <a:xfrm>
+            <a:off x="2084832" y="2834640"/>
+            <a:ext cx="1536192" cy="822960"/>
+          </a:xfrm>
+          <a:prstGeom prst="rect">
+            <a:avLst/>
+          </a:prstGeom>
+          <a:noFill/>
+          <a:ln/>
+        </p:spPr>
+        <p:txBody>
+          <a:bodyPr wrap="square" lIns="0" tIns="0" rIns="0" bIns="0" rtlCol="0" anchor="t"/>
+          <a:lstStyle/>
+          <a:p>
+            <a:pPr algn="ctr" indent="0" marL="0">
+              <a:buNone/>
+            </a:pPr>
+            <a:r>
+              <a:rPr lang="en-US" sz="1100" dirty="0">
+                <a:solidFill>
+                  <a:srgbClr val="51597F"/>
+                </a:solidFill>
+                <a:latin typeface="Calibri" pitchFamily="34" charset="0"/>
+                <a:ea typeface="Calibri" pitchFamily="34" charset="-122"/>
+                <a:cs typeface="Calibri" pitchFamily="34" charset="-120"/>
+              </a:rPr>
+              <a:t>Clasificación y pared</a:t>
+            </a:r>
+            <a:endParaRPr lang="en-US" sz="1100" dirty="0"/>
+          </a:p>
+        </p:txBody>
+      </p:sp>
+      <p:sp>
+        <p:nvSpPr>
+          <p:cNvPr id="16" name="Shape 12"/>
+          <p:cNvSpPr/>
+          <p:nvPr/>
+        </p:nvSpPr>
+        <p:spPr>
+          <a:xfrm>
+            <a:off x="3767328" y="1417320"/>
+            <a:ext cx="1572768" cy="2377440"/>
           </a:xfrm>
           <a:prstGeom prst="roundRect">
             <a:avLst>
@@ -2202,14 +2478,63 @@
       </p:sp>
       <p:sp>
         <p:nvSpPr>
-          <p:cNvPr id="11" name="Text 9"/>
+          <p:cNvPr id="17" name="Shape 13"/>
+          <p:cNvSpPr/>
+          <p:nvPr/>
+        </p:nvSpPr>
+        <p:spPr>
+          <a:xfrm>
+            <a:off x="4279392" y="1645920"/>
+            <a:ext cx="548640" cy="548640"/>
+          </a:xfrm>
+          <a:prstGeom prst="ellipse">
+            <a:avLst/>
+          </a:prstGeom>
+          <a:solidFill>
+            <a:srgbClr val="2EC4B6"/>
+          </a:solidFill>
+          <a:ln w="12700">
+            <a:solidFill>
+              <a:srgbClr val="2EC4B6"/>
+            </a:solidFill>
+            <a:prstDash val="solid"/>
+          </a:ln>
+        </p:spPr>
+      </p:sp>
+      <p:pic>
+        <p:nvPicPr>
+          <p:cNvPr id="18" name="Image 2" descr="preencoded.png">    </p:cNvPr>
+          <p:cNvPicPr>
+            <a:picLocks noChangeAspect="1"/>
+          </p:cNvPicPr>
+          <p:nvPr/>
+        </p:nvPicPr>
+        <p:blipFill>
+          <a:blip r:embed="rId3"/>
+          <a:stretch>
+            <a:fillRect/>
+          </a:stretch>
+        </p:blipFill>
+        <p:spPr>
+          <a:xfrm>
+            <a:off x="4411066" y="1777594"/>
+            <a:ext cx="285293" cy="285293"/>
+          </a:xfrm>
+          <a:prstGeom prst="rect">
+            <a:avLst/>
+          </a:prstGeom>
+        </p:spPr>
+      </p:pic>
+      <p:sp>
+        <p:nvSpPr>
+          <p:cNvPr id="19" name="Text 14"/>
           <p:cNvSpPr txBox="1"/>
           <p:nvPr/>
         </p:nvSpPr>
         <p:spPr>
           <a:xfrm>
-            <a:off x="3767328" y="1737360"/>
-            <a:ext cx="1572768" cy="731520"/>
+            <a:off x="3877056" y="1481328"/>
+            <a:ext cx="914400" cy="274320"/>
           </a:xfrm>
           <a:prstGeom prst="rect">
             <a:avLst/>
@@ -2218,14 +2543,14 @@
           <a:ln/>
         </p:spPr>
         <p:txBody>
-          <a:bodyPr wrap="square" lIns="0" tIns="0" rIns="0" bIns="0" rtlCol="0" anchor="ctr"/>
+          <a:bodyPr wrap="square" lIns="0" tIns="0" rIns="0" bIns="0" rtlCol="0" anchor="t"/>
           <a:lstStyle/>
           <a:p>
-            <a:pPr algn="ctr" indent="0" marL="0">
+            <a:pPr indent="0" marL="0">
               <a:buNone/>
             </a:pPr>
             <a:r>
-              <a:rPr lang="en-US" sz="3800" b="1" dirty="0">
+              <a:rPr lang="en-US" sz="1300" b="1" dirty="0">
                 <a:solidFill>
                   <a:srgbClr val="0C8368"/>
                 </a:solidFill>
@@ -2235,20 +2560,20 @@
               </a:rPr>
               <a:t>03</a:t>
             </a:r>
-            <a:endParaRPr lang="en-US" sz="3800" dirty="0"/>
-          </a:p>
-        </p:txBody>
-      </p:sp>
-      <p:sp>
-        <p:nvSpPr>
-          <p:cNvPr id="12" name="Text 10"/>
+            <a:endParaRPr lang="en-US" sz="1300" dirty="0"/>
+          </a:p>
+        </p:txBody>
+      </p:sp>
+      <p:sp>
+        <p:nvSpPr>
+          <p:cNvPr id="20" name="Text 15"/>
           <p:cNvSpPr txBox="1"/>
           <p:nvPr/>
         </p:nvSpPr>
         <p:spPr>
           <a:xfrm>
-            <a:off x="3749040" y="2514600"/>
-            <a:ext cx="1609344" cy="777240"/>
+            <a:off x="3749040" y="2377440"/>
+            <a:ext cx="1609344" cy="457200"/>
           </a:xfrm>
           <a:prstGeom prst="rect">
             <a:avLst/>
@@ -2280,14 +2605,53 @@
       </p:sp>
       <p:sp>
         <p:nvSpPr>
-          <p:cNvPr id="13" name="Shape 11"/>
-          <p:cNvSpPr/>
-          <p:nvPr/>
-        </p:nvSpPr>
-        <p:spPr>
-          <a:xfrm>
-            <a:off x="5468112" y="1554480"/>
-            <a:ext cx="1572768" cy="1920240"/>
+          <p:cNvPr id="21" name="Text 16"/>
+          <p:cNvSpPr txBox="1"/>
+          <p:nvPr/>
+        </p:nvSpPr>
+        <p:spPr>
+          <a:xfrm>
+            <a:off x="3785616" y="2834640"/>
+            <a:ext cx="1536192" cy="822960"/>
+          </a:xfrm>
+          <a:prstGeom prst="rect">
+            <a:avLst/>
+          </a:prstGeom>
+          <a:noFill/>
+          <a:ln/>
+        </p:spPr>
+        <p:txBody>
+          <a:bodyPr wrap="square" lIns="0" tIns="0" rIns="0" bIns="0" rtlCol="0" anchor="t"/>
+          <a:lstStyle/>
+          <a:p>
+            <a:pPr algn="ctr" indent="0" marL="0">
+              <a:buNone/>
+            </a:pPr>
+            <a:r>
+              <a:rPr lang="en-US" sz="1100" dirty="0">
+                <a:solidFill>
+                  <a:srgbClr val="51597F"/>
+                </a:solidFill>
+                <a:latin typeface="Calibri" pitchFamily="34" charset="0"/>
+                <a:ea typeface="Calibri" pitchFamily="34" charset="-122"/>
+                <a:cs typeface="Calibri" pitchFamily="34" charset="-120"/>
+              </a:rPr>
+              <a:t>Colonizar y regular</a:t>
+            </a:r>
+            <a:endParaRPr lang="en-US" sz="1100" dirty="0"/>
+          </a:p>
+        </p:txBody>
+      </p:sp>
+      <p:sp>
+        <p:nvSpPr>
+          <p:cNvPr id="22" name="Shape 17"/>
+          <p:cNvSpPr/>
+          <p:nvPr/>
+        </p:nvSpPr>
+        <p:spPr>
+          <a:xfrm>
+            <a:off x="5468112" y="1417320"/>
+            <a:ext cx="1572768" cy="2377440"/>
           </a:xfrm>
           <a:prstGeom prst="roundRect">
             <a:avLst>
@@ -2309,14 +2673,63 @@
       </p:sp>
       <p:sp>
         <p:nvSpPr>
-          <p:cNvPr id="14" name="Text 12"/>
+          <p:cNvPr id="23" name="Shape 18"/>
+          <p:cNvSpPr/>
+          <p:nvPr/>
+        </p:nvSpPr>
+        <p:spPr>
+          <a:xfrm>
+            <a:off x="5980176" y="1645920"/>
+            <a:ext cx="548640" cy="548640"/>
+          </a:xfrm>
+          <a:prstGeom prst="ellipse">
+            <a:avLst/>
+          </a:prstGeom>
+          <a:solidFill>
+            <a:srgbClr val="F2546B"/>
+          </a:solidFill>
+          <a:ln w="12700">
+            <a:solidFill>
+              <a:srgbClr val="F2546B"/>
+            </a:solidFill>
+            <a:prstDash val="solid"/>
+          </a:ln>
+        </p:spPr>
+      </p:sp>
+      <p:pic>
+        <p:nvPicPr>
+          <p:cNvPr id="24" name="Image 3" descr="preencoded.png">    </p:cNvPr>
+          <p:cNvPicPr>
+            <a:picLocks noChangeAspect="1"/>
+          </p:cNvPicPr>
+          <p:nvPr/>
+        </p:nvPicPr>
+        <p:blipFill>
+          <a:blip r:embed="rId4"/>
+          <a:stretch>
+            <a:fillRect/>
+          </a:stretch>
+        </p:blipFill>
+        <p:spPr>
+          <a:xfrm>
+            <a:off x="6111850" y="1777594"/>
+            <a:ext cx="285293" cy="285293"/>
+          </a:xfrm>
+          <a:prstGeom prst="rect">
+            <a:avLst/>
+          </a:prstGeom>
+        </p:spPr>
+      </p:pic>
+      <p:sp>
+        <p:nvSpPr>
+          <p:cNvPr id="25" name="Text 19"/>
           <p:cNvSpPr txBox="1"/>
           <p:nvPr/>
         </p:nvSpPr>
         <p:spPr>
           <a:xfrm>
-            <a:off x="5468112" y="1737360"/>
-            <a:ext cx="1572768" cy="731520"/>
+            <a:off x="5577840" y="1481328"/>
+            <a:ext cx="914400" cy="274320"/>
           </a:xfrm>
           <a:prstGeom prst="rect">
             <a:avLst/>
@@ -2325,14 +2738,14 @@
           <a:ln/>
         </p:spPr>
         <p:txBody>
-          <a:bodyPr wrap="square" lIns="0" tIns="0" rIns="0" bIns="0" rtlCol="0" anchor="ctr"/>
+          <a:bodyPr wrap="square" lIns="0" tIns="0" rIns="0" bIns="0" rtlCol="0" anchor="t"/>
           <a:lstStyle/>
           <a:p>
-            <a:pPr algn="ctr" indent="0" marL="0">
+            <a:pPr indent="0" marL="0">
               <a:buNone/>
             </a:pPr>
             <a:r>
-              <a:rPr lang="en-US" sz="3800" b="1" dirty="0">
+              <a:rPr lang="en-US" sz="1300" b="1" dirty="0">
                 <a:solidFill>
                   <a:srgbClr val="C81E43"/>
                 </a:solidFill>
@@ -2342,20 +2755,20 @@
               </a:rPr>
               <a:t>04</a:t>
             </a:r>
-            <a:endParaRPr lang="en-US" sz="3800" dirty="0"/>
-          </a:p>
-        </p:txBody>
-      </p:sp>
-      <p:sp>
-        <p:nvSpPr>
-          <p:cNvPr id="15" name="Text 13"/>
+            <a:endParaRPr lang="en-US" sz="1300" dirty="0"/>
+          </a:p>
+        </p:txBody>
+      </p:sp>
+      <p:sp>
+        <p:nvSpPr>
+          <p:cNvPr id="26" name="Text 20"/>
           <p:cNvSpPr txBox="1"/>
           <p:nvPr/>
         </p:nvSpPr>
         <p:spPr>
           <a:xfrm>
-            <a:off x="5449824" y="2514600"/>
-            <a:ext cx="1609344" cy="777240"/>
+            <a:off x="5449824" y="2377440"/>
+            <a:ext cx="1609344" cy="457200"/>
           </a:xfrm>
           <a:prstGeom prst="rect">
             <a:avLst/>
@@ -2387,14 +2800,53 @@
       </p:sp>
       <p:sp>
         <p:nvSpPr>
-          <p:cNvPr id="16" name="Shape 14"/>
-          <p:cNvSpPr/>
-          <p:nvPr/>
-        </p:nvSpPr>
-        <p:spPr>
-          <a:xfrm>
-            <a:off x="7168896" y="1554480"/>
-            <a:ext cx="1572768" cy="1920240"/>
+          <p:cNvPr id="27" name="Text 21"/>
+          <p:cNvSpPr txBox="1"/>
+          <p:nvPr/>
+        </p:nvSpPr>
+        <p:spPr>
+          <a:xfrm>
+            <a:off x="5486400" y="2834640"/>
+            <a:ext cx="1536192" cy="822960"/>
+          </a:xfrm>
+          <a:prstGeom prst="rect">
+            <a:avLst/>
+          </a:prstGeom>
+          <a:noFill/>
+          <a:ln/>
+        </p:spPr>
+        <p:txBody>
+          <a:bodyPr wrap="square" lIns="0" tIns="0" rIns="0" bIns="0" rtlCol="0" anchor="t"/>
+          <a:lstStyle/>
+          <a:p>
+            <a:pPr algn="ctr" indent="0" marL="0">
+              <a:buNone/>
+            </a:pPr>
+            <a:r>
+              <a:rPr lang="en-US" sz="1100" dirty="0">
+                <a:solidFill>
+                  <a:srgbClr val="51597F"/>
+                </a:solidFill>
+                <a:latin typeface="Calibri" pitchFamily="34" charset="0"/>
+                <a:ea typeface="Calibri" pitchFamily="34" charset="-122"/>
+                <a:cs typeface="Calibri" pitchFamily="34" charset="-120"/>
+              </a:rPr>
+              <a:t>Virulencia y daño</a:t>
+            </a:r>
+            <a:endParaRPr lang="en-US" sz="1100" dirty="0"/>
+          </a:p>
+        </p:txBody>
+      </p:sp>
+      <p:sp>
+        <p:nvSpPr>
+          <p:cNvPr id="28" name="Shape 22"/>
+          <p:cNvSpPr/>
+          <p:nvPr/>
+        </p:nvSpPr>
+        <p:spPr>
+          <a:xfrm>
+            <a:off x="7168896" y="1417320"/>
+            <a:ext cx="1572768" cy="2377440"/>
           </a:xfrm>
           <a:prstGeom prst="roundRect">
             <a:avLst>
@@ -2416,14 +2868,63 @@
       </p:sp>
       <p:sp>
         <p:nvSpPr>
-          <p:cNvPr id="17" name="Text 15"/>
+          <p:cNvPr id="29" name="Shape 23"/>
+          <p:cNvSpPr/>
+          <p:nvPr/>
+        </p:nvSpPr>
+        <p:spPr>
+          <a:xfrm>
+            <a:off x="7680960" y="1645920"/>
+            <a:ext cx="548640" cy="548640"/>
+          </a:xfrm>
+          <a:prstGeom prst="ellipse">
+            <a:avLst/>
+          </a:prstGeom>
+          <a:solidFill>
+            <a:srgbClr val="4CC9F0"/>
+          </a:solidFill>
+          <a:ln w="12700">
+            <a:solidFill>
+              <a:srgbClr val="4CC9F0"/>
+            </a:solidFill>
+            <a:prstDash val="solid"/>
+          </a:ln>
+        </p:spPr>
+      </p:sp>
+      <p:pic>
+        <p:nvPicPr>
+          <p:cNvPr id="30" name="Image 4" descr="preencoded.png">    </p:cNvPr>
+          <p:cNvPicPr>
+            <a:picLocks noChangeAspect="1"/>
+          </p:cNvPicPr>
+          <p:nvPr/>
+        </p:nvPicPr>
+        <p:blipFill>
+          <a:blip r:embed="rId5"/>
+          <a:stretch>
+            <a:fillRect/>
+          </a:stretch>
+        </p:blipFill>
+        <p:spPr>
+          <a:xfrm>
+            <a:off x="7812634" y="1777594"/>
+            <a:ext cx="285293" cy="285293"/>
+          </a:xfrm>
+          <a:prstGeom prst="rect">
+            <a:avLst/>
+          </a:prstGeom>
+        </p:spPr>
+      </p:pic>
+      <p:sp>
+        <p:nvSpPr>
+          <p:cNvPr id="31" name="Text 24"/>
           <p:cNvSpPr txBox="1"/>
           <p:nvPr/>
         </p:nvSpPr>
         <p:spPr>
           <a:xfrm>
-            <a:off x="7168896" y="1737360"/>
-            <a:ext cx="1572768" cy="731520"/>
+            <a:off x="7278624" y="1481328"/>
+            <a:ext cx="914400" cy="274320"/>
           </a:xfrm>
           <a:prstGeom prst="rect">
             <a:avLst/>
@@ -2432,14 +2933,14 @@
           <a:ln/>
         </p:spPr>
         <p:txBody>
-          <a:bodyPr wrap="square" lIns="0" tIns="0" rIns="0" bIns="0" rtlCol="0" anchor="ctr"/>
+          <a:bodyPr wrap="square" lIns="0" tIns="0" rIns="0" bIns="0" rtlCol="0" anchor="t"/>
           <a:lstStyle/>
           <a:p>
-            <a:pPr algn="ctr" indent="0" marL="0">
+            <a:pPr indent="0" marL="0">
               <a:buNone/>
             </a:pPr>
             <a:r>
-              <a:rPr lang="en-US" sz="3800" b="1" dirty="0">
+              <a:rPr lang="en-US" sz="1300" b="1" dirty="0">
                 <a:solidFill>
                   <a:srgbClr val="0A6F98"/>
                 </a:solidFill>
@@ -2449,20 +2950,20 @@
               </a:rPr>
               <a:t>05</a:t>
             </a:r>
-            <a:endParaRPr lang="en-US" sz="3800" dirty="0"/>
-          </a:p>
-        </p:txBody>
-      </p:sp>
-      <p:sp>
-        <p:nvSpPr>
-          <p:cNvPr id="18" name="Text 16"/>
+            <a:endParaRPr lang="en-US" sz="1300" dirty="0"/>
+          </a:p>
+        </p:txBody>
+      </p:sp>
+      <p:sp>
+        <p:nvSpPr>
+          <p:cNvPr id="32" name="Text 25"/>
           <p:cNvSpPr txBox="1"/>
           <p:nvPr/>
         </p:nvSpPr>
         <p:spPr>
           <a:xfrm>
-            <a:off x="7150608" y="2514600"/>
-            <a:ext cx="1609344" cy="777240"/>
+            <a:off x="7150608" y="2377440"/>
+            <a:ext cx="1609344" cy="457200"/>
           </a:xfrm>
           <a:prstGeom prst="rect">
             <a:avLst/>
@@ -2494,6 +2995,45 @@
       </p:sp>
       <p:sp>
         <p:nvSpPr>
+          <p:cNvPr id="33" name="Text 26"/>
+          <p:cNvSpPr txBox="1"/>
+          <p:nvPr/>
+        </p:nvSpPr>
+        <p:spPr>
+          <a:xfrm>
+            <a:off x="7187184" y="2834640"/>
+            <a:ext cx="1536192" cy="822960"/>
+          </a:xfrm>
+          <a:prstGeom prst="rect">
+            <a:avLst/>
+          </a:prstGeom>
+          <a:noFill/>
+          <a:ln/>
+        </p:spPr>
+        <p:txBody>
+          <a:bodyPr wrap="square" lIns="0" tIns="0" rIns="0" bIns="0" rtlCol="0" anchor="t"/>
+          <a:lstStyle/>
+          <a:p>
+            <a:pPr algn="ctr" indent="0" marL="0">
+              <a:buNone/>
+            </a:pPr>
+            <a:r>
+              <a:rPr lang="en-US" sz="1100" dirty="0">
+                <a:solidFill>
+                  <a:srgbClr val="51597F"/>
+                </a:solidFill>
+                <a:latin typeface="Calibri" pitchFamily="34" charset="0"/>
+                <a:ea typeface="Calibri" pitchFamily="34" charset="-122"/>
+                <a:cs typeface="Calibri" pitchFamily="34" charset="-120"/>
+              </a:rPr>
+              <a:t>Ideas clave</a:t>
+            </a:r>
+            <a:endParaRPr lang="en-US" sz="1100" dirty="0"/>
+          </a:p>
+        </p:txBody>
+      </p:sp>
+      <p:sp>
+        <p:nvSpPr>
           <p:cNvPr id="25" name="Slide Number Placeholder 0"/>
           <p:cNvSpPr>
             <a:spLocks noGrp="1"/>
@@ -2554,7 +3094,7 @@
     <p:bg>
       <p:bgPr>
         <a:solidFill>
-          <a:srgbClr val="FFFFFF"/>
+          <a:srgbClr val="05070F"/>
         </a:solidFill>
       </p:bgPr>
     </p:bg>
@@ -2572,16 +3112,40 @@
           <a:chExt cx="0" cy="0"/>
         </a:xfrm>
       </p:grpSpPr>
-      <p:sp>
-        <p:nvSpPr>
-          <p:cNvPr id="2" name="Shape 0"/>
-          <p:cNvSpPr/>
-          <p:nvPr/>
-        </p:nvSpPr>
-        <p:spPr>
-          <a:xfrm>
-            <a:off x="548640" y="1828800"/>
-            <a:ext cx="109728" cy="1280160"/>
+      <p:pic>
+        <p:nvPicPr>
+          <p:cNvPr id="2" name="Image 0" descr="preencoded.png">    </p:cNvPr>
+          <p:cNvPicPr>
+            <a:picLocks noChangeAspect="1"/>
+          </p:cNvPicPr>
+          <p:nvPr/>
+        </p:nvPicPr>
+        <p:blipFill>
+          <a:blip r:embed="rId1"/>
+          <a:stretch>
+            <a:fillRect/>
+          </a:stretch>
+        </p:blipFill>
+        <p:spPr>
+          <a:xfrm>
+            <a:off x="0" y="0"/>
+            <a:ext cx="9144000" cy="5143500"/>
+          </a:xfrm>
+          <a:prstGeom prst="rect">
+            <a:avLst/>
+          </a:prstGeom>
+        </p:spPr>
+      </p:pic>
+      <p:sp>
+        <p:nvSpPr>
+          <p:cNvPr id="3" name="Shape 0"/>
+          <p:cNvSpPr/>
+          <p:nvPr/>
+        </p:nvSpPr>
+        <p:spPr>
+          <a:xfrm>
+            <a:off x="594360" y="1234440"/>
+            <a:ext cx="128016" cy="2331720"/>
           </a:xfrm>
           <a:prstGeom prst="rect">
             <a:avLst/>
@@ -2599,14 +3163,14 @@
       </p:sp>
       <p:sp>
         <p:nvSpPr>
-          <p:cNvPr id="3" name="Text 1"/>
+          <p:cNvPr id="4" name="Text 1"/>
           <p:cNvSpPr txBox="1"/>
           <p:nvPr/>
         </p:nvSpPr>
         <p:spPr>
           <a:xfrm>
-            <a:off x="868680" y="1280160"/>
-            <a:ext cx="3657600" cy="914400"/>
+            <a:off x="914400" y="1097280"/>
+            <a:ext cx="3657600" cy="1005840"/>
           </a:xfrm>
           <a:prstGeom prst="rect">
             <a:avLst/>
@@ -2622,9 +3186,9 @@
               <a:buNone/>
             </a:pPr>
             <a:r>
-              <a:rPr lang="en-US" sz="5600" b="1" dirty="0">
+              <a:rPr lang="en-US" sz="6400" b="1" dirty="0">
                 <a:solidFill>
-                  <a:srgbClr val="6A4CCF"/>
+                  <a:srgbClr val="A78BFA"/>
                 </a:solidFill>
                 <a:latin typeface="Calibri" pitchFamily="34" charset="0"/>
                 <a:ea typeface="Calibri" pitchFamily="34" charset="-122"/>
@@ -2632,20 +3196,20 @@
               </a:rPr>
               <a:t>01</a:t>
             </a:r>
-            <a:endParaRPr lang="en-US" sz="5600" dirty="0"/>
-          </a:p>
-        </p:txBody>
-      </p:sp>
-      <p:sp>
-        <p:nvSpPr>
-          <p:cNvPr id="4" name="Text 2"/>
+            <a:endParaRPr lang="en-US" sz="6400" dirty="0"/>
+          </a:p>
+        </p:txBody>
+      </p:sp>
+      <p:sp>
+        <p:nvSpPr>
+          <p:cNvPr id="5" name="Text 2"/>
           <p:cNvSpPr txBox="1"/>
           <p:nvPr/>
         </p:nvSpPr>
         <p:spPr>
           <a:xfrm>
-            <a:off x="868680" y="2194560"/>
-            <a:ext cx="7498080" cy="914400"/>
+            <a:off x="914400" y="2148840"/>
+            <a:ext cx="7589520" cy="1051560"/>
           </a:xfrm>
           <a:prstGeom prst="rect">
             <a:avLst/>
@@ -2661,9 +3225,9 @@
               <a:buNone/>
             </a:pPr>
             <a:r>
-              <a:rPr lang="en-US" sz="4800" b="1" dirty="0">
+              <a:rPr lang="en-US" sz="6000" b="1" dirty="0">
                 <a:solidFill>
-                  <a:srgbClr val="15193A"/>
+                  <a:srgbClr val="F4F6FF"/>
                 </a:solidFill>
                 <a:latin typeface="Calibri" pitchFamily="34" charset="0"/>
                 <a:ea typeface="Calibri" pitchFamily="34" charset="-122"/>
@@ -2671,20 +3235,20 @@
               </a:rPr>
               <a:t>Objetivo</a:t>
             </a:r>
-            <a:endParaRPr lang="en-US" sz="4800" dirty="0"/>
-          </a:p>
-        </p:txBody>
-      </p:sp>
-      <p:sp>
-        <p:nvSpPr>
-          <p:cNvPr id="5" name="Text 3"/>
+            <a:endParaRPr lang="en-US" sz="6000" dirty="0"/>
+          </a:p>
+        </p:txBody>
+      </p:sp>
+      <p:sp>
+        <p:nvSpPr>
+          <p:cNvPr id="6" name="Text 3"/>
           <p:cNvSpPr txBox="1"/>
           <p:nvPr/>
         </p:nvSpPr>
         <p:spPr>
           <a:xfrm>
-            <a:off x="886968" y="3200400"/>
-            <a:ext cx="6858000" cy="640080"/>
+            <a:off x="941832" y="3291840"/>
+            <a:ext cx="6949440" cy="640080"/>
           </a:xfrm>
           <a:prstGeom prst="rect">
             <a:avLst/>
@@ -2700,9 +3264,9 @@
               <a:buNone/>
             </a:pPr>
             <a:r>
-              <a:rPr lang="en-US" sz="2000" dirty="0">
+              <a:rPr lang="en-US" sz="2200" dirty="0">
                 <a:solidFill>
-                  <a:srgbClr val="51597F"/>
+                  <a:srgbClr val="B9C2E2"/>
                 </a:solidFill>
                 <a:latin typeface="Calibri" pitchFamily="34" charset="0"/>
                 <a:ea typeface="Calibri" pitchFamily="34" charset="-122"/>
@@ -2710,7 +3274,7 @@
               </a:rPr>
               <a:t>Qué queremos comprender</a:t>
             </a:r>
-            <a:endParaRPr lang="en-US" sz="2000" dirty="0"/>
+            <a:endParaRPr lang="en-US" sz="2200" dirty="0"/>
           </a:p>
         </p:txBody>
       </p:sp>
@@ -2912,11 +3476,11 @@
         <p:spPr>
           <a:xfrm>
             <a:off x="457200" y="1280160"/>
-            <a:ext cx="8229600" cy="1371600"/>
+            <a:ext cx="5486400" cy="3017520"/>
           </a:xfrm>
           <a:prstGeom prst="roundRect">
             <a:avLst>
-              <a:gd name="adj" fmla="val 6667"/>
+              <a:gd name="adj" fmla="val 3030"/>
             </a:avLst>
           </a:prstGeom>
           <a:solidFill>
@@ -2940,8 +3504,8 @@
         </p:nvSpPr>
         <p:spPr>
           <a:xfrm>
-            <a:off x="822960" y="1371600"/>
-            <a:ext cx="7498080" cy="1188720"/>
+            <a:off x="685800" y="1463040"/>
+            <a:ext cx="5029200" cy="914400"/>
           </a:xfrm>
           <a:prstGeom prst="rect">
             <a:avLst/>
@@ -2950,14 +3514,14 @@
           <a:ln/>
         </p:spPr>
         <p:txBody>
-          <a:bodyPr wrap="square" lIns="0" tIns="0" rIns="0" bIns="0" rtlCol="0" anchor="ctr"/>
+          <a:bodyPr wrap="square" lIns="0" tIns="0" rIns="0" bIns="0" rtlCol="0" anchor="t"/>
           <a:lstStyle/>
           <a:p>
             <a:pPr indent="0" marL="0">
               <a:buNone/>
             </a:pPr>
             <a:r>
-              <a:rPr lang="en-US" sz="2100" dirty="0">
+              <a:rPr lang="en-US" sz="1900" dirty="0">
                 <a:solidFill>
                   <a:srgbClr val="15193A"/>
                 </a:solidFill>
@@ -2965,9 +3529,9 @@
                 <a:ea typeface="Calibri" pitchFamily="34" charset="-122"/>
                 <a:cs typeface="Calibri" pitchFamily="34" charset="-120"/>
               </a:rPr>
-              <a:t>Comprender los mecanismos fisiopatológicos de las infecciones por bacterias grampositivas, enfatizando la virulencia, la evasión inmunitaria y el daño tisular.</a:t>
+              <a:t>Comprender los mecanismos fisiopatológicos de las infecciones por bacterias grampositivas, enfatizando:</a:t>
             </a:r>
-            <a:endParaRPr lang="en-US" sz="2100" dirty="0"/>
+            <a:endParaRPr lang="en-US" sz="1900" dirty="0"/>
           </a:p>
         </p:txBody>
       </p:sp>
@@ -2979,35 +3543,8 @@
         </p:nvSpPr>
         <p:spPr>
           <a:xfrm>
-            <a:off x="457200" y="2880360"/>
-            <a:ext cx="2624328" cy="1417320"/>
-          </a:xfrm>
-          <a:prstGeom prst="roundRect">
-            <a:avLst>
-              <a:gd name="adj" fmla="val 6452"/>
-            </a:avLst>
-          </a:prstGeom>
-          <a:solidFill>
-            <a:srgbClr val="F4F6FD"/>
-          </a:solidFill>
-          <a:ln w="19050">
-            <a:solidFill>
-              <a:srgbClr val="F2B43C"/>
-            </a:solidFill>
-            <a:prstDash val="solid"/>
-          </a:ln>
-        </p:spPr>
-      </p:sp>
-      <p:sp>
-        <p:nvSpPr>
-          <p:cNvPr id="9" name="Shape 7"/>
-          <p:cNvSpPr/>
-          <p:nvPr/>
-        </p:nvSpPr>
-        <p:spPr>
-          <a:xfrm>
-            <a:off x="1408176" y="3017520"/>
-            <a:ext cx="731520" cy="731520"/>
+            <a:off x="685800" y="2514600"/>
+            <a:ext cx="502920" cy="502920"/>
           </a:xfrm>
           <a:prstGeom prst="ellipse">
             <a:avLst/>
@@ -3025,7 +3562,7 @@
       </p:sp>
       <p:pic>
         <p:nvPicPr>
-          <p:cNvPr id="10" name="Image 0" descr="preencoded.png">    </p:cNvPr>
+          <p:cNvPr id="9" name="Image 0" descr="preencoded.png">    </p:cNvPr>
           <p:cNvPicPr>
             <a:picLocks noChangeAspect="1"/>
           </p:cNvPicPr>
@@ -3039,8 +3576,8 @@
         </p:blipFill>
         <p:spPr>
           <a:xfrm>
-            <a:off x="1583741" y="3193085"/>
-            <a:ext cx="380390" cy="380390"/>
+            <a:off x="806501" y="2635301"/>
+            <a:ext cx="261518" cy="261518"/>
           </a:xfrm>
           <a:prstGeom prst="rect">
             <a:avLst/>
@@ -3049,14 +3586,14 @@
       </p:pic>
       <p:sp>
         <p:nvSpPr>
-          <p:cNvPr id="11" name="Text 8"/>
+          <p:cNvPr id="10" name="Text 7"/>
           <p:cNvSpPr txBox="1"/>
           <p:nvPr/>
         </p:nvSpPr>
         <p:spPr>
           <a:xfrm>
-            <a:off x="457200" y="3840480"/>
-            <a:ext cx="2624328" cy="365760"/>
+            <a:off x="1371600" y="2496312"/>
+            <a:ext cx="4480560" cy="320040"/>
           </a:xfrm>
           <a:prstGeom prst="rect">
             <a:avLst/>
@@ -3068,11 +3605,11 @@
           <a:bodyPr wrap="square" lIns="0" tIns="0" rIns="0" bIns="0" rtlCol="0" anchor="t"/>
           <a:lstStyle/>
           <a:p>
-            <a:pPr algn="ctr" indent="0" marL="0">
+            <a:pPr indent="0" marL="0">
               <a:buNone/>
             </a:pPr>
             <a:r>
-              <a:rPr lang="en-US" sz="1700" b="1" dirty="0">
+              <a:rPr lang="en-US" sz="1600" b="1" dirty="0">
                 <a:solidFill>
                   <a:srgbClr val="A66A00"/>
                 </a:solidFill>
@@ -3082,20 +3619,20 @@
               </a:rPr>
               <a:t>Virulencia</a:t>
             </a:r>
-            <a:endParaRPr lang="en-US" sz="1700" dirty="0"/>
-          </a:p>
-        </p:txBody>
-      </p:sp>
-      <p:sp>
-        <p:nvSpPr>
-          <p:cNvPr id="12" name="Text 9"/>
+            <a:endParaRPr lang="en-US" sz="1600" dirty="0"/>
+          </a:p>
+        </p:txBody>
+      </p:sp>
+      <p:sp>
+        <p:nvSpPr>
+          <p:cNvPr id="11" name="Text 8"/>
           <p:cNvSpPr txBox="1"/>
           <p:nvPr/>
         </p:nvSpPr>
         <p:spPr>
           <a:xfrm>
-            <a:off x="457200" y="4187952"/>
-            <a:ext cx="2624328" cy="274320"/>
+            <a:off x="1371600" y="2807208"/>
+            <a:ext cx="4480560" cy="274320"/>
           </a:xfrm>
           <a:prstGeom prst="rect">
             <a:avLst/>
@@ -3107,7 +3644,7 @@
           <a:bodyPr wrap="square" lIns="0" tIns="0" rIns="0" bIns="0" rtlCol="0" anchor="t"/>
           <a:lstStyle/>
           <a:p>
-            <a:pPr algn="ctr" indent="0" marL="0">
+            <a:pPr indent="0" marL="0">
               <a:buNone/>
             </a:pPr>
             <a:r>
@@ -3127,41 +3664,14 @@
       </p:sp>
       <p:sp>
         <p:nvSpPr>
-          <p:cNvPr id="13" name="Shape 10"/>
-          <p:cNvSpPr/>
-          <p:nvPr/>
-        </p:nvSpPr>
-        <p:spPr>
-          <a:xfrm>
-            <a:off x="3264408" y="2880360"/>
-            <a:ext cx="2624328" cy="1417320"/>
-          </a:xfrm>
-          <a:prstGeom prst="roundRect">
-            <a:avLst>
-              <a:gd name="adj" fmla="val 6452"/>
-            </a:avLst>
-          </a:prstGeom>
-          <a:solidFill>
-            <a:srgbClr val="F4F6FD"/>
-          </a:solidFill>
-          <a:ln w="19050">
-            <a:solidFill>
-              <a:srgbClr val="2EC4B6"/>
-            </a:solidFill>
-            <a:prstDash val="solid"/>
-          </a:ln>
-        </p:spPr>
-      </p:sp>
-      <p:sp>
-        <p:nvSpPr>
-          <p:cNvPr id="14" name="Shape 11"/>
-          <p:cNvSpPr/>
-          <p:nvPr/>
-        </p:nvSpPr>
-        <p:spPr>
-          <a:xfrm>
-            <a:off x="4215384" y="3017520"/>
-            <a:ext cx="731520" cy="731520"/>
+          <p:cNvPr id="12" name="Shape 9"/>
+          <p:cNvSpPr/>
+          <p:nvPr/>
+        </p:nvSpPr>
+        <p:spPr>
+          <a:xfrm>
+            <a:off x="685800" y="3136392"/>
+            <a:ext cx="502920" cy="502920"/>
           </a:xfrm>
           <a:prstGeom prst="ellipse">
             <a:avLst/>
@@ -3179,7 +3689,7 @@
       </p:sp>
       <p:pic>
         <p:nvPicPr>
-          <p:cNvPr id="15" name="Image 1" descr="preencoded.png">    </p:cNvPr>
+          <p:cNvPr id="13" name="Image 1" descr="preencoded.png">    </p:cNvPr>
           <p:cNvPicPr>
             <a:picLocks noChangeAspect="1"/>
           </p:cNvPicPr>
@@ -3193,8 +3703,8 @@
         </p:blipFill>
         <p:spPr>
           <a:xfrm>
-            <a:off x="4390949" y="3193085"/>
-            <a:ext cx="380390" cy="380390"/>
+            <a:off x="806501" y="3257093"/>
+            <a:ext cx="261518" cy="261518"/>
           </a:xfrm>
           <a:prstGeom prst="rect">
             <a:avLst/>
@@ -3203,14 +3713,14 @@
       </p:pic>
       <p:sp>
         <p:nvSpPr>
-          <p:cNvPr id="16" name="Text 12"/>
+          <p:cNvPr id="14" name="Text 10"/>
           <p:cNvSpPr txBox="1"/>
           <p:nvPr/>
         </p:nvSpPr>
         <p:spPr>
           <a:xfrm>
-            <a:off x="3264408" y="3840480"/>
-            <a:ext cx="2624328" cy="365760"/>
+            <a:off x="1371600" y="3118104"/>
+            <a:ext cx="4480560" cy="320040"/>
           </a:xfrm>
           <a:prstGeom prst="rect">
             <a:avLst/>
@@ -3222,11 +3732,11 @@
           <a:bodyPr wrap="square" lIns="0" tIns="0" rIns="0" bIns="0" rtlCol="0" anchor="t"/>
           <a:lstStyle/>
           <a:p>
-            <a:pPr algn="ctr" indent="0" marL="0">
+            <a:pPr indent="0" marL="0">
               <a:buNone/>
             </a:pPr>
             <a:r>
-              <a:rPr lang="en-US" sz="1700" b="1" dirty="0">
+              <a:rPr lang="en-US" sz="1600" b="1" dirty="0">
                 <a:solidFill>
                   <a:srgbClr val="0C8368"/>
                 </a:solidFill>
@@ -3236,20 +3746,20 @@
               </a:rPr>
               <a:t>Evasión inmunitaria</a:t>
             </a:r>
-            <a:endParaRPr lang="en-US" sz="1700" dirty="0"/>
-          </a:p>
-        </p:txBody>
-      </p:sp>
-      <p:sp>
-        <p:nvSpPr>
-          <p:cNvPr id="17" name="Text 13"/>
+            <a:endParaRPr lang="en-US" sz="1600" dirty="0"/>
+          </a:p>
+        </p:txBody>
+      </p:sp>
+      <p:sp>
+        <p:nvSpPr>
+          <p:cNvPr id="15" name="Text 11"/>
           <p:cNvSpPr txBox="1"/>
           <p:nvPr/>
         </p:nvSpPr>
         <p:spPr>
           <a:xfrm>
-            <a:off x="3264408" y="4187952"/>
-            <a:ext cx="2624328" cy="274320"/>
+            <a:off x="1371600" y="3429000"/>
+            <a:ext cx="4480560" cy="274320"/>
           </a:xfrm>
           <a:prstGeom prst="rect">
             <a:avLst/>
@@ -3261,7 +3771,7 @@
           <a:bodyPr wrap="square" lIns="0" tIns="0" rIns="0" bIns="0" rtlCol="0" anchor="t"/>
           <a:lstStyle/>
           <a:p>
-            <a:pPr algn="ctr" indent="0" marL="0">
+            <a:pPr indent="0" marL="0">
               <a:buNone/>
             </a:pPr>
             <a:r>
@@ -3273,7 +3783,7 @@
                 <a:ea typeface="Calibri" pitchFamily="34" charset="-122"/>
                 <a:cs typeface="Calibri" pitchFamily="34" charset="-120"/>
               </a:rPr>
-              <a:t>Cómo escapa</a:t>
+              <a:t>Cómo escapa al sistema inmune</a:t>
             </a:r>
             <a:endParaRPr lang="en-US" sz="1300" dirty="0"/>
           </a:p>
@@ -3281,41 +3791,14 @@
       </p:sp>
       <p:sp>
         <p:nvSpPr>
-          <p:cNvPr id="18" name="Shape 14"/>
-          <p:cNvSpPr/>
-          <p:nvPr/>
-        </p:nvSpPr>
-        <p:spPr>
-          <a:xfrm>
-            <a:off x="6071616" y="2880360"/>
-            <a:ext cx="2624328" cy="1417320"/>
-          </a:xfrm>
-          <a:prstGeom prst="roundRect">
-            <a:avLst>
-              <a:gd name="adj" fmla="val 6452"/>
-            </a:avLst>
-          </a:prstGeom>
-          <a:solidFill>
-            <a:srgbClr val="F4F6FD"/>
-          </a:solidFill>
-          <a:ln w="19050">
-            <a:solidFill>
-              <a:srgbClr val="F2546B"/>
-            </a:solidFill>
-            <a:prstDash val="solid"/>
-          </a:ln>
-        </p:spPr>
-      </p:sp>
-      <p:sp>
-        <p:nvSpPr>
-          <p:cNvPr id="19" name="Shape 15"/>
-          <p:cNvSpPr/>
-          <p:nvPr/>
-        </p:nvSpPr>
-        <p:spPr>
-          <a:xfrm>
-            <a:off x="7022592" y="3017520"/>
-            <a:ext cx="731520" cy="731520"/>
+          <p:cNvPr id="16" name="Shape 12"/>
+          <p:cNvSpPr/>
+          <p:nvPr/>
+        </p:nvSpPr>
+        <p:spPr>
+          <a:xfrm>
+            <a:off x="685800" y="3758184"/>
+            <a:ext cx="502920" cy="502920"/>
           </a:xfrm>
           <a:prstGeom prst="ellipse">
             <a:avLst/>
@@ -3333,7 +3816,7 @@
       </p:sp>
       <p:pic>
         <p:nvPicPr>
-          <p:cNvPr id="20" name="Image 2" descr="preencoded.png">    </p:cNvPr>
+          <p:cNvPr id="17" name="Image 2" descr="preencoded.png">    </p:cNvPr>
           <p:cNvPicPr>
             <a:picLocks noChangeAspect="1"/>
           </p:cNvPicPr>
@@ -3347,8 +3830,8 @@
         </p:blipFill>
         <p:spPr>
           <a:xfrm>
-            <a:off x="7198157" y="3193085"/>
-            <a:ext cx="380390" cy="380390"/>
+            <a:off x="806501" y="3878885"/>
+            <a:ext cx="261518" cy="261518"/>
           </a:xfrm>
           <a:prstGeom prst="rect">
             <a:avLst/>
@@ -3357,14 +3840,14 @@
       </p:pic>
       <p:sp>
         <p:nvSpPr>
-          <p:cNvPr id="21" name="Text 16"/>
+          <p:cNvPr id="18" name="Text 13"/>
           <p:cNvSpPr txBox="1"/>
           <p:nvPr/>
         </p:nvSpPr>
         <p:spPr>
           <a:xfrm>
-            <a:off x="6071616" y="3840480"/>
-            <a:ext cx="2624328" cy="365760"/>
+            <a:off x="1371600" y="3739896"/>
+            <a:ext cx="4480560" cy="320040"/>
           </a:xfrm>
           <a:prstGeom prst="rect">
             <a:avLst/>
@@ -3376,11 +3859,11 @@
           <a:bodyPr wrap="square" lIns="0" tIns="0" rIns="0" bIns="0" rtlCol="0" anchor="t"/>
           <a:lstStyle/>
           <a:p>
-            <a:pPr algn="ctr" indent="0" marL="0">
+            <a:pPr indent="0" marL="0">
               <a:buNone/>
             </a:pPr>
             <a:r>
-              <a:rPr lang="en-US" sz="1700" b="1" dirty="0">
+              <a:rPr lang="en-US" sz="1600" b="1" dirty="0">
                 <a:solidFill>
                   <a:srgbClr val="C81E43"/>
                 </a:solidFill>
@@ -3390,20 +3873,20 @@
               </a:rPr>
               <a:t>Daño tisular</a:t>
             </a:r>
-            <a:endParaRPr lang="en-US" sz="1700" dirty="0"/>
-          </a:p>
-        </p:txBody>
-      </p:sp>
-      <p:sp>
-        <p:nvSpPr>
-          <p:cNvPr id="22" name="Text 17"/>
+            <a:endParaRPr lang="en-US" sz="1600" dirty="0"/>
+          </a:p>
+        </p:txBody>
+      </p:sp>
+      <p:sp>
+        <p:nvSpPr>
+          <p:cNvPr id="19" name="Text 14"/>
           <p:cNvSpPr txBox="1"/>
           <p:nvPr/>
         </p:nvSpPr>
         <p:spPr>
           <a:xfrm>
-            <a:off x="6071616" y="4187952"/>
-            <a:ext cx="2624328" cy="274320"/>
+            <a:off x="1371600" y="4050792"/>
+            <a:ext cx="4480560" cy="274320"/>
           </a:xfrm>
           <a:prstGeom prst="rect">
             <a:avLst/>
@@ -3415,7 +3898,7 @@
           <a:bodyPr wrap="square" lIns="0" tIns="0" rIns="0" bIns="0" rtlCol="0" anchor="t"/>
           <a:lstStyle/>
           <a:p>
-            <a:pPr algn="ctr" indent="0" marL="0">
+            <a:pPr indent="0" marL="0">
               <a:buNone/>
             </a:pPr>
             <a:r>
@@ -3427,11 +3910,338 @@
                 <a:ea typeface="Calibri" pitchFamily="34" charset="-122"/>
                 <a:cs typeface="Calibri" pitchFamily="34" charset="-120"/>
               </a:rPr>
-              <a:t>Cómo lesiona</a:t>
+              <a:t>Cómo lesiona los tejidos</a:t>
             </a:r>
             <a:endParaRPr lang="en-US" sz="1300" dirty="0"/>
           </a:p>
         </p:txBody>
+      </p:sp>
+      <p:sp>
+        <p:nvSpPr>
+          <p:cNvPr id="20" name="Shape 15"/>
+          <p:cNvSpPr/>
+          <p:nvPr/>
+        </p:nvSpPr>
+        <p:spPr>
+          <a:xfrm>
+            <a:off x="6172200" y="1280160"/>
+            <a:ext cx="2514600" cy="3017520"/>
+          </a:xfrm>
+          <a:prstGeom prst="roundRect">
+            <a:avLst>
+              <a:gd name="adj" fmla="val 3636"/>
+            </a:avLst>
+          </a:prstGeom>
+          <a:solidFill>
+            <a:srgbClr val="0A0E1F"/>
+          </a:solidFill>
+          <a:ln w="12700">
+            <a:solidFill>
+              <a:srgbClr val="0A0E1F"/>
+            </a:solidFill>
+            <a:prstDash val="solid"/>
+          </a:ln>
+        </p:spPr>
+      </p:sp>
+      <p:sp>
+        <p:nvSpPr>
+          <p:cNvPr id="21" name="Shape 16"/>
+          <p:cNvSpPr/>
+          <p:nvPr/>
+        </p:nvSpPr>
+        <p:spPr>
+          <a:xfrm>
+            <a:off x="6858000" y="1737360"/>
+            <a:ext cx="512064" cy="512064"/>
+          </a:xfrm>
+          <a:prstGeom prst="ellipse">
+            <a:avLst/>
+          </a:prstGeom>
+          <a:solidFill>
+            <a:srgbClr val="F2B43C"/>
+          </a:solidFill>
+          <a:ln w="19050">
+            <a:solidFill>
+              <a:srgbClr val="FFFFFF"/>
+            </a:solidFill>
+            <a:prstDash val="solid"/>
+          </a:ln>
+        </p:spPr>
+      </p:sp>
+      <p:sp>
+        <p:nvSpPr>
+          <p:cNvPr id="22" name="Shape 17"/>
+          <p:cNvSpPr/>
+          <p:nvPr/>
+        </p:nvSpPr>
+        <p:spPr>
+          <a:xfrm>
+            <a:off x="7351776" y="1819656"/>
+            <a:ext cx="512064" cy="512064"/>
+          </a:xfrm>
+          <a:prstGeom prst="ellipse">
+            <a:avLst/>
+          </a:prstGeom>
+          <a:solidFill>
+            <a:srgbClr val="F2B43C"/>
+          </a:solidFill>
+          <a:ln w="19050">
+            <a:solidFill>
+              <a:srgbClr val="FFFFFF"/>
+            </a:solidFill>
+            <a:prstDash val="solid"/>
+          </a:ln>
+        </p:spPr>
+      </p:sp>
+      <p:sp>
+        <p:nvSpPr>
+          <p:cNvPr id="23" name="Shape 18"/>
+          <p:cNvSpPr/>
+          <p:nvPr/>
+        </p:nvSpPr>
+        <p:spPr>
+          <a:xfrm>
+            <a:off x="7104888" y="2203704"/>
+            <a:ext cx="512064" cy="512064"/>
+          </a:xfrm>
+          <a:prstGeom prst="ellipse">
+            <a:avLst/>
+          </a:prstGeom>
+          <a:solidFill>
+            <a:srgbClr val="F2B43C"/>
+          </a:solidFill>
+          <a:ln w="19050">
+            <a:solidFill>
+              <a:srgbClr val="FFFFFF"/>
+            </a:solidFill>
+            <a:prstDash val="solid"/>
+          </a:ln>
+        </p:spPr>
+      </p:sp>
+      <p:sp>
+        <p:nvSpPr>
+          <p:cNvPr id="24" name="Shape 19"/>
+          <p:cNvSpPr/>
+          <p:nvPr/>
+        </p:nvSpPr>
+        <p:spPr>
+          <a:xfrm>
+            <a:off x="7543800" y="2231136"/>
+            <a:ext cx="512064" cy="512064"/>
+          </a:xfrm>
+          <a:prstGeom prst="ellipse">
+            <a:avLst/>
+          </a:prstGeom>
+          <a:solidFill>
+            <a:srgbClr val="F2B43C"/>
+          </a:solidFill>
+          <a:ln w="19050">
+            <a:solidFill>
+              <a:srgbClr val="FFFFFF"/>
+            </a:solidFill>
+            <a:prstDash val="solid"/>
+          </a:ln>
+        </p:spPr>
+      </p:sp>
+      <p:sp>
+        <p:nvSpPr>
+          <p:cNvPr id="25" name="Shape 20"/>
+          <p:cNvSpPr/>
+          <p:nvPr/>
+        </p:nvSpPr>
+        <p:spPr>
+          <a:xfrm>
+            <a:off x="6830568" y="2258568"/>
+            <a:ext cx="512064" cy="512064"/>
+          </a:xfrm>
+          <a:prstGeom prst="ellipse">
+            <a:avLst/>
+          </a:prstGeom>
+          <a:solidFill>
+            <a:srgbClr val="F2B43C"/>
+          </a:solidFill>
+          <a:ln w="19050">
+            <a:solidFill>
+              <a:srgbClr val="FFFFFF"/>
+            </a:solidFill>
+            <a:prstDash val="solid"/>
+          </a:ln>
+        </p:spPr>
+      </p:sp>
+      <p:sp>
+        <p:nvSpPr>
+          <p:cNvPr id="26" name="Shape 21"/>
+          <p:cNvSpPr/>
+          <p:nvPr/>
+        </p:nvSpPr>
+        <p:spPr>
+          <a:xfrm>
+            <a:off x="7296912" y="2670048"/>
+            <a:ext cx="512064" cy="512064"/>
+          </a:xfrm>
+          <a:prstGeom prst="ellipse">
+            <a:avLst/>
+          </a:prstGeom>
+          <a:solidFill>
+            <a:srgbClr val="F2B43C"/>
+          </a:solidFill>
+          <a:ln w="19050">
+            <a:solidFill>
+              <a:srgbClr val="FFFFFF"/>
+            </a:solidFill>
+            <a:prstDash val="solid"/>
+          </a:ln>
+        </p:spPr>
+      </p:sp>
+      <p:sp>
+        <p:nvSpPr>
+          <p:cNvPr id="27" name="Shape 22"/>
+          <p:cNvSpPr/>
+          <p:nvPr/>
+        </p:nvSpPr>
+        <p:spPr>
+          <a:xfrm>
+            <a:off x="6355080" y="3703320"/>
+            <a:ext cx="384048" cy="384048"/>
+          </a:xfrm>
+          <a:prstGeom prst="ellipse">
+            <a:avLst/>
+          </a:prstGeom>
+          <a:solidFill>
+            <a:srgbClr val="F2546B"/>
+          </a:solidFill>
+          <a:ln w="19050">
+            <a:solidFill>
+              <a:srgbClr val="FFFFFF"/>
+            </a:solidFill>
+            <a:prstDash val="solid"/>
+          </a:ln>
+        </p:spPr>
+      </p:sp>
+      <p:sp>
+        <p:nvSpPr>
+          <p:cNvPr id="28" name="Shape 23"/>
+          <p:cNvSpPr/>
+          <p:nvPr/>
+        </p:nvSpPr>
+        <p:spPr>
+          <a:xfrm>
+            <a:off x="6629400" y="3730752"/>
+            <a:ext cx="384048" cy="384048"/>
+          </a:xfrm>
+          <a:prstGeom prst="ellipse">
+            <a:avLst/>
+          </a:prstGeom>
+          <a:solidFill>
+            <a:srgbClr val="F2546B"/>
+          </a:solidFill>
+          <a:ln w="19050">
+            <a:solidFill>
+              <a:srgbClr val="FFFFFF"/>
+            </a:solidFill>
+            <a:prstDash val="solid"/>
+          </a:ln>
+        </p:spPr>
+      </p:sp>
+      <p:sp>
+        <p:nvSpPr>
+          <p:cNvPr id="29" name="Shape 24"/>
+          <p:cNvSpPr/>
+          <p:nvPr/>
+        </p:nvSpPr>
+        <p:spPr>
+          <a:xfrm>
+            <a:off x="6903720" y="3758184"/>
+            <a:ext cx="384048" cy="384048"/>
+          </a:xfrm>
+          <a:prstGeom prst="ellipse">
+            <a:avLst/>
+          </a:prstGeom>
+          <a:solidFill>
+            <a:srgbClr val="F2546B"/>
+          </a:solidFill>
+          <a:ln w="19050">
+            <a:solidFill>
+              <a:srgbClr val="FFFFFF"/>
+            </a:solidFill>
+            <a:prstDash val="solid"/>
+          </a:ln>
+        </p:spPr>
+      </p:sp>
+      <p:sp>
+        <p:nvSpPr>
+          <p:cNvPr id="30" name="Shape 25"/>
+          <p:cNvSpPr/>
+          <p:nvPr/>
+        </p:nvSpPr>
+        <p:spPr>
+          <a:xfrm>
+            <a:off x="7178040" y="3785616"/>
+            <a:ext cx="384048" cy="384048"/>
+          </a:xfrm>
+          <a:prstGeom prst="ellipse">
+            <a:avLst/>
+          </a:prstGeom>
+          <a:solidFill>
+            <a:srgbClr val="F2546B"/>
+          </a:solidFill>
+          <a:ln w="19050">
+            <a:solidFill>
+              <a:srgbClr val="FFFFFF"/>
+            </a:solidFill>
+            <a:prstDash val="solid"/>
+          </a:ln>
+        </p:spPr>
+      </p:sp>
+      <p:sp>
+        <p:nvSpPr>
+          <p:cNvPr id="31" name="Shape 26"/>
+          <p:cNvSpPr/>
+          <p:nvPr/>
+        </p:nvSpPr>
+        <p:spPr>
+          <a:xfrm>
+            <a:off x="7452360" y="3813048"/>
+            <a:ext cx="384048" cy="384048"/>
+          </a:xfrm>
+          <a:prstGeom prst="ellipse">
+            <a:avLst/>
+          </a:prstGeom>
+          <a:solidFill>
+            <a:srgbClr val="F2546B"/>
+          </a:solidFill>
+          <a:ln w="19050">
+            <a:solidFill>
+              <a:srgbClr val="FFFFFF"/>
+            </a:solidFill>
+            <a:prstDash val="solid"/>
+          </a:ln>
+        </p:spPr>
+      </p:sp>
+      <p:sp>
+        <p:nvSpPr>
+          <p:cNvPr id="32" name="Shape 27"/>
+          <p:cNvSpPr/>
+          <p:nvPr/>
+        </p:nvSpPr>
+        <p:spPr>
+          <a:xfrm>
+            <a:off x="7726680" y="3840480"/>
+            <a:ext cx="384048" cy="384048"/>
+          </a:xfrm>
+          <a:prstGeom prst="ellipse">
+            <a:avLst/>
+          </a:prstGeom>
+          <a:solidFill>
+            <a:srgbClr val="F2546B"/>
+          </a:solidFill>
+          <a:ln w="19050">
+            <a:solidFill>
+              <a:srgbClr val="FFFFFF"/>
+            </a:solidFill>
+            <a:prstDash val="solid"/>
+          </a:ln>
+        </p:spPr>
       </p:sp>
       <p:sp>
         <p:nvSpPr>

--- a/Cocos_grampositivos_BLANCO.pptx
+++ b/Cocos_grampositivos_BLANCO.pptx
@@ -9,9 +9,13 @@
     <p:sldId id="257" r:id="rId3"/>
     <p:sldId id="258" r:id="rId4"/>
     <p:sldId id="259" r:id="rId5"/>
+    <p:sldId id="260" r:id="rId6"/>
+    <p:sldId id="261" r:id="rId7"/>
+    <p:sldId id="262" r:id="rId8"/>
+    <p:sldId id="263" r:id="rId9"/>
   </p:sldIdLst>
   <p:notesMasterIdLst>
-    <p:notesMasterId r:id="rId6"/>
+    <p:notesMasterId r:id="rId10"/>
   </p:notesMasterIdLst>
   <p:sldSz cx="9144000" cy="5143500"/>
   <p:notesSz cx="5143500" cy="9144000"/>
@@ -505,7 +509,7 @@
           <a:p>
             <a:r>
               <a:rPr lang="en-US" dirty="0"/>
-              <a:t>Portada. Infecciones por grampositivos: de la colonizacion al choque septico. Ilustracion original: racimo dorado (Staphylococcus) y cadena roja (Streptococcus).</a:t>
+              <a:t>Portada en fondo negro. De la colonizacion al choque septico. Nestor Fabian Sanabria Duarte, Residente III de Medicina Interna, Universidad Libre.</a:t>
             </a:r>
             <a:endParaRPr lang="en-US" dirty="0"/>
           </a:p>
@@ -769,7 +773,7 @@
           <a:p>
             <a:r>
               <a:rPr lang="en-US" dirty="0"/>
-              <a:t>Objetivo general: comprender los mecanismos fisiopatologicos de las infecciones por grampositivos, con enfasis en virulencia, evasion inmunitaria y dano tisular.</a:t>
+              <a:t>Objetivo general: comprender los mecanismos fisiopatologicos con enfasis en virulencia, evasion inmunitaria y dano tisular.</a:t>
             </a:r>
             <a:endParaRPr lang="en-US" dirty="0"/>
           </a:p>
@@ -793,6 +797,358 @@
             <a:fld id="{F7021451-1387-4CA6-816F-3879F97B5CBC}" type="slidenum">
               <a:rPr lang="en-US"/>
               <a:t>4</a:t>
+            </a:fld>
+            <a:endParaRPr lang="en-US"/>
+          </a:p>
+        </p:txBody>
+      </p:sp>
+    </p:spTree>
+    <p:extLst>
+      <p:ext uri="{BB962C8B-B14F-4D97-AF65-F5344CB8AC3E}">
+        <p14:creationId xmlns:p14="http://schemas.microsoft.com/office/powerpoint/2010/main" val="1024086991"/>
+      </p:ext>
+    </p:extLst>
+  </p:cSld>
+  <p:clrMapOvr>
+    <a:masterClrMapping/>
+  </p:clrMapOvr>
+</p:notes>
+</file>
+
+<file path=ppt/notesSlides/notesSlide5.xml><?xml version="1.0" encoding="utf-8"?>
+<p:notes xmlns:a="http://schemas.openxmlformats.org/drawingml/2006/main" xmlns:r="http://schemas.openxmlformats.org/officeDocument/2006/relationships" xmlns:p="http://schemas.openxmlformats.org/presentationml/2006/main">
+  <p:cSld>
+    <p:spTree>
+      <p:nvGrpSpPr>
+        <p:cNvPr id="1" name=""/>
+        <p:cNvGrpSpPr/>
+        <p:nvPr/>
+      </p:nvGrpSpPr>
+      <p:grpSpPr>
+        <a:xfrm>
+          <a:off x="0" y="0"/>
+          <a:ext cx="0" cy="0"/>
+          <a:chOff x="0" y="0"/>
+          <a:chExt cx="0" cy="0"/>
+        </a:xfrm>
+      </p:grpSpPr>
+      <p:sp>
+        <p:nvSpPr>
+          <p:cNvPr id="2" name="Slide Image Placeholder 1"/>
+          <p:cNvSpPr>
+            <a:spLocks noGrp="1" noRot="1" noChangeAspect="1"/>
+          </p:cNvSpPr>
+          <p:nvPr>
+            <p:ph type="sldImg"/>
+          </p:nvPr>
+        </p:nvSpPr>
+        <p:spPr/>
+      </p:sp>
+      <p:sp>
+        <p:nvSpPr>
+          <p:cNvPr id="3" name="Notes Placeholder 2"/>
+          <p:cNvSpPr>
+            <a:spLocks noGrp="1"/>
+          </p:cNvSpPr>
+          <p:nvPr>
+            <p:ph type="body" idx="1"/>
+          </p:nvPr>
+        </p:nvSpPr>
+        <p:spPr/>
+        <p:txBody>
+          <a:bodyPr/>
+          <a:lstStyle/>
+          <a:p>
+            <a:r>
+              <a:rPr lang="en-US" dirty="0"/>
+              <a:t/>
+            </a:r>
+            <a:endParaRPr lang="en-US" dirty="0"/>
+          </a:p>
+        </p:txBody>
+      </p:sp>
+      <p:sp>
+        <p:nvSpPr>
+          <p:cNvPr id="4" name="Slide Number Placeholder 3"/>
+          <p:cNvSpPr>
+            <a:spLocks noGrp="1"/>
+          </p:cNvSpPr>
+          <p:nvPr>
+            <p:ph type="sldNum" sz="quarter" idx="10"/>
+          </p:nvPr>
+        </p:nvSpPr>
+        <p:spPr/>
+        <p:txBody>
+          <a:bodyPr/>
+          <a:lstStyle/>
+          <a:p>
+            <a:fld id="{F7021451-1387-4CA6-816F-3879F97B5CBC}" type="slidenum">
+              <a:rPr lang="en-US"/>
+              <a:t>5</a:t>
+            </a:fld>
+            <a:endParaRPr lang="en-US"/>
+          </a:p>
+        </p:txBody>
+      </p:sp>
+    </p:spTree>
+    <p:extLst>
+      <p:ext uri="{BB962C8B-B14F-4D97-AF65-F5344CB8AC3E}">
+        <p14:creationId xmlns:p14="http://schemas.microsoft.com/office/powerpoint/2010/main" val="1024086991"/>
+      </p:ext>
+    </p:extLst>
+  </p:cSld>
+  <p:clrMapOvr>
+    <a:masterClrMapping/>
+  </p:clrMapOvr>
+</p:notes>
+</file>
+
+<file path=ppt/notesSlides/notesSlide6.xml><?xml version="1.0" encoding="utf-8"?>
+<p:notes xmlns:a="http://schemas.openxmlformats.org/drawingml/2006/main" xmlns:r="http://schemas.openxmlformats.org/officeDocument/2006/relationships" xmlns:p="http://schemas.openxmlformats.org/presentationml/2006/main">
+  <p:cSld>
+    <p:spTree>
+      <p:nvGrpSpPr>
+        <p:cNvPr id="1" name=""/>
+        <p:cNvGrpSpPr/>
+        <p:nvPr/>
+      </p:nvGrpSpPr>
+      <p:grpSpPr>
+        <a:xfrm>
+          <a:off x="0" y="0"/>
+          <a:ext cx="0" cy="0"/>
+          <a:chOff x="0" y="0"/>
+          <a:chExt cx="0" cy="0"/>
+        </a:xfrm>
+      </p:grpSpPr>
+      <p:sp>
+        <p:nvSpPr>
+          <p:cNvPr id="2" name="Slide Image Placeholder 1"/>
+          <p:cNvSpPr>
+            <a:spLocks noGrp="1" noRot="1" noChangeAspect="1"/>
+          </p:cNvSpPr>
+          <p:nvPr>
+            <p:ph type="sldImg"/>
+          </p:nvPr>
+        </p:nvSpPr>
+        <p:spPr/>
+      </p:sp>
+      <p:sp>
+        <p:nvSpPr>
+          <p:cNvPr id="3" name="Notes Placeholder 2"/>
+          <p:cNvSpPr>
+            <a:spLocks noGrp="1"/>
+          </p:cNvSpPr>
+          <p:nvPr>
+            <p:ph type="body" idx="1"/>
+          </p:nvPr>
+        </p:nvSpPr>
+        <p:spPr/>
+        <p:txBody>
+          <a:bodyPr/>
+          <a:lstStyle/>
+          <a:p>
+            <a:r>
+              <a:rPr lang="en-US" dirty="0"/>
+              <a:t>Clasificacion de grampositivos por forma y disposicion: cocos en racimos (Staphylococcus) y en cadenas (Streptococcus, Enterococcus); bacilos esporulados (Clostridium, Bacillus) y no esporulados (Listeria, Corynebacterium). Microfotografias de tincion de Gram.</a:t>
+            </a:r>
+            <a:endParaRPr lang="en-US" dirty="0"/>
+          </a:p>
+        </p:txBody>
+      </p:sp>
+      <p:sp>
+        <p:nvSpPr>
+          <p:cNvPr id="4" name="Slide Number Placeholder 3"/>
+          <p:cNvSpPr>
+            <a:spLocks noGrp="1"/>
+          </p:cNvSpPr>
+          <p:nvPr>
+            <p:ph type="sldNum" sz="quarter" idx="10"/>
+          </p:nvPr>
+        </p:nvSpPr>
+        <p:spPr/>
+        <p:txBody>
+          <a:bodyPr/>
+          <a:lstStyle/>
+          <a:p>
+            <a:fld id="{F7021451-1387-4CA6-816F-3879F97B5CBC}" type="slidenum">
+              <a:rPr lang="en-US"/>
+              <a:t>6</a:t>
+            </a:fld>
+            <a:endParaRPr lang="en-US"/>
+          </a:p>
+        </p:txBody>
+      </p:sp>
+    </p:spTree>
+    <p:extLst>
+      <p:ext uri="{BB962C8B-B14F-4D97-AF65-F5344CB8AC3E}">
+        <p14:creationId xmlns:p14="http://schemas.microsoft.com/office/powerpoint/2010/main" val="1024086991"/>
+      </p:ext>
+    </p:extLst>
+  </p:cSld>
+  <p:clrMapOvr>
+    <a:masterClrMapping/>
+  </p:clrMapOvr>
+</p:notes>
+</file>
+
+<file path=ppt/notesSlides/notesSlide7.xml><?xml version="1.0" encoding="utf-8"?>
+<p:notes xmlns:a="http://schemas.openxmlformats.org/drawingml/2006/main" xmlns:r="http://schemas.openxmlformats.org/officeDocument/2006/relationships" xmlns:p="http://schemas.openxmlformats.org/presentationml/2006/main">
+  <p:cSld>
+    <p:spTree>
+      <p:nvGrpSpPr>
+        <p:cNvPr id="1" name=""/>
+        <p:cNvGrpSpPr/>
+        <p:nvPr/>
+      </p:nvGrpSpPr>
+      <p:grpSpPr>
+        <a:xfrm>
+          <a:off x="0" y="0"/>
+          <a:ext cx="0" cy="0"/>
+          <a:chOff x="0" y="0"/>
+          <a:chExt cx="0" cy="0"/>
+        </a:xfrm>
+      </p:grpSpPr>
+      <p:sp>
+        <p:nvSpPr>
+          <p:cNvPr id="2" name="Slide Image Placeholder 1"/>
+          <p:cNvSpPr>
+            <a:spLocks noGrp="1" noRot="1" noChangeAspect="1"/>
+          </p:cNvSpPr>
+          <p:nvPr>
+            <p:ph type="sldImg"/>
+          </p:nvPr>
+        </p:nvSpPr>
+        <p:spPr/>
+      </p:sp>
+      <p:sp>
+        <p:nvSpPr>
+          <p:cNvPr id="3" name="Notes Placeholder 2"/>
+          <p:cNvSpPr>
+            <a:spLocks noGrp="1"/>
+          </p:cNvSpPr>
+          <p:nvPr>
+            <p:ph type="body" idx="1"/>
+          </p:nvPr>
+        </p:nvSpPr>
+        <p:spPr/>
+        <p:txBody>
+          <a:bodyPr/>
+          <a:lstStyle/>
+          <a:p>
+            <a:r>
+              <a:rPr lang="en-US" dirty="0"/>
+              <a:t>La pared grampositiva es gruesa y multicapa: peptidoglucano que retiene el cristal violeta, atravesado por acidos teicoicos (de pared) y lipoteicoicos (de membrana), con lipoproteinas de superficie. Sin membrana externa no hay LPS. Esquema original en espanol.</a:t>
+            </a:r>
+            <a:endParaRPr lang="en-US" dirty="0"/>
+          </a:p>
+        </p:txBody>
+      </p:sp>
+      <p:sp>
+        <p:nvSpPr>
+          <p:cNvPr id="4" name="Slide Number Placeholder 3"/>
+          <p:cNvSpPr>
+            <a:spLocks noGrp="1"/>
+          </p:cNvSpPr>
+          <p:nvPr>
+            <p:ph type="sldNum" sz="quarter" idx="10"/>
+          </p:nvPr>
+        </p:nvSpPr>
+        <p:spPr/>
+        <p:txBody>
+          <a:bodyPr/>
+          <a:lstStyle/>
+          <a:p>
+            <a:fld id="{F7021451-1387-4CA6-816F-3879F97B5CBC}" type="slidenum">
+              <a:rPr lang="en-US"/>
+              <a:t>7</a:t>
+            </a:fld>
+            <a:endParaRPr lang="en-US"/>
+          </a:p>
+        </p:txBody>
+      </p:sp>
+    </p:spTree>
+    <p:extLst>
+      <p:ext uri="{BB962C8B-B14F-4D97-AF65-F5344CB8AC3E}">
+        <p14:creationId xmlns:p14="http://schemas.microsoft.com/office/powerpoint/2010/main" val="1024086991"/>
+      </p:ext>
+    </p:extLst>
+  </p:cSld>
+  <p:clrMapOvr>
+    <a:masterClrMapping/>
+  </p:clrMapOvr>
+</p:notes>
+</file>
+
+<file path=ppt/notesSlides/notesSlide8.xml><?xml version="1.0" encoding="utf-8"?>
+<p:notes xmlns:a="http://schemas.openxmlformats.org/drawingml/2006/main" xmlns:r="http://schemas.openxmlformats.org/officeDocument/2006/relationships" xmlns:p="http://schemas.openxmlformats.org/presentationml/2006/main">
+  <p:cSld>
+    <p:spTree>
+      <p:nvGrpSpPr>
+        <p:cNvPr id="1" name=""/>
+        <p:cNvGrpSpPr/>
+        <p:nvPr/>
+      </p:nvGrpSpPr>
+      <p:grpSpPr>
+        <a:xfrm>
+          <a:off x="0" y="0"/>
+          <a:ext cx="0" cy="0"/>
+          <a:chOff x="0" y="0"/>
+          <a:chExt cx="0" cy="0"/>
+        </a:xfrm>
+      </p:grpSpPr>
+      <p:sp>
+        <p:nvSpPr>
+          <p:cNvPr id="2" name="Slide Image Placeholder 1"/>
+          <p:cNvSpPr>
+            <a:spLocks noGrp="1" noRot="1" noChangeAspect="1"/>
+          </p:cNvSpPr>
+          <p:nvPr>
+            <p:ph type="sldImg"/>
+          </p:nvPr>
+        </p:nvSpPr>
+        <p:spPr/>
+      </p:sp>
+      <p:sp>
+        <p:nvSpPr>
+          <p:cNvPr id="3" name="Notes Placeholder 2"/>
+          <p:cNvSpPr>
+            <a:spLocks noGrp="1"/>
+          </p:cNvSpPr>
+          <p:nvPr>
+            <p:ph type="body" idx="1"/>
+          </p:nvPr>
+        </p:nvSpPr>
+        <p:spPr/>
+        <p:txBody>
+          <a:bodyPr/>
+          <a:lstStyle/>
+          <a:p>
+            <a:r>
+              <a:rPr lang="en-US" dirty="0"/>
+              <a:t>La membrana citoplasmatica es una bicapa bajo la pared. Barrera selectiva; sin membrana externa no hay LPS, por lo que los PAMP son acidos teicoicos y lipoproteinas. Alberga las PBP que sintetizan la pared (diana de betalactamicos) y es blanco de la daptomicina, que despolariza la membrana.</a:t>
+            </a:r>
+            <a:endParaRPr lang="en-US" dirty="0"/>
+          </a:p>
+        </p:txBody>
+      </p:sp>
+      <p:sp>
+        <p:nvSpPr>
+          <p:cNvPr id="4" name="Slide Number Placeholder 3"/>
+          <p:cNvSpPr>
+            <a:spLocks noGrp="1"/>
+          </p:cNvSpPr>
+          <p:nvPr>
+            <p:ph type="sldNum" sz="quarter" idx="10"/>
+          </p:nvPr>
+        </p:nvSpPr>
+        <p:spPr/>
+        <p:txBody>
+          <a:bodyPr/>
+          <a:lstStyle/>
+          <a:p>
+            <a:fld id="{F7021451-1387-4CA6-816F-3879F97B5CBC}" type="slidenum">
+              <a:rPr lang="en-US"/>
+              <a:t>8</a:t>
             </a:fld>
             <a:endParaRPr lang="en-US"/>
           </a:p>
@@ -845,8 +1201,8 @@
         </p:nvSpPr>
         <p:spPr>
           <a:xfrm>
-            <a:off x="8321040" y="4754880"/>
-            <a:ext cx="365760" cy="274320"/>
+            <a:off x="8247888" y="4535424"/>
+            <a:ext cx="420624" cy="420624"/>
           </a:xfrm>
           <a:prstGeom prst="rect">
             <a:avLst/>
@@ -858,12 +1214,12 @@
           </a:extLst>
         </p:spPr>
         <p:txBody>
-          <a:bodyPr/>
+          <a:bodyPr anchor="ctr"/>
           <a:lstStyle>
             <a:lvl1pPr>
-              <a:defRPr sz="1100">
+              <a:defRPr sz="1800">
                 <a:solidFill>
-                  <a:srgbClr val="9AA0C0"/>
+                  <a:srgbClr val="FFFFFF"/>
                 </a:solidFill>
                 <a:latin typeface="Calibri"/>
                 <a:ea typeface="Calibri"/>
@@ -872,9 +1228,9 @@
             </a:lvl1pPr>
           </a:lstStyle>
           <a:p>
-            <a:pPr algn="r"/>
+            <a:pPr algn="ctr"/>
             <a:fld id="{F7021451-1387-4CA6-816F-3879F97B5CBC}" type="slidenum">
-              <a:rPr b="0" lang="en-US"/>
+              <a:rPr b="1" lang="en-US"/>
               <a:t>1000</a:t>
             </a:fld>
             <a:endParaRPr lang="en-US"/>
@@ -918,8 +1274,8 @@
         </p:nvSpPr>
         <p:spPr>
           <a:xfrm>
-            <a:off x="8321040" y="4754880"/>
-            <a:ext cx="365760" cy="274320"/>
+            <a:off x="8247888" y="4535424"/>
+            <a:ext cx="420624" cy="420624"/>
           </a:xfrm>
           <a:prstGeom prst="rect">
             <a:avLst/>
@@ -931,12 +1287,12 @@
           </a:extLst>
         </p:spPr>
         <p:txBody>
-          <a:bodyPr/>
+          <a:bodyPr anchor="ctr"/>
           <a:lstStyle>
             <a:lvl1pPr>
-              <a:defRPr sz="1100">
+              <a:defRPr sz="1800">
                 <a:solidFill>
-                  <a:srgbClr val="9AA0C0"/>
+                  <a:srgbClr val="FFFFFF"/>
                 </a:solidFill>
                 <a:latin typeface="Calibri"/>
                 <a:ea typeface="Calibri"/>
@@ -945,9 +1301,9 @@
             </a:lvl1pPr>
           </a:lstStyle>
           <a:p>
-            <a:pPr algn="r"/>
+            <a:pPr algn="ctr"/>
             <a:fld id="{F7021451-1387-4CA6-816F-3879F97B5CBC}" type="slidenum">
-              <a:rPr b="0" lang="en-US"/>
+              <a:rPr b="1" lang="en-US"/>
               <a:t>null</a:t>
             </a:fld>
             <a:endParaRPr lang="en-US"/>
@@ -1220,7 +1576,7 @@
     <p:bg>
       <p:bgPr>
         <a:solidFill>
-          <a:srgbClr val="FFFFFF"/>
+          <a:srgbClr val="05070F"/>
         </a:solidFill>
       </p:bgPr>
     </p:bg>
@@ -1238,491 +1594,40 @@
           <a:chExt cx="0" cy="0"/>
         </a:xfrm>
       </p:grpSpPr>
-      <p:sp>
-        <p:nvSpPr>
-          <p:cNvPr id="2" name="Shape 0"/>
-          <p:cNvSpPr/>
-          <p:nvPr/>
-        </p:nvSpPr>
-        <p:spPr>
-          <a:xfrm>
-            <a:off x="5943600" y="0"/>
-            <a:ext cx="3200400" cy="5143500"/>
-          </a:xfrm>
-          <a:prstGeom prst="roundRect">
-            <a:avLst/>
-          </a:prstGeom>
-          <a:solidFill>
-            <a:srgbClr val="F4F6FD"/>
-          </a:solidFill>
-          <a:ln w="12700">
-            <a:solidFill>
-              <a:srgbClr val="F4F6FD"/>
-            </a:solidFill>
-            <a:prstDash val="solid"/>
-          </a:ln>
-        </p:spPr>
-      </p:sp>
-      <p:sp>
-        <p:nvSpPr>
-          <p:cNvPr id="3" name="Shape 1"/>
-          <p:cNvSpPr/>
-          <p:nvPr/>
-        </p:nvSpPr>
-        <p:spPr>
-          <a:xfrm>
-            <a:off x="6675120" y="640080"/>
-            <a:ext cx="566928" cy="566928"/>
-          </a:xfrm>
-          <a:prstGeom prst="ellipse">
-            <a:avLst/>
-          </a:prstGeom>
-          <a:solidFill>
-            <a:srgbClr val="F2B43C"/>
-          </a:solidFill>
-          <a:ln w="19050">
-            <a:solidFill>
-              <a:srgbClr val="FFFFFF"/>
-            </a:solidFill>
-            <a:prstDash val="solid"/>
-          </a:ln>
-        </p:spPr>
-      </p:sp>
-      <p:sp>
-        <p:nvSpPr>
-          <p:cNvPr id="4" name="Shape 2"/>
-          <p:cNvSpPr/>
-          <p:nvPr/>
-        </p:nvSpPr>
-        <p:spPr>
-          <a:xfrm>
-            <a:off x="7185355" y="725119"/>
-            <a:ext cx="538582" cy="538582"/>
-          </a:xfrm>
-          <a:prstGeom prst="ellipse">
-            <a:avLst/>
-          </a:prstGeom>
-          <a:solidFill>
-            <a:srgbClr val="F2B43C"/>
-          </a:solidFill>
-          <a:ln w="19050">
-            <a:solidFill>
-              <a:srgbClr val="FFFFFF"/>
-            </a:solidFill>
-            <a:prstDash val="solid"/>
-          </a:ln>
-        </p:spPr>
-      </p:sp>
-      <p:sp>
-        <p:nvSpPr>
-          <p:cNvPr id="5" name="Shape 3"/>
-          <p:cNvSpPr/>
-          <p:nvPr/>
-        </p:nvSpPr>
-        <p:spPr>
-          <a:xfrm>
-            <a:off x="6930238" y="1093622"/>
-            <a:ext cx="566928" cy="566928"/>
-          </a:xfrm>
-          <a:prstGeom prst="ellipse">
-            <a:avLst/>
-          </a:prstGeom>
-          <a:solidFill>
-            <a:srgbClr val="F2B43C"/>
-          </a:solidFill>
-          <a:ln w="19050">
-            <a:solidFill>
-              <a:srgbClr val="FFFFFF"/>
-            </a:solidFill>
-            <a:prstDash val="solid"/>
-          </a:ln>
-        </p:spPr>
-      </p:sp>
-      <p:sp>
-        <p:nvSpPr>
-          <p:cNvPr id="6" name="Shape 4"/>
-          <p:cNvSpPr/>
-          <p:nvPr/>
-        </p:nvSpPr>
-        <p:spPr>
-          <a:xfrm>
-            <a:off x="7383780" y="1121969"/>
-            <a:ext cx="510235" cy="510235"/>
-          </a:xfrm>
-          <a:prstGeom prst="ellipse">
-            <a:avLst/>
-          </a:prstGeom>
-          <a:solidFill>
-            <a:srgbClr val="F2B43C"/>
-          </a:solidFill>
-          <a:ln w="19050">
-            <a:solidFill>
-              <a:srgbClr val="FFFFFF"/>
-            </a:solidFill>
-            <a:prstDash val="solid"/>
-          </a:ln>
-        </p:spPr>
-      </p:sp>
-      <p:sp>
-        <p:nvSpPr>
-          <p:cNvPr id="7" name="Shape 5"/>
-          <p:cNvSpPr/>
-          <p:nvPr/>
-        </p:nvSpPr>
-        <p:spPr>
-          <a:xfrm>
-            <a:off x="6618427" y="1121969"/>
-            <a:ext cx="481889" cy="481889"/>
-          </a:xfrm>
-          <a:prstGeom prst="ellipse">
-            <a:avLst/>
-          </a:prstGeom>
-          <a:solidFill>
-            <a:srgbClr val="F2B43C"/>
-          </a:solidFill>
-          <a:ln w="19050">
-            <a:solidFill>
-              <a:srgbClr val="FFFFFF"/>
-            </a:solidFill>
-            <a:prstDash val="solid"/>
-          </a:ln>
-        </p:spPr>
-      </p:sp>
-      <p:sp>
-        <p:nvSpPr>
-          <p:cNvPr id="8" name="Shape 6"/>
-          <p:cNvSpPr/>
-          <p:nvPr/>
-        </p:nvSpPr>
-        <p:spPr>
-          <a:xfrm>
-            <a:off x="7553858" y="753466"/>
-            <a:ext cx="453542" cy="453542"/>
-          </a:xfrm>
-          <a:prstGeom prst="ellipse">
-            <a:avLst/>
-          </a:prstGeom>
-          <a:solidFill>
-            <a:srgbClr val="F2B43C"/>
-          </a:solidFill>
-          <a:ln w="19050">
-            <a:solidFill>
-              <a:srgbClr val="FFFFFF"/>
-            </a:solidFill>
-            <a:prstDash val="solid"/>
-          </a:ln>
-        </p:spPr>
-      </p:sp>
-      <p:sp>
-        <p:nvSpPr>
-          <p:cNvPr id="9" name="Shape 7"/>
-          <p:cNvSpPr/>
-          <p:nvPr/>
-        </p:nvSpPr>
-        <p:spPr>
-          <a:xfrm>
-            <a:off x="7128662" y="1518818"/>
-            <a:ext cx="481889" cy="481889"/>
-          </a:xfrm>
-          <a:prstGeom prst="ellipse">
-            <a:avLst/>
-          </a:prstGeom>
-          <a:solidFill>
-            <a:srgbClr val="F2B43C"/>
-          </a:solidFill>
-          <a:ln w="19050">
-            <a:solidFill>
-              <a:srgbClr val="FFFFFF"/>
-            </a:solidFill>
-            <a:prstDash val="solid"/>
-          </a:ln>
-        </p:spPr>
-      </p:sp>
-      <p:sp>
-        <p:nvSpPr>
-          <p:cNvPr id="10" name="Shape 8"/>
-          <p:cNvSpPr/>
-          <p:nvPr/>
-        </p:nvSpPr>
-        <p:spPr>
-          <a:xfrm>
-            <a:off x="7610551" y="1433779"/>
-            <a:ext cx="425196" cy="425196"/>
-          </a:xfrm>
-          <a:prstGeom prst="ellipse">
-            <a:avLst/>
-          </a:prstGeom>
-          <a:solidFill>
-            <a:srgbClr val="F2B43C"/>
-          </a:solidFill>
-          <a:ln w="19050">
-            <a:solidFill>
-              <a:srgbClr val="FFFFFF"/>
-            </a:solidFill>
-            <a:prstDash val="solid"/>
-          </a:ln>
-        </p:spPr>
-      </p:sp>
-      <p:sp>
-        <p:nvSpPr>
-          <p:cNvPr id="11" name="Shape 9"/>
-          <p:cNvSpPr/>
-          <p:nvPr/>
-        </p:nvSpPr>
-        <p:spPr>
-          <a:xfrm>
-            <a:off x="6646774" y="1547165"/>
-            <a:ext cx="425196" cy="425196"/>
-          </a:xfrm>
-          <a:prstGeom prst="ellipse">
-            <a:avLst/>
-          </a:prstGeom>
-          <a:solidFill>
-            <a:srgbClr val="F2B43C"/>
-          </a:solidFill>
-          <a:ln w="19050">
-            <a:solidFill>
-              <a:srgbClr val="FFFFFF"/>
-            </a:solidFill>
-            <a:prstDash val="solid"/>
-          </a:ln>
-        </p:spPr>
-      </p:sp>
-      <p:sp>
-        <p:nvSpPr>
-          <p:cNvPr id="12" name="Shape 10"/>
-          <p:cNvSpPr/>
-          <p:nvPr/>
-        </p:nvSpPr>
-        <p:spPr>
-          <a:xfrm>
-            <a:off x="6873545" y="1915668"/>
-            <a:ext cx="396850" cy="396850"/>
-          </a:xfrm>
-          <a:prstGeom prst="ellipse">
-            <a:avLst/>
-          </a:prstGeom>
-          <a:solidFill>
-            <a:srgbClr val="F2B43C"/>
-          </a:solidFill>
-          <a:ln w="19050">
-            <a:solidFill>
-              <a:srgbClr val="FFFFFF"/>
-            </a:solidFill>
-            <a:prstDash val="solid"/>
-          </a:ln>
-        </p:spPr>
-      </p:sp>
-      <p:sp>
-        <p:nvSpPr>
-          <p:cNvPr id="13" name="Shape 11"/>
-          <p:cNvSpPr/>
-          <p:nvPr/>
-        </p:nvSpPr>
-        <p:spPr>
-          <a:xfrm>
-            <a:off x="6263640" y="3611880"/>
-            <a:ext cx="457200" cy="457200"/>
-          </a:xfrm>
-          <a:prstGeom prst="ellipse">
-            <a:avLst/>
-          </a:prstGeom>
-          <a:solidFill>
-            <a:srgbClr val="F2546B"/>
-          </a:solidFill>
-          <a:ln w="19050">
-            <a:solidFill>
-              <a:srgbClr val="FFFFFF"/>
-            </a:solidFill>
-            <a:prstDash val="solid"/>
-          </a:ln>
-        </p:spPr>
-      </p:sp>
-      <p:sp>
-        <p:nvSpPr>
-          <p:cNvPr id="14" name="Shape 12"/>
-          <p:cNvSpPr/>
-          <p:nvPr/>
-        </p:nvSpPr>
-        <p:spPr>
-          <a:xfrm>
-            <a:off x="6574536" y="3721608"/>
-            <a:ext cx="457200" cy="457200"/>
-          </a:xfrm>
-          <a:prstGeom prst="ellipse">
-            <a:avLst/>
-          </a:prstGeom>
-          <a:solidFill>
-            <a:srgbClr val="F2546B"/>
-          </a:solidFill>
-          <a:ln w="19050">
-            <a:solidFill>
-              <a:srgbClr val="FFFFFF"/>
-            </a:solidFill>
-            <a:prstDash val="solid"/>
-          </a:ln>
-        </p:spPr>
-      </p:sp>
-      <p:sp>
-        <p:nvSpPr>
-          <p:cNvPr id="15" name="Shape 13"/>
-          <p:cNvSpPr/>
-          <p:nvPr/>
-        </p:nvSpPr>
-        <p:spPr>
-          <a:xfrm>
-            <a:off x="6885432" y="3831336"/>
-            <a:ext cx="457200" cy="457200"/>
-          </a:xfrm>
-          <a:prstGeom prst="ellipse">
-            <a:avLst/>
-          </a:prstGeom>
-          <a:solidFill>
-            <a:srgbClr val="F2546B"/>
-          </a:solidFill>
-          <a:ln w="19050">
-            <a:solidFill>
-              <a:srgbClr val="FFFFFF"/>
-            </a:solidFill>
-            <a:prstDash val="solid"/>
-          </a:ln>
-        </p:spPr>
-      </p:sp>
-      <p:sp>
-        <p:nvSpPr>
-          <p:cNvPr id="16" name="Shape 14"/>
-          <p:cNvSpPr/>
-          <p:nvPr/>
-        </p:nvSpPr>
-        <p:spPr>
-          <a:xfrm>
-            <a:off x="7196328" y="3941064"/>
-            <a:ext cx="457200" cy="457200"/>
-          </a:xfrm>
-          <a:prstGeom prst="ellipse">
-            <a:avLst/>
-          </a:prstGeom>
-          <a:solidFill>
-            <a:srgbClr val="F2546B"/>
-          </a:solidFill>
-          <a:ln w="19050">
-            <a:solidFill>
-              <a:srgbClr val="FFFFFF"/>
-            </a:solidFill>
-            <a:prstDash val="solid"/>
-          </a:ln>
-        </p:spPr>
-      </p:sp>
-      <p:sp>
-        <p:nvSpPr>
-          <p:cNvPr id="17" name="Shape 15"/>
-          <p:cNvSpPr/>
-          <p:nvPr/>
-        </p:nvSpPr>
-        <p:spPr>
-          <a:xfrm>
-            <a:off x="7507224" y="4050792"/>
-            <a:ext cx="457200" cy="457200"/>
-          </a:xfrm>
-          <a:prstGeom prst="ellipse">
-            <a:avLst/>
-          </a:prstGeom>
-          <a:solidFill>
-            <a:srgbClr val="F2546B"/>
-          </a:solidFill>
-          <a:ln w="19050">
-            <a:solidFill>
-              <a:srgbClr val="FFFFFF"/>
-            </a:solidFill>
-            <a:prstDash val="solid"/>
-          </a:ln>
-        </p:spPr>
-      </p:sp>
-      <p:sp>
-        <p:nvSpPr>
-          <p:cNvPr id="18" name="Shape 16"/>
-          <p:cNvSpPr/>
-          <p:nvPr/>
-        </p:nvSpPr>
-        <p:spPr>
-          <a:xfrm>
-            <a:off x="7818120" y="4160520"/>
-            <a:ext cx="457200" cy="457200"/>
-          </a:xfrm>
-          <a:prstGeom prst="ellipse">
-            <a:avLst/>
-          </a:prstGeom>
-          <a:solidFill>
-            <a:srgbClr val="F2546B"/>
-          </a:solidFill>
-          <a:ln w="19050">
-            <a:solidFill>
-              <a:srgbClr val="FFFFFF"/>
-            </a:solidFill>
-            <a:prstDash val="solid"/>
-          </a:ln>
-        </p:spPr>
-      </p:sp>
-      <p:sp>
-        <p:nvSpPr>
-          <p:cNvPr id="19" name="Shape 17"/>
-          <p:cNvSpPr/>
-          <p:nvPr/>
-        </p:nvSpPr>
-        <p:spPr>
-          <a:xfrm>
-            <a:off x="8129016" y="4270248"/>
-            <a:ext cx="457200" cy="457200"/>
-          </a:xfrm>
-          <a:prstGeom prst="ellipse">
-            <a:avLst/>
-          </a:prstGeom>
-          <a:solidFill>
-            <a:srgbClr val="F2546B"/>
-          </a:solidFill>
-          <a:ln w="19050">
-            <a:solidFill>
-              <a:srgbClr val="FFFFFF"/>
-            </a:solidFill>
-            <a:prstDash val="solid"/>
-          </a:ln>
-        </p:spPr>
-      </p:sp>
-      <p:sp>
-        <p:nvSpPr>
-          <p:cNvPr id="20" name="Shape 18"/>
-          <p:cNvSpPr/>
-          <p:nvPr/>
-        </p:nvSpPr>
-        <p:spPr>
-          <a:xfrm>
-            <a:off x="8439912" y="4379976"/>
-            <a:ext cx="457200" cy="457200"/>
-          </a:xfrm>
-          <a:prstGeom prst="ellipse">
-            <a:avLst/>
-          </a:prstGeom>
-          <a:solidFill>
-            <a:srgbClr val="F2546B"/>
-          </a:solidFill>
-          <a:ln w="19050">
-            <a:solidFill>
-              <a:srgbClr val="FFFFFF"/>
-            </a:solidFill>
-            <a:prstDash val="solid"/>
-          </a:ln>
-        </p:spPr>
-      </p:sp>
-      <p:sp>
-        <p:nvSpPr>
-          <p:cNvPr id="21" name="Text 19"/>
+      <p:pic>
+        <p:nvPicPr>
+          <p:cNvPr id="2" name="Image 0" descr="preencoded.png">    </p:cNvPr>
+          <p:cNvPicPr>
+            <a:picLocks noChangeAspect="1"/>
+          </p:cNvPicPr>
+          <p:nvPr/>
+        </p:nvPicPr>
+        <p:blipFill>
+          <a:blip r:embed="rId1"/>
+          <a:stretch>
+            <a:fillRect/>
+          </a:stretch>
+        </p:blipFill>
+        <p:spPr>
+          <a:xfrm>
+            <a:off x="0" y="0"/>
+            <a:ext cx="9144000" cy="5143500"/>
+          </a:xfrm>
+          <a:prstGeom prst="rect">
+            <a:avLst/>
+          </a:prstGeom>
+        </p:spPr>
+      </p:pic>
+      <p:sp>
+        <p:nvSpPr>
+          <p:cNvPr id="3" name="Text 0"/>
           <p:cNvSpPr txBox="1"/>
           <p:nvPr/>
         </p:nvSpPr>
         <p:spPr>
           <a:xfrm>
-            <a:off x="548640" y="914400"/>
-            <a:ext cx="5486400" cy="365760"/>
+            <a:off x="640080" y="868680"/>
+            <a:ext cx="6400800" cy="365760"/>
           </a:xfrm>
           <a:prstGeom prst="rect">
             <a:avLst/>
@@ -1738,9 +1643,9 @@
               <a:buNone/>
             </a:pPr>
             <a:r>
-              <a:rPr lang="en-US" sz="1500" b="1" spc="400" kern="0" dirty="0">
+              <a:rPr lang="en-US" sz="1600" b="1" spc="400" kern="0" dirty="0">
                 <a:solidFill>
-                  <a:srgbClr val="6A4CCF"/>
+                  <a:srgbClr val="A78BFA"/>
                 </a:solidFill>
                 <a:latin typeface="Calibri" pitchFamily="34" charset="0"/>
                 <a:ea typeface="Calibri" pitchFamily="34" charset="-122"/>
@@ -1748,20 +1653,20 @@
               </a:rPr>
               <a:t>INFECCIONES POR GRAMPOSITIVOS</a:t>
             </a:r>
-            <a:endParaRPr lang="en-US" sz="1500" dirty="0"/>
+            <a:endParaRPr lang="en-US" sz="1600" dirty="0"/>
           </a:p>
         </p:txBody>
       </p:sp>
       <p:sp>
         <p:nvSpPr>
-          <p:cNvPr id="22" name="Text 20"/>
+          <p:cNvPr id="4" name="Text 1"/>
           <p:cNvSpPr txBox="1"/>
           <p:nvPr/>
         </p:nvSpPr>
         <p:spPr>
           <a:xfrm>
-            <a:off x="548640" y="1325880"/>
-            <a:ext cx="5486400" cy="914400"/>
+            <a:off x="640080" y="1280160"/>
+            <a:ext cx="6583680" cy="914400"/>
           </a:xfrm>
           <a:prstGeom prst="rect">
             <a:avLst/>
@@ -1777,9 +1682,9 @@
               <a:buNone/>
             </a:pPr>
             <a:r>
-              <a:rPr lang="en-US" sz="5400" b="1" dirty="0">
+              <a:rPr lang="en-US" sz="5600" b="1" dirty="0">
                 <a:solidFill>
-                  <a:srgbClr val="15193A"/>
+                  <a:srgbClr val="F4F6FF"/>
                 </a:solidFill>
                 <a:latin typeface="Calibri" pitchFamily="34" charset="0"/>
                 <a:ea typeface="Calibri" pitchFamily="34" charset="-122"/>
@@ -1787,20 +1692,20 @@
               </a:rPr>
               <a:t>Grampositivos</a:t>
             </a:r>
-            <a:endParaRPr lang="en-US" sz="5400" dirty="0"/>
+            <a:endParaRPr lang="en-US" sz="5600" dirty="0"/>
           </a:p>
         </p:txBody>
       </p:sp>
       <p:sp>
         <p:nvSpPr>
-          <p:cNvPr id="23" name="Text 21"/>
+          <p:cNvPr id="5" name="Text 2"/>
           <p:cNvSpPr txBox="1"/>
           <p:nvPr/>
         </p:nvSpPr>
         <p:spPr>
           <a:xfrm>
-            <a:off x="548640" y="2377440"/>
-            <a:ext cx="5394960" cy="822960"/>
+            <a:off x="658368" y="2331720"/>
+            <a:ext cx="6400800" cy="731520"/>
           </a:xfrm>
           <a:prstGeom prst="rect">
             <a:avLst/>
@@ -1816,9 +1721,9 @@
               <a:buNone/>
             </a:pPr>
             <a:r>
-              <a:rPr lang="en-US" sz="2400" dirty="0">
+              <a:rPr lang="en-US" sz="2500" dirty="0">
                 <a:solidFill>
-                  <a:srgbClr val="A66A00"/>
+                  <a:srgbClr val="F2B43C"/>
                 </a:solidFill>
                 <a:latin typeface="Calibri" pitchFamily="34" charset="0"/>
                 <a:ea typeface="Calibri" pitchFamily="34" charset="-122"/>
@@ -1826,20 +1731,45 @@
               </a:rPr>
               <a:t>De la colonización al choque séptico</a:t>
             </a:r>
-            <a:endParaRPr lang="en-US" sz="2400" dirty="0"/>
+            <a:endParaRPr lang="en-US" sz="2500" dirty="0"/>
           </a:p>
         </p:txBody>
       </p:sp>
       <p:sp>
         <p:nvSpPr>
-          <p:cNvPr id="24" name="Text 22"/>
+          <p:cNvPr id="6" name="Shape 3"/>
+          <p:cNvSpPr/>
+          <p:nvPr/>
+        </p:nvSpPr>
+        <p:spPr>
+          <a:xfrm>
+            <a:off x="676656" y="3429000"/>
+            <a:ext cx="822960" cy="41148"/>
+          </a:xfrm>
+          <a:prstGeom prst="rect">
+            <a:avLst/>
+          </a:prstGeom>
+          <a:solidFill>
+            <a:srgbClr val="A78BFA"/>
+          </a:solidFill>
+          <a:ln w="12700">
+            <a:solidFill>
+              <a:srgbClr val="A78BFA"/>
+            </a:solidFill>
+            <a:prstDash val="solid"/>
+          </a:ln>
+        </p:spPr>
+      </p:sp>
+      <p:sp>
+        <p:nvSpPr>
+          <p:cNvPr id="7" name="Text 4"/>
           <p:cNvSpPr txBox="1"/>
           <p:nvPr/>
         </p:nvSpPr>
         <p:spPr>
           <a:xfrm>
-            <a:off x="548640" y="3749040"/>
-            <a:ext cx="5394960" cy="411480"/>
+            <a:off x="658368" y="3611880"/>
+            <a:ext cx="6400800" cy="457200"/>
           </a:xfrm>
           <a:prstGeom prst="rect">
             <a:avLst/>
@@ -1855,9 +1785,9 @@
               <a:buNone/>
             </a:pPr>
             <a:r>
-              <a:rPr lang="en-US" sz="2200" b="1" dirty="0">
+              <a:rPr lang="en-US" sz="2300" b="1" dirty="0">
                 <a:solidFill>
-                  <a:srgbClr val="15193A"/>
+                  <a:srgbClr val="F4F6FF"/>
                 </a:solidFill>
                 <a:latin typeface="Calibri" pitchFamily="34" charset="0"/>
                 <a:ea typeface="Calibri" pitchFamily="34" charset="-122"/>
@@ -1865,20 +1795,20 @@
               </a:rPr>
               <a:t>Néstor Fabián Sanabria Duarte</a:t>
             </a:r>
-            <a:endParaRPr lang="en-US" sz="2200" dirty="0"/>
+            <a:endParaRPr lang="en-US" sz="2300" dirty="0"/>
           </a:p>
         </p:txBody>
       </p:sp>
       <p:sp>
         <p:nvSpPr>
-          <p:cNvPr id="25" name="Text 23"/>
+          <p:cNvPr id="8" name="Text 5"/>
           <p:cNvSpPr txBox="1"/>
           <p:nvPr/>
         </p:nvSpPr>
         <p:spPr>
           <a:xfrm>
-            <a:off x="548640" y="4142232"/>
-            <a:ext cx="5486400" cy="320040"/>
+            <a:off x="658368" y="4114800"/>
+            <a:ext cx="7315200" cy="365760"/>
           </a:xfrm>
           <a:prstGeom prst="rect">
             <a:avLst/>
@@ -1894,56 +1824,90 @@
               <a:buNone/>
             </a:pPr>
             <a:r>
-              <a:rPr lang="en-US" sz="1500" dirty="0">
+              <a:rPr lang="en-US" sz="1600" dirty="0">
                 <a:solidFill>
-                  <a:srgbClr val="51597F"/>
+                  <a:srgbClr val="B9C2E2"/>
                 </a:solidFill>
                 <a:latin typeface="Calibri" pitchFamily="34" charset="0"/>
                 <a:ea typeface="Calibri" pitchFamily="34" charset="-122"/>
                 <a:cs typeface="Calibri" pitchFamily="34" charset="-120"/>
               </a:rPr>
-              <a:t>Residente de Medicina Interna</a:t>
+              <a:t>Residente III · Medicina Interna · Universidad Libre</a:t>
             </a:r>
-            <a:endParaRPr lang="en-US" sz="1500" dirty="0"/>
+            <a:endParaRPr lang="en-US" sz="1600" dirty="0"/>
           </a:p>
         </p:txBody>
       </p:sp>
       <p:sp>
         <p:nvSpPr>
-          <p:cNvPr id="26" name="Text 24"/>
-          <p:cNvSpPr txBox="1"/>
-          <p:nvPr/>
-        </p:nvSpPr>
-        <p:spPr>
-          <a:xfrm>
-            <a:off x="548640" y="4434840"/>
-            <a:ext cx="5486400" cy="292608"/>
-          </a:xfrm>
-          <a:prstGeom prst="rect">
-            <a:avLst/>
-          </a:prstGeom>
-          <a:noFill/>
-          <a:ln/>
+          <p:cNvPr id="9" name="Shape 6"/>
+          <p:cNvSpPr/>
+          <p:nvPr/>
+        </p:nvSpPr>
+        <p:spPr>
+          <a:xfrm>
+            <a:off x="8247888" y="4535424"/>
+            <a:ext cx="420624" cy="420624"/>
+          </a:xfrm>
+          <a:prstGeom prst="ellipse">
+            <a:avLst/>
+          </a:prstGeom>
+          <a:solidFill>
+            <a:srgbClr val="0A0E1F"/>
+          </a:solidFill>
+          <a:ln w="15875">
+            <a:solidFill>
+              <a:srgbClr val="FFFFFF"/>
+            </a:solidFill>
+            <a:prstDash val="solid"/>
+          </a:ln>
+        </p:spPr>
+      </p:sp>
+      <p:sp>
+        <p:nvSpPr>
+          <p:cNvPr id="25" name="Slide Number Placeholder 0"/>
+          <p:cNvSpPr>
+            <a:spLocks noGrp="1"/>
+          </p:cNvSpPr>
+          <p:nvPr>
+            <p:ph type="sldNum" sz="quarter" idx="4294967295"/>
+          </p:nvPr>
+        </p:nvSpPr>
+        <p:spPr>
+          <a:xfrm>
+            <a:off x="8247888" y="4535424"/>
+            <a:ext cx="420624" cy="420624"/>
+          </a:xfrm>
+          <a:prstGeom prst="rect">
+            <a:avLst/>
+          </a:prstGeom>
+          <a:extLst>
+            <a:ext uri="{C572A759-6A51-4108-AA02-DFA0A04FC94B}">
+              <ma14:wrappingTextBoxFlag xmlns:ma14="http://schemas.microsoft.com/office/mac/drawingml/2011/main" val="0"/>
+            </a:ext>
+          </a:extLst>
         </p:spPr>
         <p:txBody>
-          <a:bodyPr wrap="square" lIns="0" tIns="0" rIns="0" bIns="0" rtlCol="0" anchor="t"/>
-          <a:lstStyle/>
-          <a:p>
-            <a:pPr indent="0" marL="0">
-              <a:buNone/>
-            </a:pPr>
-            <a:r>
-              <a:rPr lang="en-US" sz="1400" dirty="0">
+          <a:bodyPr anchor="ctr"/>
+          <a:lstStyle>
+            <a:lvl1pPr>
+              <a:defRPr sz="1800">
                 <a:solidFill>
-                  <a:srgbClr val="9AA0C0"/>
+                  <a:srgbClr val="FFFFFF"/>
                 </a:solidFill>
-                <a:latin typeface="Calibri" pitchFamily="34" charset="0"/>
-                <a:ea typeface="Calibri" pitchFamily="34" charset="-122"/>
-                <a:cs typeface="Calibri" pitchFamily="34" charset="-120"/>
-              </a:rPr>
-              <a:t>Universidad Libre</a:t>
-            </a:r>
-            <a:endParaRPr lang="en-US" sz="1400" dirty="0"/>
+                <a:latin typeface="Calibri"/>
+                <a:ea typeface="Calibri"/>
+                <a:cs typeface="Calibri"/>
+              </a:defRPr>
+            </a:lvl1pPr>
+          </a:lstStyle>
+          <a:p>
+            <a:pPr algn="ctr"/>
+            <a:fld id="{F7021451-1387-4CA6-816F-3879F97B5CBC}" type="slidenum">
+              <a:rPr b="1" lang="en-US"/>
+              <a:t>1</a:t>
+            </a:fld>
+            <a:endParaRPr lang="en-US"/>
           </a:p>
         </p:txBody>
       </p:sp>
@@ -2065,6 +2029,31 @@
         </p:nvSpPr>
         <p:spPr>
           <a:xfrm>
+            <a:off x="8247888" y="4535424"/>
+            <a:ext cx="420624" cy="420624"/>
+          </a:xfrm>
+          <a:prstGeom prst="ellipse">
+            <a:avLst/>
+          </a:prstGeom>
+          <a:solidFill>
+            <a:srgbClr val="0A0E1F"/>
+          </a:solidFill>
+          <a:ln w="15875">
+            <a:solidFill>
+              <a:srgbClr val="3A4165"/>
+            </a:solidFill>
+            <a:prstDash val="solid"/>
+          </a:ln>
+        </p:spPr>
+      </p:sp>
+      <p:sp>
+        <p:nvSpPr>
+          <p:cNvPr id="5" name="Shape 3"/>
+          <p:cNvSpPr/>
+          <p:nvPr/>
+        </p:nvSpPr>
+        <p:spPr>
+          <a:xfrm>
             <a:off x="365760" y="1417320"/>
             <a:ext cx="1572768" cy="2377440"/>
           </a:xfrm>
@@ -2088,7 +2077,7 @@
       </p:sp>
       <p:sp>
         <p:nvSpPr>
-          <p:cNvPr id="5" name="Shape 3"/>
+          <p:cNvPr id="6" name="Shape 4"/>
           <p:cNvSpPr/>
           <p:nvPr/>
         </p:nvSpPr>
@@ -2113,7 +2102,7 @@
       </p:sp>
       <p:pic>
         <p:nvPicPr>
-          <p:cNvPr id="6" name="Image 0" descr="preencoded.png">    </p:cNvPr>
+          <p:cNvPr id="7" name="Image 0" descr="preencoded.png">    </p:cNvPr>
           <p:cNvPicPr>
             <a:picLocks noChangeAspect="1"/>
           </p:cNvPicPr>
@@ -2137,7 +2126,7 @@
       </p:pic>
       <p:sp>
         <p:nvSpPr>
-          <p:cNvPr id="7" name="Text 4"/>
+          <p:cNvPr id="8" name="Text 5"/>
           <p:cNvSpPr txBox="1"/>
           <p:nvPr/>
         </p:nvSpPr>
@@ -2176,7 +2165,7 @@
       </p:sp>
       <p:sp>
         <p:nvSpPr>
-          <p:cNvPr id="8" name="Text 5"/>
+          <p:cNvPr id="9" name="Text 6"/>
           <p:cNvSpPr txBox="1"/>
           <p:nvPr/>
         </p:nvSpPr>
@@ -2215,7 +2204,7 @@
       </p:sp>
       <p:sp>
         <p:nvSpPr>
-          <p:cNvPr id="9" name="Text 6"/>
+          <p:cNvPr id="10" name="Text 7"/>
           <p:cNvSpPr txBox="1"/>
           <p:nvPr/>
         </p:nvSpPr>
@@ -2254,7 +2243,7 @@
       </p:sp>
       <p:sp>
         <p:nvSpPr>
-          <p:cNvPr id="10" name="Shape 7"/>
+          <p:cNvPr id="11" name="Shape 8"/>
           <p:cNvSpPr/>
           <p:nvPr/>
         </p:nvSpPr>
@@ -2283,7 +2272,7 @@
       </p:sp>
       <p:sp>
         <p:nvSpPr>
-          <p:cNvPr id="11" name="Shape 8"/>
+          <p:cNvPr id="12" name="Shape 9"/>
           <p:cNvSpPr/>
           <p:nvPr/>
         </p:nvSpPr>
@@ -2308,7 +2297,7 @@
       </p:sp>
       <p:pic>
         <p:nvPicPr>
-          <p:cNvPr id="12" name="Image 1" descr="preencoded.png">    </p:cNvPr>
+          <p:cNvPr id="13" name="Image 1" descr="preencoded.png">    </p:cNvPr>
           <p:cNvPicPr>
             <a:picLocks noChangeAspect="1"/>
           </p:cNvPicPr>
@@ -2332,7 +2321,7 @@
       </p:pic>
       <p:sp>
         <p:nvSpPr>
-          <p:cNvPr id="13" name="Text 9"/>
+          <p:cNvPr id="14" name="Text 10"/>
           <p:cNvSpPr txBox="1"/>
           <p:nvPr/>
         </p:nvSpPr>
@@ -2371,7 +2360,7 @@
       </p:sp>
       <p:sp>
         <p:nvSpPr>
-          <p:cNvPr id="14" name="Text 10"/>
+          <p:cNvPr id="15" name="Text 11"/>
           <p:cNvSpPr txBox="1"/>
           <p:nvPr/>
         </p:nvSpPr>
@@ -2410,7 +2399,7 @@
       </p:sp>
       <p:sp>
         <p:nvSpPr>
-          <p:cNvPr id="15" name="Text 11"/>
+          <p:cNvPr id="16" name="Text 12"/>
           <p:cNvSpPr txBox="1"/>
           <p:nvPr/>
         </p:nvSpPr>
@@ -2449,7 +2438,7 @@
       </p:sp>
       <p:sp>
         <p:nvSpPr>
-          <p:cNvPr id="16" name="Shape 12"/>
+          <p:cNvPr id="17" name="Shape 13"/>
           <p:cNvSpPr/>
           <p:nvPr/>
         </p:nvSpPr>
@@ -2478,7 +2467,7 @@
       </p:sp>
       <p:sp>
         <p:nvSpPr>
-          <p:cNvPr id="17" name="Shape 13"/>
+          <p:cNvPr id="18" name="Shape 14"/>
           <p:cNvSpPr/>
           <p:nvPr/>
         </p:nvSpPr>
@@ -2503,7 +2492,7 @@
       </p:sp>
       <p:pic>
         <p:nvPicPr>
-          <p:cNvPr id="18" name="Image 2" descr="preencoded.png">    </p:cNvPr>
+          <p:cNvPr id="19" name="Image 2" descr="preencoded.png">    </p:cNvPr>
           <p:cNvPicPr>
             <a:picLocks noChangeAspect="1"/>
           </p:cNvPicPr>
@@ -2527,7 +2516,7 @@
       </p:pic>
       <p:sp>
         <p:nvSpPr>
-          <p:cNvPr id="19" name="Text 14"/>
+          <p:cNvPr id="20" name="Text 15"/>
           <p:cNvSpPr txBox="1"/>
           <p:nvPr/>
         </p:nvSpPr>
@@ -2566,7 +2555,7 @@
       </p:sp>
       <p:sp>
         <p:nvSpPr>
-          <p:cNvPr id="20" name="Text 15"/>
+          <p:cNvPr id="21" name="Text 16"/>
           <p:cNvSpPr txBox="1"/>
           <p:nvPr/>
         </p:nvSpPr>
@@ -2605,7 +2594,7 @@
       </p:sp>
       <p:sp>
         <p:nvSpPr>
-          <p:cNvPr id="21" name="Text 16"/>
+          <p:cNvPr id="22" name="Text 17"/>
           <p:cNvSpPr txBox="1"/>
           <p:nvPr/>
         </p:nvSpPr>
@@ -2644,7 +2633,7 @@
       </p:sp>
       <p:sp>
         <p:nvSpPr>
-          <p:cNvPr id="22" name="Shape 17"/>
+          <p:cNvPr id="23" name="Shape 18"/>
           <p:cNvSpPr/>
           <p:nvPr/>
         </p:nvSpPr>
@@ -2673,7 +2662,7 @@
       </p:sp>
       <p:sp>
         <p:nvSpPr>
-          <p:cNvPr id="23" name="Shape 18"/>
+          <p:cNvPr id="24" name="Shape 19"/>
           <p:cNvSpPr/>
           <p:nvPr/>
         </p:nvSpPr>
@@ -2698,7 +2687,7 @@
       </p:sp>
       <p:pic>
         <p:nvPicPr>
-          <p:cNvPr id="24" name="Image 3" descr="preencoded.png">    </p:cNvPr>
+          <p:cNvPr id="25" name="Image 3" descr="preencoded.png">    </p:cNvPr>
           <p:cNvPicPr>
             <a:picLocks noChangeAspect="1"/>
           </p:cNvPicPr>
@@ -2722,7 +2711,7 @@
       </p:pic>
       <p:sp>
         <p:nvSpPr>
-          <p:cNvPr id="25" name="Text 19"/>
+          <p:cNvPr id="26" name="Text 20"/>
           <p:cNvSpPr txBox="1"/>
           <p:nvPr/>
         </p:nvSpPr>
@@ -2761,7 +2750,7 @@
       </p:sp>
       <p:sp>
         <p:nvSpPr>
-          <p:cNvPr id="26" name="Text 20"/>
+          <p:cNvPr id="27" name="Text 21"/>
           <p:cNvSpPr txBox="1"/>
           <p:nvPr/>
         </p:nvSpPr>
@@ -2800,7 +2789,7 @@
       </p:sp>
       <p:sp>
         <p:nvSpPr>
-          <p:cNvPr id="27" name="Text 21"/>
+          <p:cNvPr id="28" name="Text 22"/>
           <p:cNvSpPr txBox="1"/>
           <p:nvPr/>
         </p:nvSpPr>
@@ -2839,7 +2828,7 @@
       </p:sp>
       <p:sp>
         <p:nvSpPr>
-          <p:cNvPr id="28" name="Shape 22"/>
+          <p:cNvPr id="29" name="Shape 23"/>
           <p:cNvSpPr/>
           <p:nvPr/>
         </p:nvSpPr>
@@ -2868,7 +2857,7 @@
       </p:sp>
       <p:sp>
         <p:nvSpPr>
-          <p:cNvPr id="29" name="Shape 23"/>
+          <p:cNvPr id="30" name="Shape 24"/>
           <p:cNvSpPr/>
           <p:nvPr/>
         </p:nvSpPr>
@@ -2893,7 +2882,7 @@
       </p:sp>
       <p:pic>
         <p:nvPicPr>
-          <p:cNvPr id="30" name="Image 4" descr="preencoded.png">    </p:cNvPr>
+          <p:cNvPr id="31" name="Image 4" descr="preencoded.png">    </p:cNvPr>
           <p:cNvPicPr>
             <a:picLocks noChangeAspect="1"/>
           </p:cNvPicPr>
@@ -2917,7 +2906,7 @@
       </p:pic>
       <p:sp>
         <p:nvSpPr>
-          <p:cNvPr id="31" name="Text 24"/>
+          <p:cNvPr id="32" name="Text 25"/>
           <p:cNvSpPr txBox="1"/>
           <p:nvPr/>
         </p:nvSpPr>
@@ -2956,7 +2945,7 @@
       </p:sp>
       <p:sp>
         <p:nvSpPr>
-          <p:cNvPr id="32" name="Text 25"/>
+          <p:cNvPr id="33" name="Text 26"/>
           <p:cNvSpPr txBox="1"/>
           <p:nvPr/>
         </p:nvSpPr>
@@ -2995,7 +2984,7 @@
       </p:sp>
       <p:sp>
         <p:nvSpPr>
-          <p:cNvPr id="33" name="Text 26"/>
+          <p:cNvPr id="34" name="Text 27"/>
           <p:cNvSpPr txBox="1"/>
           <p:nvPr/>
         </p:nvSpPr>
@@ -3044,8 +3033,8 @@
         </p:nvSpPr>
         <p:spPr>
           <a:xfrm>
-            <a:off x="8321040" y="4754880"/>
-            <a:ext cx="365760" cy="274320"/>
+            <a:off x="8247888" y="4535424"/>
+            <a:ext cx="420624" cy="420624"/>
           </a:xfrm>
           <a:prstGeom prst="rect">
             <a:avLst/>
@@ -3057,12 +3046,12 @@
           </a:extLst>
         </p:spPr>
         <p:txBody>
-          <a:bodyPr/>
+          <a:bodyPr anchor="ctr"/>
           <a:lstStyle>
             <a:lvl1pPr>
-              <a:defRPr sz="1100">
+              <a:defRPr sz="1800">
                 <a:solidFill>
-                  <a:srgbClr val="9AA0C0"/>
+                  <a:srgbClr val="FFFFFF"/>
                 </a:solidFill>
                 <a:latin typeface="Calibri"/>
                 <a:ea typeface="Calibri"/>
@@ -3071,9 +3060,9 @@
             </a:lvl1pPr>
           </a:lstStyle>
           <a:p>
-            <a:pPr algn="r"/>
+            <a:pPr algn="ctr"/>
             <a:fld id="{F7021451-1387-4CA6-816F-3879F97B5CBC}" type="slidenum">
-              <a:rPr b="0" lang="en-US"/>
+              <a:rPr b="1" lang="en-US"/>
               <a:t>2</a:t>
             </a:fld>
             <a:endParaRPr lang="en-US"/>
@@ -3278,6 +3267,79 @@
           </a:p>
         </p:txBody>
       </p:sp>
+      <p:sp>
+        <p:nvSpPr>
+          <p:cNvPr id="7" name="Shape 4"/>
+          <p:cNvSpPr/>
+          <p:nvPr/>
+        </p:nvSpPr>
+        <p:spPr>
+          <a:xfrm>
+            <a:off x="8247888" y="4535424"/>
+            <a:ext cx="420624" cy="420624"/>
+          </a:xfrm>
+          <a:prstGeom prst="ellipse">
+            <a:avLst/>
+          </a:prstGeom>
+          <a:solidFill>
+            <a:srgbClr val="0A0E1F"/>
+          </a:solidFill>
+          <a:ln w="15875">
+            <a:solidFill>
+              <a:srgbClr val="FFFFFF"/>
+            </a:solidFill>
+            <a:prstDash val="solid"/>
+          </a:ln>
+        </p:spPr>
+      </p:sp>
+      <p:sp>
+        <p:nvSpPr>
+          <p:cNvPr id="25" name="Slide Number Placeholder 0"/>
+          <p:cNvSpPr>
+            <a:spLocks noGrp="1"/>
+          </p:cNvSpPr>
+          <p:nvPr>
+            <p:ph type="sldNum" sz="quarter" idx="4294967295"/>
+          </p:nvPr>
+        </p:nvSpPr>
+        <p:spPr>
+          <a:xfrm>
+            <a:off x="8247888" y="4535424"/>
+            <a:ext cx="420624" cy="420624"/>
+          </a:xfrm>
+          <a:prstGeom prst="rect">
+            <a:avLst/>
+          </a:prstGeom>
+          <a:extLst>
+            <a:ext uri="{C572A759-6A51-4108-AA02-DFA0A04FC94B}">
+              <ma14:wrappingTextBoxFlag xmlns:ma14="http://schemas.microsoft.com/office/mac/drawingml/2011/main" val="0"/>
+            </a:ext>
+          </a:extLst>
+        </p:spPr>
+        <p:txBody>
+          <a:bodyPr anchor="ctr"/>
+          <a:lstStyle>
+            <a:lvl1pPr>
+              <a:defRPr sz="1800">
+                <a:solidFill>
+                  <a:srgbClr val="FFFFFF"/>
+                </a:solidFill>
+                <a:latin typeface="Calibri"/>
+                <a:ea typeface="Calibri"/>
+                <a:cs typeface="Calibri"/>
+              </a:defRPr>
+            </a:lvl1pPr>
+          </a:lstStyle>
+          <a:p>
+            <a:pPr algn="ctr"/>
+            <a:fld id="{F7021451-1387-4CA6-816F-3879F97B5CBC}" type="slidenum">
+              <a:rPr b="1" lang="en-US"/>
+              <a:t>3</a:t>
+            </a:fld>
+            <a:endParaRPr lang="en-US"/>
+          </a:p>
+        </p:txBody>
+      </p:sp>
     </p:spTree>
   </p:cSld>
   <p:clrMapOvr>
@@ -3396,8 +3458,8 @@
         </p:nvSpPr>
         <p:spPr>
           <a:xfrm>
-            <a:off x="457200" y="4507992"/>
-            <a:ext cx="8229600" cy="0"/>
+            <a:off x="457200" y="4480560"/>
+            <a:ext cx="7589520" cy="0"/>
           </a:xfrm>
           <a:prstGeom prst="line">
             <a:avLst/>
@@ -3419,8 +3481,8 @@
         </p:nvSpPr>
         <p:spPr>
           <a:xfrm>
-            <a:off x="457200" y="4553712"/>
-            <a:ext cx="7818120" cy="502920"/>
+            <a:off x="457200" y="4526280"/>
+            <a:ext cx="7635240" cy="548640"/>
           </a:xfrm>
           <a:prstGeom prst="rect">
             <a:avLst/>
@@ -3475,12 +3537,37 @@
         </p:nvSpPr>
         <p:spPr>
           <a:xfrm>
+            <a:off x="8247888" y="4535424"/>
+            <a:ext cx="420624" cy="420624"/>
+          </a:xfrm>
+          <a:prstGeom prst="ellipse">
+            <a:avLst/>
+          </a:prstGeom>
+          <a:solidFill>
+            <a:srgbClr val="0A0E1F"/>
+          </a:solidFill>
+          <a:ln w="15875">
+            <a:solidFill>
+              <a:srgbClr val="3A4165"/>
+            </a:solidFill>
+            <a:prstDash val="solid"/>
+          </a:ln>
+        </p:spPr>
+      </p:sp>
+      <p:sp>
+        <p:nvSpPr>
+          <p:cNvPr id="7" name="Shape 5"/>
+          <p:cNvSpPr/>
+          <p:nvPr/>
+        </p:nvSpPr>
+        <p:spPr>
+          <a:xfrm>
             <a:off x="457200" y="1280160"/>
-            <a:ext cx="5486400" cy="3017520"/>
+            <a:ext cx="5486400" cy="2971800"/>
           </a:xfrm>
           <a:prstGeom prst="roundRect">
             <a:avLst>
-              <a:gd name="adj" fmla="val 3030"/>
+              <a:gd name="adj" fmla="val 3077"/>
             </a:avLst>
           </a:prstGeom>
           <a:solidFill>
@@ -3498,7 +3585,7 @@
       </p:sp>
       <p:sp>
         <p:nvSpPr>
-          <p:cNvPr id="7" name="Text 5"/>
+          <p:cNvPr id="8" name="Text 6"/>
           <p:cNvSpPr txBox="1"/>
           <p:nvPr/>
         </p:nvSpPr>
@@ -3537,13 +3624,13 @@
       </p:sp>
       <p:sp>
         <p:nvSpPr>
-          <p:cNvPr id="8" name="Shape 6"/>
-          <p:cNvSpPr/>
-          <p:nvPr/>
-        </p:nvSpPr>
-        <p:spPr>
-          <a:xfrm>
-            <a:off x="685800" y="2514600"/>
+          <p:cNvPr id="9" name="Shape 7"/>
+          <p:cNvSpPr/>
+          <p:nvPr/>
+        </p:nvSpPr>
+        <p:spPr>
+          <a:xfrm>
+            <a:off x="685800" y="2468880"/>
             <a:ext cx="502920" cy="502920"/>
           </a:xfrm>
           <a:prstGeom prst="ellipse">
@@ -3562,7 +3649,7 @@
       </p:sp>
       <p:pic>
         <p:nvPicPr>
-          <p:cNvPr id="9" name="Image 0" descr="preencoded.png">    </p:cNvPr>
+          <p:cNvPr id="10" name="Image 0" descr="preencoded.png">    </p:cNvPr>
           <p:cNvPicPr>
             <a:picLocks noChangeAspect="1"/>
           </p:cNvPicPr>
@@ -3576,7 +3663,7 @@
         </p:blipFill>
         <p:spPr>
           <a:xfrm>
-            <a:off x="806501" y="2635301"/>
+            <a:off x="806501" y="2589581"/>
             <a:ext cx="261518" cy="261518"/>
           </a:xfrm>
           <a:prstGeom prst="rect">
@@ -3586,13 +3673,13 @@
       </p:pic>
       <p:sp>
         <p:nvSpPr>
-          <p:cNvPr id="10" name="Text 7"/>
+          <p:cNvPr id="11" name="Text 8"/>
           <p:cNvSpPr txBox="1"/>
           <p:nvPr/>
         </p:nvSpPr>
         <p:spPr>
           <a:xfrm>
-            <a:off x="1371600" y="2496312"/>
+            <a:off x="1371600" y="2450592"/>
             <a:ext cx="4480560" cy="320040"/>
           </a:xfrm>
           <a:prstGeom prst="rect">
@@ -3625,13 +3712,13 @@
       </p:sp>
       <p:sp>
         <p:nvSpPr>
-          <p:cNvPr id="11" name="Text 8"/>
+          <p:cNvPr id="12" name="Text 9"/>
           <p:cNvSpPr txBox="1"/>
           <p:nvPr/>
         </p:nvSpPr>
         <p:spPr>
           <a:xfrm>
-            <a:off x="1371600" y="2807208"/>
+            <a:off x="1371600" y="2761488"/>
             <a:ext cx="4480560" cy="274320"/>
           </a:xfrm>
           <a:prstGeom prst="rect">
@@ -3664,13 +3751,13 @@
       </p:sp>
       <p:sp>
         <p:nvSpPr>
-          <p:cNvPr id="12" name="Shape 9"/>
-          <p:cNvSpPr/>
-          <p:nvPr/>
-        </p:nvSpPr>
-        <p:spPr>
-          <a:xfrm>
-            <a:off x="685800" y="3136392"/>
+          <p:cNvPr id="13" name="Shape 10"/>
+          <p:cNvSpPr/>
+          <p:nvPr/>
+        </p:nvSpPr>
+        <p:spPr>
+          <a:xfrm>
+            <a:off x="685800" y="3063240"/>
             <a:ext cx="502920" cy="502920"/>
           </a:xfrm>
           <a:prstGeom prst="ellipse">
@@ -3689,7 +3776,7 @@
       </p:sp>
       <p:pic>
         <p:nvPicPr>
-          <p:cNvPr id="13" name="Image 1" descr="preencoded.png">    </p:cNvPr>
+          <p:cNvPr id="14" name="Image 1" descr="preencoded.png">    </p:cNvPr>
           <p:cNvPicPr>
             <a:picLocks noChangeAspect="1"/>
           </p:cNvPicPr>
@@ -3703,7 +3790,7 @@
         </p:blipFill>
         <p:spPr>
           <a:xfrm>
-            <a:off x="806501" y="3257093"/>
+            <a:off x="806501" y="3183941"/>
             <a:ext cx="261518" cy="261518"/>
           </a:xfrm>
           <a:prstGeom prst="rect">
@@ -3713,13 +3800,13 @@
       </p:pic>
       <p:sp>
         <p:nvSpPr>
-          <p:cNvPr id="14" name="Text 10"/>
+          <p:cNvPr id="15" name="Text 11"/>
           <p:cNvSpPr txBox="1"/>
           <p:nvPr/>
         </p:nvSpPr>
         <p:spPr>
           <a:xfrm>
-            <a:off x="1371600" y="3118104"/>
+            <a:off x="1371600" y="3044952"/>
             <a:ext cx="4480560" cy="320040"/>
           </a:xfrm>
           <a:prstGeom prst="rect">
@@ -3752,13 +3839,13 @@
       </p:sp>
       <p:sp>
         <p:nvSpPr>
-          <p:cNvPr id="15" name="Text 11"/>
+          <p:cNvPr id="16" name="Text 12"/>
           <p:cNvSpPr txBox="1"/>
           <p:nvPr/>
         </p:nvSpPr>
         <p:spPr>
           <a:xfrm>
-            <a:off x="1371600" y="3429000"/>
+            <a:off x="1371600" y="3355848"/>
             <a:ext cx="4480560" cy="274320"/>
           </a:xfrm>
           <a:prstGeom prst="rect">
@@ -3791,13 +3878,13 @@
       </p:sp>
       <p:sp>
         <p:nvSpPr>
-          <p:cNvPr id="16" name="Shape 12"/>
-          <p:cNvSpPr/>
-          <p:nvPr/>
-        </p:nvSpPr>
-        <p:spPr>
-          <a:xfrm>
-            <a:off x="685800" y="3758184"/>
+          <p:cNvPr id="17" name="Shape 13"/>
+          <p:cNvSpPr/>
+          <p:nvPr/>
+        </p:nvSpPr>
+        <p:spPr>
+          <a:xfrm>
+            <a:off x="685800" y="3657600"/>
             <a:ext cx="502920" cy="502920"/>
           </a:xfrm>
           <a:prstGeom prst="ellipse">
@@ -3816,7 +3903,7 @@
       </p:sp>
       <p:pic>
         <p:nvPicPr>
-          <p:cNvPr id="17" name="Image 2" descr="preencoded.png">    </p:cNvPr>
+          <p:cNvPr id="18" name="Image 2" descr="preencoded.png">    </p:cNvPr>
           <p:cNvPicPr>
             <a:picLocks noChangeAspect="1"/>
           </p:cNvPicPr>
@@ -3830,7 +3917,7 @@
         </p:blipFill>
         <p:spPr>
           <a:xfrm>
-            <a:off x="806501" y="3878885"/>
+            <a:off x="806501" y="3778301"/>
             <a:ext cx="261518" cy="261518"/>
           </a:xfrm>
           <a:prstGeom prst="rect">
@@ -3840,13 +3927,13 @@
       </p:pic>
       <p:sp>
         <p:nvSpPr>
-          <p:cNvPr id="18" name="Text 13"/>
+          <p:cNvPr id="19" name="Text 14"/>
           <p:cNvSpPr txBox="1"/>
           <p:nvPr/>
         </p:nvSpPr>
         <p:spPr>
           <a:xfrm>
-            <a:off x="1371600" y="3739896"/>
+            <a:off x="1371600" y="3639312"/>
             <a:ext cx="4480560" cy="320040"/>
           </a:xfrm>
           <a:prstGeom prst="rect">
@@ -3879,13 +3966,13 @@
       </p:sp>
       <p:sp>
         <p:nvSpPr>
-          <p:cNvPr id="19" name="Text 14"/>
+          <p:cNvPr id="20" name="Text 15"/>
           <p:cNvSpPr txBox="1"/>
           <p:nvPr/>
         </p:nvSpPr>
         <p:spPr>
           <a:xfrm>
-            <a:off x="1371600" y="4050792"/>
+            <a:off x="1371600" y="3950208"/>
             <a:ext cx="4480560" cy="274320"/>
           </a:xfrm>
           <a:prstGeom prst="rect">
@@ -3918,14 +4005,14 @@
       </p:sp>
       <p:sp>
         <p:nvSpPr>
-          <p:cNvPr id="20" name="Shape 15"/>
+          <p:cNvPr id="21" name="Shape 16"/>
           <p:cNvSpPr/>
           <p:nvPr/>
         </p:nvSpPr>
         <p:spPr>
           <a:xfrm>
             <a:off x="6172200" y="1280160"/>
-            <a:ext cx="2514600" cy="3017520"/>
+            <a:ext cx="2514600" cy="2971800"/>
           </a:xfrm>
           <a:prstGeom prst="roundRect">
             <a:avLst>
@@ -3945,7 +4032,7 @@
       </p:sp>
       <p:sp>
         <p:nvSpPr>
-          <p:cNvPr id="21" name="Shape 16"/>
+          <p:cNvPr id="22" name="Shape 17"/>
           <p:cNvSpPr/>
           <p:nvPr/>
         </p:nvSpPr>
@@ -3970,7 +4057,7 @@
       </p:sp>
       <p:sp>
         <p:nvSpPr>
-          <p:cNvPr id="22" name="Shape 17"/>
+          <p:cNvPr id="23" name="Shape 18"/>
           <p:cNvSpPr/>
           <p:nvPr/>
         </p:nvSpPr>
@@ -3995,7 +4082,7 @@
       </p:sp>
       <p:sp>
         <p:nvSpPr>
-          <p:cNvPr id="23" name="Shape 18"/>
+          <p:cNvPr id="24" name="Shape 19"/>
           <p:cNvSpPr/>
           <p:nvPr/>
         </p:nvSpPr>
@@ -4020,7 +4107,7 @@
       </p:sp>
       <p:sp>
         <p:nvSpPr>
-          <p:cNvPr id="24" name="Shape 19"/>
+          <p:cNvPr id="25" name="Shape 20"/>
           <p:cNvSpPr/>
           <p:nvPr/>
         </p:nvSpPr>
@@ -4045,7 +4132,7 @@
       </p:sp>
       <p:sp>
         <p:nvSpPr>
-          <p:cNvPr id="25" name="Shape 20"/>
+          <p:cNvPr id="26" name="Shape 21"/>
           <p:cNvSpPr/>
           <p:nvPr/>
         </p:nvSpPr>
@@ -4070,7 +4157,7 @@
       </p:sp>
       <p:sp>
         <p:nvSpPr>
-          <p:cNvPr id="26" name="Shape 21"/>
+          <p:cNvPr id="27" name="Shape 22"/>
           <p:cNvSpPr/>
           <p:nvPr/>
         </p:nvSpPr>
@@ -4095,7 +4182,7 @@
       </p:sp>
       <p:sp>
         <p:nvSpPr>
-          <p:cNvPr id="27" name="Shape 22"/>
+          <p:cNvPr id="28" name="Shape 23"/>
           <p:cNvSpPr/>
           <p:nvPr/>
         </p:nvSpPr>
@@ -4120,7 +4207,7 @@
       </p:sp>
       <p:sp>
         <p:nvSpPr>
-          <p:cNvPr id="28" name="Shape 23"/>
+          <p:cNvPr id="29" name="Shape 24"/>
           <p:cNvSpPr/>
           <p:nvPr/>
         </p:nvSpPr>
@@ -4145,7 +4232,7 @@
       </p:sp>
       <p:sp>
         <p:nvSpPr>
-          <p:cNvPr id="29" name="Shape 24"/>
+          <p:cNvPr id="30" name="Shape 25"/>
           <p:cNvSpPr/>
           <p:nvPr/>
         </p:nvSpPr>
@@ -4170,7 +4257,7 @@
       </p:sp>
       <p:sp>
         <p:nvSpPr>
-          <p:cNvPr id="30" name="Shape 25"/>
+          <p:cNvPr id="31" name="Shape 26"/>
           <p:cNvSpPr/>
           <p:nvPr/>
         </p:nvSpPr>
@@ -4195,7 +4282,7 @@
       </p:sp>
       <p:sp>
         <p:nvSpPr>
-          <p:cNvPr id="31" name="Shape 26"/>
+          <p:cNvPr id="32" name="Shape 27"/>
           <p:cNvSpPr/>
           <p:nvPr/>
         </p:nvSpPr>
@@ -4220,7 +4307,7 @@
       </p:sp>
       <p:sp>
         <p:nvSpPr>
-          <p:cNvPr id="32" name="Shape 27"/>
+          <p:cNvPr id="33" name="Shape 28"/>
           <p:cNvSpPr/>
           <p:nvPr/>
         </p:nvSpPr>
@@ -4255,8 +4342,8 @@
         </p:nvSpPr>
         <p:spPr>
           <a:xfrm>
-            <a:off x="8321040" y="4754880"/>
-            <a:ext cx="365760" cy="274320"/>
+            <a:off x="8247888" y="4535424"/>
+            <a:ext cx="420624" cy="420624"/>
           </a:xfrm>
           <a:prstGeom prst="rect">
             <a:avLst/>
@@ -4268,12 +4355,12 @@
           </a:extLst>
         </p:spPr>
         <p:txBody>
-          <a:bodyPr/>
+          <a:bodyPr anchor="ctr"/>
           <a:lstStyle>
             <a:lvl1pPr>
-              <a:defRPr sz="1100">
+              <a:defRPr sz="1800">
                 <a:solidFill>
-                  <a:srgbClr val="9AA0C0"/>
+                  <a:srgbClr val="FFFFFF"/>
                 </a:solidFill>
                 <a:latin typeface="Calibri"/>
                 <a:ea typeface="Calibri"/>
@@ -4282,10 +4369,5809 @@
             </a:lvl1pPr>
           </a:lstStyle>
           <a:p>
-            <a:pPr algn="r"/>
+            <a:pPr algn="ctr"/>
             <a:fld id="{F7021451-1387-4CA6-816F-3879F97B5CBC}" type="slidenum">
-              <a:rPr b="0" lang="en-US"/>
+              <a:rPr b="1" lang="en-US"/>
               <a:t>4</a:t>
+            </a:fld>
+            <a:endParaRPr lang="en-US"/>
+          </a:p>
+        </p:txBody>
+      </p:sp>
+    </p:spTree>
+  </p:cSld>
+  <p:clrMapOvr>
+    <a:masterClrMapping/>
+  </p:clrMapOvr>
+</p:sld>
+</file>
+
+<file path=ppt/slides/slide5.xml><?xml version="1.0" encoding="utf-8"?>
+<p:sld xmlns:a="http://schemas.openxmlformats.org/drawingml/2006/main" xmlns:r="http://schemas.openxmlformats.org/officeDocument/2006/relationships" xmlns:p="http://schemas.openxmlformats.org/presentationml/2006/main">
+  <p:cSld name="Slide 5">
+    <p:bg>
+      <p:bgPr>
+        <a:solidFill>
+          <a:srgbClr val="05070F"/>
+        </a:solidFill>
+      </p:bgPr>
+    </p:bg>
+    <p:spTree>
+      <p:nvGrpSpPr>
+        <p:cNvPr id="1" name=""/>
+        <p:cNvGrpSpPr/>
+        <p:nvPr/>
+      </p:nvGrpSpPr>
+      <p:grpSpPr>
+        <a:xfrm>
+          <a:off x="0" y="0"/>
+          <a:ext cx="0" cy="0"/>
+          <a:chOff x="0" y="0"/>
+          <a:chExt cx="0" cy="0"/>
+        </a:xfrm>
+      </p:grpSpPr>
+      <p:pic>
+        <p:nvPicPr>
+          <p:cNvPr id="2" name="Image 0" descr="preencoded.png">    </p:cNvPr>
+          <p:cNvPicPr>
+            <a:picLocks noChangeAspect="1"/>
+          </p:cNvPicPr>
+          <p:nvPr/>
+        </p:nvPicPr>
+        <p:blipFill>
+          <a:blip r:embed="rId1"/>
+          <a:stretch>
+            <a:fillRect/>
+          </a:stretch>
+        </p:blipFill>
+        <p:spPr>
+          <a:xfrm>
+            <a:off x="0" y="0"/>
+            <a:ext cx="9144000" cy="5143500"/>
+          </a:xfrm>
+          <a:prstGeom prst="rect">
+            <a:avLst/>
+          </a:prstGeom>
+        </p:spPr>
+      </p:pic>
+      <p:sp>
+        <p:nvSpPr>
+          <p:cNvPr id="3" name="Shape 0"/>
+          <p:cNvSpPr/>
+          <p:nvPr/>
+        </p:nvSpPr>
+        <p:spPr>
+          <a:xfrm>
+            <a:off x="594360" y="1234440"/>
+            <a:ext cx="128016" cy="2331720"/>
+          </a:xfrm>
+          <a:prstGeom prst="rect">
+            <a:avLst/>
+          </a:prstGeom>
+          <a:solidFill>
+            <a:srgbClr val="F2B43C"/>
+          </a:solidFill>
+          <a:ln w="12700">
+            <a:solidFill>
+              <a:srgbClr val="F2B43C"/>
+            </a:solidFill>
+            <a:prstDash val="solid"/>
+          </a:ln>
+        </p:spPr>
+      </p:sp>
+      <p:sp>
+        <p:nvSpPr>
+          <p:cNvPr id="4" name="Text 1"/>
+          <p:cNvSpPr txBox="1"/>
+          <p:nvPr/>
+        </p:nvSpPr>
+        <p:spPr>
+          <a:xfrm>
+            <a:off x="914400" y="1097280"/>
+            <a:ext cx="3657600" cy="1005840"/>
+          </a:xfrm>
+          <a:prstGeom prst="rect">
+            <a:avLst/>
+          </a:prstGeom>
+          <a:noFill/>
+          <a:ln/>
+        </p:spPr>
+        <p:txBody>
+          <a:bodyPr wrap="square" lIns="0" tIns="0" rIns="0" bIns="0" rtlCol="0" anchor="b"/>
+          <a:lstStyle/>
+          <a:p>
+            <a:pPr indent="0" marL="0">
+              <a:buNone/>
+            </a:pPr>
+            <a:r>
+              <a:rPr lang="en-US" sz="6400" b="1" dirty="0">
+                <a:solidFill>
+                  <a:srgbClr val="F2B43C"/>
+                </a:solidFill>
+                <a:latin typeface="Calibri" pitchFamily="34" charset="0"/>
+                <a:ea typeface="Calibri" pitchFamily="34" charset="-122"/>
+                <a:cs typeface="Calibri" pitchFamily="34" charset="-120"/>
+              </a:rPr>
+              <a:t>02</a:t>
+            </a:r>
+            <a:endParaRPr lang="en-US" sz="6400" dirty="0"/>
+          </a:p>
+        </p:txBody>
+      </p:sp>
+      <p:sp>
+        <p:nvSpPr>
+          <p:cNvPr id="5" name="Text 2"/>
+          <p:cNvSpPr txBox="1"/>
+          <p:nvPr/>
+        </p:nvSpPr>
+        <p:spPr>
+          <a:xfrm>
+            <a:off x="914400" y="2148840"/>
+            <a:ext cx="7589520" cy="1051560"/>
+          </a:xfrm>
+          <a:prstGeom prst="rect">
+            <a:avLst/>
+          </a:prstGeom>
+          <a:noFill/>
+          <a:ln/>
+        </p:spPr>
+        <p:txBody>
+          <a:bodyPr wrap="square" lIns="0" tIns="0" rIns="0" bIns="0" rtlCol="0" anchor="ctr"/>
+          <a:lstStyle/>
+          <a:p>
+            <a:pPr indent="0" marL="0">
+              <a:buNone/>
+            </a:pPr>
+            <a:r>
+              <a:rPr lang="en-US" sz="6000" b="1" dirty="0">
+                <a:solidFill>
+                  <a:srgbClr val="F4F6FF"/>
+                </a:solidFill>
+                <a:latin typeface="Calibri" pitchFamily="34" charset="0"/>
+                <a:ea typeface="Calibri" pitchFamily="34" charset="-122"/>
+                <a:cs typeface="Calibri" pitchFamily="34" charset="-120"/>
+              </a:rPr>
+              <a:t>Anatomía</a:t>
+            </a:r>
+            <a:endParaRPr lang="en-US" sz="6000" dirty="0"/>
+          </a:p>
+        </p:txBody>
+      </p:sp>
+      <p:sp>
+        <p:nvSpPr>
+          <p:cNvPr id="6" name="Text 3"/>
+          <p:cNvSpPr txBox="1"/>
+          <p:nvPr/>
+        </p:nvSpPr>
+        <p:spPr>
+          <a:xfrm>
+            <a:off x="941832" y="3291840"/>
+            <a:ext cx="6949440" cy="640080"/>
+          </a:xfrm>
+          <a:prstGeom prst="rect">
+            <a:avLst/>
+          </a:prstGeom>
+          <a:noFill/>
+          <a:ln/>
+        </p:spPr>
+        <p:txBody>
+          <a:bodyPr wrap="square" lIns="0" tIns="0" rIns="0" bIns="0" rtlCol="0" anchor="t"/>
+          <a:lstStyle/>
+          <a:p>
+            <a:pPr indent="0" marL="0">
+              <a:buNone/>
+            </a:pPr>
+            <a:r>
+              <a:rPr lang="en-US" sz="2200" dirty="0">
+                <a:solidFill>
+                  <a:srgbClr val="B9C2E2"/>
+                </a:solidFill>
+                <a:latin typeface="Calibri" pitchFamily="34" charset="0"/>
+                <a:ea typeface="Calibri" pitchFamily="34" charset="-122"/>
+                <a:cs typeface="Calibri" pitchFamily="34" charset="-120"/>
+              </a:rPr>
+              <a:t>Clasificación y estructura de la pared</a:t>
+            </a:r>
+            <a:endParaRPr lang="en-US" sz="2200" dirty="0"/>
+          </a:p>
+        </p:txBody>
+      </p:sp>
+      <p:sp>
+        <p:nvSpPr>
+          <p:cNvPr id="7" name="Shape 4"/>
+          <p:cNvSpPr/>
+          <p:nvPr/>
+        </p:nvSpPr>
+        <p:spPr>
+          <a:xfrm>
+            <a:off x="8247888" y="4535424"/>
+            <a:ext cx="420624" cy="420624"/>
+          </a:xfrm>
+          <a:prstGeom prst="ellipse">
+            <a:avLst/>
+          </a:prstGeom>
+          <a:solidFill>
+            <a:srgbClr val="0A0E1F"/>
+          </a:solidFill>
+          <a:ln w="15875">
+            <a:solidFill>
+              <a:srgbClr val="FFFFFF"/>
+            </a:solidFill>
+            <a:prstDash val="solid"/>
+          </a:ln>
+        </p:spPr>
+      </p:sp>
+      <p:sp>
+        <p:nvSpPr>
+          <p:cNvPr id="25" name="Slide Number Placeholder 0"/>
+          <p:cNvSpPr>
+            <a:spLocks noGrp="1"/>
+          </p:cNvSpPr>
+          <p:nvPr>
+            <p:ph type="sldNum" sz="quarter" idx="4294967295"/>
+          </p:nvPr>
+        </p:nvSpPr>
+        <p:spPr>
+          <a:xfrm>
+            <a:off x="8247888" y="4535424"/>
+            <a:ext cx="420624" cy="420624"/>
+          </a:xfrm>
+          <a:prstGeom prst="rect">
+            <a:avLst/>
+          </a:prstGeom>
+          <a:extLst>
+            <a:ext uri="{C572A759-6A51-4108-AA02-DFA0A04FC94B}">
+              <ma14:wrappingTextBoxFlag xmlns:ma14="http://schemas.microsoft.com/office/mac/drawingml/2011/main" val="0"/>
+            </a:ext>
+          </a:extLst>
+        </p:spPr>
+        <p:txBody>
+          <a:bodyPr anchor="ctr"/>
+          <a:lstStyle>
+            <a:lvl1pPr>
+              <a:defRPr sz="1800">
+                <a:solidFill>
+                  <a:srgbClr val="FFFFFF"/>
+                </a:solidFill>
+                <a:latin typeface="Calibri"/>
+                <a:ea typeface="Calibri"/>
+                <a:cs typeface="Calibri"/>
+              </a:defRPr>
+            </a:lvl1pPr>
+          </a:lstStyle>
+          <a:p>
+            <a:pPr algn="ctr"/>
+            <a:fld id="{F7021451-1387-4CA6-816F-3879F97B5CBC}" type="slidenum">
+              <a:rPr b="1" lang="en-US"/>
+              <a:t>5</a:t>
+            </a:fld>
+            <a:endParaRPr lang="en-US"/>
+          </a:p>
+        </p:txBody>
+      </p:sp>
+    </p:spTree>
+  </p:cSld>
+  <p:clrMapOvr>
+    <a:masterClrMapping/>
+  </p:clrMapOvr>
+</p:sld>
+</file>
+
+<file path=ppt/slides/slide6.xml><?xml version="1.0" encoding="utf-8"?>
+<p:sld xmlns:a="http://schemas.openxmlformats.org/drawingml/2006/main" xmlns:r="http://schemas.openxmlformats.org/officeDocument/2006/relationships" xmlns:p="http://schemas.openxmlformats.org/presentationml/2006/main">
+  <p:cSld name="Slide 6">
+    <p:bg>
+      <p:bgPr>
+        <a:solidFill>
+          <a:srgbClr val="FFFFFF"/>
+        </a:solidFill>
+      </p:bgPr>
+    </p:bg>
+    <p:spTree>
+      <p:nvGrpSpPr>
+        <p:cNvPr id="1" name=""/>
+        <p:cNvGrpSpPr/>
+        <p:nvPr/>
+      </p:nvGrpSpPr>
+      <p:grpSpPr>
+        <a:xfrm>
+          <a:off x="0" y="0"/>
+          <a:ext cx="0" cy="0"/>
+          <a:chOff x="0" y="0"/>
+          <a:chExt cx="0" cy="0"/>
+        </a:xfrm>
+      </p:grpSpPr>
+      <p:sp>
+        <p:nvSpPr>
+          <p:cNvPr id="2" name="Text 0"/>
+          <p:cNvSpPr txBox="1"/>
+          <p:nvPr/>
+        </p:nvSpPr>
+        <p:spPr>
+          <a:xfrm>
+            <a:off x="457200" y="201168"/>
+            <a:ext cx="7863840" cy="274320"/>
+          </a:xfrm>
+          <a:prstGeom prst="rect">
+            <a:avLst/>
+          </a:prstGeom>
+          <a:noFill/>
+          <a:ln/>
+        </p:spPr>
+        <p:txBody>
+          <a:bodyPr wrap="square" lIns="0" tIns="0" rIns="0" bIns="0" rtlCol="0" anchor="ctr"/>
+          <a:lstStyle/>
+          <a:p>
+            <a:pPr indent="0" marL="0">
+              <a:buNone/>
+            </a:pPr>
+            <a:r>
+              <a:rPr lang="en-US" sz="1300" b="1" spc="300" kern="0" dirty="0">
+                <a:solidFill>
+                  <a:srgbClr val="A66A00"/>
+                </a:solidFill>
+                <a:latin typeface="Calibri" pitchFamily="34" charset="0"/>
+                <a:ea typeface="Calibri" pitchFamily="34" charset="-122"/>
+                <a:cs typeface="Calibri" pitchFamily="34" charset="-120"/>
+              </a:rPr>
+              <a:t>02 - ANATOMÍA</a:t>
+            </a:r>
+            <a:endParaRPr lang="en-US" sz="1300" dirty="0"/>
+          </a:p>
+        </p:txBody>
+      </p:sp>
+      <p:sp>
+        <p:nvSpPr>
+          <p:cNvPr id="3" name="Text 1"/>
+          <p:cNvSpPr txBox="1"/>
+          <p:nvPr/>
+        </p:nvSpPr>
+        <p:spPr>
+          <a:xfrm>
+            <a:off x="457200" y="457200"/>
+            <a:ext cx="8229600" cy="658368"/>
+          </a:xfrm>
+          <a:prstGeom prst="rect">
+            <a:avLst/>
+          </a:prstGeom>
+          <a:noFill/>
+          <a:ln/>
+        </p:spPr>
+        <p:txBody>
+          <a:bodyPr wrap="square" lIns="0" tIns="0" rIns="0" bIns="0" rtlCol="0" anchor="ctr"/>
+          <a:lstStyle/>
+          <a:p>
+            <a:pPr indent="0" marL="0">
+              <a:buNone/>
+            </a:pPr>
+            <a:r>
+              <a:rPr lang="en-US" sz="3000" b="1" dirty="0">
+                <a:solidFill>
+                  <a:srgbClr val="15193A"/>
+                </a:solidFill>
+                <a:latin typeface="Calibri" pitchFamily="34" charset="0"/>
+                <a:ea typeface="Calibri" pitchFamily="34" charset="-122"/>
+                <a:cs typeface="Calibri" pitchFamily="34" charset="-120"/>
+              </a:rPr>
+              <a:t>¿Cómo se clasifican los grampositivos?</a:t>
+            </a:r>
+            <a:endParaRPr lang="en-US" sz="3000" dirty="0"/>
+          </a:p>
+        </p:txBody>
+      </p:sp>
+      <p:sp>
+        <p:nvSpPr>
+          <p:cNvPr id="4" name="Shape 2"/>
+          <p:cNvSpPr/>
+          <p:nvPr/>
+        </p:nvSpPr>
+        <p:spPr>
+          <a:xfrm>
+            <a:off x="457200" y="4480560"/>
+            <a:ext cx="7589520" cy="0"/>
+          </a:xfrm>
+          <a:prstGeom prst="line">
+            <a:avLst/>
+          </a:prstGeom>
+          <a:noFill/>
+          <a:ln w="9525">
+            <a:solidFill>
+              <a:srgbClr val="D7DCEF"/>
+            </a:solidFill>
+            <a:prstDash val="solid"/>
+          </a:ln>
+        </p:spPr>
+      </p:sp>
+      <p:sp>
+        <p:nvSpPr>
+          <p:cNvPr id="5" name="Text 3"/>
+          <p:cNvSpPr txBox="1"/>
+          <p:nvPr/>
+        </p:nvSpPr>
+        <p:spPr>
+          <a:xfrm>
+            <a:off x="457200" y="4526280"/>
+            <a:ext cx="7635240" cy="548640"/>
+          </a:xfrm>
+          <a:prstGeom prst="rect">
+            <a:avLst/>
+          </a:prstGeom>
+          <a:noFill/>
+          <a:ln/>
+        </p:spPr>
+        <p:txBody>
+          <a:bodyPr wrap="square" lIns="0" tIns="0" rIns="0" bIns="0" rtlCol="0" anchor="ctr"/>
+          <a:lstStyle/>
+          <a:p>
+            <a:pPr indent="0" marL="0">
+              <a:buNone/>
+            </a:pPr>
+            <a:r>
+              <a:rPr lang="en-US" sz="900" dirty="0">
+                <a:solidFill>
+                  <a:srgbClr val="51597F"/>
+                </a:solidFill>
+                <a:latin typeface="Calibri" pitchFamily="34" charset="0"/>
+                <a:ea typeface="Calibri" pitchFamily="34" charset="-122"/>
+                <a:cs typeface="Calibri" pitchFamily="34" charset="-120"/>
+              </a:rPr>
+              <a:t>1. Cheung GYC, Bae JS, Otto M. Pathogenicity and virulence of Staphylococcus aureus. Virulence. 2021;12(1):547-69.</a:t>
+            </a:r>
+            <a:endParaRPr lang="en-US" sz="900" dirty="0"/>
+          </a:p>
+          <a:p>
+            <a:pPr indent="0" marL="0">
+              <a:buNone/>
+            </a:pPr>
+            <a:r>
+              <a:rPr lang="en-US" sz="900" dirty="0">
+                <a:solidFill>
+                  <a:srgbClr val="51597F"/>
+                </a:solidFill>
+                <a:latin typeface="Calibri" pitchFamily="34" charset="0"/>
+                <a:ea typeface="Calibri" pitchFamily="34" charset="-122"/>
+                <a:cs typeface="Calibri" pitchFamily="34" charset="-120"/>
+              </a:rPr>
+              <a:t>2. Brouwer S, Rivera-Hernandez T, Curren BF, Harbison-Price N, De Oliveira DMP, Jespersen MG, et al. Pathogenesis, epidemiology and control of Group A Streptococcus infection. Nat Rev Microbiol. 2023;21(7):431-47.</a:t>
+            </a:r>
+            <a:endParaRPr lang="en-US" sz="900" dirty="0"/>
+          </a:p>
+        </p:txBody>
+      </p:sp>
+      <p:sp>
+        <p:nvSpPr>
+          <p:cNvPr id="6" name="Shape 4"/>
+          <p:cNvSpPr/>
+          <p:nvPr/>
+        </p:nvSpPr>
+        <p:spPr>
+          <a:xfrm>
+            <a:off x="8247888" y="4535424"/>
+            <a:ext cx="420624" cy="420624"/>
+          </a:xfrm>
+          <a:prstGeom prst="ellipse">
+            <a:avLst/>
+          </a:prstGeom>
+          <a:solidFill>
+            <a:srgbClr val="0A0E1F"/>
+          </a:solidFill>
+          <a:ln w="15875">
+            <a:solidFill>
+              <a:srgbClr val="3A4165"/>
+            </a:solidFill>
+            <a:prstDash val="solid"/>
+          </a:ln>
+        </p:spPr>
+      </p:sp>
+      <p:sp>
+        <p:nvSpPr>
+          <p:cNvPr id="7" name="Shape 5"/>
+          <p:cNvSpPr/>
+          <p:nvPr/>
+        </p:nvSpPr>
+        <p:spPr>
+          <a:xfrm>
+            <a:off x="457200" y="1234440"/>
+            <a:ext cx="4023360" cy="1554480"/>
+          </a:xfrm>
+          <a:prstGeom prst="roundRect">
+            <a:avLst>
+              <a:gd name="adj" fmla="val 5882"/>
+            </a:avLst>
+          </a:prstGeom>
+          <a:solidFill>
+            <a:srgbClr val="F4F6FD"/>
+          </a:solidFill>
+          <a:ln w="19050">
+            <a:solidFill>
+              <a:srgbClr val="F2B43C"/>
+            </a:solidFill>
+            <a:prstDash val="solid"/>
+          </a:ln>
+        </p:spPr>
+      </p:sp>
+      <p:pic>
+        <p:nvPicPr>
+          <p:cNvPr id="8" name="Image 0" descr="preencoded.png">    </p:cNvPr>
+          <p:cNvPicPr>
+            <a:picLocks noChangeAspect="1"/>
+          </p:cNvPicPr>
+          <p:nvPr/>
+        </p:nvPicPr>
+        <p:blipFill>
+          <a:blip r:embed="rId1"/>
+          <a:srcRect l="0" r="0" t="0" b="0"/>
+          <a:stretch/>
+        </p:blipFill>
+        <p:spPr>
+          <a:xfrm>
+            <a:off x="566928" y="1344168"/>
+            <a:ext cx="1371600" cy="1335024"/>
+          </a:xfrm>
+          <a:prstGeom prst="ellipse">
+            <a:avLst/>
+          </a:prstGeom>
+        </p:spPr>
+      </p:pic>
+      <p:sp>
+        <p:nvSpPr>
+          <p:cNvPr id="9" name="Text 6"/>
+          <p:cNvSpPr txBox="1"/>
+          <p:nvPr/>
+        </p:nvSpPr>
+        <p:spPr>
+          <a:xfrm>
+            <a:off x="2057400" y="1371600"/>
+            <a:ext cx="2331720" cy="320040"/>
+          </a:xfrm>
+          <a:prstGeom prst="rect">
+            <a:avLst/>
+          </a:prstGeom>
+          <a:noFill/>
+          <a:ln/>
+        </p:spPr>
+        <p:txBody>
+          <a:bodyPr wrap="square" lIns="0" tIns="0" rIns="0" bIns="0" rtlCol="0" anchor="t"/>
+          <a:lstStyle/>
+          <a:p>
+            <a:pPr indent="0" marL="0">
+              <a:buNone/>
+            </a:pPr>
+            <a:r>
+              <a:rPr lang="en-US" sz="1500" b="1" dirty="0">
+                <a:solidFill>
+                  <a:srgbClr val="A66A00"/>
+                </a:solidFill>
+                <a:latin typeface="Calibri" pitchFamily="34" charset="0"/>
+                <a:ea typeface="Calibri" pitchFamily="34" charset="-122"/>
+                <a:cs typeface="Calibri" pitchFamily="34" charset="-120"/>
+              </a:rPr>
+              <a:t>Cocos en racimos</a:t>
+            </a:r>
+            <a:endParaRPr lang="en-US" sz="1500" dirty="0"/>
+          </a:p>
+        </p:txBody>
+      </p:sp>
+      <p:sp>
+        <p:nvSpPr>
+          <p:cNvPr id="10" name="Text 7"/>
+          <p:cNvSpPr txBox="1"/>
+          <p:nvPr/>
+        </p:nvSpPr>
+        <p:spPr>
+          <a:xfrm>
+            <a:off x="2057400" y="1709928"/>
+            <a:ext cx="2331720" cy="411480"/>
+          </a:xfrm>
+          <a:prstGeom prst="rect">
+            <a:avLst/>
+          </a:prstGeom>
+          <a:noFill/>
+          <a:ln/>
+        </p:spPr>
+        <p:txBody>
+          <a:bodyPr wrap="square" lIns="0" tIns="0" rIns="0" bIns="0" rtlCol="0" anchor="t"/>
+          <a:lstStyle/>
+          <a:p>
+            <a:pPr indent="0" marL="0">
+              <a:buNone/>
+            </a:pPr>
+            <a:r>
+              <a:rPr lang="en-US" sz="1350" b="1" i="1" dirty="0">
+                <a:solidFill>
+                  <a:srgbClr val="15193A"/>
+                </a:solidFill>
+                <a:latin typeface="Calibri" pitchFamily="34" charset="0"/>
+                <a:ea typeface="Calibri" pitchFamily="34" charset="-122"/>
+                <a:cs typeface="Calibri" pitchFamily="34" charset="-120"/>
+              </a:rPr>
+              <a:t>Staphylococcus</a:t>
+            </a:r>
+            <a:endParaRPr lang="en-US" sz="1350" dirty="0"/>
+          </a:p>
+        </p:txBody>
+      </p:sp>
+      <p:sp>
+        <p:nvSpPr>
+          <p:cNvPr id="11" name="Text 8"/>
+          <p:cNvSpPr txBox="1"/>
+          <p:nvPr/>
+        </p:nvSpPr>
+        <p:spPr>
+          <a:xfrm>
+            <a:off x="2057400" y="2130552"/>
+            <a:ext cx="2331720" cy="594360"/>
+          </a:xfrm>
+          <a:prstGeom prst="rect">
+            <a:avLst/>
+          </a:prstGeom>
+          <a:noFill/>
+          <a:ln/>
+        </p:spPr>
+        <p:txBody>
+          <a:bodyPr wrap="square" lIns="0" tIns="0" rIns="0" bIns="0" rtlCol="0" anchor="t"/>
+          <a:lstStyle/>
+          <a:p>
+            <a:pPr indent="0" marL="0">
+              <a:buNone/>
+            </a:pPr>
+            <a:r>
+              <a:rPr lang="en-US" sz="1150" dirty="0">
+                <a:solidFill>
+                  <a:srgbClr val="51597F"/>
+                </a:solidFill>
+                <a:latin typeface="Calibri" pitchFamily="34" charset="0"/>
+                <a:ea typeface="Calibri" pitchFamily="34" charset="-122"/>
+                <a:cs typeface="Calibri" pitchFamily="34" charset="-120"/>
+              </a:rPr>
+              <a:t>S. aureus, S. epidermidis, S. saprophyticus</a:t>
+            </a:r>
+            <a:endParaRPr lang="en-US" sz="1150" dirty="0"/>
+          </a:p>
+        </p:txBody>
+      </p:sp>
+      <p:sp>
+        <p:nvSpPr>
+          <p:cNvPr id="12" name="Shape 9"/>
+          <p:cNvSpPr/>
+          <p:nvPr/>
+        </p:nvSpPr>
+        <p:spPr>
+          <a:xfrm>
+            <a:off x="4663440" y="1234440"/>
+            <a:ext cx="4023360" cy="1554480"/>
+          </a:xfrm>
+          <a:prstGeom prst="roundRect">
+            <a:avLst>
+              <a:gd name="adj" fmla="val 5882"/>
+            </a:avLst>
+          </a:prstGeom>
+          <a:solidFill>
+            <a:srgbClr val="F4F6FD"/>
+          </a:solidFill>
+          <a:ln w="19050">
+            <a:solidFill>
+              <a:srgbClr val="F2546B"/>
+            </a:solidFill>
+            <a:prstDash val="solid"/>
+          </a:ln>
+        </p:spPr>
+      </p:sp>
+      <p:pic>
+        <p:nvPicPr>
+          <p:cNvPr id="13" name="Image 1" descr="preencoded.png">    </p:cNvPr>
+          <p:cNvPicPr>
+            <a:picLocks noChangeAspect="1"/>
+          </p:cNvPicPr>
+          <p:nvPr/>
+        </p:nvPicPr>
+        <p:blipFill>
+          <a:blip r:embed="rId2"/>
+          <a:srcRect l="0" r="0" t="0" b="0"/>
+          <a:stretch/>
+        </p:blipFill>
+        <p:spPr>
+          <a:xfrm>
+            <a:off x="4773168" y="1344168"/>
+            <a:ext cx="1371600" cy="1335024"/>
+          </a:xfrm>
+          <a:prstGeom prst="ellipse">
+            <a:avLst/>
+          </a:prstGeom>
+        </p:spPr>
+      </p:pic>
+      <p:sp>
+        <p:nvSpPr>
+          <p:cNvPr id="14" name="Text 10"/>
+          <p:cNvSpPr txBox="1"/>
+          <p:nvPr/>
+        </p:nvSpPr>
+        <p:spPr>
+          <a:xfrm>
+            <a:off x="6263640" y="1371600"/>
+            <a:ext cx="2331720" cy="320040"/>
+          </a:xfrm>
+          <a:prstGeom prst="rect">
+            <a:avLst/>
+          </a:prstGeom>
+          <a:noFill/>
+          <a:ln/>
+        </p:spPr>
+        <p:txBody>
+          <a:bodyPr wrap="square" lIns="0" tIns="0" rIns="0" bIns="0" rtlCol="0" anchor="t"/>
+          <a:lstStyle/>
+          <a:p>
+            <a:pPr indent="0" marL="0">
+              <a:buNone/>
+            </a:pPr>
+            <a:r>
+              <a:rPr lang="en-US" sz="1500" b="1" dirty="0">
+                <a:solidFill>
+                  <a:srgbClr val="C81E43"/>
+                </a:solidFill>
+                <a:latin typeface="Calibri" pitchFamily="34" charset="0"/>
+                <a:ea typeface="Calibri" pitchFamily="34" charset="-122"/>
+                <a:cs typeface="Calibri" pitchFamily="34" charset="-120"/>
+              </a:rPr>
+              <a:t>Cocos en cadenas</a:t>
+            </a:r>
+            <a:endParaRPr lang="en-US" sz="1500" dirty="0"/>
+          </a:p>
+        </p:txBody>
+      </p:sp>
+      <p:sp>
+        <p:nvSpPr>
+          <p:cNvPr id="15" name="Text 11"/>
+          <p:cNvSpPr txBox="1"/>
+          <p:nvPr/>
+        </p:nvSpPr>
+        <p:spPr>
+          <a:xfrm>
+            <a:off x="6263640" y="1709928"/>
+            <a:ext cx="2331720" cy="411480"/>
+          </a:xfrm>
+          <a:prstGeom prst="rect">
+            <a:avLst/>
+          </a:prstGeom>
+          <a:noFill/>
+          <a:ln/>
+        </p:spPr>
+        <p:txBody>
+          <a:bodyPr wrap="square" lIns="0" tIns="0" rIns="0" bIns="0" rtlCol="0" anchor="t"/>
+          <a:lstStyle/>
+          <a:p>
+            <a:pPr indent="0" marL="0">
+              <a:buNone/>
+            </a:pPr>
+            <a:r>
+              <a:rPr lang="en-US" sz="1350" b="1" i="1" dirty="0">
+                <a:solidFill>
+                  <a:srgbClr val="15193A"/>
+                </a:solidFill>
+                <a:latin typeface="Calibri" pitchFamily="34" charset="0"/>
+                <a:ea typeface="Calibri" pitchFamily="34" charset="-122"/>
+                <a:cs typeface="Calibri" pitchFamily="34" charset="-120"/>
+              </a:rPr>
+              <a:t>Streptococcus / Enterococcus</a:t>
+            </a:r>
+            <a:endParaRPr lang="en-US" sz="1350" dirty="0"/>
+          </a:p>
+        </p:txBody>
+      </p:sp>
+      <p:sp>
+        <p:nvSpPr>
+          <p:cNvPr id="16" name="Text 12"/>
+          <p:cNvSpPr txBox="1"/>
+          <p:nvPr/>
+        </p:nvSpPr>
+        <p:spPr>
+          <a:xfrm>
+            <a:off x="6263640" y="2130552"/>
+            <a:ext cx="2331720" cy="594360"/>
+          </a:xfrm>
+          <a:prstGeom prst="rect">
+            <a:avLst/>
+          </a:prstGeom>
+          <a:noFill/>
+          <a:ln/>
+        </p:spPr>
+        <p:txBody>
+          <a:bodyPr wrap="square" lIns="0" tIns="0" rIns="0" bIns="0" rtlCol="0" anchor="t"/>
+          <a:lstStyle/>
+          <a:p>
+            <a:pPr indent="0" marL="0">
+              <a:buNone/>
+            </a:pPr>
+            <a:r>
+              <a:rPr lang="en-US" sz="1150" dirty="0">
+                <a:solidFill>
+                  <a:srgbClr val="51597F"/>
+                </a:solidFill>
+                <a:latin typeface="Calibri" pitchFamily="34" charset="0"/>
+                <a:ea typeface="Calibri" pitchFamily="34" charset="-122"/>
+                <a:cs typeface="Calibri" pitchFamily="34" charset="-120"/>
+              </a:rPr>
+              <a:t>S. pyogenes, S. agalactiae, S. pneumoniae</a:t>
+            </a:r>
+            <a:endParaRPr lang="en-US" sz="1150" dirty="0"/>
+          </a:p>
+        </p:txBody>
+      </p:sp>
+      <p:sp>
+        <p:nvSpPr>
+          <p:cNvPr id="17" name="Shape 13"/>
+          <p:cNvSpPr/>
+          <p:nvPr/>
+        </p:nvSpPr>
+        <p:spPr>
+          <a:xfrm>
+            <a:off x="457200" y="2880360"/>
+            <a:ext cx="4023360" cy="1554480"/>
+          </a:xfrm>
+          <a:prstGeom prst="roundRect">
+            <a:avLst>
+              <a:gd name="adj" fmla="val 5882"/>
+            </a:avLst>
+          </a:prstGeom>
+          <a:solidFill>
+            <a:srgbClr val="F4F6FD"/>
+          </a:solidFill>
+          <a:ln w="19050">
+            <a:solidFill>
+              <a:srgbClr val="2EC4B6"/>
+            </a:solidFill>
+            <a:prstDash val="solid"/>
+          </a:ln>
+        </p:spPr>
+      </p:sp>
+      <p:pic>
+        <p:nvPicPr>
+          <p:cNvPr id="18" name="Image 2" descr="preencoded.png">    </p:cNvPr>
+          <p:cNvPicPr>
+            <a:picLocks noChangeAspect="1"/>
+          </p:cNvPicPr>
+          <p:nvPr/>
+        </p:nvPicPr>
+        <p:blipFill>
+          <a:blip r:embed="rId3"/>
+          <a:srcRect l="0" r="0" t="0" b="0"/>
+          <a:stretch/>
+        </p:blipFill>
+        <p:spPr>
+          <a:xfrm>
+            <a:off x="566928" y="2990088"/>
+            <a:ext cx="1371600" cy="1335024"/>
+          </a:xfrm>
+          <a:prstGeom prst="ellipse">
+            <a:avLst/>
+          </a:prstGeom>
+        </p:spPr>
+      </p:pic>
+      <p:sp>
+        <p:nvSpPr>
+          <p:cNvPr id="19" name="Text 14"/>
+          <p:cNvSpPr txBox="1"/>
+          <p:nvPr/>
+        </p:nvSpPr>
+        <p:spPr>
+          <a:xfrm>
+            <a:off x="2057400" y="3017520"/>
+            <a:ext cx="2331720" cy="320040"/>
+          </a:xfrm>
+          <a:prstGeom prst="rect">
+            <a:avLst/>
+          </a:prstGeom>
+          <a:noFill/>
+          <a:ln/>
+        </p:spPr>
+        <p:txBody>
+          <a:bodyPr wrap="square" lIns="0" tIns="0" rIns="0" bIns="0" rtlCol="0" anchor="t"/>
+          <a:lstStyle/>
+          <a:p>
+            <a:pPr indent="0" marL="0">
+              <a:buNone/>
+            </a:pPr>
+            <a:r>
+              <a:rPr lang="en-US" sz="1500" b="1" dirty="0">
+                <a:solidFill>
+                  <a:srgbClr val="0C8368"/>
+                </a:solidFill>
+                <a:latin typeface="Calibri" pitchFamily="34" charset="0"/>
+                <a:ea typeface="Calibri" pitchFamily="34" charset="-122"/>
+                <a:cs typeface="Calibri" pitchFamily="34" charset="-120"/>
+              </a:rPr>
+              <a:t>Bacilos esporulados</a:t>
+            </a:r>
+            <a:endParaRPr lang="en-US" sz="1500" dirty="0"/>
+          </a:p>
+        </p:txBody>
+      </p:sp>
+      <p:sp>
+        <p:nvSpPr>
+          <p:cNvPr id="20" name="Text 15"/>
+          <p:cNvSpPr txBox="1"/>
+          <p:nvPr/>
+        </p:nvSpPr>
+        <p:spPr>
+          <a:xfrm>
+            <a:off x="2057400" y="3355848"/>
+            <a:ext cx="2331720" cy="411480"/>
+          </a:xfrm>
+          <a:prstGeom prst="rect">
+            <a:avLst/>
+          </a:prstGeom>
+          <a:noFill/>
+          <a:ln/>
+        </p:spPr>
+        <p:txBody>
+          <a:bodyPr wrap="square" lIns="0" tIns="0" rIns="0" bIns="0" rtlCol="0" anchor="t"/>
+          <a:lstStyle/>
+          <a:p>
+            <a:pPr indent="0" marL="0">
+              <a:buNone/>
+            </a:pPr>
+            <a:r>
+              <a:rPr lang="en-US" sz="1350" b="1" i="1" dirty="0">
+                <a:solidFill>
+                  <a:srgbClr val="15193A"/>
+                </a:solidFill>
+                <a:latin typeface="Calibri" pitchFamily="34" charset="0"/>
+                <a:ea typeface="Calibri" pitchFamily="34" charset="-122"/>
+                <a:cs typeface="Calibri" pitchFamily="34" charset="-120"/>
+              </a:rPr>
+              <a:t>Clostridium · Bacillus</a:t>
+            </a:r>
+            <a:endParaRPr lang="en-US" sz="1350" dirty="0"/>
+          </a:p>
+        </p:txBody>
+      </p:sp>
+      <p:sp>
+        <p:nvSpPr>
+          <p:cNvPr id="21" name="Text 16"/>
+          <p:cNvSpPr txBox="1"/>
+          <p:nvPr/>
+        </p:nvSpPr>
+        <p:spPr>
+          <a:xfrm>
+            <a:off x="2057400" y="3776472"/>
+            <a:ext cx="2331720" cy="594360"/>
+          </a:xfrm>
+          <a:prstGeom prst="rect">
+            <a:avLst/>
+          </a:prstGeom>
+          <a:noFill/>
+          <a:ln/>
+        </p:spPr>
+        <p:txBody>
+          <a:bodyPr wrap="square" lIns="0" tIns="0" rIns="0" bIns="0" rtlCol="0" anchor="t"/>
+          <a:lstStyle/>
+          <a:p>
+            <a:pPr indent="0" marL="0">
+              <a:buNone/>
+            </a:pPr>
+            <a:r>
+              <a:rPr lang="en-US" sz="1150" dirty="0">
+                <a:solidFill>
+                  <a:srgbClr val="51597F"/>
+                </a:solidFill>
+                <a:latin typeface="Calibri" pitchFamily="34" charset="0"/>
+                <a:ea typeface="Calibri" pitchFamily="34" charset="-122"/>
+                <a:cs typeface="Calibri" pitchFamily="34" charset="-120"/>
+              </a:rPr>
+              <a:t>C. difficile, C. tetani, B. anthracis</a:t>
+            </a:r>
+            <a:endParaRPr lang="en-US" sz="1150" dirty="0"/>
+          </a:p>
+        </p:txBody>
+      </p:sp>
+      <p:sp>
+        <p:nvSpPr>
+          <p:cNvPr id="22" name="Shape 17"/>
+          <p:cNvSpPr/>
+          <p:nvPr/>
+        </p:nvSpPr>
+        <p:spPr>
+          <a:xfrm>
+            <a:off x="4663440" y="2880360"/>
+            <a:ext cx="4023360" cy="1554480"/>
+          </a:xfrm>
+          <a:prstGeom prst="roundRect">
+            <a:avLst>
+              <a:gd name="adj" fmla="val 5882"/>
+            </a:avLst>
+          </a:prstGeom>
+          <a:solidFill>
+            <a:srgbClr val="F4F6FD"/>
+          </a:solidFill>
+          <a:ln w="19050">
+            <a:solidFill>
+              <a:srgbClr val="A78BFA"/>
+            </a:solidFill>
+            <a:prstDash val="solid"/>
+          </a:ln>
+        </p:spPr>
+      </p:sp>
+      <p:pic>
+        <p:nvPicPr>
+          <p:cNvPr id="23" name="Image 3" descr="preencoded.png">    </p:cNvPr>
+          <p:cNvPicPr>
+            <a:picLocks noChangeAspect="1"/>
+          </p:cNvPicPr>
+          <p:nvPr/>
+        </p:nvPicPr>
+        <p:blipFill>
+          <a:blip r:embed="rId4"/>
+          <a:srcRect l="0" r="0" t="0" b="0"/>
+          <a:stretch/>
+        </p:blipFill>
+        <p:spPr>
+          <a:xfrm>
+            <a:off x="4773168" y="2990088"/>
+            <a:ext cx="1371600" cy="1335024"/>
+          </a:xfrm>
+          <a:prstGeom prst="ellipse">
+            <a:avLst/>
+          </a:prstGeom>
+        </p:spPr>
+      </p:pic>
+      <p:sp>
+        <p:nvSpPr>
+          <p:cNvPr id="24" name="Text 18"/>
+          <p:cNvSpPr txBox="1"/>
+          <p:nvPr/>
+        </p:nvSpPr>
+        <p:spPr>
+          <a:xfrm>
+            <a:off x="6263640" y="3017520"/>
+            <a:ext cx="2331720" cy="320040"/>
+          </a:xfrm>
+          <a:prstGeom prst="rect">
+            <a:avLst/>
+          </a:prstGeom>
+          <a:noFill/>
+          <a:ln/>
+        </p:spPr>
+        <p:txBody>
+          <a:bodyPr wrap="square" lIns="0" tIns="0" rIns="0" bIns="0" rtlCol="0" anchor="t"/>
+          <a:lstStyle/>
+          <a:p>
+            <a:pPr indent="0" marL="0">
+              <a:buNone/>
+            </a:pPr>
+            <a:r>
+              <a:rPr lang="en-US" sz="1500" b="1" dirty="0">
+                <a:solidFill>
+                  <a:srgbClr val="6A4CCF"/>
+                </a:solidFill>
+                <a:latin typeface="Calibri" pitchFamily="34" charset="0"/>
+                <a:ea typeface="Calibri" pitchFamily="34" charset="-122"/>
+                <a:cs typeface="Calibri" pitchFamily="34" charset="-120"/>
+              </a:rPr>
+              <a:t>Bacilos no esporulados</a:t>
+            </a:r>
+            <a:endParaRPr lang="en-US" sz="1500" dirty="0"/>
+          </a:p>
+        </p:txBody>
+      </p:sp>
+      <p:sp>
+        <p:nvSpPr>
+          <p:cNvPr id="25" name="Text 19"/>
+          <p:cNvSpPr txBox="1"/>
+          <p:nvPr/>
+        </p:nvSpPr>
+        <p:spPr>
+          <a:xfrm>
+            <a:off x="6263640" y="3355848"/>
+            <a:ext cx="2331720" cy="411480"/>
+          </a:xfrm>
+          <a:prstGeom prst="rect">
+            <a:avLst/>
+          </a:prstGeom>
+          <a:noFill/>
+          <a:ln/>
+        </p:spPr>
+        <p:txBody>
+          <a:bodyPr wrap="square" lIns="0" tIns="0" rIns="0" bIns="0" rtlCol="0" anchor="t"/>
+          <a:lstStyle/>
+          <a:p>
+            <a:pPr indent="0" marL="0">
+              <a:buNone/>
+            </a:pPr>
+            <a:r>
+              <a:rPr lang="en-US" sz="1350" b="1" i="1" dirty="0">
+                <a:solidFill>
+                  <a:srgbClr val="15193A"/>
+                </a:solidFill>
+                <a:latin typeface="Calibri" pitchFamily="34" charset="0"/>
+                <a:ea typeface="Calibri" pitchFamily="34" charset="-122"/>
+                <a:cs typeface="Calibri" pitchFamily="34" charset="-120"/>
+              </a:rPr>
+              <a:t>Listeria · Corynebacterium</a:t>
+            </a:r>
+            <a:endParaRPr lang="en-US" sz="1350" dirty="0"/>
+          </a:p>
+        </p:txBody>
+      </p:sp>
+      <p:sp>
+        <p:nvSpPr>
+          <p:cNvPr id="26" name="Text 20"/>
+          <p:cNvSpPr txBox="1"/>
+          <p:nvPr/>
+        </p:nvSpPr>
+        <p:spPr>
+          <a:xfrm>
+            <a:off x="6263640" y="3776472"/>
+            <a:ext cx="2331720" cy="594360"/>
+          </a:xfrm>
+          <a:prstGeom prst="rect">
+            <a:avLst/>
+          </a:prstGeom>
+          <a:noFill/>
+          <a:ln/>
+        </p:spPr>
+        <p:txBody>
+          <a:bodyPr wrap="square" lIns="0" tIns="0" rIns="0" bIns="0" rtlCol="0" anchor="t"/>
+          <a:lstStyle/>
+          <a:p>
+            <a:pPr indent="0" marL="0">
+              <a:buNone/>
+            </a:pPr>
+            <a:r>
+              <a:rPr lang="en-US" sz="1150" dirty="0">
+                <a:solidFill>
+                  <a:srgbClr val="51597F"/>
+                </a:solidFill>
+                <a:latin typeface="Calibri" pitchFamily="34" charset="0"/>
+                <a:ea typeface="Calibri" pitchFamily="34" charset="-122"/>
+                <a:cs typeface="Calibri" pitchFamily="34" charset="-120"/>
+              </a:rPr>
+              <a:t>L. monocytogenes, C. diphtheriae</a:t>
+            </a:r>
+            <a:endParaRPr lang="en-US" sz="1150" dirty="0"/>
+          </a:p>
+        </p:txBody>
+      </p:sp>
+      <p:sp>
+        <p:nvSpPr>
+          <p:cNvPr id="25" name="Slide Number Placeholder 0"/>
+          <p:cNvSpPr>
+            <a:spLocks noGrp="1"/>
+          </p:cNvSpPr>
+          <p:nvPr>
+            <p:ph type="sldNum" sz="quarter" idx="4294967295"/>
+          </p:nvPr>
+        </p:nvSpPr>
+        <p:spPr>
+          <a:xfrm>
+            <a:off x="8247888" y="4535424"/>
+            <a:ext cx="420624" cy="420624"/>
+          </a:xfrm>
+          <a:prstGeom prst="rect">
+            <a:avLst/>
+          </a:prstGeom>
+          <a:extLst>
+            <a:ext uri="{C572A759-6A51-4108-AA02-DFA0A04FC94B}">
+              <ma14:wrappingTextBoxFlag xmlns:ma14="http://schemas.microsoft.com/office/mac/drawingml/2011/main" val="0"/>
+            </a:ext>
+          </a:extLst>
+        </p:spPr>
+        <p:txBody>
+          <a:bodyPr anchor="ctr"/>
+          <a:lstStyle>
+            <a:lvl1pPr>
+              <a:defRPr sz="1800">
+                <a:solidFill>
+                  <a:srgbClr val="FFFFFF"/>
+                </a:solidFill>
+                <a:latin typeface="Calibri"/>
+                <a:ea typeface="Calibri"/>
+                <a:cs typeface="Calibri"/>
+              </a:defRPr>
+            </a:lvl1pPr>
+          </a:lstStyle>
+          <a:p>
+            <a:pPr algn="ctr"/>
+            <a:fld id="{F7021451-1387-4CA6-816F-3879F97B5CBC}" type="slidenum">
+              <a:rPr b="1" lang="en-US"/>
+              <a:t>6</a:t>
+            </a:fld>
+            <a:endParaRPr lang="en-US"/>
+          </a:p>
+        </p:txBody>
+      </p:sp>
+    </p:spTree>
+  </p:cSld>
+  <p:clrMapOvr>
+    <a:masterClrMapping/>
+  </p:clrMapOvr>
+</p:sld>
+</file>
+
+<file path=ppt/slides/slide7.xml><?xml version="1.0" encoding="utf-8"?>
+<p:sld xmlns:a="http://schemas.openxmlformats.org/drawingml/2006/main" xmlns:r="http://schemas.openxmlformats.org/officeDocument/2006/relationships" xmlns:p="http://schemas.openxmlformats.org/presentationml/2006/main">
+  <p:cSld name="Slide 7">
+    <p:bg>
+      <p:bgPr>
+        <a:solidFill>
+          <a:srgbClr val="FFFFFF"/>
+        </a:solidFill>
+      </p:bgPr>
+    </p:bg>
+    <p:spTree>
+      <p:nvGrpSpPr>
+        <p:cNvPr id="1" name=""/>
+        <p:cNvGrpSpPr/>
+        <p:nvPr/>
+      </p:nvGrpSpPr>
+      <p:grpSpPr>
+        <a:xfrm>
+          <a:off x="0" y="0"/>
+          <a:ext cx="0" cy="0"/>
+          <a:chOff x="0" y="0"/>
+          <a:chExt cx="0" cy="0"/>
+        </a:xfrm>
+      </p:grpSpPr>
+      <p:sp>
+        <p:nvSpPr>
+          <p:cNvPr id="2" name="Text 0"/>
+          <p:cNvSpPr txBox="1"/>
+          <p:nvPr/>
+        </p:nvSpPr>
+        <p:spPr>
+          <a:xfrm>
+            <a:off x="457200" y="201168"/>
+            <a:ext cx="7863840" cy="274320"/>
+          </a:xfrm>
+          <a:prstGeom prst="rect">
+            <a:avLst/>
+          </a:prstGeom>
+          <a:noFill/>
+          <a:ln/>
+        </p:spPr>
+        <p:txBody>
+          <a:bodyPr wrap="square" lIns="0" tIns="0" rIns="0" bIns="0" rtlCol="0" anchor="ctr"/>
+          <a:lstStyle/>
+          <a:p>
+            <a:pPr indent="0" marL="0">
+              <a:buNone/>
+            </a:pPr>
+            <a:r>
+              <a:rPr lang="en-US" sz="1300" b="1" spc="300" kern="0" dirty="0">
+                <a:solidFill>
+                  <a:srgbClr val="A66A00"/>
+                </a:solidFill>
+                <a:latin typeface="Calibri" pitchFamily="34" charset="0"/>
+                <a:ea typeface="Calibri" pitchFamily="34" charset="-122"/>
+                <a:cs typeface="Calibri" pitchFamily="34" charset="-120"/>
+              </a:rPr>
+              <a:t>02 - ANATOMÍA</a:t>
+            </a:r>
+            <a:endParaRPr lang="en-US" sz="1300" dirty="0"/>
+          </a:p>
+        </p:txBody>
+      </p:sp>
+      <p:sp>
+        <p:nvSpPr>
+          <p:cNvPr id="3" name="Text 1"/>
+          <p:cNvSpPr txBox="1"/>
+          <p:nvPr/>
+        </p:nvSpPr>
+        <p:spPr>
+          <a:xfrm>
+            <a:off x="457200" y="457200"/>
+            <a:ext cx="8229600" cy="658368"/>
+          </a:xfrm>
+          <a:prstGeom prst="rect">
+            <a:avLst/>
+          </a:prstGeom>
+          <a:noFill/>
+          <a:ln/>
+        </p:spPr>
+        <p:txBody>
+          <a:bodyPr wrap="square" lIns="0" tIns="0" rIns="0" bIns="0" rtlCol="0" anchor="ctr"/>
+          <a:lstStyle/>
+          <a:p>
+            <a:pPr indent="0" marL="0">
+              <a:buNone/>
+            </a:pPr>
+            <a:r>
+              <a:rPr lang="en-US" sz="3000" b="1" dirty="0">
+                <a:solidFill>
+                  <a:srgbClr val="15193A"/>
+                </a:solidFill>
+                <a:latin typeface="Calibri" pitchFamily="34" charset="0"/>
+                <a:ea typeface="Calibri" pitchFamily="34" charset="-122"/>
+                <a:cs typeface="Calibri" pitchFamily="34" charset="-120"/>
+              </a:rPr>
+              <a:t>Estructura de la pared celular grampositiva</a:t>
+            </a:r>
+            <a:endParaRPr lang="en-US" sz="3000" dirty="0"/>
+          </a:p>
+        </p:txBody>
+      </p:sp>
+      <p:sp>
+        <p:nvSpPr>
+          <p:cNvPr id="4" name="Shape 2"/>
+          <p:cNvSpPr/>
+          <p:nvPr/>
+        </p:nvSpPr>
+        <p:spPr>
+          <a:xfrm>
+            <a:off x="457200" y="4480560"/>
+            <a:ext cx="7589520" cy="0"/>
+          </a:xfrm>
+          <a:prstGeom prst="line">
+            <a:avLst/>
+          </a:prstGeom>
+          <a:noFill/>
+          <a:ln w="9525">
+            <a:solidFill>
+              <a:srgbClr val="D7DCEF"/>
+            </a:solidFill>
+            <a:prstDash val="solid"/>
+          </a:ln>
+        </p:spPr>
+      </p:sp>
+      <p:sp>
+        <p:nvSpPr>
+          <p:cNvPr id="5" name="Text 3"/>
+          <p:cNvSpPr txBox="1"/>
+          <p:nvPr/>
+        </p:nvSpPr>
+        <p:spPr>
+          <a:xfrm>
+            <a:off x="457200" y="4526280"/>
+            <a:ext cx="7635240" cy="548640"/>
+          </a:xfrm>
+          <a:prstGeom prst="rect">
+            <a:avLst/>
+          </a:prstGeom>
+          <a:noFill/>
+          <a:ln/>
+        </p:spPr>
+        <p:txBody>
+          <a:bodyPr wrap="square" lIns="0" tIns="0" rIns="0" bIns="0" rtlCol="0" anchor="ctr"/>
+          <a:lstStyle/>
+          <a:p>
+            <a:pPr indent="0" marL="0">
+              <a:buNone/>
+            </a:pPr>
+            <a:r>
+              <a:rPr lang="en-US" sz="900" dirty="0">
+                <a:solidFill>
+                  <a:srgbClr val="51597F"/>
+                </a:solidFill>
+                <a:latin typeface="Calibri" pitchFamily="34" charset="0"/>
+                <a:ea typeface="Calibri" pitchFamily="34" charset="-122"/>
+                <a:cs typeface="Calibri" pitchFamily="34" charset="-120"/>
+              </a:rPr>
+              <a:t>4. Wu X, Han J, Gong G, Koffas MAG, Zha J. Wall teichoic acids: physiology and applications. FEMS Microbiol Rev. 2021;45(4):fuaa064.</a:t>
+            </a:r>
+            <a:endParaRPr lang="en-US" sz="900" dirty="0"/>
+          </a:p>
+          <a:p>
+            <a:pPr indent="0" marL="0">
+              <a:buNone/>
+            </a:pPr>
+            <a:r>
+              <a:rPr lang="en-US" sz="900" dirty="0">
+                <a:solidFill>
+                  <a:srgbClr val="51597F"/>
+                </a:solidFill>
+                <a:latin typeface="Calibri" pitchFamily="34" charset="0"/>
+                <a:ea typeface="Calibri" pitchFamily="34" charset="-122"/>
+                <a:cs typeface="Calibri" pitchFamily="34" charset="-120"/>
+              </a:rPr>
+              <a:t>5. Torrens G, Cava F. Mechanisms conferring bacterial cell wall variability and adaptivity. Biochem Soc Trans. 2024;52(5):1981-93.</a:t>
+            </a:r>
+            <a:endParaRPr lang="en-US" sz="900" dirty="0"/>
+          </a:p>
+        </p:txBody>
+      </p:sp>
+      <p:sp>
+        <p:nvSpPr>
+          <p:cNvPr id="6" name="Shape 4"/>
+          <p:cNvSpPr/>
+          <p:nvPr/>
+        </p:nvSpPr>
+        <p:spPr>
+          <a:xfrm>
+            <a:off x="8247888" y="4535424"/>
+            <a:ext cx="420624" cy="420624"/>
+          </a:xfrm>
+          <a:prstGeom prst="ellipse">
+            <a:avLst/>
+          </a:prstGeom>
+          <a:solidFill>
+            <a:srgbClr val="0A0E1F"/>
+          </a:solidFill>
+          <a:ln w="15875">
+            <a:solidFill>
+              <a:srgbClr val="3A4165"/>
+            </a:solidFill>
+            <a:prstDash val="solid"/>
+          </a:ln>
+        </p:spPr>
+      </p:sp>
+      <p:pic>
+        <p:nvPicPr>
+          <p:cNvPr id="7" name="Image 0" descr="preencoded.png">    </p:cNvPr>
+          <p:cNvPicPr>
+            <a:picLocks noChangeAspect="1"/>
+          </p:cNvPicPr>
+          <p:nvPr/>
+        </p:nvPicPr>
+        <p:blipFill>
+          <a:blip r:embed="rId1"/>
+          <a:stretch>
+            <a:fillRect/>
+          </a:stretch>
+        </p:blipFill>
+        <p:spPr>
+          <a:xfrm>
+            <a:off x="365760" y="1234440"/>
+            <a:ext cx="5029200" cy="3063240"/>
+          </a:xfrm>
+          <a:prstGeom prst="rect">
+            <a:avLst/>
+          </a:prstGeom>
+        </p:spPr>
+      </p:pic>
+      <p:sp>
+        <p:nvSpPr>
+          <p:cNvPr id="8" name="Shape 5"/>
+          <p:cNvSpPr/>
+          <p:nvPr/>
+        </p:nvSpPr>
+        <p:spPr>
+          <a:xfrm>
+            <a:off x="5532120" y="1280160"/>
+            <a:ext cx="3154680" cy="731520"/>
+          </a:xfrm>
+          <a:prstGeom prst="roundRect">
+            <a:avLst>
+              <a:gd name="adj" fmla="val 12500"/>
+            </a:avLst>
+          </a:prstGeom>
+          <a:solidFill>
+            <a:srgbClr val="F4F6FD"/>
+          </a:solidFill>
+          <a:ln w="19050">
+            <a:solidFill>
+              <a:srgbClr val="F2B43C"/>
+            </a:solidFill>
+            <a:prstDash val="solid"/>
+          </a:ln>
+        </p:spPr>
+      </p:sp>
+      <p:sp>
+        <p:nvSpPr>
+          <p:cNvPr id="9" name="Shape 6"/>
+          <p:cNvSpPr/>
+          <p:nvPr/>
+        </p:nvSpPr>
+        <p:spPr>
+          <a:xfrm>
+            <a:off x="5669280" y="1426464"/>
+            <a:ext cx="438912" cy="438912"/>
+          </a:xfrm>
+          <a:prstGeom prst="ellipse">
+            <a:avLst/>
+          </a:prstGeom>
+          <a:solidFill>
+            <a:srgbClr val="F2B43C"/>
+          </a:solidFill>
+          <a:ln w="12700">
+            <a:solidFill>
+              <a:srgbClr val="F2B43C"/>
+            </a:solidFill>
+            <a:prstDash val="solid"/>
+          </a:ln>
+        </p:spPr>
+      </p:sp>
+      <p:pic>
+        <p:nvPicPr>
+          <p:cNvPr id="10" name="Image 1" descr="preencoded.png">    </p:cNvPr>
+          <p:cNvPicPr>
+            <a:picLocks noChangeAspect="1"/>
+          </p:cNvPicPr>
+          <p:nvPr/>
+        </p:nvPicPr>
+        <p:blipFill>
+          <a:blip r:embed="rId2"/>
+          <a:stretch>
+            <a:fillRect/>
+          </a:stretch>
+        </p:blipFill>
+        <p:spPr>
+          <a:xfrm>
+            <a:off x="5774619" y="1531803"/>
+            <a:ext cx="228234" cy="228234"/>
+          </a:xfrm>
+          <a:prstGeom prst="rect">
+            <a:avLst/>
+          </a:prstGeom>
+        </p:spPr>
+      </p:pic>
+      <p:sp>
+        <p:nvSpPr>
+          <p:cNvPr id="11" name="Text 7"/>
+          <p:cNvSpPr txBox="1"/>
+          <p:nvPr/>
+        </p:nvSpPr>
+        <p:spPr>
+          <a:xfrm>
+            <a:off x="6199632" y="1353312"/>
+            <a:ext cx="2377440" cy="320040"/>
+          </a:xfrm>
+          <a:prstGeom prst="rect">
+            <a:avLst/>
+          </a:prstGeom>
+          <a:noFill/>
+          <a:ln/>
+        </p:spPr>
+        <p:txBody>
+          <a:bodyPr wrap="square" lIns="0" tIns="0" rIns="0" bIns="0" rtlCol="0" anchor="t"/>
+          <a:lstStyle/>
+          <a:p>
+            <a:pPr indent="0" marL="0">
+              <a:buNone/>
+            </a:pPr>
+            <a:r>
+              <a:rPr lang="en-US" sz="1350" b="1" dirty="0">
+                <a:solidFill>
+                  <a:srgbClr val="A66A00"/>
+                </a:solidFill>
+                <a:latin typeface="Calibri" pitchFamily="34" charset="0"/>
+                <a:ea typeface="Calibri" pitchFamily="34" charset="-122"/>
+                <a:cs typeface="Calibri" pitchFamily="34" charset="-120"/>
+              </a:rPr>
+              <a:t>Peptidoglucano grueso</a:t>
+            </a:r>
+            <a:endParaRPr lang="en-US" sz="1350" dirty="0"/>
+          </a:p>
+        </p:txBody>
+      </p:sp>
+      <p:sp>
+        <p:nvSpPr>
+          <p:cNvPr id="12" name="Text 8"/>
+          <p:cNvSpPr txBox="1"/>
+          <p:nvPr/>
+        </p:nvSpPr>
+        <p:spPr>
+          <a:xfrm>
+            <a:off x="6199632" y="1645920"/>
+            <a:ext cx="2423160" cy="347472"/>
+          </a:xfrm>
+          <a:prstGeom prst="rect">
+            <a:avLst/>
+          </a:prstGeom>
+          <a:noFill/>
+          <a:ln/>
+        </p:spPr>
+        <p:txBody>
+          <a:bodyPr wrap="square" lIns="0" tIns="0" rIns="0" bIns="0" rtlCol="0" anchor="t"/>
+          <a:lstStyle/>
+          <a:p>
+            <a:pPr indent="0" marL="0">
+              <a:buNone/>
+            </a:pPr>
+            <a:r>
+              <a:rPr lang="en-US" sz="1050" dirty="0">
+                <a:solidFill>
+                  <a:srgbClr val="51597F"/>
+                </a:solidFill>
+                <a:latin typeface="Calibri" pitchFamily="34" charset="0"/>
+                <a:ea typeface="Calibri" pitchFamily="34" charset="-122"/>
+                <a:cs typeface="Calibri" pitchFamily="34" charset="-120"/>
+              </a:rPr>
+              <a:t>Multicapa (20-80 nm); retiene el cristal violeta</a:t>
+            </a:r>
+            <a:endParaRPr lang="en-US" sz="1050" dirty="0"/>
+          </a:p>
+        </p:txBody>
+      </p:sp>
+      <p:sp>
+        <p:nvSpPr>
+          <p:cNvPr id="13" name="Shape 9"/>
+          <p:cNvSpPr/>
+          <p:nvPr/>
+        </p:nvSpPr>
+        <p:spPr>
+          <a:xfrm>
+            <a:off x="5532120" y="2066544"/>
+            <a:ext cx="3154680" cy="731520"/>
+          </a:xfrm>
+          <a:prstGeom prst="roundRect">
+            <a:avLst>
+              <a:gd name="adj" fmla="val 12500"/>
+            </a:avLst>
+          </a:prstGeom>
+          <a:solidFill>
+            <a:srgbClr val="F4F6FD"/>
+          </a:solidFill>
+          <a:ln w="19050">
+            <a:solidFill>
+              <a:srgbClr val="4CC9F0"/>
+            </a:solidFill>
+            <a:prstDash val="solid"/>
+          </a:ln>
+        </p:spPr>
+      </p:sp>
+      <p:sp>
+        <p:nvSpPr>
+          <p:cNvPr id="14" name="Shape 10"/>
+          <p:cNvSpPr/>
+          <p:nvPr/>
+        </p:nvSpPr>
+        <p:spPr>
+          <a:xfrm>
+            <a:off x="5669280" y="2212848"/>
+            <a:ext cx="438912" cy="438912"/>
+          </a:xfrm>
+          <a:prstGeom prst="ellipse">
+            <a:avLst/>
+          </a:prstGeom>
+          <a:solidFill>
+            <a:srgbClr val="4CC9F0"/>
+          </a:solidFill>
+          <a:ln w="12700">
+            <a:solidFill>
+              <a:srgbClr val="4CC9F0"/>
+            </a:solidFill>
+            <a:prstDash val="solid"/>
+          </a:ln>
+        </p:spPr>
+      </p:sp>
+      <p:pic>
+        <p:nvPicPr>
+          <p:cNvPr id="15" name="Image 2" descr="preencoded.png">    </p:cNvPr>
+          <p:cNvPicPr>
+            <a:picLocks noChangeAspect="1"/>
+          </p:cNvPicPr>
+          <p:nvPr/>
+        </p:nvPicPr>
+        <p:blipFill>
+          <a:blip r:embed="rId3"/>
+          <a:stretch>
+            <a:fillRect/>
+          </a:stretch>
+        </p:blipFill>
+        <p:spPr>
+          <a:xfrm>
+            <a:off x="5774619" y="2318187"/>
+            <a:ext cx="228234" cy="228234"/>
+          </a:xfrm>
+          <a:prstGeom prst="rect">
+            <a:avLst/>
+          </a:prstGeom>
+        </p:spPr>
+      </p:pic>
+      <p:sp>
+        <p:nvSpPr>
+          <p:cNvPr id="16" name="Text 11"/>
+          <p:cNvSpPr txBox="1"/>
+          <p:nvPr/>
+        </p:nvSpPr>
+        <p:spPr>
+          <a:xfrm>
+            <a:off x="6199632" y="2139696"/>
+            <a:ext cx="2377440" cy="320040"/>
+          </a:xfrm>
+          <a:prstGeom prst="rect">
+            <a:avLst/>
+          </a:prstGeom>
+          <a:noFill/>
+          <a:ln/>
+        </p:spPr>
+        <p:txBody>
+          <a:bodyPr wrap="square" lIns="0" tIns="0" rIns="0" bIns="0" rtlCol="0" anchor="t"/>
+          <a:lstStyle/>
+          <a:p>
+            <a:pPr indent="0" marL="0">
+              <a:buNone/>
+            </a:pPr>
+            <a:r>
+              <a:rPr lang="en-US" sz="1350" b="1" dirty="0">
+                <a:solidFill>
+                  <a:srgbClr val="0A6F98"/>
+                </a:solidFill>
+                <a:latin typeface="Calibri" pitchFamily="34" charset="0"/>
+                <a:ea typeface="Calibri" pitchFamily="34" charset="-122"/>
+                <a:cs typeface="Calibri" pitchFamily="34" charset="-120"/>
+              </a:rPr>
+              <a:t>Ácidos teicoicos</a:t>
+            </a:r>
+            <a:endParaRPr lang="en-US" sz="1350" dirty="0"/>
+          </a:p>
+        </p:txBody>
+      </p:sp>
+      <p:sp>
+        <p:nvSpPr>
+          <p:cNvPr id="17" name="Text 12"/>
+          <p:cNvSpPr txBox="1"/>
+          <p:nvPr/>
+        </p:nvSpPr>
+        <p:spPr>
+          <a:xfrm>
+            <a:off x="6199632" y="2432304"/>
+            <a:ext cx="2423160" cy="347472"/>
+          </a:xfrm>
+          <a:prstGeom prst="rect">
+            <a:avLst/>
+          </a:prstGeom>
+          <a:noFill/>
+          <a:ln/>
+        </p:spPr>
+        <p:txBody>
+          <a:bodyPr wrap="square" lIns="0" tIns="0" rIns="0" bIns="0" rtlCol="0" anchor="t"/>
+          <a:lstStyle/>
+          <a:p>
+            <a:pPr indent="0" marL="0">
+              <a:buNone/>
+            </a:pPr>
+            <a:r>
+              <a:rPr lang="en-US" sz="1050" dirty="0">
+                <a:solidFill>
+                  <a:srgbClr val="51597F"/>
+                </a:solidFill>
+                <a:latin typeface="Calibri" pitchFamily="34" charset="0"/>
+                <a:ea typeface="Calibri" pitchFamily="34" charset="-122"/>
+                <a:cs typeface="Calibri" pitchFamily="34" charset="-120"/>
+              </a:rPr>
+              <a:t>Carga negativa; regulan cationes y autolisinas</a:t>
+            </a:r>
+            <a:endParaRPr lang="en-US" sz="1050" dirty="0"/>
+          </a:p>
+        </p:txBody>
+      </p:sp>
+      <p:sp>
+        <p:nvSpPr>
+          <p:cNvPr id="18" name="Shape 13"/>
+          <p:cNvSpPr/>
+          <p:nvPr/>
+        </p:nvSpPr>
+        <p:spPr>
+          <a:xfrm>
+            <a:off x="5532120" y="2852928"/>
+            <a:ext cx="3154680" cy="731520"/>
+          </a:xfrm>
+          <a:prstGeom prst="roundRect">
+            <a:avLst>
+              <a:gd name="adj" fmla="val 12500"/>
+            </a:avLst>
+          </a:prstGeom>
+          <a:solidFill>
+            <a:srgbClr val="F4F6FD"/>
+          </a:solidFill>
+          <a:ln w="19050">
+            <a:solidFill>
+              <a:srgbClr val="F2546B"/>
+            </a:solidFill>
+            <a:prstDash val="solid"/>
+          </a:ln>
+        </p:spPr>
+      </p:sp>
+      <p:sp>
+        <p:nvSpPr>
+          <p:cNvPr id="19" name="Shape 14"/>
+          <p:cNvSpPr/>
+          <p:nvPr/>
+        </p:nvSpPr>
+        <p:spPr>
+          <a:xfrm>
+            <a:off x="5669280" y="2999232"/>
+            <a:ext cx="438912" cy="438912"/>
+          </a:xfrm>
+          <a:prstGeom prst="ellipse">
+            <a:avLst/>
+          </a:prstGeom>
+          <a:solidFill>
+            <a:srgbClr val="F2546B"/>
+          </a:solidFill>
+          <a:ln w="12700">
+            <a:solidFill>
+              <a:srgbClr val="F2546B"/>
+            </a:solidFill>
+            <a:prstDash val="solid"/>
+          </a:ln>
+        </p:spPr>
+      </p:sp>
+      <p:pic>
+        <p:nvPicPr>
+          <p:cNvPr id="20" name="Image 3" descr="preencoded.png">    </p:cNvPr>
+          <p:cNvPicPr>
+            <a:picLocks noChangeAspect="1"/>
+          </p:cNvPicPr>
+          <p:nvPr/>
+        </p:nvPicPr>
+        <p:blipFill>
+          <a:blip r:embed="rId4"/>
+          <a:stretch>
+            <a:fillRect/>
+          </a:stretch>
+        </p:blipFill>
+        <p:spPr>
+          <a:xfrm>
+            <a:off x="5774619" y="3104571"/>
+            <a:ext cx="228234" cy="228234"/>
+          </a:xfrm>
+          <a:prstGeom prst="rect">
+            <a:avLst/>
+          </a:prstGeom>
+        </p:spPr>
+      </p:pic>
+      <p:sp>
+        <p:nvSpPr>
+          <p:cNvPr id="21" name="Text 15"/>
+          <p:cNvSpPr txBox="1"/>
+          <p:nvPr/>
+        </p:nvSpPr>
+        <p:spPr>
+          <a:xfrm>
+            <a:off x="6199632" y="2926080"/>
+            <a:ext cx="2377440" cy="320040"/>
+          </a:xfrm>
+          <a:prstGeom prst="rect">
+            <a:avLst/>
+          </a:prstGeom>
+          <a:noFill/>
+          <a:ln/>
+        </p:spPr>
+        <p:txBody>
+          <a:bodyPr wrap="square" lIns="0" tIns="0" rIns="0" bIns="0" rtlCol="0" anchor="t"/>
+          <a:lstStyle/>
+          <a:p>
+            <a:pPr indent="0" marL="0">
+              <a:buNone/>
+            </a:pPr>
+            <a:r>
+              <a:rPr lang="en-US" sz="1350" b="1" dirty="0">
+                <a:solidFill>
+                  <a:srgbClr val="C81E43"/>
+                </a:solidFill>
+                <a:latin typeface="Calibri" pitchFamily="34" charset="0"/>
+                <a:ea typeface="Calibri" pitchFamily="34" charset="-122"/>
+                <a:cs typeface="Calibri" pitchFamily="34" charset="-120"/>
+              </a:rPr>
+              <a:t>Ácido lipoteicoico</a:t>
+            </a:r>
+            <a:endParaRPr lang="en-US" sz="1350" dirty="0"/>
+          </a:p>
+        </p:txBody>
+      </p:sp>
+      <p:sp>
+        <p:nvSpPr>
+          <p:cNvPr id="22" name="Text 16"/>
+          <p:cNvSpPr txBox="1"/>
+          <p:nvPr/>
+        </p:nvSpPr>
+        <p:spPr>
+          <a:xfrm>
+            <a:off x="6199632" y="3218688"/>
+            <a:ext cx="2423160" cy="347472"/>
+          </a:xfrm>
+          <a:prstGeom prst="rect">
+            <a:avLst/>
+          </a:prstGeom>
+          <a:noFill/>
+          <a:ln/>
+        </p:spPr>
+        <p:txBody>
+          <a:bodyPr wrap="square" lIns="0" tIns="0" rIns="0" bIns="0" rtlCol="0" anchor="t"/>
+          <a:lstStyle/>
+          <a:p>
+            <a:pPr indent="0" marL="0">
+              <a:buNone/>
+            </a:pPr>
+            <a:r>
+              <a:rPr lang="en-US" sz="1050" dirty="0">
+                <a:solidFill>
+                  <a:srgbClr val="51597F"/>
+                </a:solidFill>
+                <a:latin typeface="Calibri" pitchFamily="34" charset="0"/>
+                <a:ea typeface="Calibri" pitchFamily="34" charset="-122"/>
+                <a:cs typeface="Calibri" pitchFamily="34" charset="-120"/>
+              </a:rPr>
+              <a:t>Anclado a membrana; adhesión y señal inmune</a:t>
+            </a:r>
+            <a:endParaRPr lang="en-US" sz="1050" dirty="0"/>
+          </a:p>
+        </p:txBody>
+      </p:sp>
+      <p:sp>
+        <p:nvSpPr>
+          <p:cNvPr id="23" name="Shape 17"/>
+          <p:cNvSpPr/>
+          <p:nvPr/>
+        </p:nvSpPr>
+        <p:spPr>
+          <a:xfrm>
+            <a:off x="5532120" y="3639312"/>
+            <a:ext cx="3154680" cy="731520"/>
+          </a:xfrm>
+          <a:prstGeom prst="roundRect">
+            <a:avLst>
+              <a:gd name="adj" fmla="val 12500"/>
+            </a:avLst>
+          </a:prstGeom>
+          <a:solidFill>
+            <a:srgbClr val="F4F6FD"/>
+          </a:solidFill>
+          <a:ln w="19050">
+            <a:solidFill>
+              <a:srgbClr val="2EC4B6"/>
+            </a:solidFill>
+            <a:prstDash val="solid"/>
+          </a:ln>
+        </p:spPr>
+      </p:sp>
+      <p:sp>
+        <p:nvSpPr>
+          <p:cNvPr id="24" name="Shape 18"/>
+          <p:cNvSpPr/>
+          <p:nvPr/>
+        </p:nvSpPr>
+        <p:spPr>
+          <a:xfrm>
+            <a:off x="5669280" y="3785616"/>
+            <a:ext cx="438912" cy="438912"/>
+          </a:xfrm>
+          <a:prstGeom prst="ellipse">
+            <a:avLst/>
+          </a:prstGeom>
+          <a:solidFill>
+            <a:srgbClr val="2EC4B6"/>
+          </a:solidFill>
+          <a:ln w="12700">
+            <a:solidFill>
+              <a:srgbClr val="2EC4B6"/>
+            </a:solidFill>
+            <a:prstDash val="solid"/>
+          </a:ln>
+        </p:spPr>
+      </p:sp>
+      <p:pic>
+        <p:nvPicPr>
+          <p:cNvPr id="25" name="Image 4" descr="preencoded.png">    </p:cNvPr>
+          <p:cNvPicPr>
+            <a:picLocks noChangeAspect="1"/>
+          </p:cNvPicPr>
+          <p:nvPr/>
+        </p:nvPicPr>
+        <p:blipFill>
+          <a:blip r:embed="rId5"/>
+          <a:stretch>
+            <a:fillRect/>
+          </a:stretch>
+        </p:blipFill>
+        <p:spPr>
+          <a:xfrm>
+            <a:off x="5774619" y="3890955"/>
+            <a:ext cx="228234" cy="228234"/>
+          </a:xfrm>
+          <a:prstGeom prst="rect">
+            <a:avLst/>
+          </a:prstGeom>
+        </p:spPr>
+      </p:pic>
+      <p:sp>
+        <p:nvSpPr>
+          <p:cNvPr id="26" name="Text 19"/>
+          <p:cNvSpPr txBox="1"/>
+          <p:nvPr/>
+        </p:nvSpPr>
+        <p:spPr>
+          <a:xfrm>
+            <a:off x="6199632" y="3712464"/>
+            <a:ext cx="2377440" cy="320040"/>
+          </a:xfrm>
+          <a:prstGeom prst="rect">
+            <a:avLst/>
+          </a:prstGeom>
+          <a:noFill/>
+          <a:ln/>
+        </p:spPr>
+        <p:txBody>
+          <a:bodyPr wrap="square" lIns="0" tIns="0" rIns="0" bIns="0" rtlCol="0" anchor="t"/>
+          <a:lstStyle/>
+          <a:p>
+            <a:pPr indent="0" marL="0">
+              <a:buNone/>
+            </a:pPr>
+            <a:r>
+              <a:rPr lang="en-US" sz="1350" b="1" dirty="0">
+                <a:solidFill>
+                  <a:srgbClr val="0C8368"/>
+                </a:solidFill>
+                <a:latin typeface="Calibri" pitchFamily="34" charset="0"/>
+                <a:ea typeface="Calibri" pitchFamily="34" charset="-122"/>
+                <a:cs typeface="Calibri" pitchFamily="34" charset="-120"/>
+              </a:rPr>
+              <a:t>Lipoproteínas</a:t>
+            </a:r>
+            <a:endParaRPr lang="en-US" sz="1350" dirty="0"/>
+          </a:p>
+        </p:txBody>
+      </p:sp>
+      <p:sp>
+        <p:nvSpPr>
+          <p:cNvPr id="27" name="Text 20"/>
+          <p:cNvSpPr txBox="1"/>
+          <p:nvPr/>
+        </p:nvSpPr>
+        <p:spPr>
+          <a:xfrm>
+            <a:off x="6199632" y="4005072"/>
+            <a:ext cx="2423160" cy="347472"/>
+          </a:xfrm>
+          <a:prstGeom prst="rect">
+            <a:avLst/>
+          </a:prstGeom>
+          <a:noFill/>
+          <a:ln/>
+        </p:spPr>
+        <p:txBody>
+          <a:bodyPr wrap="square" lIns="0" tIns="0" rIns="0" bIns="0" rtlCol="0" anchor="t"/>
+          <a:lstStyle/>
+          <a:p>
+            <a:pPr indent="0" marL="0">
+              <a:buNone/>
+            </a:pPr>
+            <a:r>
+              <a:rPr lang="en-US" sz="1050" dirty="0">
+                <a:solidFill>
+                  <a:srgbClr val="51597F"/>
+                </a:solidFill>
+                <a:latin typeface="Calibri" pitchFamily="34" charset="0"/>
+                <a:ea typeface="Calibri" pitchFamily="34" charset="-122"/>
+                <a:cs typeface="Calibri" pitchFamily="34" charset="-120"/>
+              </a:rPr>
+              <a:t>Ligando de TLR2: activan la inmunidad innata</a:t>
+            </a:r>
+            <a:endParaRPr lang="en-US" sz="1050" dirty="0"/>
+          </a:p>
+        </p:txBody>
+      </p:sp>
+      <p:sp>
+        <p:nvSpPr>
+          <p:cNvPr id="25" name="Slide Number Placeholder 0"/>
+          <p:cNvSpPr>
+            <a:spLocks noGrp="1"/>
+          </p:cNvSpPr>
+          <p:nvPr>
+            <p:ph type="sldNum" sz="quarter" idx="4294967295"/>
+          </p:nvPr>
+        </p:nvSpPr>
+        <p:spPr>
+          <a:xfrm>
+            <a:off x="8247888" y="4535424"/>
+            <a:ext cx="420624" cy="420624"/>
+          </a:xfrm>
+          <a:prstGeom prst="rect">
+            <a:avLst/>
+          </a:prstGeom>
+          <a:extLst>
+            <a:ext uri="{C572A759-6A51-4108-AA02-DFA0A04FC94B}">
+              <ma14:wrappingTextBoxFlag xmlns:ma14="http://schemas.microsoft.com/office/mac/drawingml/2011/main" val="0"/>
+            </a:ext>
+          </a:extLst>
+        </p:spPr>
+        <p:txBody>
+          <a:bodyPr anchor="ctr"/>
+          <a:lstStyle>
+            <a:lvl1pPr>
+              <a:defRPr sz="1800">
+                <a:solidFill>
+                  <a:srgbClr val="FFFFFF"/>
+                </a:solidFill>
+                <a:latin typeface="Calibri"/>
+                <a:ea typeface="Calibri"/>
+                <a:cs typeface="Calibri"/>
+              </a:defRPr>
+            </a:lvl1pPr>
+          </a:lstStyle>
+          <a:p>
+            <a:pPr algn="ctr"/>
+            <a:fld id="{F7021451-1387-4CA6-816F-3879F97B5CBC}" type="slidenum">
+              <a:rPr b="1" lang="en-US"/>
+              <a:t>7</a:t>
+            </a:fld>
+            <a:endParaRPr lang="en-US"/>
+          </a:p>
+        </p:txBody>
+      </p:sp>
+    </p:spTree>
+  </p:cSld>
+  <p:clrMapOvr>
+    <a:masterClrMapping/>
+  </p:clrMapOvr>
+</p:sld>
+</file>
+
+<file path=ppt/slides/slide8.xml><?xml version="1.0" encoding="utf-8"?>
+<p:sld xmlns:a="http://schemas.openxmlformats.org/drawingml/2006/main" xmlns:r="http://schemas.openxmlformats.org/officeDocument/2006/relationships" xmlns:p="http://schemas.openxmlformats.org/presentationml/2006/main">
+  <p:cSld name="Slide 8">
+    <p:bg>
+      <p:bgPr>
+        <a:solidFill>
+          <a:srgbClr val="FFFFFF"/>
+        </a:solidFill>
+      </p:bgPr>
+    </p:bg>
+    <p:spTree>
+      <p:nvGrpSpPr>
+        <p:cNvPr id="1" name=""/>
+        <p:cNvGrpSpPr/>
+        <p:nvPr/>
+      </p:nvGrpSpPr>
+      <p:grpSpPr>
+        <a:xfrm>
+          <a:off x="0" y="0"/>
+          <a:ext cx="0" cy="0"/>
+          <a:chOff x="0" y="0"/>
+          <a:chExt cx="0" cy="0"/>
+        </a:xfrm>
+      </p:grpSpPr>
+      <p:sp>
+        <p:nvSpPr>
+          <p:cNvPr id="2" name="Text 0"/>
+          <p:cNvSpPr txBox="1"/>
+          <p:nvPr/>
+        </p:nvSpPr>
+        <p:spPr>
+          <a:xfrm>
+            <a:off x="457200" y="201168"/>
+            <a:ext cx="7863840" cy="274320"/>
+          </a:xfrm>
+          <a:prstGeom prst="rect">
+            <a:avLst/>
+          </a:prstGeom>
+          <a:noFill/>
+          <a:ln/>
+        </p:spPr>
+        <p:txBody>
+          <a:bodyPr wrap="square" lIns="0" tIns="0" rIns="0" bIns="0" rtlCol="0" anchor="ctr"/>
+          <a:lstStyle/>
+          <a:p>
+            <a:pPr indent="0" marL="0">
+              <a:buNone/>
+            </a:pPr>
+            <a:r>
+              <a:rPr lang="en-US" sz="1300" b="1" spc="300" kern="0" dirty="0">
+                <a:solidFill>
+                  <a:srgbClr val="A66A00"/>
+                </a:solidFill>
+                <a:latin typeface="Calibri" pitchFamily="34" charset="0"/>
+                <a:ea typeface="Calibri" pitchFamily="34" charset="-122"/>
+                <a:cs typeface="Calibri" pitchFamily="34" charset="-120"/>
+              </a:rPr>
+              <a:t>02 - ANATOMÍA</a:t>
+            </a:r>
+            <a:endParaRPr lang="en-US" sz="1300" dirty="0"/>
+          </a:p>
+        </p:txBody>
+      </p:sp>
+      <p:sp>
+        <p:nvSpPr>
+          <p:cNvPr id="3" name="Text 1"/>
+          <p:cNvSpPr txBox="1"/>
+          <p:nvPr/>
+        </p:nvSpPr>
+        <p:spPr>
+          <a:xfrm>
+            <a:off x="457200" y="457200"/>
+            <a:ext cx="8229600" cy="658368"/>
+          </a:xfrm>
+          <a:prstGeom prst="rect">
+            <a:avLst/>
+          </a:prstGeom>
+          <a:noFill/>
+          <a:ln/>
+        </p:spPr>
+        <p:txBody>
+          <a:bodyPr wrap="square" lIns="0" tIns="0" rIns="0" bIns="0" rtlCol="0" anchor="ctr"/>
+          <a:lstStyle/>
+          <a:p>
+            <a:pPr indent="0" marL="0">
+              <a:buNone/>
+            </a:pPr>
+            <a:r>
+              <a:rPr lang="en-US" sz="3000" b="1" dirty="0">
+                <a:solidFill>
+                  <a:srgbClr val="15193A"/>
+                </a:solidFill>
+                <a:latin typeface="Calibri" pitchFamily="34" charset="0"/>
+                <a:ea typeface="Calibri" pitchFamily="34" charset="-122"/>
+                <a:cs typeface="Calibri" pitchFamily="34" charset="-120"/>
+              </a:rPr>
+              <a:t>La membrana celular: barrera y diana</a:t>
+            </a:r>
+            <a:endParaRPr lang="en-US" sz="3000" dirty="0"/>
+          </a:p>
+        </p:txBody>
+      </p:sp>
+      <p:sp>
+        <p:nvSpPr>
+          <p:cNvPr id="4" name="Shape 2"/>
+          <p:cNvSpPr/>
+          <p:nvPr/>
+        </p:nvSpPr>
+        <p:spPr>
+          <a:xfrm>
+            <a:off x="457200" y="4480560"/>
+            <a:ext cx="7589520" cy="0"/>
+          </a:xfrm>
+          <a:prstGeom prst="line">
+            <a:avLst/>
+          </a:prstGeom>
+          <a:noFill/>
+          <a:ln w="9525">
+            <a:solidFill>
+              <a:srgbClr val="D7DCEF"/>
+            </a:solidFill>
+            <a:prstDash val="solid"/>
+          </a:ln>
+        </p:spPr>
+      </p:sp>
+      <p:sp>
+        <p:nvSpPr>
+          <p:cNvPr id="5" name="Text 3"/>
+          <p:cNvSpPr txBox="1"/>
+          <p:nvPr/>
+        </p:nvSpPr>
+        <p:spPr>
+          <a:xfrm>
+            <a:off x="457200" y="4526280"/>
+            <a:ext cx="7635240" cy="548640"/>
+          </a:xfrm>
+          <a:prstGeom prst="rect">
+            <a:avLst/>
+          </a:prstGeom>
+          <a:noFill/>
+          <a:ln/>
+        </p:spPr>
+        <p:txBody>
+          <a:bodyPr wrap="square" lIns="0" tIns="0" rIns="0" bIns="0" rtlCol="0" anchor="ctr"/>
+          <a:lstStyle/>
+          <a:p>
+            <a:pPr indent="0" marL="0">
+              <a:buNone/>
+            </a:pPr>
+            <a:r>
+              <a:rPr lang="en-US" sz="900" dirty="0">
+                <a:solidFill>
+                  <a:srgbClr val="51597F"/>
+                </a:solidFill>
+                <a:latin typeface="Calibri" pitchFamily="34" charset="0"/>
+                <a:ea typeface="Calibri" pitchFamily="34" charset="-122"/>
+                <a:cs typeface="Calibri" pitchFamily="34" charset="-120"/>
+              </a:rPr>
+              <a:t>1. Cheung GYC, Bae JS, Otto M. Pathogenicity and virulence of Staphylococcus aureus. Virulence. 2021;12(1):547-69.</a:t>
+            </a:r>
+            <a:endParaRPr lang="en-US" sz="900" dirty="0"/>
+          </a:p>
+          <a:p>
+            <a:pPr indent="0" marL="0">
+              <a:buNone/>
+            </a:pPr>
+            <a:r>
+              <a:rPr lang="en-US" sz="900" dirty="0">
+                <a:solidFill>
+                  <a:srgbClr val="51597F"/>
+                </a:solidFill>
+                <a:latin typeface="Calibri" pitchFamily="34" charset="0"/>
+                <a:ea typeface="Calibri" pitchFamily="34" charset="-122"/>
+                <a:cs typeface="Calibri" pitchFamily="34" charset="-120"/>
+              </a:rPr>
+              <a:t>3. Howden BP, Giulieri SG, Wong Fok Lung T, Baines SL, Sharkey LK, Lee JYH, et al. Staphylococcus aureus host interactions and adaptation. Nat Rev Microbiol. 2023;21(6):380-95.</a:t>
+            </a:r>
+            <a:endParaRPr lang="en-US" sz="900" dirty="0"/>
+          </a:p>
+          <a:p>
+            <a:pPr indent="0" marL="0">
+              <a:buNone/>
+            </a:pPr>
+            <a:r>
+              <a:rPr lang="en-US" sz="900" dirty="0">
+                <a:solidFill>
+                  <a:srgbClr val="51597F"/>
+                </a:solidFill>
+                <a:latin typeface="Calibri" pitchFamily="34" charset="0"/>
+                <a:ea typeface="Calibri" pitchFamily="34" charset="-122"/>
+                <a:cs typeface="Calibri" pitchFamily="34" charset="-120"/>
+              </a:rPr>
+              <a:t>4. Wu X, Han J, Gong G, Koffas MAG, Zha J. Wall teichoic acids: physiology and applications. FEMS Microbiol Rev. 2021;45(4):fuaa064.</a:t>
+            </a:r>
+            <a:endParaRPr lang="en-US" sz="900" dirty="0"/>
+          </a:p>
+        </p:txBody>
+      </p:sp>
+      <p:sp>
+        <p:nvSpPr>
+          <p:cNvPr id="6" name="Shape 4"/>
+          <p:cNvSpPr/>
+          <p:nvPr/>
+        </p:nvSpPr>
+        <p:spPr>
+          <a:xfrm>
+            <a:off x="8247888" y="4535424"/>
+            <a:ext cx="420624" cy="420624"/>
+          </a:xfrm>
+          <a:prstGeom prst="ellipse">
+            <a:avLst/>
+          </a:prstGeom>
+          <a:solidFill>
+            <a:srgbClr val="0A0E1F"/>
+          </a:solidFill>
+          <a:ln w="15875">
+            <a:solidFill>
+              <a:srgbClr val="3A4165"/>
+            </a:solidFill>
+            <a:prstDash val="solid"/>
+          </a:ln>
+        </p:spPr>
+      </p:sp>
+      <p:sp>
+        <p:nvSpPr>
+          <p:cNvPr id="7" name="Shape 5"/>
+          <p:cNvSpPr/>
+          <p:nvPr/>
+        </p:nvSpPr>
+        <p:spPr>
+          <a:xfrm>
+            <a:off x="457200" y="1280160"/>
+            <a:ext cx="8229600" cy="1234440"/>
+          </a:xfrm>
+          <a:prstGeom prst="roundRect">
+            <a:avLst>
+              <a:gd name="adj" fmla="val 7407"/>
+            </a:avLst>
+          </a:prstGeom>
+          <a:solidFill>
+            <a:srgbClr val="F4F6FD"/>
+          </a:solidFill>
+          <a:ln w="19050">
+            <a:solidFill>
+              <a:srgbClr val="4CC9F0"/>
+            </a:solidFill>
+            <a:prstDash val="solid"/>
+          </a:ln>
+        </p:spPr>
+      </p:sp>
+      <p:sp>
+        <p:nvSpPr>
+          <p:cNvPr id="8" name="Text 6"/>
+          <p:cNvSpPr txBox="1"/>
+          <p:nvPr/>
+        </p:nvSpPr>
+        <p:spPr>
+          <a:xfrm>
+            <a:off x="685800" y="1371600"/>
+            <a:ext cx="7772400" cy="1051560"/>
+          </a:xfrm>
+          <a:prstGeom prst="rect">
+            <a:avLst/>
+          </a:prstGeom>
+          <a:noFill/>
+          <a:ln/>
+        </p:spPr>
+        <p:txBody>
+          <a:bodyPr wrap="square" lIns="0" tIns="0" rIns="0" bIns="0" rtlCol="0" anchor="ctr"/>
+          <a:lstStyle/>
+          <a:p>
+            <a:pPr indent="0" marL="0">
+              <a:buNone/>
+            </a:pPr>
+            <a:r>
+              <a:rPr lang="en-US" sz="1600" dirty="0">
+                <a:solidFill>
+                  <a:srgbClr val="15193A"/>
+                </a:solidFill>
+                <a:latin typeface="Calibri" pitchFamily="34" charset="0"/>
+                <a:ea typeface="Calibri" pitchFamily="34" charset="-122"/>
+                <a:cs typeface="Calibri" pitchFamily="34" charset="-120"/>
+              </a:rPr>
+              <a:t>Bicapa de fosfolípidos bajo la pared. Es barrera selectiva y, al no haber membrana externa ni LPS, concentra funciones clave y blancos terapéuticos.</a:t>
+            </a:r>
+            <a:endParaRPr lang="en-US" sz="1600" dirty="0"/>
+          </a:p>
+        </p:txBody>
+      </p:sp>
+      <p:sp>
+        <p:nvSpPr>
+          <p:cNvPr id="9" name="Shape 7"/>
+          <p:cNvSpPr/>
+          <p:nvPr/>
+        </p:nvSpPr>
+        <p:spPr>
+          <a:xfrm>
+            <a:off x="1860804" y="2697480"/>
+            <a:ext cx="109728" cy="109728"/>
+          </a:xfrm>
+          <a:prstGeom prst="ellipse">
+            <a:avLst/>
+          </a:prstGeom>
+          <a:solidFill>
+            <a:srgbClr val="C6D0E8"/>
+          </a:solidFill>
+          <a:ln w="12700">
+            <a:solidFill>
+              <a:srgbClr val="8C97BC"/>
+            </a:solidFill>
+            <a:prstDash val="solid"/>
+          </a:ln>
+        </p:spPr>
+      </p:sp>
+      <p:sp>
+        <p:nvSpPr>
+          <p:cNvPr id="10" name="Shape 8"/>
+          <p:cNvSpPr/>
+          <p:nvPr/>
+        </p:nvSpPr>
+        <p:spPr>
+          <a:xfrm>
+            <a:off x="1915668" y="2807208"/>
+            <a:ext cx="914" cy="237744"/>
+          </a:xfrm>
+          <a:prstGeom prst="line">
+            <a:avLst/>
+          </a:prstGeom>
+          <a:noFill/>
+          <a:ln w="19050">
+            <a:solidFill>
+              <a:srgbClr val="8C97BC"/>
+            </a:solidFill>
+            <a:prstDash val="solid"/>
+          </a:ln>
+        </p:spPr>
+      </p:sp>
+      <p:sp>
+        <p:nvSpPr>
+          <p:cNvPr id="11" name="Shape 9"/>
+          <p:cNvSpPr/>
+          <p:nvPr/>
+        </p:nvSpPr>
+        <p:spPr>
+          <a:xfrm>
+            <a:off x="1915668" y="3118104"/>
+            <a:ext cx="914" cy="237744"/>
+          </a:xfrm>
+          <a:prstGeom prst="line">
+            <a:avLst/>
+          </a:prstGeom>
+          <a:noFill/>
+          <a:ln w="19050">
+            <a:solidFill>
+              <a:srgbClr val="8C97BC"/>
+            </a:solidFill>
+            <a:prstDash val="solid"/>
+          </a:ln>
+        </p:spPr>
+      </p:sp>
+      <p:sp>
+        <p:nvSpPr>
+          <p:cNvPr id="12" name="Shape 10"/>
+          <p:cNvSpPr/>
+          <p:nvPr/>
+        </p:nvSpPr>
+        <p:spPr>
+          <a:xfrm>
+            <a:off x="1860804" y="3355848"/>
+            <a:ext cx="109728" cy="109728"/>
+          </a:xfrm>
+          <a:prstGeom prst="ellipse">
+            <a:avLst/>
+          </a:prstGeom>
+          <a:solidFill>
+            <a:srgbClr val="C6D0E8"/>
+          </a:solidFill>
+          <a:ln w="12700">
+            <a:solidFill>
+              <a:srgbClr val="8C97BC"/>
+            </a:solidFill>
+            <a:prstDash val="solid"/>
+          </a:ln>
+        </p:spPr>
+      </p:sp>
+      <p:sp>
+        <p:nvSpPr>
+          <p:cNvPr id="13" name="Shape 11"/>
+          <p:cNvSpPr/>
+          <p:nvPr/>
+        </p:nvSpPr>
+        <p:spPr>
+          <a:xfrm>
+            <a:off x="2034540" y="2697480"/>
+            <a:ext cx="109728" cy="109728"/>
+          </a:xfrm>
+          <a:prstGeom prst="ellipse">
+            <a:avLst/>
+          </a:prstGeom>
+          <a:solidFill>
+            <a:srgbClr val="C6D0E8"/>
+          </a:solidFill>
+          <a:ln w="12700">
+            <a:solidFill>
+              <a:srgbClr val="8C97BC"/>
+            </a:solidFill>
+            <a:prstDash val="solid"/>
+          </a:ln>
+        </p:spPr>
+      </p:sp>
+      <p:sp>
+        <p:nvSpPr>
+          <p:cNvPr id="14" name="Shape 12"/>
+          <p:cNvSpPr/>
+          <p:nvPr/>
+        </p:nvSpPr>
+        <p:spPr>
+          <a:xfrm>
+            <a:off x="2089404" y="2807208"/>
+            <a:ext cx="914" cy="237744"/>
+          </a:xfrm>
+          <a:prstGeom prst="line">
+            <a:avLst/>
+          </a:prstGeom>
+          <a:noFill/>
+          <a:ln w="19050">
+            <a:solidFill>
+              <a:srgbClr val="8C97BC"/>
+            </a:solidFill>
+            <a:prstDash val="solid"/>
+          </a:ln>
+        </p:spPr>
+      </p:sp>
+      <p:sp>
+        <p:nvSpPr>
+          <p:cNvPr id="15" name="Shape 13"/>
+          <p:cNvSpPr/>
+          <p:nvPr/>
+        </p:nvSpPr>
+        <p:spPr>
+          <a:xfrm>
+            <a:off x="2089404" y="3118104"/>
+            <a:ext cx="914" cy="237744"/>
+          </a:xfrm>
+          <a:prstGeom prst="line">
+            <a:avLst/>
+          </a:prstGeom>
+          <a:noFill/>
+          <a:ln w="19050">
+            <a:solidFill>
+              <a:srgbClr val="8C97BC"/>
+            </a:solidFill>
+            <a:prstDash val="solid"/>
+          </a:ln>
+        </p:spPr>
+      </p:sp>
+      <p:sp>
+        <p:nvSpPr>
+          <p:cNvPr id="16" name="Shape 14"/>
+          <p:cNvSpPr/>
+          <p:nvPr/>
+        </p:nvSpPr>
+        <p:spPr>
+          <a:xfrm>
+            <a:off x="2034540" y="3355848"/>
+            <a:ext cx="109728" cy="109728"/>
+          </a:xfrm>
+          <a:prstGeom prst="ellipse">
+            <a:avLst/>
+          </a:prstGeom>
+          <a:solidFill>
+            <a:srgbClr val="C6D0E8"/>
+          </a:solidFill>
+          <a:ln w="12700">
+            <a:solidFill>
+              <a:srgbClr val="8C97BC"/>
+            </a:solidFill>
+            <a:prstDash val="solid"/>
+          </a:ln>
+        </p:spPr>
+      </p:sp>
+      <p:sp>
+        <p:nvSpPr>
+          <p:cNvPr id="17" name="Shape 15"/>
+          <p:cNvSpPr/>
+          <p:nvPr/>
+        </p:nvSpPr>
+        <p:spPr>
+          <a:xfrm>
+            <a:off x="2208276" y="2697480"/>
+            <a:ext cx="109728" cy="109728"/>
+          </a:xfrm>
+          <a:prstGeom prst="ellipse">
+            <a:avLst/>
+          </a:prstGeom>
+          <a:solidFill>
+            <a:srgbClr val="C6D0E8"/>
+          </a:solidFill>
+          <a:ln w="12700">
+            <a:solidFill>
+              <a:srgbClr val="8C97BC"/>
+            </a:solidFill>
+            <a:prstDash val="solid"/>
+          </a:ln>
+        </p:spPr>
+      </p:sp>
+      <p:sp>
+        <p:nvSpPr>
+          <p:cNvPr id="18" name="Shape 16"/>
+          <p:cNvSpPr/>
+          <p:nvPr/>
+        </p:nvSpPr>
+        <p:spPr>
+          <a:xfrm>
+            <a:off x="2263140" y="2807208"/>
+            <a:ext cx="914" cy="237744"/>
+          </a:xfrm>
+          <a:prstGeom prst="line">
+            <a:avLst/>
+          </a:prstGeom>
+          <a:noFill/>
+          <a:ln w="19050">
+            <a:solidFill>
+              <a:srgbClr val="8C97BC"/>
+            </a:solidFill>
+            <a:prstDash val="solid"/>
+          </a:ln>
+        </p:spPr>
+      </p:sp>
+      <p:sp>
+        <p:nvSpPr>
+          <p:cNvPr id="19" name="Shape 17"/>
+          <p:cNvSpPr/>
+          <p:nvPr/>
+        </p:nvSpPr>
+        <p:spPr>
+          <a:xfrm>
+            <a:off x="2263140" y="3118104"/>
+            <a:ext cx="914" cy="237744"/>
+          </a:xfrm>
+          <a:prstGeom prst="line">
+            <a:avLst/>
+          </a:prstGeom>
+          <a:noFill/>
+          <a:ln w="19050">
+            <a:solidFill>
+              <a:srgbClr val="8C97BC"/>
+            </a:solidFill>
+            <a:prstDash val="solid"/>
+          </a:ln>
+        </p:spPr>
+      </p:sp>
+      <p:sp>
+        <p:nvSpPr>
+          <p:cNvPr id="20" name="Shape 18"/>
+          <p:cNvSpPr/>
+          <p:nvPr/>
+        </p:nvSpPr>
+        <p:spPr>
+          <a:xfrm>
+            <a:off x="2208276" y="3355848"/>
+            <a:ext cx="109728" cy="109728"/>
+          </a:xfrm>
+          <a:prstGeom prst="ellipse">
+            <a:avLst/>
+          </a:prstGeom>
+          <a:solidFill>
+            <a:srgbClr val="C6D0E8"/>
+          </a:solidFill>
+          <a:ln w="12700">
+            <a:solidFill>
+              <a:srgbClr val="8C97BC"/>
+            </a:solidFill>
+            <a:prstDash val="solid"/>
+          </a:ln>
+        </p:spPr>
+      </p:sp>
+      <p:sp>
+        <p:nvSpPr>
+          <p:cNvPr id="21" name="Shape 19"/>
+          <p:cNvSpPr/>
+          <p:nvPr/>
+        </p:nvSpPr>
+        <p:spPr>
+          <a:xfrm>
+            <a:off x="2382012" y="2697480"/>
+            <a:ext cx="109728" cy="109728"/>
+          </a:xfrm>
+          <a:prstGeom prst="ellipse">
+            <a:avLst/>
+          </a:prstGeom>
+          <a:solidFill>
+            <a:srgbClr val="C6D0E8"/>
+          </a:solidFill>
+          <a:ln w="12700">
+            <a:solidFill>
+              <a:srgbClr val="8C97BC"/>
+            </a:solidFill>
+            <a:prstDash val="solid"/>
+          </a:ln>
+        </p:spPr>
+      </p:sp>
+      <p:sp>
+        <p:nvSpPr>
+          <p:cNvPr id="22" name="Shape 20"/>
+          <p:cNvSpPr/>
+          <p:nvPr/>
+        </p:nvSpPr>
+        <p:spPr>
+          <a:xfrm>
+            <a:off x="2436876" y="2807208"/>
+            <a:ext cx="914" cy="237744"/>
+          </a:xfrm>
+          <a:prstGeom prst="line">
+            <a:avLst/>
+          </a:prstGeom>
+          <a:noFill/>
+          <a:ln w="19050">
+            <a:solidFill>
+              <a:srgbClr val="8C97BC"/>
+            </a:solidFill>
+            <a:prstDash val="solid"/>
+          </a:ln>
+        </p:spPr>
+      </p:sp>
+      <p:sp>
+        <p:nvSpPr>
+          <p:cNvPr id="23" name="Shape 21"/>
+          <p:cNvSpPr/>
+          <p:nvPr/>
+        </p:nvSpPr>
+        <p:spPr>
+          <a:xfrm>
+            <a:off x="2436876" y="3118104"/>
+            <a:ext cx="914" cy="237744"/>
+          </a:xfrm>
+          <a:prstGeom prst="line">
+            <a:avLst/>
+          </a:prstGeom>
+          <a:noFill/>
+          <a:ln w="19050">
+            <a:solidFill>
+              <a:srgbClr val="8C97BC"/>
+            </a:solidFill>
+            <a:prstDash val="solid"/>
+          </a:ln>
+        </p:spPr>
+      </p:sp>
+      <p:sp>
+        <p:nvSpPr>
+          <p:cNvPr id="24" name="Shape 22"/>
+          <p:cNvSpPr/>
+          <p:nvPr/>
+        </p:nvSpPr>
+        <p:spPr>
+          <a:xfrm>
+            <a:off x="2382012" y="3355848"/>
+            <a:ext cx="109728" cy="109728"/>
+          </a:xfrm>
+          <a:prstGeom prst="ellipse">
+            <a:avLst/>
+          </a:prstGeom>
+          <a:solidFill>
+            <a:srgbClr val="C6D0E8"/>
+          </a:solidFill>
+          <a:ln w="12700">
+            <a:solidFill>
+              <a:srgbClr val="8C97BC"/>
+            </a:solidFill>
+            <a:prstDash val="solid"/>
+          </a:ln>
+        </p:spPr>
+      </p:sp>
+      <p:sp>
+        <p:nvSpPr>
+          <p:cNvPr id="25" name="Shape 23"/>
+          <p:cNvSpPr/>
+          <p:nvPr/>
+        </p:nvSpPr>
+        <p:spPr>
+          <a:xfrm>
+            <a:off x="2555748" y="2697480"/>
+            <a:ext cx="109728" cy="109728"/>
+          </a:xfrm>
+          <a:prstGeom prst="ellipse">
+            <a:avLst/>
+          </a:prstGeom>
+          <a:solidFill>
+            <a:srgbClr val="C6D0E8"/>
+          </a:solidFill>
+          <a:ln w="12700">
+            <a:solidFill>
+              <a:srgbClr val="8C97BC"/>
+            </a:solidFill>
+            <a:prstDash val="solid"/>
+          </a:ln>
+        </p:spPr>
+      </p:sp>
+      <p:sp>
+        <p:nvSpPr>
+          <p:cNvPr id="26" name="Shape 24"/>
+          <p:cNvSpPr/>
+          <p:nvPr/>
+        </p:nvSpPr>
+        <p:spPr>
+          <a:xfrm>
+            <a:off x="2610612" y="2807208"/>
+            <a:ext cx="914" cy="237744"/>
+          </a:xfrm>
+          <a:prstGeom prst="line">
+            <a:avLst/>
+          </a:prstGeom>
+          <a:noFill/>
+          <a:ln w="19050">
+            <a:solidFill>
+              <a:srgbClr val="8C97BC"/>
+            </a:solidFill>
+            <a:prstDash val="solid"/>
+          </a:ln>
+        </p:spPr>
+      </p:sp>
+      <p:sp>
+        <p:nvSpPr>
+          <p:cNvPr id="27" name="Shape 25"/>
+          <p:cNvSpPr/>
+          <p:nvPr/>
+        </p:nvSpPr>
+        <p:spPr>
+          <a:xfrm>
+            <a:off x="2610612" y="3118104"/>
+            <a:ext cx="914" cy="237744"/>
+          </a:xfrm>
+          <a:prstGeom prst="line">
+            <a:avLst/>
+          </a:prstGeom>
+          <a:noFill/>
+          <a:ln w="19050">
+            <a:solidFill>
+              <a:srgbClr val="8C97BC"/>
+            </a:solidFill>
+            <a:prstDash val="solid"/>
+          </a:ln>
+        </p:spPr>
+      </p:sp>
+      <p:sp>
+        <p:nvSpPr>
+          <p:cNvPr id="28" name="Shape 26"/>
+          <p:cNvSpPr/>
+          <p:nvPr/>
+        </p:nvSpPr>
+        <p:spPr>
+          <a:xfrm>
+            <a:off x="2555748" y="3355848"/>
+            <a:ext cx="109728" cy="109728"/>
+          </a:xfrm>
+          <a:prstGeom prst="ellipse">
+            <a:avLst/>
+          </a:prstGeom>
+          <a:solidFill>
+            <a:srgbClr val="C6D0E8"/>
+          </a:solidFill>
+          <a:ln w="12700">
+            <a:solidFill>
+              <a:srgbClr val="8C97BC"/>
+            </a:solidFill>
+            <a:prstDash val="solid"/>
+          </a:ln>
+        </p:spPr>
+      </p:sp>
+      <p:sp>
+        <p:nvSpPr>
+          <p:cNvPr id="29" name="Shape 27"/>
+          <p:cNvSpPr/>
+          <p:nvPr/>
+        </p:nvSpPr>
+        <p:spPr>
+          <a:xfrm>
+            <a:off x="2729484" y="2697480"/>
+            <a:ext cx="109728" cy="109728"/>
+          </a:xfrm>
+          <a:prstGeom prst="ellipse">
+            <a:avLst/>
+          </a:prstGeom>
+          <a:solidFill>
+            <a:srgbClr val="C6D0E8"/>
+          </a:solidFill>
+          <a:ln w="12700">
+            <a:solidFill>
+              <a:srgbClr val="8C97BC"/>
+            </a:solidFill>
+            <a:prstDash val="solid"/>
+          </a:ln>
+        </p:spPr>
+      </p:sp>
+      <p:sp>
+        <p:nvSpPr>
+          <p:cNvPr id="30" name="Shape 28"/>
+          <p:cNvSpPr/>
+          <p:nvPr/>
+        </p:nvSpPr>
+        <p:spPr>
+          <a:xfrm>
+            <a:off x="2784348" y="2807208"/>
+            <a:ext cx="914" cy="237744"/>
+          </a:xfrm>
+          <a:prstGeom prst="line">
+            <a:avLst/>
+          </a:prstGeom>
+          <a:noFill/>
+          <a:ln w="19050">
+            <a:solidFill>
+              <a:srgbClr val="8C97BC"/>
+            </a:solidFill>
+            <a:prstDash val="solid"/>
+          </a:ln>
+        </p:spPr>
+      </p:sp>
+      <p:sp>
+        <p:nvSpPr>
+          <p:cNvPr id="31" name="Shape 29"/>
+          <p:cNvSpPr/>
+          <p:nvPr/>
+        </p:nvSpPr>
+        <p:spPr>
+          <a:xfrm>
+            <a:off x="2784348" y="3118104"/>
+            <a:ext cx="914" cy="237744"/>
+          </a:xfrm>
+          <a:prstGeom prst="line">
+            <a:avLst/>
+          </a:prstGeom>
+          <a:noFill/>
+          <a:ln w="19050">
+            <a:solidFill>
+              <a:srgbClr val="8C97BC"/>
+            </a:solidFill>
+            <a:prstDash val="solid"/>
+          </a:ln>
+        </p:spPr>
+      </p:sp>
+      <p:sp>
+        <p:nvSpPr>
+          <p:cNvPr id="32" name="Shape 30"/>
+          <p:cNvSpPr/>
+          <p:nvPr/>
+        </p:nvSpPr>
+        <p:spPr>
+          <a:xfrm>
+            <a:off x="2729484" y="3355848"/>
+            <a:ext cx="109728" cy="109728"/>
+          </a:xfrm>
+          <a:prstGeom prst="ellipse">
+            <a:avLst/>
+          </a:prstGeom>
+          <a:solidFill>
+            <a:srgbClr val="C6D0E8"/>
+          </a:solidFill>
+          <a:ln w="12700">
+            <a:solidFill>
+              <a:srgbClr val="8C97BC"/>
+            </a:solidFill>
+            <a:prstDash val="solid"/>
+          </a:ln>
+        </p:spPr>
+      </p:sp>
+      <p:sp>
+        <p:nvSpPr>
+          <p:cNvPr id="33" name="Shape 31"/>
+          <p:cNvSpPr/>
+          <p:nvPr/>
+        </p:nvSpPr>
+        <p:spPr>
+          <a:xfrm>
+            <a:off x="2903220" y="2697480"/>
+            <a:ext cx="109728" cy="109728"/>
+          </a:xfrm>
+          <a:prstGeom prst="ellipse">
+            <a:avLst/>
+          </a:prstGeom>
+          <a:solidFill>
+            <a:srgbClr val="C6D0E8"/>
+          </a:solidFill>
+          <a:ln w="12700">
+            <a:solidFill>
+              <a:srgbClr val="8C97BC"/>
+            </a:solidFill>
+            <a:prstDash val="solid"/>
+          </a:ln>
+        </p:spPr>
+      </p:sp>
+      <p:sp>
+        <p:nvSpPr>
+          <p:cNvPr id="34" name="Shape 32"/>
+          <p:cNvSpPr/>
+          <p:nvPr/>
+        </p:nvSpPr>
+        <p:spPr>
+          <a:xfrm>
+            <a:off x="2958084" y="2807208"/>
+            <a:ext cx="914" cy="237744"/>
+          </a:xfrm>
+          <a:prstGeom prst="line">
+            <a:avLst/>
+          </a:prstGeom>
+          <a:noFill/>
+          <a:ln w="19050">
+            <a:solidFill>
+              <a:srgbClr val="8C97BC"/>
+            </a:solidFill>
+            <a:prstDash val="solid"/>
+          </a:ln>
+        </p:spPr>
+      </p:sp>
+      <p:sp>
+        <p:nvSpPr>
+          <p:cNvPr id="35" name="Shape 33"/>
+          <p:cNvSpPr/>
+          <p:nvPr/>
+        </p:nvSpPr>
+        <p:spPr>
+          <a:xfrm>
+            <a:off x="2958084" y="3118104"/>
+            <a:ext cx="914" cy="237744"/>
+          </a:xfrm>
+          <a:prstGeom prst="line">
+            <a:avLst/>
+          </a:prstGeom>
+          <a:noFill/>
+          <a:ln w="19050">
+            <a:solidFill>
+              <a:srgbClr val="8C97BC"/>
+            </a:solidFill>
+            <a:prstDash val="solid"/>
+          </a:ln>
+        </p:spPr>
+      </p:sp>
+      <p:sp>
+        <p:nvSpPr>
+          <p:cNvPr id="36" name="Shape 34"/>
+          <p:cNvSpPr/>
+          <p:nvPr/>
+        </p:nvSpPr>
+        <p:spPr>
+          <a:xfrm>
+            <a:off x="2903220" y="3355848"/>
+            <a:ext cx="109728" cy="109728"/>
+          </a:xfrm>
+          <a:prstGeom prst="ellipse">
+            <a:avLst/>
+          </a:prstGeom>
+          <a:solidFill>
+            <a:srgbClr val="C6D0E8"/>
+          </a:solidFill>
+          <a:ln w="12700">
+            <a:solidFill>
+              <a:srgbClr val="8C97BC"/>
+            </a:solidFill>
+            <a:prstDash val="solid"/>
+          </a:ln>
+        </p:spPr>
+      </p:sp>
+      <p:sp>
+        <p:nvSpPr>
+          <p:cNvPr id="37" name="Shape 35"/>
+          <p:cNvSpPr/>
+          <p:nvPr/>
+        </p:nvSpPr>
+        <p:spPr>
+          <a:xfrm>
+            <a:off x="3076956" y="2697480"/>
+            <a:ext cx="109728" cy="109728"/>
+          </a:xfrm>
+          <a:prstGeom prst="ellipse">
+            <a:avLst/>
+          </a:prstGeom>
+          <a:solidFill>
+            <a:srgbClr val="C6D0E8"/>
+          </a:solidFill>
+          <a:ln w="12700">
+            <a:solidFill>
+              <a:srgbClr val="8C97BC"/>
+            </a:solidFill>
+            <a:prstDash val="solid"/>
+          </a:ln>
+        </p:spPr>
+      </p:sp>
+      <p:sp>
+        <p:nvSpPr>
+          <p:cNvPr id="38" name="Shape 36"/>
+          <p:cNvSpPr/>
+          <p:nvPr/>
+        </p:nvSpPr>
+        <p:spPr>
+          <a:xfrm>
+            <a:off x="3131820" y="2807208"/>
+            <a:ext cx="914" cy="237744"/>
+          </a:xfrm>
+          <a:prstGeom prst="line">
+            <a:avLst/>
+          </a:prstGeom>
+          <a:noFill/>
+          <a:ln w="19050">
+            <a:solidFill>
+              <a:srgbClr val="8C97BC"/>
+            </a:solidFill>
+            <a:prstDash val="solid"/>
+          </a:ln>
+        </p:spPr>
+      </p:sp>
+      <p:sp>
+        <p:nvSpPr>
+          <p:cNvPr id="39" name="Shape 37"/>
+          <p:cNvSpPr/>
+          <p:nvPr/>
+        </p:nvSpPr>
+        <p:spPr>
+          <a:xfrm>
+            <a:off x="3131820" y="3118104"/>
+            <a:ext cx="914" cy="237744"/>
+          </a:xfrm>
+          <a:prstGeom prst="line">
+            <a:avLst/>
+          </a:prstGeom>
+          <a:noFill/>
+          <a:ln w="19050">
+            <a:solidFill>
+              <a:srgbClr val="8C97BC"/>
+            </a:solidFill>
+            <a:prstDash val="solid"/>
+          </a:ln>
+        </p:spPr>
+      </p:sp>
+      <p:sp>
+        <p:nvSpPr>
+          <p:cNvPr id="40" name="Shape 38"/>
+          <p:cNvSpPr/>
+          <p:nvPr/>
+        </p:nvSpPr>
+        <p:spPr>
+          <a:xfrm>
+            <a:off x="3076956" y="3355848"/>
+            <a:ext cx="109728" cy="109728"/>
+          </a:xfrm>
+          <a:prstGeom prst="ellipse">
+            <a:avLst/>
+          </a:prstGeom>
+          <a:solidFill>
+            <a:srgbClr val="C6D0E8"/>
+          </a:solidFill>
+          <a:ln w="12700">
+            <a:solidFill>
+              <a:srgbClr val="8C97BC"/>
+            </a:solidFill>
+            <a:prstDash val="solid"/>
+          </a:ln>
+        </p:spPr>
+      </p:sp>
+      <p:sp>
+        <p:nvSpPr>
+          <p:cNvPr id="41" name="Shape 39"/>
+          <p:cNvSpPr/>
+          <p:nvPr/>
+        </p:nvSpPr>
+        <p:spPr>
+          <a:xfrm>
+            <a:off x="3250692" y="2697480"/>
+            <a:ext cx="109728" cy="109728"/>
+          </a:xfrm>
+          <a:prstGeom prst="ellipse">
+            <a:avLst/>
+          </a:prstGeom>
+          <a:solidFill>
+            <a:srgbClr val="C6D0E8"/>
+          </a:solidFill>
+          <a:ln w="12700">
+            <a:solidFill>
+              <a:srgbClr val="8C97BC"/>
+            </a:solidFill>
+            <a:prstDash val="solid"/>
+          </a:ln>
+        </p:spPr>
+      </p:sp>
+      <p:sp>
+        <p:nvSpPr>
+          <p:cNvPr id="42" name="Shape 40"/>
+          <p:cNvSpPr/>
+          <p:nvPr/>
+        </p:nvSpPr>
+        <p:spPr>
+          <a:xfrm>
+            <a:off x="3305556" y="2807208"/>
+            <a:ext cx="914" cy="237744"/>
+          </a:xfrm>
+          <a:prstGeom prst="line">
+            <a:avLst/>
+          </a:prstGeom>
+          <a:noFill/>
+          <a:ln w="19050">
+            <a:solidFill>
+              <a:srgbClr val="8C97BC"/>
+            </a:solidFill>
+            <a:prstDash val="solid"/>
+          </a:ln>
+        </p:spPr>
+      </p:sp>
+      <p:sp>
+        <p:nvSpPr>
+          <p:cNvPr id="43" name="Shape 41"/>
+          <p:cNvSpPr/>
+          <p:nvPr/>
+        </p:nvSpPr>
+        <p:spPr>
+          <a:xfrm>
+            <a:off x="3305556" y="3118104"/>
+            <a:ext cx="914" cy="237744"/>
+          </a:xfrm>
+          <a:prstGeom prst="line">
+            <a:avLst/>
+          </a:prstGeom>
+          <a:noFill/>
+          <a:ln w="19050">
+            <a:solidFill>
+              <a:srgbClr val="8C97BC"/>
+            </a:solidFill>
+            <a:prstDash val="solid"/>
+          </a:ln>
+        </p:spPr>
+      </p:sp>
+      <p:sp>
+        <p:nvSpPr>
+          <p:cNvPr id="44" name="Shape 42"/>
+          <p:cNvSpPr/>
+          <p:nvPr/>
+        </p:nvSpPr>
+        <p:spPr>
+          <a:xfrm>
+            <a:off x="3250692" y="3355848"/>
+            <a:ext cx="109728" cy="109728"/>
+          </a:xfrm>
+          <a:prstGeom prst="ellipse">
+            <a:avLst/>
+          </a:prstGeom>
+          <a:solidFill>
+            <a:srgbClr val="C6D0E8"/>
+          </a:solidFill>
+          <a:ln w="12700">
+            <a:solidFill>
+              <a:srgbClr val="8C97BC"/>
+            </a:solidFill>
+            <a:prstDash val="solid"/>
+          </a:ln>
+        </p:spPr>
+      </p:sp>
+      <p:sp>
+        <p:nvSpPr>
+          <p:cNvPr id="45" name="Shape 43"/>
+          <p:cNvSpPr/>
+          <p:nvPr/>
+        </p:nvSpPr>
+        <p:spPr>
+          <a:xfrm>
+            <a:off x="3424428" y="2697480"/>
+            <a:ext cx="109728" cy="109728"/>
+          </a:xfrm>
+          <a:prstGeom prst="ellipse">
+            <a:avLst/>
+          </a:prstGeom>
+          <a:solidFill>
+            <a:srgbClr val="C6D0E8"/>
+          </a:solidFill>
+          <a:ln w="12700">
+            <a:solidFill>
+              <a:srgbClr val="8C97BC"/>
+            </a:solidFill>
+            <a:prstDash val="solid"/>
+          </a:ln>
+        </p:spPr>
+      </p:sp>
+      <p:sp>
+        <p:nvSpPr>
+          <p:cNvPr id="46" name="Shape 44"/>
+          <p:cNvSpPr/>
+          <p:nvPr/>
+        </p:nvSpPr>
+        <p:spPr>
+          <a:xfrm>
+            <a:off x="3479292" y="2807208"/>
+            <a:ext cx="914" cy="237744"/>
+          </a:xfrm>
+          <a:prstGeom prst="line">
+            <a:avLst/>
+          </a:prstGeom>
+          <a:noFill/>
+          <a:ln w="19050">
+            <a:solidFill>
+              <a:srgbClr val="8C97BC"/>
+            </a:solidFill>
+            <a:prstDash val="solid"/>
+          </a:ln>
+        </p:spPr>
+      </p:sp>
+      <p:sp>
+        <p:nvSpPr>
+          <p:cNvPr id="47" name="Shape 45"/>
+          <p:cNvSpPr/>
+          <p:nvPr/>
+        </p:nvSpPr>
+        <p:spPr>
+          <a:xfrm>
+            <a:off x="3479292" y="3118104"/>
+            <a:ext cx="914" cy="237744"/>
+          </a:xfrm>
+          <a:prstGeom prst="line">
+            <a:avLst/>
+          </a:prstGeom>
+          <a:noFill/>
+          <a:ln w="19050">
+            <a:solidFill>
+              <a:srgbClr val="8C97BC"/>
+            </a:solidFill>
+            <a:prstDash val="solid"/>
+          </a:ln>
+        </p:spPr>
+      </p:sp>
+      <p:sp>
+        <p:nvSpPr>
+          <p:cNvPr id="48" name="Shape 46"/>
+          <p:cNvSpPr/>
+          <p:nvPr/>
+        </p:nvSpPr>
+        <p:spPr>
+          <a:xfrm>
+            <a:off x="3424428" y="3355848"/>
+            <a:ext cx="109728" cy="109728"/>
+          </a:xfrm>
+          <a:prstGeom prst="ellipse">
+            <a:avLst/>
+          </a:prstGeom>
+          <a:solidFill>
+            <a:srgbClr val="C6D0E8"/>
+          </a:solidFill>
+          <a:ln w="12700">
+            <a:solidFill>
+              <a:srgbClr val="8C97BC"/>
+            </a:solidFill>
+            <a:prstDash val="solid"/>
+          </a:ln>
+        </p:spPr>
+      </p:sp>
+      <p:sp>
+        <p:nvSpPr>
+          <p:cNvPr id="49" name="Shape 47"/>
+          <p:cNvSpPr/>
+          <p:nvPr/>
+        </p:nvSpPr>
+        <p:spPr>
+          <a:xfrm>
+            <a:off x="3598164" y="2697480"/>
+            <a:ext cx="109728" cy="109728"/>
+          </a:xfrm>
+          <a:prstGeom prst="ellipse">
+            <a:avLst/>
+          </a:prstGeom>
+          <a:solidFill>
+            <a:srgbClr val="C6D0E8"/>
+          </a:solidFill>
+          <a:ln w="12700">
+            <a:solidFill>
+              <a:srgbClr val="8C97BC"/>
+            </a:solidFill>
+            <a:prstDash val="solid"/>
+          </a:ln>
+        </p:spPr>
+      </p:sp>
+      <p:sp>
+        <p:nvSpPr>
+          <p:cNvPr id="50" name="Shape 48"/>
+          <p:cNvSpPr/>
+          <p:nvPr/>
+        </p:nvSpPr>
+        <p:spPr>
+          <a:xfrm>
+            <a:off x="3653028" y="2807208"/>
+            <a:ext cx="914" cy="237744"/>
+          </a:xfrm>
+          <a:prstGeom prst="line">
+            <a:avLst/>
+          </a:prstGeom>
+          <a:noFill/>
+          <a:ln w="19050">
+            <a:solidFill>
+              <a:srgbClr val="8C97BC"/>
+            </a:solidFill>
+            <a:prstDash val="solid"/>
+          </a:ln>
+        </p:spPr>
+      </p:sp>
+      <p:sp>
+        <p:nvSpPr>
+          <p:cNvPr id="51" name="Shape 49"/>
+          <p:cNvSpPr/>
+          <p:nvPr/>
+        </p:nvSpPr>
+        <p:spPr>
+          <a:xfrm>
+            <a:off x="3653028" y="3118104"/>
+            <a:ext cx="914" cy="237744"/>
+          </a:xfrm>
+          <a:prstGeom prst="line">
+            <a:avLst/>
+          </a:prstGeom>
+          <a:noFill/>
+          <a:ln w="19050">
+            <a:solidFill>
+              <a:srgbClr val="8C97BC"/>
+            </a:solidFill>
+            <a:prstDash val="solid"/>
+          </a:ln>
+        </p:spPr>
+      </p:sp>
+      <p:sp>
+        <p:nvSpPr>
+          <p:cNvPr id="52" name="Shape 50"/>
+          <p:cNvSpPr/>
+          <p:nvPr/>
+        </p:nvSpPr>
+        <p:spPr>
+          <a:xfrm>
+            <a:off x="3598164" y="3355848"/>
+            <a:ext cx="109728" cy="109728"/>
+          </a:xfrm>
+          <a:prstGeom prst="ellipse">
+            <a:avLst/>
+          </a:prstGeom>
+          <a:solidFill>
+            <a:srgbClr val="C6D0E8"/>
+          </a:solidFill>
+          <a:ln w="12700">
+            <a:solidFill>
+              <a:srgbClr val="8C97BC"/>
+            </a:solidFill>
+            <a:prstDash val="solid"/>
+          </a:ln>
+        </p:spPr>
+      </p:sp>
+      <p:sp>
+        <p:nvSpPr>
+          <p:cNvPr id="53" name="Shape 51"/>
+          <p:cNvSpPr/>
+          <p:nvPr/>
+        </p:nvSpPr>
+        <p:spPr>
+          <a:xfrm>
+            <a:off x="3771900" y="2697480"/>
+            <a:ext cx="109728" cy="109728"/>
+          </a:xfrm>
+          <a:prstGeom prst="ellipse">
+            <a:avLst/>
+          </a:prstGeom>
+          <a:solidFill>
+            <a:srgbClr val="C6D0E8"/>
+          </a:solidFill>
+          <a:ln w="12700">
+            <a:solidFill>
+              <a:srgbClr val="8C97BC"/>
+            </a:solidFill>
+            <a:prstDash val="solid"/>
+          </a:ln>
+        </p:spPr>
+      </p:sp>
+      <p:sp>
+        <p:nvSpPr>
+          <p:cNvPr id="54" name="Shape 52"/>
+          <p:cNvSpPr/>
+          <p:nvPr/>
+        </p:nvSpPr>
+        <p:spPr>
+          <a:xfrm>
+            <a:off x="3826764" y="2807208"/>
+            <a:ext cx="914" cy="237744"/>
+          </a:xfrm>
+          <a:prstGeom prst="line">
+            <a:avLst/>
+          </a:prstGeom>
+          <a:noFill/>
+          <a:ln w="19050">
+            <a:solidFill>
+              <a:srgbClr val="8C97BC"/>
+            </a:solidFill>
+            <a:prstDash val="solid"/>
+          </a:ln>
+        </p:spPr>
+      </p:sp>
+      <p:sp>
+        <p:nvSpPr>
+          <p:cNvPr id="55" name="Shape 53"/>
+          <p:cNvSpPr/>
+          <p:nvPr/>
+        </p:nvSpPr>
+        <p:spPr>
+          <a:xfrm>
+            <a:off x="3826764" y="3118104"/>
+            <a:ext cx="914" cy="237744"/>
+          </a:xfrm>
+          <a:prstGeom prst="line">
+            <a:avLst/>
+          </a:prstGeom>
+          <a:noFill/>
+          <a:ln w="19050">
+            <a:solidFill>
+              <a:srgbClr val="8C97BC"/>
+            </a:solidFill>
+            <a:prstDash val="solid"/>
+          </a:ln>
+        </p:spPr>
+      </p:sp>
+      <p:sp>
+        <p:nvSpPr>
+          <p:cNvPr id="56" name="Shape 54"/>
+          <p:cNvSpPr/>
+          <p:nvPr/>
+        </p:nvSpPr>
+        <p:spPr>
+          <a:xfrm>
+            <a:off x="3771900" y="3355848"/>
+            <a:ext cx="109728" cy="109728"/>
+          </a:xfrm>
+          <a:prstGeom prst="ellipse">
+            <a:avLst/>
+          </a:prstGeom>
+          <a:solidFill>
+            <a:srgbClr val="C6D0E8"/>
+          </a:solidFill>
+          <a:ln w="12700">
+            <a:solidFill>
+              <a:srgbClr val="8C97BC"/>
+            </a:solidFill>
+            <a:prstDash val="solid"/>
+          </a:ln>
+        </p:spPr>
+      </p:sp>
+      <p:sp>
+        <p:nvSpPr>
+          <p:cNvPr id="57" name="Shape 55"/>
+          <p:cNvSpPr/>
+          <p:nvPr/>
+        </p:nvSpPr>
+        <p:spPr>
+          <a:xfrm>
+            <a:off x="3945636" y="2697480"/>
+            <a:ext cx="109728" cy="109728"/>
+          </a:xfrm>
+          <a:prstGeom prst="ellipse">
+            <a:avLst/>
+          </a:prstGeom>
+          <a:solidFill>
+            <a:srgbClr val="C6D0E8"/>
+          </a:solidFill>
+          <a:ln w="12700">
+            <a:solidFill>
+              <a:srgbClr val="8C97BC"/>
+            </a:solidFill>
+            <a:prstDash val="solid"/>
+          </a:ln>
+        </p:spPr>
+      </p:sp>
+      <p:sp>
+        <p:nvSpPr>
+          <p:cNvPr id="58" name="Shape 56"/>
+          <p:cNvSpPr/>
+          <p:nvPr/>
+        </p:nvSpPr>
+        <p:spPr>
+          <a:xfrm>
+            <a:off x="4000500" y="2807208"/>
+            <a:ext cx="914" cy="237744"/>
+          </a:xfrm>
+          <a:prstGeom prst="line">
+            <a:avLst/>
+          </a:prstGeom>
+          <a:noFill/>
+          <a:ln w="19050">
+            <a:solidFill>
+              <a:srgbClr val="8C97BC"/>
+            </a:solidFill>
+            <a:prstDash val="solid"/>
+          </a:ln>
+        </p:spPr>
+      </p:sp>
+      <p:sp>
+        <p:nvSpPr>
+          <p:cNvPr id="59" name="Shape 57"/>
+          <p:cNvSpPr/>
+          <p:nvPr/>
+        </p:nvSpPr>
+        <p:spPr>
+          <a:xfrm>
+            <a:off x="4000500" y="3118104"/>
+            <a:ext cx="914" cy="237744"/>
+          </a:xfrm>
+          <a:prstGeom prst="line">
+            <a:avLst/>
+          </a:prstGeom>
+          <a:noFill/>
+          <a:ln w="19050">
+            <a:solidFill>
+              <a:srgbClr val="8C97BC"/>
+            </a:solidFill>
+            <a:prstDash val="solid"/>
+          </a:ln>
+        </p:spPr>
+      </p:sp>
+      <p:sp>
+        <p:nvSpPr>
+          <p:cNvPr id="60" name="Shape 58"/>
+          <p:cNvSpPr/>
+          <p:nvPr/>
+        </p:nvSpPr>
+        <p:spPr>
+          <a:xfrm>
+            <a:off x="3945636" y="3355848"/>
+            <a:ext cx="109728" cy="109728"/>
+          </a:xfrm>
+          <a:prstGeom prst="ellipse">
+            <a:avLst/>
+          </a:prstGeom>
+          <a:solidFill>
+            <a:srgbClr val="C6D0E8"/>
+          </a:solidFill>
+          <a:ln w="12700">
+            <a:solidFill>
+              <a:srgbClr val="8C97BC"/>
+            </a:solidFill>
+            <a:prstDash val="solid"/>
+          </a:ln>
+        </p:spPr>
+      </p:sp>
+      <p:sp>
+        <p:nvSpPr>
+          <p:cNvPr id="61" name="Shape 59"/>
+          <p:cNvSpPr/>
+          <p:nvPr/>
+        </p:nvSpPr>
+        <p:spPr>
+          <a:xfrm>
+            <a:off x="4119372" y="2697480"/>
+            <a:ext cx="109728" cy="109728"/>
+          </a:xfrm>
+          <a:prstGeom prst="ellipse">
+            <a:avLst/>
+          </a:prstGeom>
+          <a:solidFill>
+            <a:srgbClr val="C6D0E8"/>
+          </a:solidFill>
+          <a:ln w="12700">
+            <a:solidFill>
+              <a:srgbClr val="8C97BC"/>
+            </a:solidFill>
+            <a:prstDash val="solid"/>
+          </a:ln>
+        </p:spPr>
+      </p:sp>
+      <p:sp>
+        <p:nvSpPr>
+          <p:cNvPr id="62" name="Shape 60"/>
+          <p:cNvSpPr/>
+          <p:nvPr/>
+        </p:nvSpPr>
+        <p:spPr>
+          <a:xfrm>
+            <a:off x="4174236" y="2807208"/>
+            <a:ext cx="914" cy="237744"/>
+          </a:xfrm>
+          <a:prstGeom prst="line">
+            <a:avLst/>
+          </a:prstGeom>
+          <a:noFill/>
+          <a:ln w="19050">
+            <a:solidFill>
+              <a:srgbClr val="8C97BC"/>
+            </a:solidFill>
+            <a:prstDash val="solid"/>
+          </a:ln>
+        </p:spPr>
+      </p:sp>
+      <p:sp>
+        <p:nvSpPr>
+          <p:cNvPr id="63" name="Shape 61"/>
+          <p:cNvSpPr/>
+          <p:nvPr/>
+        </p:nvSpPr>
+        <p:spPr>
+          <a:xfrm>
+            <a:off x="4174236" y="3118104"/>
+            <a:ext cx="914" cy="237744"/>
+          </a:xfrm>
+          <a:prstGeom prst="line">
+            <a:avLst/>
+          </a:prstGeom>
+          <a:noFill/>
+          <a:ln w="19050">
+            <a:solidFill>
+              <a:srgbClr val="8C97BC"/>
+            </a:solidFill>
+            <a:prstDash val="solid"/>
+          </a:ln>
+        </p:spPr>
+      </p:sp>
+      <p:sp>
+        <p:nvSpPr>
+          <p:cNvPr id="64" name="Shape 62"/>
+          <p:cNvSpPr/>
+          <p:nvPr/>
+        </p:nvSpPr>
+        <p:spPr>
+          <a:xfrm>
+            <a:off x="4119372" y="3355848"/>
+            <a:ext cx="109728" cy="109728"/>
+          </a:xfrm>
+          <a:prstGeom prst="ellipse">
+            <a:avLst/>
+          </a:prstGeom>
+          <a:solidFill>
+            <a:srgbClr val="C6D0E8"/>
+          </a:solidFill>
+          <a:ln w="12700">
+            <a:solidFill>
+              <a:srgbClr val="8C97BC"/>
+            </a:solidFill>
+            <a:prstDash val="solid"/>
+          </a:ln>
+        </p:spPr>
+      </p:sp>
+      <p:sp>
+        <p:nvSpPr>
+          <p:cNvPr id="65" name="Shape 63"/>
+          <p:cNvSpPr/>
+          <p:nvPr/>
+        </p:nvSpPr>
+        <p:spPr>
+          <a:xfrm>
+            <a:off x="4293108" y="2697480"/>
+            <a:ext cx="109728" cy="109728"/>
+          </a:xfrm>
+          <a:prstGeom prst="ellipse">
+            <a:avLst/>
+          </a:prstGeom>
+          <a:solidFill>
+            <a:srgbClr val="C6D0E8"/>
+          </a:solidFill>
+          <a:ln w="12700">
+            <a:solidFill>
+              <a:srgbClr val="8C97BC"/>
+            </a:solidFill>
+            <a:prstDash val="solid"/>
+          </a:ln>
+        </p:spPr>
+      </p:sp>
+      <p:sp>
+        <p:nvSpPr>
+          <p:cNvPr id="66" name="Shape 64"/>
+          <p:cNvSpPr/>
+          <p:nvPr/>
+        </p:nvSpPr>
+        <p:spPr>
+          <a:xfrm>
+            <a:off x="4347972" y="2807208"/>
+            <a:ext cx="914" cy="237744"/>
+          </a:xfrm>
+          <a:prstGeom prst="line">
+            <a:avLst/>
+          </a:prstGeom>
+          <a:noFill/>
+          <a:ln w="19050">
+            <a:solidFill>
+              <a:srgbClr val="8C97BC"/>
+            </a:solidFill>
+            <a:prstDash val="solid"/>
+          </a:ln>
+        </p:spPr>
+      </p:sp>
+      <p:sp>
+        <p:nvSpPr>
+          <p:cNvPr id="67" name="Shape 65"/>
+          <p:cNvSpPr/>
+          <p:nvPr/>
+        </p:nvSpPr>
+        <p:spPr>
+          <a:xfrm>
+            <a:off x="4347972" y="3118104"/>
+            <a:ext cx="914" cy="237744"/>
+          </a:xfrm>
+          <a:prstGeom prst="line">
+            <a:avLst/>
+          </a:prstGeom>
+          <a:noFill/>
+          <a:ln w="19050">
+            <a:solidFill>
+              <a:srgbClr val="8C97BC"/>
+            </a:solidFill>
+            <a:prstDash val="solid"/>
+          </a:ln>
+        </p:spPr>
+      </p:sp>
+      <p:sp>
+        <p:nvSpPr>
+          <p:cNvPr id="68" name="Shape 66"/>
+          <p:cNvSpPr/>
+          <p:nvPr/>
+        </p:nvSpPr>
+        <p:spPr>
+          <a:xfrm>
+            <a:off x="4293108" y="3355848"/>
+            <a:ext cx="109728" cy="109728"/>
+          </a:xfrm>
+          <a:prstGeom prst="ellipse">
+            <a:avLst/>
+          </a:prstGeom>
+          <a:solidFill>
+            <a:srgbClr val="C6D0E8"/>
+          </a:solidFill>
+          <a:ln w="12700">
+            <a:solidFill>
+              <a:srgbClr val="8C97BC"/>
+            </a:solidFill>
+            <a:prstDash val="solid"/>
+          </a:ln>
+        </p:spPr>
+      </p:sp>
+      <p:sp>
+        <p:nvSpPr>
+          <p:cNvPr id="69" name="Shape 67"/>
+          <p:cNvSpPr/>
+          <p:nvPr/>
+        </p:nvSpPr>
+        <p:spPr>
+          <a:xfrm>
+            <a:off x="4466844" y="2697480"/>
+            <a:ext cx="109728" cy="109728"/>
+          </a:xfrm>
+          <a:prstGeom prst="ellipse">
+            <a:avLst/>
+          </a:prstGeom>
+          <a:solidFill>
+            <a:srgbClr val="C6D0E8"/>
+          </a:solidFill>
+          <a:ln w="12700">
+            <a:solidFill>
+              <a:srgbClr val="8C97BC"/>
+            </a:solidFill>
+            <a:prstDash val="solid"/>
+          </a:ln>
+        </p:spPr>
+      </p:sp>
+      <p:sp>
+        <p:nvSpPr>
+          <p:cNvPr id="70" name="Shape 68"/>
+          <p:cNvSpPr/>
+          <p:nvPr/>
+        </p:nvSpPr>
+        <p:spPr>
+          <a:xfrm>
+            <a:off x="4521708" y="2807208"/>
+            <a:ext cx="914" cy="237744"/>
+          </a:xfrm>
+          <a:prstGeom prst="line">
+            <a:avLst/>
+          </a:prstGeom>
+          <a:noFill/>
+          <a:ln w="19050">
+            <a:solidFill>
+              <a:srgbClr val="8C97BC"/>
+            </a:solidFill>
+            <a:prstDash val="solid"/>
+          </a:ln>
+        </p:spPr>
+      </p:sp>
+      <p:sp>
+        <p:nvSpPr>
+          <p:cNvPr id="71" name="Shape 69"/>
+          <p:cNvSpPr/>
+          <p:nvPr/>
+        </p:nvSpPr>
+        <p:spPr>
+          <a:xfrm>
+            <a:off x="4521708" y="3118104"/>
+            <a:ext cx="914" cy="237744"/>
+          </a:xfrm>
+          <a:prstGeom prst="line">
+            <a:avLst/>
+          </a:prstGeom>
+          <a:noFill/>
+          <a:ln w="19050">
+            <a:solidFill>
+              <a:srgbClr val="8C97BC"/>
+            </a:solidFill>
+            <a:prstDash val="solid"/>
+          </a:ln>
+        </p:spPr>
+      </p:sp>
+      <p:sp>
+        <p:nvSpPr>
+          <p:cNvPr id="72" name="Shape 70"/>
+          <p:cNvSpPr/>
+          <p:nvPr/>
+        </p:nvSpPr>
+        <p:spPr>
+          <a:xfrm>
+            <a:off x="4466844" y="3355848"/>
+            <a:ext cx="109728" cy="109728"/>
+          </a:xfrm>
+          <a:prstGeom prst="ellipse">
+            <a:avLst/>
+          </a:prstGeom>
+          <a:solidFill>
+            <a:srgbClr val="C6D0E8"/>
+          </a:solidFill>
+          <a:ln w="12700">
+            <a:solidFill>
+              <a:srgbClr val="8C97BC"/>
+            </a:solidFill>
+            <a:prstDash val="solid"/>
+          </a:ln>
+        </p:spPr>
+      </p:sp>
+      <p:sp>
+        <p:nvSpPr>
+          <p:cNvPr id="73" name="Shape 71"/>
+          <p:cNvSpPr/>
+          <p:nvPr/>
+        </p:nvSpPr>
+        <p:spPr>
+          <a:xfrm>
+            <a:off x="4640580" y="2697480"/>
+            <a:ext cx="109728" cy="109728"/>
+          </a:xfrm>
+          <a:prstGeom prst="ellipse">
+            <a:avLst/>
+          </a:prstGeom>
+          <a:solidFill>
+            <a:srgbClr val="C6D0E8"/>
+          </a:solidFill>
+          <a:ln w="12700">
+            <a:solidFill>
+              <a:srgbClr val="8C97BC"/>
+            </a:solidFill>
+            <a:prstDash val="solid"/>
+          </a:ln>
+        </p:spPr>
+      </p:sp>
+      <p:sp>
+        <p:nvSpPr>
+          <p:cNvPr id="74" name="Shape 72"/>
+          <p:cNvSpPr/>
+          <p:nvPr/>
+        </p:nvSpPr>
+        <p:spPr>
+          <a:xfrm>
+            <a:off x="4695444" y="2807208"/>
+            <a:ext cx="914" cy="237744"/>
+          </a:xfrm>
+          <a:prstGeom prst="line">
+            <a:avLst/>
+          </a:prstGeom>
+          <a:noFill/>
+          <a:ln w="19050">
+            <a:solidFill>
+              <a:srgbClr val="8C97BC"/>
+            </a:solidFill>
+            <a:prstDash val="solid"/>
+          </a:ln>
+        </p:spPr>
+      </p:sp>
+      <p:sp>
+        <p:nvSpPr>
+          <p:cNvPr id="75" name="Shape 73"/>
+          <p:cNvSpPr/>
+          <p:nvPr/>
+        </p:nvSpPr>
+        <p:spPr>
+          <a:xfrm>
+            <a:off x="4695444" y="3118104"/>
+            <a:ext cx="914" cy="237744"/>
+          </a:xfrm>
+          <a:prstGeom prst="line">
+            <a:avLst/>
+          </a:prstGeom>
+          <a:noFill/>
+          <a:ln w="19050">
+            <a:solidFill>
+              <a:srgbClr val="8C97BC"/>
+            </a:solidFill>
+            <a:prstDash val="solid"/>
+          </a:ln>
+        </p:spPr>
+      </p:sp>
+      <p:sp>
+        <p:nvSpPr>
+          <p:cNvPr id="76" name="Shape 74"/>
+          <p:cNvSpPr/>
+          <p:nvPr/>
+        </p:nvSpPr>
+        <p:spPr>
+          <a:xfrm>
+            <a:off x="4640580" y="3355848"/>
+            <a:ext cx="109728" cy="109728"/>
+          </a:xfrm>
+          <a:prstGeom prst="ellipse">
+            <a:avLst/>
+          </a:prstGeom>
+          <a:solidFill>
+            <a:srgbClr val="C6D0E8"/>
+          </a:solidFill>
+          <a:ln w="12700">
+            <a:solidFill>
+              <a:srgbClr val="8C97BC"/>
+            </a:solidFill>
+            <a:prstDash val="solid"/>
+          </a:ln>
+        </p:spPr>
+      </p:sp>
+      <p:sp>
+        <p:nvSpPr>
+          <p:cNvPr id="77" name="Shape 75"/>
+          <p:cNvSpPr/>
+          <p:nvPr/>
+        </p:nvSpPr>
+        <p:spPr>
+          <a:xfrm>
+            <a:off x="4814316" y="2697480"/>
+            <a:ext cx="109728" cy="109728"/>
+          </a:xfrm>
+          <a:prstGeom prst="ellipse">
+            <a:avLst/>
+          </a:prstGeom>
+          <a:solidFill>
+            <a:srgbClr val="C6D0E8"/>
+          </a:solidFill>
+          <a:ln w="12700">
+            <a:solidFill>
+              <a:srgbClr val="8C97BC"/>
+            </a:solidFill>
+            <a:prstDash val="solid"/>
+          </a:ln>
+        </p:spPr>
+      </p:sp>
+      <p:sp>
+        <p:nvSpPr>
+          <p:cNvPr id="78" name="Shape 76"/>
+          <p:cNvSpPr/>
+          <p:nvPr/>
+        </p:nvSpPr>
+        <p:spPr>
+          <a:xfrm>
+            <a:off x="4869180" y="2807208"/>
+            <a:ext cx="914" cy="237744"/>
+          </a:xfrm>
+          <a:prstGeom prst="line">
+            <a:avLst/>
+          </a:prstGeom>
+          <a:noFill/>
+          <a:ln w="19050">
+            <a:solidFill>
+              <a:srgbClr val="8C97BC"/>
+            </a:solidFill>
+            <a:prstDash val="solid"/>
+          </a:ln>
+        </p:spPr>
+      </p:sp>
+      <p:sp>
+        <p:nvSpPr>
+          <p:cNvPr id="79" name="Shape 77"/>
+          <p:cNvSpPr/>
+          <p:nvPr/>
+        </p:nvSpPr>
+        <p:spPr>
+          <a:xfrm>
+            <a:off x="4869180" y="3118104"/>
+            <a:ext cx="914" cy="237744"/>
+          </a:xfrm>
+          <a:prstGeom prst="line">
+            <a:avLst/>
+          </a:prstGeom>
+          <a:noFill/>
+          <a:ln w="19050">
+            <a:solidFill>
+              <a:srgbClr val="8C97BC"/>
+            </a:solidFill>
+            <a:prstDash val="solid"/>
+          </a:ln>
+        </p:spPr>
+      </p:sp>
+      <p:sp>
+        <p:nvSpPr>
+          <p:cNvPr id="80" name="Shape 78"/>
+          <p:cNvSpPr/>
+          <p:nvPr/>
+        </p:nvSpPr>
+        <p:spPr>
+          <a:xfrm>
+            <a:off x="4814316" y="3355848"/>
+            <a:ext cx="109728" cy="109728"/>
+          </a:xfrm>
+          <a:prstGeom prst="ellipse">
+            <a:avLst/>
+          </a:prstGeom>
+          <a:solidFill>
+            <a:srgbClr val="C6D0E8"/>
+          </a:solidFill>
+          <a:ln w="12700">
+            <a:solidFill>
+              <a:srgbClr val="8C97BC"/>
+            </a:solidFill>
+            <a:prstDash val="solid"/>
+          </a:ln>
+        </p:spPr>
+      </p:sp>
+      <p:sp>
+        <p:nvSpPr>
+          <p:cNvPr id="81" name="Shape 79"/>
+          <p:cNvSpPr/>
+          <p:nvPr/>
+        </p:nvSpPr>
+        <p:spPr>
+          <a:xfrm>
+            <a:off x="4988052" y="2697480"/>
+            <a:ext cx="109728" cy="109728"/>
+          </a:xfrm>
+          <a:prstGeom prst="ellipse">
+            <a:avLst/>
+          </a:prstGeom>
+          <a:solidFill>
+            <a:srgbClr val="C6D0E8"/>
+          </a:solidFill>
+          <a:ln w="12700">
+            <a:solidFill>
+              <a:srgbClr val="8C97BC"/>
+            </a:solidFill>
+            <a:prstDash val="solid"/>
+          </a:ln>
+        </p:spPr>
+      </p:sp>
+      <p:sp>
+        <p:nvSpPr>
+          <p:cNvPr id="82" name="Shape 80"/>
+          <p:cNvSpPr/>
+          <p:nvPr/>
+        </p:nvSpPr>
+        <p:spPr>
+          <a:xfrm>
+            <a:off x="5042916" y="2807208"/>
+            <a:ext cx="914" cy="237744"/>
+          </a:xfrm>
+          <a:prstGeom prst="line">
+            <a:avLst/>
+          </a:prstGeom>
+          <a:noFill/>
+          <a:ln w="19050">
+            <a:solidFill>
+              <a:srgbClr val="8C97BC"/>
+            </a:solidFill>
+            <a:prstDash val="solid"/>
+          </a:ln>
+        </p:spPr>
+      </p:sp>
+      <p:sp>
+        <p:nvSpPr>
+          <p:cNvPr id="83" name="Shape 81"/>
+          <p:cNvSpPr/>
+          <p:nvPr/>
+        </p:nvSpPr>
+        <p:spPr>
+          <a:xfrm>
+            <a:off x="5042916" y="3118104"/>
+            <a:ext cx="914" cy="237744"/>
+          </a:xfrm>
+          <a:prstGeom prst="line">
+            <a:avLst/>
+          </a:prstGeom>
+          <a:noFill/>
+          <a:ln w="19050">
+            <a:solidFill>
+              <a:srgbClr val="8C97BC"/>
+            </a:solidFill>
+            <a:prstDash val="solid"/>
+          </a:ln>
+        </p:spPr>
+      </p:sp>
+      <p:sp>
+        <p:nvSpPr>
+          <p:cNvPr id="84" name="Shape 82"/>
+          <p:cNvSpPr/>
+          <p:nvPr/>
+        </p:nvSpPr>
+        <p:spPr>
+          <a:xfrm>
+            <a:off x="4988052" y="3355848"/>
+            <a:ext cx="109728" cy="109728"/>
+          </a:xfrm>
+          <a:prstGeom prst="ellipse">
+            <a:avLst/>
+          </a:prstGeom>
+          <a:solidFill>
+            <a:srgbClr val="C6D0E8"/>
+          </a:solidFill>
+          <a:ln w="12700">
+            <a:solidFill>
+              <a:srgbClr val="8C97BC"/>
+            </a:solidFill>
+            <a:prstDash val="solid"/>
+          </a:ln>
+        </p:spPr>
+      </p:sp>
+      <p:sp>
+        <p:nvSpPr>
+          <p:cNvPr id="85" name="Shape 83"/>
+          <p:cNvSpPr/>
+          <p:nvPr/>
+        </p:nvSpPr>
+        <p:spPr>
+          <a:xfrm>
+            <a:off x="5161788" y="2697480"/>
+            <a:ext cx="109728" cy="109728"/>
+          </a:xfrm>
+          <a:prstGeom prst="ellipse">
+            <a:avLst/>
+          </a:prstGeom>
+          <a:solidFill>
+            <a:srgbClr val="C6D0E8"/>
+          </a:solidFill>
+          <a:ln w="12700">
+            <a:solidFill>
+              <a:srgbClr val="8C97BC"/>
+            </a:solidFill>
+            <a:prstDash val="solid"/>
+          </a:ln>
+        </p:spPr>
+      </p:sp>
+      <p:sp>
+        <p:nvSpPr>
+          <p:cNvPr id="86" name="Shape 84"/>
+          <p:cNvSpPr/>
+          <p:nvPr/>
+        </p:nvSpPr>
+        <p:spPr>
+          <a:xfrm>
+            <a:off x="5216652" y="2807208"/>
+            <a:ext cx="914" cy="237744"/>
+          </a:xfrm>
+          <a:prstGeom prst="line">
+            <a:avLst/>
+          </a:prstGeom>
+          <a:noFill/>
+          <a:ln w="19050">
+            <a:solidFill>
+              <a:srgbClr val="8C97BC"/>
+            </a:solidFill>
+            <a:prstDash val="solid"/>
+          </a:ln>
+        </p:spPr>
+      </p:sp>
+      <p:sp>
+        <p:nvSpPr>
+          <p:cNvPr id="87" name="Shape 85"/>
+          <p:cNvSpPr/>
+          <p:nvPr/>
+        </p:nvSpPr>
+        <p:spPr>
+          <a:xfrm>
+            <a:off x="5216652" y="3118104"/>
+            <a:ext cx="914" cy="237744"/>
+          </a:xfrm>
+          <a:prstGeom prst="line">
+            <a:avLst/>
+          </a:prstGeom>
+          <a:noFill/>
+          <a:ln w="19050">
+            <a:solidFill>
+              <a:srgbClr val="8C97BC"/>
+            </a:solidFill>
+            <a:prstDash val="solid"/>
+          </a:ln>
+        </p:spPr>
+      </p:sp>
+      <p:sp>
+        <p:nvSpPr>
+          <p:cNvPr id="88" name="Shape 86"/>
+          <p:cNvSpPr/>
+          <p:nvPr/>
+        </p:nvSpPr>
+        <p:spPr>
+          <a:xfrm>
+            <a:off x="5161788" y="3355848"/>
+            <a:ext cx="109728" cy="109728"/>
+          </a:xfrm>
+          <a:prstGeom prst="ellipse">
+            <a:avLst/>
+          </a:prstGeom>
+          <a:solidFill>
+            <a:srgbClr val="C6D0E8"/>
+          </a:solidFill>
+          <a:ln w="12700">
+            <a:solidFill>
+              <a:srgbClr val="8C97BC"/>
+            </a:solidFill>
+            <a:prstDash val="solid"/>
+          </a:ln>
+        </p:spPr>
+      </p:sp>
+      <p:sp>
+        <p:nvSpPr>
+          <p:cNvPr id="89" name="Shape 87"/>
+          <p:cNvSpPr/>
+          <p:nvPr/>
+        </p:nvSpPr>
+        <p:spPr>
+          <a:xfrm>
+            <a:off x="5335524" y="2697480"/>
+            <a:ext cx="109728" cy="109728"/>
+          </a:xfrm>
+          <a:prstGeom prst="ellipse">
+            <a:avLst/>
+          </a:prstGeom>
+          <a:solidFill>
+            <a:srgbClr val="C6D0E8"/>
+          </a:solidFill>
+          <a:ln w="12700">
+            <a:solidFill>
+              <a:srgbClr val="8C97BC"/>
+            </a:solidFill>
+            <a:prstDash val="solid"/>
+          </a:ln>
+        </p:spPr>
+      </p:sp>
+      <p:sp>
+        <p:nvSpPr>
+          <p:cNvPr id="90" name="Shape 88"/>
+          <p:cNvSpPr/>
+          <p:nvPr/>
+        </p:nvSpPr>
+        <p:spPr>
+          <a:xfrm>
+            <a:off x="5390388" y="2807208"/>
+            <a:ext cx="914" cy="237744"/>
+          </a:xfrm>
+          <a:prstGeom prst="line">
+            <a:avLst/>
+          </a:prstGeom>
+          <a:noFill/>
+          <a:ln w="19050">
+            <a:solidFill>
+              <a:srgbClr val="8C97BC"/>
+            </a:solidFill>
+            <a:prstDash val="solid"/>
+          </a:ln>
+        </p:spPr>
+      </p:sp>
+      <p:sp>
+        <p:nvSpPr>
+          <p:cNvPr id="91" name="Shape 89"/>
+          <p:cNvSpPr/>
+          <p:nvPr/>
+        </p:nvSpPr>
+        <p:spPr>
+          <a:xfrm>
+            <a:off x="5390388" y="3118104"/>
+            <a:ext cx="914" cy="237744"/>
+          </a:xfrm>
+          <a:prstGeom prst="line">
+            <a:avLst/>
+          </a:prstGeom>
+          <a:noFill/>
+          <a:ln w="19050">
+            <a:solidFill>
+              <a:srgbClr val="8C97BC"/>
+            </a:solidFill>
+            <a:prstDash val="solid"/>
+          </a:ln>
+        </p:spPr>
+      </p:sp>
+      <p:sp>
+        <p:nvSpPr>
+          <p:cNvPr id="92" name="Shape 90"/>
+          <p:cNvSpPr/>
+          <p:nvPr/>
+        </p:nvSpPr>
+        <p:spPr>
+          <a:xfrm>
+            <a:off x="5335524" y="3355848"/>
+            <a:ext cx="109728" cy="109728"/>
+          </a:xfrm>
+          <a:prstGeom prst="ellipse">
+            <a:avLst/>
+          </a:prstGeom>
+          <a:solidFill>
+            <a:srgbClr val="C6D0E8"/>
+          </a:solidFill>
+          <a:ln w="12700">
+            <a:solidFill>
+              <a:srgbClr val="8C97BC"/>
+            </a:solidFill>
+            <a:prstDash val="solid"/>
+          </a:ln>
+        </p:spPr>
+      </p:sp>
+      <p:sp>
+        <p:nvSpPr>
+          <p:cNvPr id="93" name="Shape 91"/>
+          <p:cNvSpPr/>
+          <p:nvPr/>
+        </p:nvSpPr>
+        <p:spPr>
+          <a:xfrm>
+            <a:off x="5509260" y="2697480"/>
+            <a:ext cx="109728" cy="109728"/>
+          </a:xfrm>
+          <a:prstGeom prst="ellipse">
+            <a:avLst/>
+          </a:prstGeom>
+          <a:solidFill>
+            <a:srgbClr val="C6D0E8"/>
+          </a:solidFill>
+          <a:ln w="12700">
+            <a:solidFill>
+              <a:srgbClr val="8C97BC"/>
+            </a:solidFill>
+            <a:prstDash val="solid"/>
+          </a:ln>
+        </p:spPr>
+      </p:sp>
+      <p:sp>
+        <p:nvSpPr>
+          <p:cNvPr id="94" name="Shape 92"/>
+          <p:cNvSpPr/>
+          <p:nvPr/>
+        </p:nvSpPr>
+        <p:spPr>
+          <a:xfrm>
+            <a:off x="5564124" y="2807208"/>
+            <a:ext cx="914" cy="237744"/>
+          </a:xfrm>
+          <a:prstGeom prst="line">
+            <a:avLst/>
+          </a:prstGeom>
+          <a:noFill/>
+          <a:ln w="19050">
+            <a:solidFill>
+              <a:srgbClr val="8C97BC"/>
+            </a:solidFill>
+            <a:prstDash val="solid"/>
+          </a:ln>
+        </p:spPr>
+      </p:sp>
+      <p:sp>
+        <p:nvSpPr>
+          <p:cNvPr id="95" name="Shape 93"/>
+          <p:cNvSpPr/>
+          <p:nvPr/>
+        </p:nvSpPr>
+        <p:spPr>
+          <a:xfrm>
+            <a:off x="5564124" y="3118104"/>
+            <a:ext cx="914" cy="237744"/>
+          </a:xfrm>
+          <a:prstGeom prst="line">
+            <a:avLst/>
+          </a:prstGeom>
+          <a:noFill/>
+          <a:ln w="19050">
+            <a:solidFill>
+              <a:srgbClr val="8C97BC"/>
+            </a:solidFill>
+            <a:prstDash val="solid"/>
+          </a:ln>
+        </p:spPr>
+      </p:sp>
+      <p:sp>
+        <p:nvSpPr>
+          <p:cNvPr id="96" name="Shape 94"/>
+          <p:cNvSpPr/>
+          <p:nvPr/>
+        </p:nvSpPr>
+        <p:spPr>
+          <a:xfrm>
+            <a:off x="5509260" y="3355848"/>
+            <a:ext cx="109728" cy="109728"/>
+          </a:xfrm>
+          <a:prstGeom prst="ellipse">
+            <a:avLst/>
+          </a:prstGeom>
+          <a:solidFill>
+            <a:srgbClr val="C6D0E8"/>
+          </a:solidFill>
+          <a:ln w="12700">
+            <a:solidFill>
+              <a:srgbClr val="8C97BC"/>
+            </a:solidFill>
+            <a:prstDash val="solid"/>
+          </a:ln>
+        </p:spPr>
+      </p:sp>
+      <p:sp>
+        <p:nvSpPr>
+          <p:cNvPr id="97" name="Shape 95"/>
+          <p:cNvSpPr/>
+          <p:nvPr/>
+        </p:nvSpPr>
+        <p:spPr>
+          <a:xfrm>
+            <a:off x="5682996" y="2697480"/>
+            <a:ext cx="109728" cy="109728"/>
+          </a:xfrm>
+          <a:prstGeom prst="ellipse">
+            <a:avLst/>
+          </a:prstGeom>
+          <a:solidFill>
+            <a:srgbClr val="C6D0E8"/>
+          </a:solidFill>
+          <a:ln w="12700">
+            <a:solidFill>
+              <a:srgbClr val="8C97BC"/>
+            </a:solidFill>
+            <a:prstDash val="solid"/>
+          </a:ln>
+        </p:spPr>
+      </p:sp>
+      <p:sp>
+        <p:nvSpPr>
+          <p:cNvPr id="98" name="Shape 96"/>
+          <p:cNvSpPr/>
+          <p:nvPr/>
+        </p:nvSpPr>
+        <p:spPr>
+          <a:xfrm>
+            <a:off x="5737860" y="2807208"/>
+            <a:ext cx="914" cy="237744"/>
+          </a:xfrm>
+          <a:prstGeom prst="line">
+            <a:avLst/>
+          </a:prstGeom>
+          <a:noFill/>
+          <a:ln w="19050">
+            <a:solidFill>
+              <a:srgbClr val="8C97BC"/>
+            </a:solidFill>
+            <a:prstDash val="solid"/>
+          </a:ln>
+        </p:spPr>
+      </p:sp>
+      <p:sp>
+        <p:nvSpPr>
+          <p:cNvPr id="99" name="Shape 97"/>
+          <p:cNvSpPr/>
+          <p:nvPr/>
+        </p:nvSpPr>
+        <p:spPr>
+          <a:xfrm>
+            <a:off x="5737860" y="3118104"/>
+            <a:ext cx="914" cy="237744"/>
+          </a:xfrm>
+          <a:prstGeom prst="line">
+            <a:avLst/>
+          </a:prstGeom>
+          <a:noFill/>
+          <a:ln w="19050">
+            <a:solidFill>
+              <a:srgbClr val="8C97BC"/>
+            </a:solidFill>
+            <a:prstDash val="solid"/>
+          </a:ln>
+        </p:spPr>
+      </p:sp>
+      <p:sp>
+        <p:nvSpPr>
+          <p:cNvPr id="100" name="Shape 98"/>
+          <p:cNvSpPr/>
+          <p:nvPr/>
+        </p:nvSpPr>
+        <p:spPr>
+          <a:xfrm>
+            <a:off x="5682996" y="3355848"/>
+            <a:ext cx="109728" cy="109728"/>
+          </a:xfrm>
+          <a:prstGeom prst="ellipse">
+            <a:avLst/>
+          </a:prstGeom>
+          <a:solidFill>
+            <a:srgbClr val="C6D0E8"/>
+          </a:solidFill>
+          <a:ln w="12700">
+            <a:solidFill>
+              <a:srgbClr val="8C97BC"/>
+            </a:solidFill>
+            <a:prstDash val="solid"/>
+          </a:ln>
+        </p:spPr>
+      </p:sp>
+      <p:sp>
+        <p:nvSpPr>
+          <p:cNvPr id="101" name="Shape 99"/>
+          <p:cNvSpPr/>
+          <p:nvPr/>
+        </p:nvSpPr>
+        <p:spPr>
+          <a:xfrm>
+            <a:off x="5856732" y="2697480"/>
+            <a:ext cx="109728" cy="109728"/>
+          </a:xfrm>
+          <a:prstGeom prst="ellipse">
+            <a:avLst/>
+          </a:prstGeom>
+          <a:solidFill>
+            <a:srgbClr val="C6D0E8"/>
+          </a:solidFill>
+          <a:ln w="12700">
+            <a:solidFill>
+              <a:srgbClr val="8C97BC"/>
+            </a:solidFill>
+            <a:prstDash val="solid"/>
+          </a:ln>
+        </p:spPr>
+      </p:sp>
+      <p:sp>
+        <p:nvSpPr>
+          <p:cNvPr id="102" name="Shape 100"/>
+          <p:cNvSpPr/>
+          <p:nvPr/>
+        </p:nvSpPr>
+        <p:spPr>
+          <a:xfrm>
+            <a:off x="5911596" y="2807208"/>
+            <a:ext cx="914" cy="237744"/>
+          </a:xfrm>
+          <a:prstGeom prst="line">
+            <a:avLst/>
+          </a:prstGeom>
+          <a:noFill/>
+          <a:ln w="19050">
+            <a:solidFill>
+              <a:srgbClr val="8C97BC"/>
+            </a:solidFill>
+            <a:prstDash val="solid"/>
+          </a:ln>
+        </p:spPr>
+      </p:sp>
+      <p:sp>
+        <p:nvSpPr>
+          <p:cNvPr id="103" name="Shape 101"/>
+          <p:cNvSpPr/>
+          <p:nvPr/>
+        </p:nvSpPr>
+        <p:spPr>
+          <a:xfrm>
+            <a:off x="5911596" y="3118104"/>
+            <a:ext cx="914" cy="237744"/>
+          </a:xfrm>
+          <a:prstGeom prst="line">
+            <a:avLst/>
+          </a:prstGeom>
+          <a:noFill/>
+          <a:ln w="19050">
+            <a:solidFill>
+              <a:srgbClr val="8C97BC"/>
+            </a:solidFill>
+            <a:prstDash val="solid"/>
+          </a:ln>
+        </p:spPr>
+      </p:sp>
+      <p:sp>
+        <p:nvSpPr>
+          <p:cNvPr id="104" name="Shape 102"/>
+          <p:cNvSpPr/>
+          <p:nvPr/>
+        </p:nvSpPr>
+        <p:spPr>
+          <a:xfrm>
+            <a:off x="5856732" y="3355848"/>
+            <a:ext cx="109728" cy="109728"/>
+          </a:xfrm>
+          <a:prstGeom prst="ellipse">
+            <a:avLst/>
+          </a:prstGeom>
+          <a:solidFill>
+            <a:srgbClr val="C6D0E8"/>
+          </a:solidFill>
+          <a:ln w="12700">
+            <a:solidFill>
+              <a:srgbClr val="8C97BC"/>
+            </a:solidFill>
+            <a:prstDash val="solid"/>
+          </a:ln>
+        </p:spPr>
+      </p:sp>
+      <p:sp>
+        <p:nvSpPr>
+          <p:cNvPr id="105" name="Shape 103"/>
+          <p:cNvSpPr/>
+          <p:nvPr/>
+        </p:nvSpPr>
+        <p:spPr>
+          <a:xfrm>
+            <a:off x="6030468" y="2697480"/>
+            <a:ext cx="109728" cy="109728"/>
+          </a:xfrm>
+          <a:prstGeom prst="ellipse">
+            <a:avLst/>
+          </a:prstGeom>
+          <a:solidFill>
+            <a:srgbClr val="C6D0E8"/>
+          </a:solidFill>
+          <a:ln w="12700">
+            <a:solidFill>
+              <a:srgbClr val="8C97BC"/>
+            </a:solidFill>
+            <a:prstDash val="solid"/>
+          </a:ln>
+        </p:spPr>
+      </p:sp>
+      <p:sp>
+        <p:nvSpPr>
+          <p:cNvPr id="106" name="Shape 104"/>
+          <p:cNvSpPr/>
+          <p:nvPr/>
+        </p:nvSpPr>
+        <p:spPr>
+          <a:xfrm>
+            <a:off x="6085332" y="2807208"/>
+            <a:ext cx="914" cy="237744"/>
+          </a:xfrm>
+          <a:prstGeom prst="line">
+            <a:avLst/>
+          </a:prstGeom>
+          <a:noFill/>
+          <a:ln w="19050">
+            <a:solidFill>
+              <a:srgbClr val="8C97BC"/>
+            </a:solidFill>
+            <a:prstDash val="solid"/>
+          </a:ln>
+        </p:spPr>
+      </p:sp>
+      <p:sp>
+        <p:nvSpPr>
+          <p:cNvPr id="107" name="Shape 105"/>
+          <p:cNvSpPr/>
+          <p:nvPr/>
+        </p:nvSpPr>
+        <p:spPr>
+          <a:xfrm>
+            <a:off x="6085332" y="3118104"/>
+            <a:ext cx="914" cy="237744"/>
+          </a:xfrm>
+          <a:prstGeom prst="line">
+            <a:avLst/>
+          </a:prstGeom>
+          <a:noFill/>
+          <a:ln w="19050">
+            <a:solidFill>
+              <a:srgbClr val="8C97BC"/>
+            </a:solidFill>
+            <a:prstDash val="solid"/>
+          </a:ln>
+        </p:spPr>
+      </p:sp>
+      <p:sp>
+        <p:nvSpPr>
+          <p:cNvPr id="108" name="Shape 106"/>
+          <p:cNvSpPr/>
+          <p:nvPr/>
+        </p:nvSpPr>
+        <p:spPr>
+          <a:xfrm>
+            <a:off x="6030468" y="3355848"/>
+            <a:ext cx="109728" cy="109728"/>
+          </a:xfrm>
+          <a:prstGeom prst="ellipse">
+            <a:avLst/>
+          </a:prstGeom>
+          <a:solidFill>
+            <a:srgbClr val="C6D0E8"/>
+          </a:solidFill>
+          <a:ln w="12700">
+            <a:solidFill>
+              <a:srgbClr val="8C97BC"/>
+            </a:solidFill>
+            <a:prstDash val="solid"/>
+          </a:ln>
+        </p:spPr>
+      </p:sp>
+      <p:sp>
+        <p:nvSpPr>
+          <p:cNvPr id="109" name="Shape 107"/>
+          <p:cNvSpPr/>
+          <p:nvPr/>
+        </p:nvSpPr>
+        <p:spPr>
+          <a:xfrm>
+            <a:off x="6204204" y="2697480"/>
+            <a:ext cx="109728" cy="109728"/>
+          </a:xfrm>
+          <a:prstGeom prst="ellipse">
+            <a:avLst/>
+          </a:prstGeom>
+          <a:solidFill>
+            <a:srgbClr val="C6D0E8"/>
+          </a:solidFill>
+          <a:ln w="12700">
+            <a:solidFill>
+              <a:srgbClr val="8C97BC"/>
+            </a:solidFill>
+            <a:prstDash val="solid"/>
+          </a:ln>
+        </p:spPr>
+      </p:sp>
+      <p:sp>
+        <p:nvSpPr>
+          <p:cNvPr id="110" name="Shape 108"/>
+          <p:cNvSpPr/>
+          <p:nvPr/>
+        </p:nvSpPr>
+        <p:spPr>
+          <a:xfrm>
+            <a:off x="6259068" y="2807208"/>
+            <a:ext cx="914" cy="237744"/>
+          </a:xfrm>
+          <a:prstGeom prst="line">
+            <a:avLst/>
+          </a:prstGeom>
+          <a:noFill/>
+          <a:ln w="19050">
+            <a:solidFill>
+              <a:srgbClr val="8C97BC"/>
+            </a:solidFill>
+            <a:prstDash val="solid"/>
+          </a:ln>
+        </p:spPr>
+      </p:sp>
+      <p:sp>
+        <p:nvSpPr>
+          <p:cNvPr id="111" name="Shape 109"/>
+          <p:cNvSpPr/>
+          <p:nvPr/>
+        </p:nvSpPr>
+        <p:spPr>
+          <a:xfrm>
+            <a:off x="6259068" y="3118104"/>
+            <a:ext cx="914" cy="237744"/>
+          </a:xfrm>
+          <a:prstGeom prst="line">
+            <a:avLst/>
+          </a:prstGeom>
+          <a:noFill/>
+          <a:ln w="19050">
+            <a:solidFill>
+              <a:srgbClr val="8C97BC"/>
+            </a:solidFill>
+            <a:prstDash val="solid"/>
+          </a:ln>
+        </p:spPr>
+      </p:sp>
+      <p:sp>
+        <p:nvSpPr>
+          <p:cNvPr id="112" name="Shape 110"/>
+          <p:cNvSpPr/>
+          <p:nvPr/>
+        </p:nvSpPr>
+        <p:spPr>
+          <a:xfrm>
+            <a:off x="6204204" y="3355848"/>
+            <a:ext cx="109728" cy="109728"/>
+          </a:xfrm>
+          <a:prstGeom prst="ellipse">
+            <a:avLst/>
+          </a:prstGeom>
+          <a:solidFill>
+            <a:srgbClr val="C6D0E8"/>
+          </a:solidFill>
+          <a:ln w="12700">
+            <a:solidFill>
+              <a:srgbClr val="8C97BC"/>
+            </a:solidFill>
+            <a:prstDash val="solid"/>
+          </a:ln>
+        </p:spPr>
+      </p:sp>
+      <p:sp>
+        <p:nvSpPr>
+          <p:cNvPr id="113" name="Shape 111"/>
+          <p:cNvSpPr/>
+          <p:nvPr/>
+        </p:nvSpPr>
+        <p:spPr>
+          <a:xfrm>
+            <a:off x="6377940" y="2697480"/>
+            <a:ext cx="109728" cy="109728"/>
+          </a:xfrm>
+          <a:prstGeom prst="ellipse">
+            <a:avLst/>
+          </a:prstGeom>
+          <a:solidFill>
+            <a:srgbClr val="C6D0E8"/>
+          </a:solidFill>
+          <a:ln w="12700">
+            <a:solidFill>
+              <a:srgbClr val="8C97BC"/>
+            </a:solidFill>
+            <a:prstDash val="solid"/>
+          </a:ln>
+        </p:spPr>
+      </p:sp>
+      <p:sp>
+        <p:nvSpPr>
+          <p:cNvPr id="114" name="Shape 112"/>
+          <p:cNvSpPr/>
+          <p:nvPr/>
+        </p:nvSpPr>
+        <p:spPr>
+          <a:xfrm>
+            <a:off x="6432804" y="2807208"/>
+            <a:ext cx="914" cy="237744"/>
+          </a:xfrm>
+          <a:prstGeom prst="line">
+            <a:avLst/>
+          </a:prstGeom>
+          <a:noFill/>
+          <a:ln w="19050">
+            <a:solidFill>
+              <a:srgbClr val="8C97BC"/>
+            </a:solidFill>
+            <a:prstDash val="solid"/>
+          </a:ln>
+        </p:spPr>
+      </p:sp>
+      <p:sp>
+        <p:nvSpPr>
+          <p:cNvPr id="115" name="Shape 113"/>
+          <p:cNvSpPr/>
+          <p:nvPr/>
+        </p:nvSpPr>
+        <p:spPr>
+          <a:xfrm>
+            <a:off x="6432804" y="3118104"/>
+            <a:ext cx="914" cy="237744"/>
+          </a:xfrm>
+          <a:prstGeom prst="line">
+            <a:avLst/>
+          </a:prstGeom>
+          <a:noFill/>
+          <a:ln w="19050">
+            <a:solidFill>
+              <a:srgbClr val="8C97BC"/>
+            </a:solidFill>
+            <a:prstDash val="solid"/>
+          </a:ln>
+        </p:spPr>
+      </p:sp>
+      <p:sp>
+        <p:nvSpPr>
+          <p:cNvPr id="116" name="Shape 114"/>
+          <p:cNvSpPr/>
+          <p:nvPr/>
+        </p:nvSpPr>
+        <p:spPr>
+          <a:xfrm>
+            <a:off x="6377940" y="3355848"/>
+            <a:ext cx="109728" cy="109728"/>
+          </a:xfrm>
+          <a:prstGeom prst="ellipse">
+            <a:avLst/>
+          </a:prstGeom>
+          <a:solidFill>
+            <a:srgbClr val="C6D0E8"/>
+          </a:solidFill>
+          <a:ln w="12700">
+            <a:solidFill>
+              <a:srgbClr val="8C97BC"/>
+            </a:solidFill>
+            <a:prstDash val="solid"/>
+          </a:ln>
+        </p:spPr>
+      </p:sp>
+      <p:sp>
+        <p:nvSpPr>
+          <p:cNvPr id="117" name="Shape 115"/>
+          <p:cNvSpPr/>
+          <p:nvPr/>
+        </p:nvSpPr>
+        <p:spPr>
+          <a:xfrm>
+            <a:off x="6551676" y="2697480"/>
+            <a:ext cx="109728" cy="109728"/>
+          </a:xfrm>
+          <a:prstGeom prst="ellipse">
+            <a:avLst/>
+          </a:prstGeom>
+          <a:solidFill>
+            <a:srgbClr val="C6D0E8"/>
+          </a:solidFill>
+          <a:ln w="12700">
+            <a:solidFill>
+              <a:srgbClr val="8C97BC"/>
+            </a:solidFill>
+            <a:prstDash val="solid"/>
+          </a:ln>
+        </p:spPr>
+      </p:sp>
+      <p:sp>
+        <p:nvSpPr>
+          <p:cNvPr id="118" name="Shape 116"/>
+          <p:cNvSpPr/>
+          <p:nvPr/>
+        </p:nvSpPr>
+        <p:spPr>
+          <a:xfrm>
+            <a:off x="6606540" y="2807208"/>
+            <a:ext cx="914" cy="237744"/>
+          </a:xfrm>
+          <a:prstGeom prst="line">
+            <a:avLst/>
+          </a:prstGeom>
+          <a:noFill/>
+          <a:ln w="19050">
+            <a:solidFill>
+              <a:srgbClr val="8C97BC"/>
+            </a:solidFill>
+            <a:prstDash val="solid"/>
+          </a:ln>
+        </p:spPr>
+      </p:sp>
+      <p:sp>
+        <p:nvSpPr>
+          <p:cNvPr id="119" name="Shape 117"/>
+          <p:cNvSpPr/>
+          <p:nvPr/>
+        </p:nvSpPr>
+        <p:spPr>
+          <a:xfrm>
+            <a:off x="6606540" y="3118104"/>
+            <a:ext cx="914" cy="237744"/>
+          </a:xfrm>
+          <a:prstGeom prst="line">
+            <a:avLst/>
+          </a:prstGeom>
+          <a:noFill/>
+          <a:ln w="19050">
+            <a:solidFill>
+              <a:srgbClr val="8C97BC"/>
+            </a:solidFill>
+            <a:prstDash val="solid"/>
+          </a:ln>
+        </p:spPr>
+      </p:sp>
+      <p:sp>
+        <p:nvSpPr>
+          <p:cNvPr id="120" name="Shape 118"/>
+          <p:cNvSpPr/>
+          <p:nvPr/>
+        </p:nvSpPr>
+        <p:spPr>
+          <a:xfrm>
+            <a:off x="6551676" y="3355848"/>
+            <a:ext cx="109728" cy="109728"/>
+          </a:xfrm>
+          <a:prstGeom prst="ellipse">
+            <a:avLst/>
+          </a:prstGeom>
+          <a:solidFill>
+            <a:srgbClr val="C6D0E8"/>
+          </a:solidFill>
+          <a:ln w="12700">
+            <a:solidFill>
+              <a:srgbClr val="8C97BC"/>
+            </a:solidFill>
+            <a:prstDash val="solid"/>
+          </a:ln>
+        </p:spPr>
+      </p:sp>
+      <p:sp>
+        <p:nvSpPr>
+          <p:cNvPr id="121" name="Shape 119"/>
+          <p:cNvSpPr/>
+          <p:nvPr/>
+        </p:nvSpPr>
+        <p:spPr>
+          <a:xfrm>
+            <a:off x="6725412" y="2697480"/>
+            <a:ext cx="109728" cy="109728"/>
+          </a:xfrm>
+          <a:prstGeom prst="ellipse">
+            <a:avLst/>
+          </a:prstGeom>
+          <a:solidFill>
+            <a:srgbClr val="C6D0E8"/>
+          </a:solidFill>
+          <a:ln w="12700">
+            <a:solidFill>
+              <a:srgbClr val="8C97BC"/>
+            </a:solidFill>
+            <a:prstDash val="solid"/>
+          </a:ln>
+        </p:spPr>
+      </p:sp>
+      <p:sp>
+        <p:nvSpPr>
+          <p:cNvPr id="122" name="Shape 120"/>
+          <p:cNvSpPr/>
+          <p:nvPr/>
+        </p:nvSpPr>
+        <p:spPr>
+          <a:xfrm>
+            <a:off x="6780276" y="2807208"/>
+            <a:ext cx="914" cy="237744"/>
+          </a:xfrm>
+          <a:prstGeom prst="line">
+            <a:avLst/>
+          </a:prstGeom>
+          <a:noFill/>
+          <a:ln w="19050">
+            <a:solidFill>
+              <a:srgbClr val="8C97BC"/>
+            </a:solidFill>
+            <a:prstDash val="solid"/>
+          </a:ln>
+        </p:spPr>
+      </p:sp>
+      <p:sp>
+        <p:nvSpPr>
+          <p:cNvPr id="123" name="Shape 121"/>
+          <p:cNvSpPr/>
+          <p:nvPr/>
+        </p:nvSpPr>
+        <p:spPr>
+          <a:xfrm>
+            <a:off x="6780276" y="3118104"/>
+            <a:ext cx="914" cy="237744"/>
+          </a:xfrm>
+          <a:prstGeom prst="line">
+            <a:avLst/>
+          </a:prstGeom>
+          <a:noFill/>
+          <a:ln w="19050">
+            <a:solidFill>
+              <a:srgbClr val="8C97BC"/>
+            </a:solidFill>
+            <a:prstDash val="solid"/>
+          </a:ln>
+        </p:spPr>
+      </p:sp>
+      <p:sp>
+        <p:nvSpPr>
+          <p:cNvPr id="124" name="Shape 122"/>
+          <p:cNvSpPr/>
+          <p:nvPr/>
+        </p:nvSpPr>
+        <p:spPr>
+          <a:xfrm>
+            <a:off x="6725412" y="3355848"/>
+            <a:ext cx="109728" cy="109728"/>
+          </a:xfrm>
+          <a:prstGeom prst="ellipse">
+            <a:avLst/>
+          </a:prstGeom>
+          <a:solidFill>
+            <a:srgbClr val="C6D0E8"/>
+          </a:solidFill>
+          <a:ln w="12700">
+            <a:solidFill>
+              <a:srgbClr val="8C97BC"/>
+            </a:solidFill>
+            <a:prstDash val="solid"/>
+          </a:ln>
+        </p:spPr>
+      </p:sp>
+      <p:sp>
+        <p:nvSpPr>
+          <p:cNvPr id="125" name="Shape 123"/>
+          <p:cNvSpPr/>
+          <p:nvPr/>
+        </p:nvSpPr>
+        <p:spPr>
+          <a:xfrm>
+            <a:off x="6899148" y="2697480"/>
+            <a:ext cx="109728" cy="109728"/>
+          </a:xfrm>
+          <a:prstGeom prst="ellipse">
+            <a:avLst/>
+          </a:prstGeom>
+          <a:solidFill>
+            <a:srgbClr val="C6D0E8"/>
+          </a:solidFill>
+          <a:ln w="12700">
+            <a:solidFill>
+              <a:srgbClr val="8C97BC"/>
+            </a:solidFill>
+            <a:prstDash val="solid"/>
+          </a:ln>
+        </p:spPr>
+      </p:sp>
+      <p:sp>
+        <p:nvSpPr>
+          <p:cNvPr id="126" name="Shape 124"/>
+          <p:cNvSpPr/>
+          <p:nvPr/>
+        </p:nvSpPr>
+        <p:spPr>
+          <a:xfrm>
+            <a:off x="6954012" y="2807208"/>
+            <a:ext cx="914" cy="237744"/>
+          </a:xfrm>
+          <a:prstGeom prst="line">
+            <a:avLst/>
+          </a:prstGeom>
+          <a:noFill/>
+          <a:ln w="19050">
+            <a:solidFill>
+              <a:srgbClr val="8C97BC"/>
+            </a:solidFill>
+            <a:prstDash val="solid"/>
+          </a:ln>
+        </p:spPr>
+      </p:sp>
+      <p:sp>
+        <p:nvSpPr>
+          <p:cNvPr id="127" name="Shape 125"/>
+          <p:cNvSpPr/>
+          <p:nvPr/>
+        </p:nvSpPr>
+        <p:spPr>
+          <a:xfrm>
+            <a:off x="6954012" y="3118104"/>
+            <a:ext cx="914" cy="237744"/>
+          </a:xfrm>
+          <a:prstGeom prst="line">
+            <a:avLst/>
+          </a:prstGeom>
+          <a:noFill/>
+          <a:ln w="19050">
+            <a:solidFill>
+              <a:srgbClr val="8C97BC"/>
+            </a:solidFill>
+            <a:prstDash val="solid"/>
+          </a:ln>
+        </p:spPr>
+      </p:sp>
+      <p:sp>
+        <p:nvSpPr>
+          <p:cNvPr id="128" name="Shape 126"/>
+          <p:cNvSpPr/>
+          <p:nvPr/>
+        </p:nvSpPr>
+        <p:spPr>
+          <a:xfrm>
+            <a:off x="6899148" y="3355848"/>
+            <a:ext cx="109728" cy="109728"/>
+          </a:xfrm>
+          <a:prstGeom prst="ellipse">
+            <a:avLst/>
+          </a:prstGeom>
+          <a:solidFill>
+            <a:srgbClr val="C6D0E8"/>
+          </a:solidFill>
+          <a:ln w="12700">
+            <a:solidFill>
+              <a:srgbClr val="8C97BC"/>
+            </a:solidFill>
+            <a:prstDash val="solid"/>
+          </a:ln>
+        </p:spPr>
+      </p:sp>
+      <p:sp>
+        <p:nvSpPr>
+          <p:cNvPr id="129" name="Shape 127"/>
+          <p:cNvSpPr/>
+          <p:nvPr/>
+        </p:nvSpPr>
+        <p:spPr>
+          <a:xfrm>
+            <a:off x="7072884" y="2697480"/>
+            <a:ext cx="109728" cy="109728"/>
+          </a:xfrm>
+          <a:prstGeom prst="ellipse">
+            <a:avLst/>
+          </a:prstGeom>
+          <a:solidFill>
+            <a:srgbClr val="C6D0E8"/>
+          </a:solidFill>
+          <a:ln w="12700">
+            <a:solidFill>
+              <a:srgbClr val="8C97BC"/>
+            </a:solidFill>
+            <a:prstDash val="solid"/>
+          </a:ln>
+        </p:spPr>
+      </p:sp>
+      <p:sp>
+        <p:nvSpPr>
+          <p:cNvPr id="130" name="Shape 128"/>
+          <p:cNvSpPr/>
+          <p:nvPr/>
+        </p:nvSpPr>
+        <p:spPr>
+          <a:xfrm>
+            <a:off x="7127748" y="2807208"/>
+            <a:ext cx="914" cy="237744"/>
+          </a:xfrm>
+          <a:prstGeom prst="line">
+            <a:avLst/>
+          </a:prstGeom>
+          <a:noFill/>
+          <a:ln w="19050">
+            <a:solidFill>
+              <a:srgbClr val="8C97BC"/>
+            </a:solidFill>
+            <a:prstDash val="solid"/>
+          </a:ln>
+        </p:spPr>
+      </p:sp>
+      <p:sp>
+        <p:nvSpPr>
+          <p:cNvPr id="131" name="Shape 129"/>
+          <p:cNvSpPr/>
+          <p:nvPr/>
+        </p:nvSpPr>
+        <p:spPr>
+          <a:xfrm>
+            <a:off x="7127748" y="3118104"/>
+            <a:ext cx="914" cy="237744"/>
+          </a:xfrm>
+          <a:prstGeom prst="line">
+            <a:avLst/>
+          </a:prstGeom>
+          <a:noFill/>
+          <a:ln w="19050">
+            <a:solidFill>
+              <a:srgbClr val="8C97BC"/>
+            </a:solidFill>
+            <a:prstDash val="solid"/>
+          </a:ln>
+        </p:spPr>
+      </p:sp>
+      <p:sp>
+        <p:nvSpPr>
+          <p:cNvPr id="132" name="Shape 130"/>
+          <p:cNvSpPr/>
+          <p:nvPr/>
+        </p:nvSpPr>
+        <p:spPr>
+          <a:xfrm>
+            <a:off x="7072884" y="3355848"/>
+            <a:ext cx="109728" cy="109728"/>
+          </a:xfrm>
+          <a:prstGeom prst="ellipse">
+            <a:avLst/>
+          </a:prstGeom>
+          <a:solidFill>
+            <a:srgbClr val="C6D0E8"/>
+          </a:solidFill>
+          <a:ln w="12700">
+            <a:solidFill>
+              <a:srgbClr val="8C97BC"/>
+            </a:solidFill>
+            <a:prstDash val="solid"/>
+          </a:ln>
+        </p:spPr>
+      </p:sp>
+      <p:sp>
+        <p:nvSpPr>
+          <p:cNvPr id="133" name="Shape 131"/>
+          <p:cNvSpPr/>
+          <p:nvPr/>
+        </p:nvSpPr>
+        <p:spPr>
+          <a:xfrm>
+            <a:off x="7246620" y="2697480"/>
+            <a:ext cx="109728" cy="109728"/>
+          </a:xfrm>
+          <a:prstGeom prst="ellipse">
+            <a:avLst/>
+          </a:prstGeom>
+          <a:solidFill>
+            <a:srgbClr val="C6D0E8"/>
+          </a:solidFill>
+          <a:ln w="12700">
+            <a:solidFill>
+              <a:srgbClr val="8C97BC"/>
+            </a:solidFill>
+            <a:prstDash val="solid"/>
+          </a:ln>
+        </p:spPr>
+      </p:sp>
+      <p:sp>
+        <p:nvSpPr>
+          <p:cNvPr id="134" name="Shape 132"/>
+          <p:cNvSpPr/>
+          <p:nvPr/>
+        </p:nvSpPr>
+        <p:spPr>
+          <a:xfrm>
+            <a:off x="7301484" y="2807208"/>
+            <a:ext cx="914" cy="237744"/>
+          </a:xfrm>
+          <a:prstGeom prst="line">
+            <a:avLst/>
+          </a:prstGeom>
+          <a:noFill/>
+          <a:ln w="19050">
+            <a:solidFill>
+              <a:srgbClr val="8C97BC"/>
+            </a:solidFill>
+            <a:prstDash val="solid"/>
+          </a:ln>
+        </p:spPr>
+      </p:sp>
+      <p:sp>
+        <p:nvSpPr>
+          <p:cNvPr id="135" name="Shape 133"/>
+          <p:cNvSpPr/>
+          <p:nvPr/>
+        </p:nvSpPr>
+        <p:spPr>
+          <a:xfrm>
+            <a:off x="7301484" y="3118104"/>
+            <a:ext cx="914" cy="237744"/>
+          </a:xfrm>
+          <a:prstGeom prst="line">
+            <a:avLst/>
+          </a:prstGeom>
+          <a:noFill/>
+          <a:ln w="19050">
+            <a:solidFill>
+              <a:srgbClr val="8C97BC"/>
+            </a:solidFill>
+            <a:prstDash val="solid"/>
+          </a:ln>
+        </p:spPr>
+      </p:sp>
+      <p:sp>
+        <p:nvSpPr>
+          <p:cNvPr id="136" name="Shape 134"/>
+          <p:cNvSpPr/>
+          <p:nvPr/>
+        </p:nvSpPr>
+        <p:spPr>
+          <a:xfrm>
+            <a:off x="7246620" y="3355848"/>
+            <a:ext cx="109728" cy="109728"/>
+          </a:xfrm>
+          <a:prstGeom prst="ellipse">
+            <a:avLst/>
+          </a:prstGeom>
+          <a:solidFill>
+            <a:srgbClr val="C6D0E8"/>
+          </a:solidFill>
+          <a:ln w="12700">
+            <a:solidFill>
+              <a:srgbClr val="8C97BC"/>
+            </a:solidFill>
+            <a:prstDash val="solid"/>
+          </a:ln>
+        </p:spPr>
+      </p:sp>
+      <p:sp>
+        <p:nvSpPr>
+          <p:cNvPr id="137" name="Text 135"/>
+          <p:cNvSpPr txBox="1"/>
+          <p:nvPr/>
+        </p:nvSpPr>
+        <p:spPr>
+          <a:xfrm>
+            <a:off x="1828800" y="3520440"/>
+            <a:ext cx="5486400" cy="274320"/>
+          </a:xfrm>
+          <a:prstGeom prst="rect">
+            <a:avLst/>
+          </a:prstGeom>
+          <a:noFill/>
+          <a:ln/>
+        </p:spPr>
+        <p:txBody>
+          <a:bodyPr wrap="square" lIns="0" tIns="0" rIns="0" bIns="0" rtlCol="0" anchor="t"/>
+          <a:lstStyle/>
+          <a:p>
+            <a:pPr algn="ctr" indent="0" marL="0">
+              <a:buNone/>
+            </a:pPr>
+            <a:r>
+              <a:rPr lang="en-US" sz="1100" i="1" dirty="0">
+                <a:solidFill>
+                  <a:srgbClr val="9AA0C0"/>
+                </a:solidFill>
+                <a:latin typeface="Calibri" pitchFamily="34" charset="0"/>
+                <a:ea typeface="Calibri" pitchFamily="34" charset="-122"/>
+                <a:cs typeface="Calibri" pitchFamily="34" charset="-120"/>
+              </a:rPr>
+              <a:t>Membrana (bicapa)</a:t>
+            </a:r>
+            <a:endParaRPr lang="en-US" sz="1100" dirty="0"/>
+          </a:p>
+        </p:txBody>
+      </p:sp>
+      <p:sp>
+        <p:nvSpPr>
+          <p:cNvPr id="138" name="Shape 136"/>
+          <p:cNvSpPr/>
+          <p:nvPr/>
+        </p:nvSpPr>
+        <p:spPr>
+          <a:xfrm>
+            <a:off x="457200" y="3840480"/>
+            <a:ext cx="2624328" cy="566928"/>
+          </a:xfrm>
+          <a:prstGeom prst="roundRect">
+            <a:avLst>
+              <a:gd name="adj" fmla="val 16129"/>
+            </a:avLst>
+          </a:prstGeom>
+          <a:solidFill>
+            <a:srgbClr val="ECEFF9"/>
+          </a:solidFill>
+          <a:ln w="19050">
+            <a:solidFill>
+              <a:srgbClr val="4CC9F0"/>
+            </a:solidFill>
+            <a:prstDash val="solid"/>
+          </a:ln>
+        </p:spPr>
+      </p:sp>
+      <p:sp>
+        <p:nvSpPr>
+          <p:cNvPr id="139" name="Text 137"/>
+          <p:cNvSpPr txBox="1"/>
+          <p:nvPr/>
+        </p:nvSpPr>
+        <p:spPr>
+          <a:xfrm>
+            <a:off x="566928" y="3840480"/>
+            <a:ext cx="2404872" cy="566928"/>
+          </a:xfrm>
+          <a:prstGeom prst="rect">
+            <a:avLst/>
+          </a:prstGeom>
+          <a:noFill/>
+          <a:ln/>
+        </p:spPr>
+        <p:txBody>
+          <a:bodyPr wrap="square" lIns="0" tIns="0" rIns="0" bIns="0" rtlCol="0" anchor="ctr"/>
+          <a:lstStyle/>
+          <a:p>
+            <a:pPr indent="0" marL="0">
+              <a:buNone/>
+            </a:pPr>
+            <a:r>
+              <a:rPr lang="en-US" sz="1000" b="1" dirty="0">
+                <a:solidFill>
+                  <a:srgbClr val="0A6F98"/>
+                </a:solidFill>
+                <a:latin typeface="Calibri" pitchFamily="34" charset="0"/>
+                <a:ea typeface="Calibri" pitchFamily="34" charset="-122"/>
+                <a:cs typeface="Calibri" pitchFamily="34" charset="-120"/>
+              </a:rPr>
+              <a:t>Sin membrana externa  </a:t>
+            </a:r>
+            <a:pPr indent="0" marL="0">
+              <a:buNone/>
+            </a:pPr>
+            <a:r>
+              <a:rPr lang="en-US" sz="1000" dirty="0">
+                <a:solidFill>
+                  <a:srgbClr val="51597F"/>
+                </a:solidFill>
+                <a:latin typeface="Calibri" pitchFamily="34" charset="0"/>
+                <a:ea typeface="Calibri" pitchFamily="34" charset="-122"/>
+                <a:cs typeface="Calibri" pitchFamily="34" charset="-120"/>
+              </a:rPr>
+              <a:t>No hay LPS; PAMP por teicoicos y lipoproteínas</a:t>
+            </a:r>
+            <a:endParaRPr lang="en-US" sz="1000" dirty="0"/>
+          </a:p>
+        </p:txBody>
+      </p:sp>
+      <p:sp>
+        <p:nvSpPr>
+          <p:cNvPr id="140" name="Shape 138"/>
+          <p:cNvSpPr/>
+          <p:nvPr/>
+        </p:nvSpPr>
+        <p:spPr>
+          <a:xfrm>
+            <a:off x="3264408" y="3840480"/>
+            <a:ext cx="2624328" cy="566928"/>
+          </a:xfrm>
+          <a:prstGeom prst="roundRect">
+            <a:avLst>
+              <a:gd name="adj" fmla="val 16129"/>
+            </a:avLst>
+          </a:prstGeom>
+          <a:solidFill>
+            <a:srgbClr val="ECEFF9"/>
+          </a:solidFill>
+          <a:ln w="19050">
+            <a:solidFill>
+              <a:srgbClr val="F2B43C"/>
+            </a:solidFill>
+            <a:prstDash val="solid"/>
+          </a:ln>
+        </p:spPr>
+      </p:sp>
+      <p:sp>
+        <p:nvSpPr>
+          <p:cNvPr id="141" name="Text 139"/>
+          <p:cNvSpPr txBox="1"/>
+          <p:nvPr/>
+        </p:nvSpPr>
+        <p:spPr>
+          <a:xfrm>
+            <a:off x="3374136" y="3840480"/>
+            <a:ext cx="2404872" cy="566928"/>
+          </a:xfrm>
+          <a:prstGeom prst="rect">
+            <a:avLst/>
+          </a:prstGeom>
+          <a:noFill/>
+          <a:ln/>
+        </p:spPr>
+        <p:txBody>
+          <a:bodyPr wrap="square" lIns="0" tIns="0" rIns="0" bIns="0" rtlCol="0" anchor="ctr"/>
+          <a:lstStyle/>
+          <a:p>
+            <a:pPr indent="0" marL="0">
+              <a:buNone/>
+            </a:pPr>
+            <a:r>
+              <a:rPr lang="en-US" sz="1000" b="1" dirty="0">
+                <a:solidFill>
+                  <a:srgbClr val="A66A00"/>
+                </a:solidFill>
+                <a:latin typeface="Calibri" pitchFamily="34" charset="0"/>
+                <a:ea typeface="Calibri" pitchFamily="34" charset="-122"/>
+                <a:cs typeface="Calibri" pitchFamily="34" charset="-120"/>
+              </a:rPr>
+              <a:t>Sitio de las PBP  </a:t>
+            </a:r>
+            <a:pPr indent="0" marL="0">
+              <a:buNone/>
+            </a:pPr>
+            <a:r>
+              <a:rPr lang="en-US" sz="1000" dirty="0">
+                <a:solidFill>
+                  <a:srgbClr val="51597F"/>
+                </a:solidFill>
+                <a:latin typeface="Calibri" pitchFamily="34" charset="0"/>
+                <a:ea typeface="Calibri" pitchFamily="34" charset="-122"/>
+                <a:cs typeface="Calibri" pitchFamily="34" charset="-120"/>
+              </a:rPr>
+              <a:t>Sintetizan la pared: diana de betalactámicos</a:t>
+            </a:r>
+            <a:endParaRPr lang="en-US" sz="1000" dirty="0"/>
+          </a:p>
+        </p:txBody>
+      </p:sp>
+      <p:sp>
+        <p:nvSpPr>
+          <p:cNvPr id="142" name="Shape 140"/>
+          <p:cNvSpPr/>
+          <p:nvPr/>
+        </p:nvSpPr>
+        <p:spPr>
+          <a:xfrm>
+            <a:off x="6071616" y="3840480"/>
+            <a:ext cx="2624328" cy="566928"/>
+          </a:xfrm>
+          <a:prstGeom prst="roundRect">
+            <a:avLst>
+              <a:gd name="adj" fmla="val 16129"/>
+            </a:avLst>
+          </a:prstGeom>
+          <a:solidFill>
+            <a:srgbClr val="ECEFF9"/>
+          </a:solidFill>
+          <a:ln w="19050">
+            <a:solidFill>
+              <a:srgbClr val="F2546B"/>
+            </a:solidFill>
+            <a:prstDash val="solid"/>
+          </a:ln>
+        </p:spPr>
+      </p:sp>
+      <p:sp>
+        <p:nvSpPr>
+          <p:cNvPr id="143" name="Text 141"/>
+          <p:cNvSpPr txBox="1"/>
+          <p:nvPr/>
+        </p:nvSpPr>
+        <p:spPr>
+          <a:xfrm>
+            <a:off x="6181344" y="3840480"/>
+            <a:ext cx="2404872" cy="566928"/>
+          </a:xfrm>
+          <a:prstGeom prst="rect">
+            <a:avLst/>
+          </a:prstGeom>
+          <a:noFill/>
+          <a:ln/>
+        </p:spPr>
+        <p:txBody>
+          <a:bodyPr wrap="square" lIns="0" tIns="0" rIns="0" bIns="0" rtlCol="0" anchor="ctr"/>
+          <a:lstStyle/>
+          <a:p>
+            <a:pPr indent="0" marL="0">
+              <a:buNone/>
+            </a:pPr>
+            <a:r>
+              <a:rPr lang="en-US" sz="1000" b="1" dirty="0">
+                <a:solidFill>
+                  <a:srgbClr val="C81E43"/>
+                </a:solidFill>
+                <a:latin typeface="Calibri" pitchFamily="34" charset="0"/>
+                <a:ea typeface="Calibri" pitchFamily="34" charset="-122"/>
+                <a:cs typeface="Calibri" pitchFamily="34" charset="-120"/>
+              </a:rPr>
+              <a:t>Diana de daptomicina  </a:t>
+            </a:r>
+            <a:pPr indent="0" marL="0">
+              <a:buNone/>
+            </a:pPr>
+            <a:r>
+              <a:rPr lang="en-US" sz="1000" dirty="0">
+                <a:solidFill>
+                  <a:srgbClr val="51597F"/>
+                </a:solidFill>
+                <a:latin typeface="Calibri" pitchFamily="34" charset="0"/>
+                <a:ea typeface="Calibri" pitchFamily="34" charset="-122"/>
+                <a:cs typeface="Calibri" pitchFamily="34" charset="-120"/>
+              </a:rPr>
+              <a:t>Despolariza la membrana del grampositivo</a:t>
+            </a:r>
+            <a:endParaRPr lang="en-US" sz="1000" dirty="0"/>
+          </a:p>
+        </p:txBody>
+      </p:sp>
+      <p:sp>
+        <p:nvSpPr>
+          <p:cNvPr id="25" name="Slide Number Placeholder 0"/>
+          <p:cNvSpPr>
+            <a:spLocks noGrp="1"/>
+          </p:cNvSpPr>
+          <p:nvPr>
+            <p:ph type="sldNum" sz="quarter" idx="4294967295"/>
+          </p:nvPr>
+        </p:nvSpPr>
+        <p:spPr>
+          <a:xfrm>
+            <a:off x="8247888" y="4535424"/>
+            <a:ext cx="420624" cy="420624"/>
+          </a:xfrm>
+          <a:prstGeom prst="rect">
+            <a:avLst/>
+          </a:prstGeom>
+          <a:extLst>
+            <a:ext uri="{C572A759-6A51-4108-AA02-DFA0A04FC94B}">
+              <ma14:wrappingTextBoxFlag xmlns:ma14="http://schemas.microsoft.com/office/mac/drawingml/2011/main" val="0"/>
+            </a:ext>
+          </a:extLst>
+        </p:spPr>
+        <p:txBody>
+          <a:bodyPr anchor="ctr"/>
+          <a:lstStyle>
+            <a:lvl1pPr>
+              <a:defRPr sz="1800">
+                <a:solidFill>
+                  <a:srgbClr val="FFFFFF"/>
+                </a:solidFill>
+                <a:latin typeface="Calibri"/>
+                <a:ea typeface="Calibri"/>
+                <a:cs typeface="Calibri"/>
+              </a:defRPr>
+            </a:lvl1pPr>
+          </a:lstStyle>
+          <a:p>
+            <a:pPr algn="ctr"/>
+            <a:fld id="{F7021451-1387-4CA6-816F-3879F97B5CBC}" type="slidenum">
+              <a:rPr b="1" lang="en-US"/>
+              <a:t>8</a:t>
             </a:fld>
             <a:endParaRPr lang="en-US"/>
           </a:p>
